--- a/Curso Gas B/09 - UNE 60670 - Generalidades y terminologia/09 - UNE 60670 - Generalidades y terminologia - Vídeo 2.pptx
+++ b/Curso Gas B/09 - UNE 60670 - Generalidades y terminologia/09 - UNE 60670 - Generalidades y terminologia - Vídeo 2.pptx
@@ -24,6 +24,7 @@
     <p:sldId id="272" r:id="rId24"/>
     <p:sldId id="273" r:id="rId25"/>
     <p:sldId id="274" r:id="rId26"/>
+    <p:sldId id="275" r:id="rId27"/>
   </p:sldIdLst>
   <p:sldSz cx="12191695" cy="6858000" type="screen4x3"/>
   <p:notesSz cx="6858000" cy="9144000"/>
@@ -595,12 +596,12 @@
           <a:lstStyle/>
           <a:p>
             <a:r>
-              <a:t>N1: Tanto armario y conducto, ¿cómo no me hago un lío?</a:t>
-            </a:r>
-          </a:p>
-          <a:p>
-            <a:r>
-              <a:t>N2: Los agrupamos por para qué sirven. El armario de contadores y regulación es un recinto ventilado, con puertas, que solo contiene contadores o reguladores, y en el que no pueden entrar personas; solo se abre para instalar o cambiar equipos. El armario-cocina es otra cosa: un recinto de cocción cuyo lado menor, con la puerta cerrada, es igual o menor de treinta centímetros; ese número, treinta centímetros, es el que lo define. Y los conductos: el conducto de tuberías es un canal, de obra o metálico, que puede alojar varias tuberías de gas; y el conducto técnico es ese hueco vertical junto a los rellanos que contiene, en cada planta, los contadores o reguladores que dan gas a las viviendas. Regla: el armario contiene equipos y no entra nadie; el conducto es un canal por donde pasan tuberías o donde se alojan los contadores planta a planta.</a:t>
+              <a:t>N1: Aparcamiento y garaje, ¿no son lo mismo?</a:t>
+            </a:r>
+          </a:p>
+          <a:p>
+            <a:r>
+              <a:t>N2: Para la norma no, y el número que los separa es cien metros cuadrados. Si la superficie construida supera los cien metros cuadrados, es aparcamiento; si es igual o menor, es garaje, que veremos en el vídeo tres. Y dentro del aparcamiento hay dos clases. Abierto: sus fachadas tienen tanta abertura permanente al exterior que ventilan solas; en concreto, un área abierta de al menos un veinteavo de la superficie, con al menos un cuarentavo repartido de forma uniforme entre las paredes opuestas, y el borde superior de las aberturas a no más de medio metro del techo. Cerrado: el que no cumple eso. Por qué importa: cuanta más ventilación natural, menos riesgo de acumular gas; de ahí que la norma sea tan exigente con las aberturas.</a:t>
             </a:r>
           </a:p>
         </p:txBody>
@@ -670,12 +671,12 @@
           <a:lstStyle/>
           <a:p>
             <a:r>
-              <a:t>N1: ¿Qué diferencia hay entre chimenea y conducto de evacuación?</a:t>
-            </a:r>
-          </a:p>
-          <a:p>
-            <a:r>
-              <a:t>N2: La chimenea es la estructura, las paredes que encierran uno o varios conductos de humos. El conducto de evacuación es el tubo de dentro: un conducto continuo y estanco cuya misión es llevar los humos de los aparatos tipo B o tipo C hasta la chimenea o hasta el terminal de salida. Dos palabras clave ahí: continuo, sin cortes, y estanco, que no se escapen los humos por el camino, porque esos humos llevan monóxido. El collarín de evacuación es la boca del aparato tipo B por donde se enchufa a ese conducto. Y en los tipo C los conductos pueden ser concéntricos, un tubo dentro de otro, el de humos rodeado por el de aire; o independientes, dos tubos separados. Detalle de examen: esos conductos y el terminal forman parte del aparato, salvo que se diga lo contrario.</a:t>
+              <a:t>N1: Tanto armario y conducto, ¿cómo no me hago un lío?</a:t>
+            </a:r>
+          </a:p>
+          <a:p>
+            <a:r>
+              <a:t>N2: Los agrupamos por para qué sirven. El armario de contadores y regulación es un recinto ventilado, con puertas, que solo contiene contadores o reguladores, y en el que no pueden entrar personas; solo se abre para instalar o cambiar equipos. El armario-cocina es otra cosa: un recinto de cocción cuyo lado menor, con la puerta cerrada, es igual o menor de treinta centímetros; ese número, treinta centímetros, es el que lo define. Y los conductos: el conducto de tuberías es un canal, de obra o metálico, que puede alojar varias tuberías de gas; y el conducto técnico es ese hueco vertical junto a los rellanos que contiene, en cada planta, los contadores o reguladores que dan gas a las viviendas. Regla: el armario contiene equipos y no entra nadie; el conducto es un canal por donde pasan tuberías o donde se alojan los contadores planta a planta.</a:t>
             </a:r>
           </a:p>
         </p:txBody>
@@ -745,12 +746,12 @@
           <a:lstStyle/>
           <a:p>
             <a:r>
-              <a:t>N1: ¿Por qué hay dos condiciones distintas para medir el gas?</a:t>
-            </a:r>
-          </a:p>
-          <a:p>
-            <a:r>
-              <a:t>N2: Porque el gas cambia de volumen con la temperatura, así que para comparar hace falta una situación patrón, un punto de partida fijo. La norma define dos, y las dos comparten la misma presión, mil trece con veinticinco milibares, y el gas seco. La única diferencia es la temperatura. Condiciones de referencia: quince grados. Condiciones normales: cero grados. Truco para no fallar nunca: referencia, quince; normales, cero. De ahí salen las dos unidades de caudal que ves en las etiquetas, el metro cúbico estándar, medido a quince grados, y el metro cúbico normal, medido a cero grados. Cuando en obra veas metro cúbico ese o metro cúbico ene, ya sabes de dónde vienen.</a:t>
+              <a:t>N1: ¿Qué diferencia hay entre chimenea y conducto de evacuación?</a:t>
+            </a:r>
+          </a:p>
+          <a:p>
+            <a:r>
+              <a:t>N2: La chimenea es la estructura, las paredes que encierran uno o varios conductos de humos. El conducto de evacuación es el tubo de dentro: un conducto continuo y estanco cuya misión es llevar los humos de los aparatos tipo B o tipo C hasta la chimenea o hasta el terminal de salida. Dos palabras clave ahí: continuo, sin cortes, y estanco, que no se escapen los humos por el camino, porque esos humos llevan monóxido. El collarín de evacuación es la boca del aparato tipo B por donde se enchufa a ese conducto. Y en los tipo C los conductos pueden ser concéntricos, un tubo dentro de otro, el de humos rodeado por el de aire; o independientes, dos tubos separados. Detalle de examen: esos conductos y el terminal forman parte del aparato, salvo que se diga lo contrario.</a:t>
             </a:r>
           </a:p>
         </p:txBody>
@@ -820,12 +821,12 @@
           <a:lstStyle/>
           <a:p>
             <a:r>
-              <a:t>N1: Caudal, consumo, nominal, volumétrico, másico... ¿en qué se diferencian?</a:t>
-            </a:r>
-          </a:p>
-          <a:p>
-            <a:r>
-              <a:t>N2: Ordénalos por lo que miden. El caudal de diseño, qs, es el que usas para dimensionar la instalación, calculado a partir de lo que consumen todos los aparatos juntos; se da en metros cúbicos por hora. El consumo calorífico, Q, es la energía que gasta un aparato en un tiempo, y se expresa en kilovatios; el nominal, Qn, es ese valor pero el que declara el fabricante en la placa. Luego, según midas volumen o masa: el consumo volumétrico, qv, es el volumen de gas por hora, en metros cúbicos por hora; el másico, qm, es la masa por hora, en kilogramos por hora, típico del GLP. Regla rápida: Q va en kilovatios porque es energía; qv y qm van en volumen o en peso porque es cantidad de gas. Y qs es lo que sumas para elegir el diámetro de los tubos.</a:t>
+              <a:t>N1: ¿Por qué hay dos condiciones distintas para medir el gas?</a:t>
+            </a:r>
+          </a:p>
+          <a:p>
+            <a:r>
+              <a:t>N2: Porque el gas cambia de volumen con la temperatura, así que para comparar hace falta una situación patrón, un punto de partida fijo. La norma define dos, y las dos comparten la misma presión, mil trece con veinticinco milibares, y el gas seco. La única diferencia es la temperatura. Condiciones de referencia: quince grados. Condiciones normales: cero grados. Truco para no fallar nunca: referencia, quince; normales, cero. De ahí salen las dos unidades de caudal que ves en las etiquetas, el metro cúbico estándar, medido a quince grados, y el metro cúbico normal, medido a cero grados. Cuando en obra veas metro cúbico ese o metro cúbico ene, ya sabes de dónde vienen.</a:t>
             </a:r>
           </a:p>
         </p:txBody>
@@ -895,12 +896,12 @@
           <a:lstStyle/>
           <a:p>
             <a:r>
-              <a:t>N1: ¿La conexión de aparato es solo el tubo final?</a:t>
-            </a:r>
-          </a:p>
-          <a:p>
-            <a:r>
-              <a:t>N2: Es el último tramo, sí. La conexión de aparato va desde la llave de conexión del aparato, excluida, hasta el propio aparato, también excluido; o sea, lo que hay entre la llave y el aparato, y puede ser flexible o rígida. En una bombona pequeña acoplada a un aparato móvil, esa conexión la forman el regulador de la bombona y el tubo flexible. El conjunto de regulación con o sin medida es otra cosa: es el regulador de presión más todo lo que lo acompaña, filtro, llaves de corte, tomas de presión, válvulas de seguridad, y si hay que contar el consumo, el contador. Cuando todo eso va metido en un armario, se llama armario de regulación. Idea clara: la conexión es el tramo final hasta el aparato; el conjunto de regulación es el equipo que ajusta la presión y, si toca, mide.</a:t>
+              <a:t>N1: Caudal, consumo, nominal, volumétrico, másico... ¿en qué se diferencian?</a:t>
+            </a:r>
+          </a:p>
+          <a:p>
+            <a:r>
+              <a:t>N2: Ordénalos por lo que miden. El caudal de diseño, qs, es el que usas para dimensionar la instalación, calculado a partir de lo que consumen todos los aparatos juntos; se da en metros cúbicos por hora. El consumo calorífico, Q, es la energía que gasta un aparato en un tiempo, y se expresa en kilovatios; el nominal, Qn, es ese valor pero el que declara el fabricante en la placa. Luego, según midas volumen o masa: el consumo volumétrico, qv, es el volumen de gas por hora, en metros cúbicos por hora; el másico, qm, es la masa por hora, en kilogramos por hora, típico del GLP. Regla rápida: Q va en kilovatios porque es energía; qv y qm van en volumen o en peso porque es cantidad de gas. Y qs es lo que sumas para elegir el diámetro de los tubos.</a:t>
             </a:r>
           </a:p>
         </p:txBody>
@@ -970,12 +971,12 @@
           <a:lstStyle/>
           <a:p>
             <a:r>
-              <a:t>N1: El cortatiro y esos dispositivos, ¿no son todos lo mismo?</a:t>
-            </a:r>
-          </a:p>
-          <a:p>
-            <a:r>
-              <a:t>N2: No, y conviene no mezclarlos. El cortatiro es esa abertura de los aparatos B de tiro natural que estabiliza el tiro y evita que un golpe de aire apague o descontrole la llama. A su alrededor aparecen dos dispositivos que suenan parecido pero hacen cosas opuestas. El dispositivo de control de la evacuación, típico de los aparatos que se llaman BBS, vigila: si los humos se desbordan por el cortatiro hacia el local, para el quemador. El dispositivo de ayuda a la evacuación es lo contrario de vigilar: es un ventilador que se coloca después del cortatiro y empuja los humos para que salgan. Regla: uno vigila y corta si hay peligro; el otro simplemente empuja los humos hacia fuera.</a:t>
+              <a:t>N1: ¿La conexión de aparato es solo el tubo final?</a:t>
+            </a:r>
+          </a:p>
+          <a:p>
+            <a:r>
+              <a:t>N2: Es el último tramo, sí. La conexión de aparato va desde la llave de conexión del aparato, excluida, hasta el propio aparato, también excluido; o sea, lo que hay entre la llave y el aparato, y puede ser flexible o rígida. En una bombona pequeña acoplada a un aparato móvil, esa conexión la forman el regulador de la bombona y el tubo flexible. El conjunto de regulación con o sin medida es otra cosa: es el regulador de presión más todo lo que lo acompaña, filtro, llaves de corte, tomas de presión, válvulas de seguridad, y si hay que contar el consumo, el contador. Cuando todo eso va metido en un armario, se llama armario de regulación. Idea clara: la conexión es el tramo final hasta el aparato; el conjunto de regulación es el equipo que ajusta la presión y, si toca, mide.</a:t>
             </a:r>
           </a:p>
         </p:txBody>
@@ -1045,12 +1046,12 @@
           <a:lstStyle/>
           <a:p>
             <a:r>
-              <a:t>N1: ¿Cómo funciona la seguridad cuando hay una fuga?</a:t>
-            </a:r>
-          </a:p>
-          <a:p>
-            <a:r>
-              <a:t>N2: Se encadenan tres cosas. Primero el detector de gas: un aparato que huele el gas en el aire y, al llegar a cierta concentración, avisa y puede ordenar un corte. Ese corte lo hace el corte automático de gas, y aquí va el concepto clave de toda la seguridad del gas: es normalmente cerrado. Quiere decir que, si se va la luz o falla algo, el sistema se queda en la posición segura, que es cerrado, cortando el gas. Y una vez que salta, solo se reabre a mano, con rearme manual, nunca solo; así nadie se lleva una sorpresa. Además, la norma clasifica los espacios: emplazamiento peligroso es donde puede haber una atmósfera de gas explosiva y hacen falta precauciones; no peligroso, donde no se espera. Y atmósfera explosiva es la mezcla de gas y aire en la que, si prende, la llama se propaga a toda la mezcla.</a:t>
+              <a:t>N1: El cortatiro y esos dispositivos, ¿no son todos lo mismo?</a:t>
+            </a:r>
+          </a:p>
+          <a:p>
+            <a:r>
+              <a:t>N2: No, y conviene no mezclarlos. El cortatiro es esa abertura de los aparatos B de tiro natural que estabiliza el tiro y evita que un golpe de aire apague o descontrole la llama. A su alrededor aparecen dos dispositivos que suenan parecido pero hacen cosas opuestas. El dispositivo de control de la evacuación, típico de los aparatos que se llaman BBS, vigila: si los humos se desbordan por el cortatiro hacia el local, para el quemador. El dispositivo de ayuda a la evacuación es lo contrario de vigilar: es un ventilador que se coloca después del cortatiro y empuja los humos para que salgan. Regla: uno vigila y corta si hay peligro; el otro simplemente empuja los humos hacia fuera.</a:t>
             </a:r>
           </a:p>
         </p:txBody>
@@ -1120,12 +1121,12 @@
           <a:lstStyle/>
           <a:p>
             <a:r>
-              <a:t>N1: ¿Qué es eso del índice de Wobbe y por qué clasifica los gases?</a:t>
-            </a:r>
-          </a:p>
-          <a:p>
-            <a:r>
-              <a:t>N2: El índice de Wobbe es como la huella de identidad de un gas. Se calcula dividiendo el poder calorífico del gas por la raíz cuadrada de su densidad relativa, y sirve para saber si dos gases se comportan igual en un mismo quemador. Con él se ordenan las tres familias, y estos rangos caen en el examen. Primera familia, los gases manufacturados y el aire metanado o propanado: Wobbe superior entre veintidós con cuatro y veinticuatro con ocho. Segunda familia, el gas natural: entre treinta y nueve con uno y cincuenta y cuatro con siete. Tercera familia, el GLP, butano y propano: entre setenta y dos con nueve y ochenta y siete con tres, en megajulios por metro cúbico. Truco: cuanto más pesado y energético el gas, mayor Wobbe; el GLP arriba, los manufacturados abajo. Y para qué sirve en obra: cada aparato está tarado a una familia; meterle gas de otra familia da llama amarilla, hollín y monóxido.</a:t>
+              <a:t>N1: ¿Cómo funciona la seguridad cuando hay una fuga?</a:t>
+            </a:r>
+          </a:p>
+          <a:p>
+            <a:r>
+              <a:t>N2: Se encadenan tres cosas. Primero el detector de gas: un aparato que huele el gas en el aire y, al llegar a cierta concentración, avisa y puede ordenar un corte. Ese corte lo hace el corte automático de gas, y aquí va el concepto clave de toda la seguridad del gas: es normalmente cerrado. Quiere decir que, si se va la luz o falla algo, el sistema se queda en la posición segura, que es cerrado, cortando el gas. Y una vez que salta, solo se reabre a mano, con rearme manual, nunca solo; así nadie se lleva una sorpresa. Además, la norma clasifica los espacios: emplazamiento peligroso es donde puede haber una atmósfera de gas explosiva y hacen falta precauciones; no peligroso, donde no se espera. Y atmósfera explosiva es la mezcla de gas y aire en la que, si prende, la llama se propaga a toda la mezcla.</a:t>
             </a:r>
           </a:p>
         </p:txBody>
@@ -1195,12 +1196,12 @@
           <a:lstStyle/>
           <a:p>
             <a:r>
-              <a:t>N1: ¿Dónde acaba la parte común y empieza la individual?</a:t>
-            </a:r>
-          </a:p>
-          <a:p>
-            <a:r>
-              <a:t>N2: Todo se decide en una cadena de llaves, y con la regla de oro incluida-excluida. La instalación común va desde la llave de edificio, excluida, hasta las llaves de usuario, incluidas. La instalación individual arranca en la llave de usuario, excluida, y termina en las llaves de conexión de los aparatos, incluidas. Fíjate: la llave de usuario es la frontera; cierra la común y abre la individual. Por encima de las dos, la instalación receptora es el conjunto entero: desde la llave de acometida, excluida, hasta las llaves de conexión de aparato, incluidas, quedando fuera la conexión del aparato y el aparato mismo. Regla de oro: lo que pone la comunidad o la compañía va excluido; lo que es tuyo va incluido. Y un término suelto: intemperie es, sencillamente, a cielo descubierto, sin techo ni reparo. Por qué importa esto: ese límite decide qué tramo sometes a estanquidad y quién responde, la comunidad o el usuario.</a:t>
+              <a:t>N1: ¿Qué es eso del índice de Wobbe y por qué clasifica los gases?</a:t>
+            </a:r>
+          </a:p>
+          <a:p>
+            <a:r>
+              <a:t>N2: El índice de Wobbe es como la huella de identidad de un gas. Se calcula dividiendo el poder calorífico del gas por la raíz cuadrada de su densidad relativa, y sirve para saber si dos gases se comportan igual en un mismo quemador. Con él se ordenan las tres familias, y estos rangos caen en el examen. Primera familia, los gases manufacturados y el aire metanado o propanado: Wobbe superior entre veintidós con cuatro y veinticuatro con ocho. Segunda familia, el gas natural: entre treinta y nueve con uno y cincuenta y cuatro con siete. Tercera familia, el GLP, butano y propano: entre setenta y dos con nueve y ochenta y siete con tres, en megajulios por metro cúbico. Truco: cuanto más pesado y energético el gas, mayor Wobbe; el GLP arriba, los manufacturados abajo. Y para qué sirve en obra: cada aparato está tarado a una familia; meterle gas de otra familia da llama amarilla, hollín y monóxido.</a:t>
             </a:r>
           </a:p>
         </p:txBody>
@@ -1270,22 +1271,12 @@
           <a:lstStyle/>
           <a:p>
             <a:r>
-              <a:t>N1: Ha sido mucho vocabulario. ¿Cómo lo ato todo?</a:t>
-            </a:r>
-          </a:p>
-          <a:p>
-            <a:r>
-              <a:t>N2: Vamos a reconstruir el hilo, que no es una lista, es una lógica. Primero, los tipos de aparato: A coge aire del local y no evacúa, B coge aire del local y sí evacúa, C es estanco; esto no es trivia, es ventilación y monóxido de carbono, y colocar el tipo equivocado mata. Segundo, la accesibilidad, del uno al tres, de más fácil a más difícil, que decide si luego podrás mantener y cortar rápido. Tercero, las familias de gas se ordenan por el índice de Wobbe, y cada aparato está tarado a la suya; confundirlas da mala combustión. Y cuarto, la joya: el juego excluida-incluida en las llaves marca dónde acaba cada tramo, qué sometes a estanquidad y quién responde.</a:t>
-            </a:r>
-          </a:p>
-          <a:p>
-            <a:r>
-              <a:t>N1: ¿Y cómo se pregunta esto?</a:t>
-            </a:r>
-          </a:p>
-          <a:p>
-            <a:r>
-              <a:t>N2: En el examen, casi siempre como qué es esto, buscando el matiz fino: un excluida esta, un valor en cifra, los cien metros cuadrados del aparcamiento, los quince grados de referencia frente a los cero de las normales. Y en obra, estos son los términos exactos que escribes en el certificado y que discutes con la distribuidora; un boletín con la definición cambiada te lo devuelven. Ya hablas el idioma de la norma, y eso es la mitad del oficio. En el tercer y último vídeo entramos en la parte más técnica del diccionario: presiones, combustión y seguridad, donde de verdad hay vidas en juego. Te espero allí.</a:t>
+              <a:t>N1: ¿Dónde acaba la parte común y empieza la individual?</a:t>
+            </a:r>
+          </a:p>
+          <a:p>
+            <a:r>
+              <a:t>N2: Todo se decide en una cadena de llaves, y con la regla de oro incluida-excluida. La instalación común va desde la llave de edificio, excluida, hasta las llaves de usuario, incluidas. La instalación individual arranca en la llave de usuario, excluida, y termina en las llaves de conexión de los aparatos, incluidas. Fíjate: la llave de usuario es la frontera; cierra la común y abre la individual. Por encima de las dos, la instalación receptora es el conjunto entero: desde la llave de acometida, excluida, hasta las llaves de conexión de aparato, incluidas, quedando fuera la conexión del aparato y el aparato mismo. Regla de oro: lo que pone la comunidad o la compañía va excluido; lo que es tuyo va incluido. Y un término suelto: intemperie es, sencillamente, a cielo descubierto, sin techo ni reparo. Por qué importa esto: ese límite decide qué tramo sometes a estanquidad y quién responde, la comunidad o el usuario.</a:t>
             </a:r>
           </a:p>
         </p:txBody>
@@ -1385,6 +1376,91 @@
 </p:notes>
 </file>
 
+<file path=ppt/notesSlides/notesSlide20.xml><?xml version="1.0" encoding="utf-8"?>
+<p:notes xmlns:a="http://schemas.openxmlformats.org/drawingml/2006/main" xmlns:p="http://schemas.openxmlformats.org/presentationml/2006/main" xmlns:r="http://schemas.openxmlformats.org/officeDocument/2006/relationships">
+  <p:cSld>
+    <p:spTree>
+      <p:nvGrpSpPr>
+        <p:cNvPr id="1" name=""/>
+        <p:cNvGrpSpPr/>
+        <p:nvPr/>
+      </p:nvGrpSpPr>
+      <p:grpSpPr>
+        <a:xfrm>
+          <a:off x="0" y="0"/>
+          <a:ext cx="0" cy="0"/>
+          <a:chOff x="0" y="0"/>
+          <a:chExt cx="0" cy="0"/>
+        </a:xfrm>
+      </p:grpSpPr>
+      <p:sp>
+        <p:nvSpPr>
+          <p:cNvPr id="2" name="Slide Image Placeholder 1"/>
+          <p:cNvSpPr>
+            <a:spLocks noGrp="1"/>
+          </p:cNvSpPr>
+          <p:nvPr>
+            <p:ph type="sldImg" idx="2"/>
+          </p:nvPr>
+        </p:nvSpPr>
+        <p:spPr/>
+      </p:sp>
+      <p:sp>
+        <p:nvSpPr>
+          <p:cNvPr id="3" name="Notes Placeholder 2"/>
+          <p:cNvSpPr>
+            <a:spLocks noGrp="1"/>
+          </p:cNvSpPr>
+          <p:nvPr>
+            <p:ph type="body" idx="3" sz="quarter"/>
+          </p:nvPr>
+        </p:nvSpPr>
+        <p:spPr/>
+        <p:txBody>
+          <a:bodyPr/>
+          <a:lstStyle/>
+          <a:p>
+            <a:r>
+              <a:t>N1: Ha sido mucho vocabulario. ¿Cómo lo ato todo?</a:t>
+            </a:r>
+          </a:p>
+          <a:p>
+            <a:r>
+              <a:t>N2: Vamos a reconstruir el hilo, que no es una lista, es una lógica. Primero, los tipos de aparato: A coge aire del local y no evacúa, B coge aire del local y sí evacúa, C es estanco; esto no es trivia, es ventilación y monóxido de carbono, y colocar el tipo equivocado mata. Segundo, la accesibilidad, del uno al tres, de más fácil a más difícil, que decide si luego podrás mantener y cortar rápido. Tercero, las familias de gas se ordenan por el índice de Wobbe, y cada aparato está tarado a la suya; confundirlas da mala combustión. Y cuarto, la joya: el juego excluida-incluida en las llaves marca dónde acaba cada tramo, qué sometes a estanquidad y quién responde.</a:t>
+            </a:r>
+          </a:p>
+          <a:p>
+            <a:r>
+              <a:t>N1: ¿Y cómo se pregunta esto?</a:t>
+            </a:r>
+          </a:p>
+          <a:p>
+            <a:r>
+              <a:t>N2: En el examen, casi siempre como qué es esto, buscando el matiz fino: un excluida esta, un valor en cifra, los cien metros cuadrados del aparcamiento, los quince grados de referencia frente a los cero de las normales. Y en obra, estos son los términos exactos que escribes en el certificado y que discutes con la distribuidora; un boletín con la definición cambiada te lo devuelven. Ya hablas el idioma de la norma, y eso es la mitad del oficio. En el tercer y último vídeo entramos en la parte más técnica del diccionario: presiones, combustión y seguridad, donde de verdad hay vidas en juego. Te espero allí.</a:t>
+            </a:r>
+          </a:p>
+        </p:txBody>
+      </p:sp>
+      <p:sp>
+        <p:nvSpPr>
+          <p:cNvPr id="4" name="Slide Number Placeholder 3"/>
+          <p:cNvSpPr>
+            <a:spLocks noGrp="1"/>
+          </p:cNvSpPr>
+          <p:nvPr>
+            <p:ph type="sldNum" idx="5" sz="quarter"/>
+          </p:nvPr>
+        </p:nvSpPr>
+        <p:spPr/>
+      </p:sp>
+    </p:spTree>
+  </p:cSld>
+  <p:clrMapOvr>
+    <a:masterClrMapping/>
+  </p:clrMapOvr>
+</p:notes>
+</file>
+
 <file path=ppt/notesSlides/notesSlide3.xml><?xml version="1.0" encoding="utf-8"?>
 <p:notes xmlns:a="http://schemas.openxmlformats.org/drawingml/2006/main" xmlns:p="http://schemas.openxmlformats.org/presentationml/2006/main" xmlns:r="http://schemas.openxmlformats.org/officeDocument/2006/relationships">
   <p:cSld>
@@ -1428,16 +1504,7 @@
         <p:txBody>
           <a:bodyPr/>
           <a:lstStyle/>
-          <a:p>
-            <a:r>
-              <a:t>N1: ¿Cómo se estudia un glosario sin volverse loco?</a:t>
-            </a:r>
-          </a:p>
-          <a:p>
-            <a:r>
-              <a:t>N2: Con un método sencillo y potente. La parte dos solo hace una cosa: fijar el significado exacto de cada palabra que usa la norma, para que no haya interpretaciones. En esta edición se añaden términos nuevos, como aparato móvil, intemperie, local industrial, loft y ventilación cruzada; y se elimina el primer sótano, dejando solo el semisótano, que es el que se usa en el resto de la norma. Y el truco para estudiarlo: lee la definición, tápala con la mano y explícala con tus palabras; luego comprueba que no te dejas ningún matiz, esos excluida esta o incluidas estas, y los valores en cifra. En el examen la trampa casi siempre está en ese detalle fino, no en la idea general.</a:t>
-            </a:r>
-          </a:p>
+          <a:p/>
         </p:txBody>
       </p:sp>
       <p:sp>
@@ -1505,12 +1572,12 @@
           <a:lstStyle/>
           <a:p>
             <a:r>
-              <a:t>N1: ¿Y esto de los grados de accesibilidad para qué sirve?</a:t>
-            </a:r>
-          </a:p>
-          <a:p>
-            <a:r>
-              <a:t>N2: Para saber lo fácil o difícil que es llegar a un dispositivo, una llave o un contador, y mantenerlo. Van del uno al tres, de más fácil a más difícil. Grado uno: llegas y lo tocas, sin abrir cerraduras y sin necesitar escaleras ni medios especiales. Grado dos: está protegido por un armario, un registro o una puerta con cerradura de llave normalizada, pero aun así llegas sin escalera. Grado tres: para manipularlo necesitas escalera o medios mecánicos especiales, o tienes que pasar por una zona privada. Truco: cuanto más alto el número, más armado está el acceso. Y ojo en obra: si montas una llave de corte con peor accesibilidad de la que le toca, luego no puedes hacer el control periódico ni cortar rápido en una emergencia. El grado se decide al montar, no se improvisa.</a:t>
+              <a:t>N1: ¿Cómo se estudia un glosario sin volverse loco?</a:t>
+            </a:r>
+          </a:p>
+          <a:p>
+            <a:r>
+              <a:t>N2: Con un método sencillo y potente. La parte dos solo hace una cosa: fijar el significado exacto de cada palabra que usa la norma, para que no haya interpretaciones. En esta edición se añaden términos nuevos, como aparato móvil, intemperie, local industrial, loft y ventilación cruzada; y se elimina el primer sótano, dejando solo el semisótano, que es el que se usa en el resto de la norma. Y el truco para estudiarlo: lee la definición, tápala con la mano y explícala con tus palabras; luego comprueba que no te dejas ningún matiz, esos excluida esta o incluidas estas, y los valores en cifra. En el examen la trampa casi siempre está en ese detalle fino, no en la idea general.</a:t>
             </a:r>
           </a:p>
         </p:txBody>
@@ -1580,12 +1647,12 @@
           <a:lstStyle/>
           <a:p>
             <a:r>
-              <a:t>N1: Acometida y acometida interior suenan casi igual, ¿en qué se diferencian?</a:t>
-            </a:r>
-          </a:p>
-          <a:p>
-            <a:r>
-              <a:t>N2: En un punto exacto: la llave de acometida. Vamos despacio. La acometida es el tramo que va desde la red de distribución hasta la llave de acometida, y esa llave va incluida; es cosa de la compañía y no forma parte de tu instalación receptora. La acometida interior empieza justo después, desde la llave de acometida, ya excluida, hasta la llave o llaves de edificio, esas sí incluidas. Fíjate en el juego incluida-excluida: es la clave de todo el diccionario. La llave de acometida es la línea que separa lo de la compañía de lo tuyo. Y un detalle: si el contador está en el límite de la propiedad, puede que no haya acometida interior.</a:t>
+              <a:t>N1: ¿Y esto de los grados de accesibilidad para qué sirve?</a:t>
+            </a:r>
+          </a:p>
+          <a:p>
+            <a:r>
+              <a:t>N2: Para saber lo fácil o difícil que es llegar a un dispositivo, una llave o un contador, y mantenerlo. Van del uno al tres, de más fácil a más difícil. Grado uno: llegas y lo tocas, sin abrir cerraduras y sin necesitar escaleras ni medios especiales. Grado dos: está protegido por un armario, un registro o una puerta con cerradura de llave normalizada, pero aun así llegas sin escalera. Grado tres: para manipularlo necesitas escalera o medios mecánicos especiales, o tienes que pasar por una zona privada. Truco: cuanto más alto el número, más armado está el acceso. Y ojo en obra: si montas una llave de corte con peor accesibilidad de la que le toca, luego no puedes hacer el control periódico ni cortar rápido en una emergencia. El grado se decide al montar, no se improvisa.</a:t>
             </a:r>
           </a:p>
         </p:txBody>
@@ -1655,12 +1722,12 @@
           <a:lstStyle/>
           <a:p>
             <a:r>
-              <a:t>N1: ¿Qué quiere decir que un aparato es de circuito abierto?</a:t>
-            </a:r>
-          </a:p>
-          <a:p>
-            <a:r>
-              <a:t>N2: Vamos por pasos. Aparato de gas es, sencillamente, el que quema un gas de los normalizados, de las familias de la norma UNE-EN cuatrocientos treinta y siete. Ahora, de circuito abierto quiere decir que coge el aire para quemar de la propia habitación donde está. Piensa en un calentador antiguo o una cocina: respiran el aire del local. Estos abiertos pueden ser de dos clases, tipo A o tipo B, que vemos ahora. Lo contrario del abierto es el estanco, el tipo C, que ni coge aire del local ni suelta humos en él. Guárdate la idea: abierto igual a respira el aire de la habitación.</a:t>
+              <a:t>N1: Acometida y acometida interior suenan casi igual, ¿en qué se diferencian?</a:t>
+            </a:r>
+          </a:p>
+          <a:p>
+            <a:r>
+              <a:t>N2: En un punto exacto: la llave de acometida. Vamos despacio. La acometida es el tramo que va desde la red de distribución hasta la llave de acometida, y esa llave va incluida; es cosa de la compañía y no forma parte de tu instalación receptora. La acometida interior empieza justo después, desde la llave de acometida, ya excluida, hasta la llave o llaves de edificio, esas sí incluidas. Fíjate en el juego incluida-excluida: es la clave de todo el diccionario. La llave de acometida es la línea que separa lo de la compañía de lo tuyo. Y un detalle: si el contador está en el límite de la propiedad, puede que no haya acometida interior.</a:t>
             </a:r>
           </a:p>
         </p:txBody>
@@ -1730,12 +1797,12 @@
           <a:lstStyle/>
           <a:p>
             <a:r>
-              <a:t>N1: Los tipos A, B y C me lío siempre. ¿Cómo los distingo?</a:t>
-            </a:r>
-          </a:p>
-          <a:p>
-            <a:r>
-              <a:t>N2: Este es el concepto estrella del tema, así que lo dejamos clavado. Tipo A: coge el aire del local y no evacúa los humos fuera; los suelta dentro. Ejemplo: la cocina de gas o un calentador atmosférico antiguo. Tipo B: coge el aire del local, igual que el A, pero sí evacúa los humos al exterior por un conducto o chimenea. Ejemplo: la caldera de tiro natural conectada a la chimenea. Tipo C: es estanco; su combustión no tiene ningún contacto con el aire del local, ni coge aire de él ni suelta humos en él. Ejemplo: la caldera estanca moderna, que coge aire y expulsa humos por un tubo al exterior. Regla para no fallar: el A no tira humos fuera; el B coge aire dentro y tira humos fuera; el C ni entra ni sale del local. Y por qué importa tanto: colocar el tipo equivocado, un B atmosférico en un cuarto de baño, por ejemplo, es causa directa de intoxicación por monóxido de carbono.</a:t>
+              <a:t>N1: ¿Qué quiere decir que un aparato es de circuito abierto?</a:t>
+            </a:r>
+          </a:p>
+          <a:p>
+            <a:r>
+              <a:t>N2: Vamos por pasos. Aparato de gas es, sencillamente, el que quema un gas de los normalizados, de las familias de la norma UNE-EN cuatrocientos treinta y siete. Ahora, de circuito abierto quiere decir que coge el aire para quemar de la propia habitación donde está. Piensa en un calentador antiguo o una cocina: respiran el aire del local. Estos abiertos pueden ser de dos clases, tipo A o tipo B, que vemos ahora. Lo contrario del abierto es el estanco, el tipo C, que ni coge aire del local ni suelta humos en él. Guárdate la idea: abierto igual a respira el aire de la habitación.</a:t>
             </a:r>
           </a:p>
         </p:txBody>
@@ -1805,12 +1872,12 @@
           <a:lstStyle/>
           <a:p>
             <a:r>
-              <a:t>N1: ¿Aparato móvil es cualquier cosa que se pueda mover?</a:t>
-            </a:r>
-          </a:p>
-          <a:p>
-            <a:r>
-              <a:t>N2: Casi. Móvil es el que no está fijado al local ni a un mueble anclado a la estructura, y por tanto lo puedes mover para usarlo o recolocarlo, como una estufa de butano. Y hay una regla de seguridad que no falla: un aparato móvil no se puede conectar nunca con tubería rígida; siempre flexible, porque si va a moverse, un tubo rígido acabaría rompiendo por fatiga y tendrías fuga. El aparato popular es todavía más pequeño: solo se puede conectar a un envase de hasta tres kilos, como el infiernillo de camping. Piensa en el popular como un subconjunto de lo pequeño, y el número que lo marca son tres kilos.</a:t>
+              <a:t>N1: Los tipos A, B y C me lío siempre. ¿Cómo los distingo?</a:t>
+            </a:r>
+          </a:p>
+          <a:p>
+            <a:r>
+              <a:t>N2: Este es el concepto estrella del tema, así que lo dejamos clavado. Tipo A: coge el aire del local y no evacúa los humos fuera; los suelta dentro. Ejemplo: la cocina de gas o un calentador atmosférico antiguo. Tipo B: coge el aire del local, igual que el A, pero sí evacúa los humos al exterior por un conducto o chimenea. Ejemplo: la caldera de tiro natural conectada a la chimenea. Tipo C: es estanco; su combustión no tiene ningún contacto con el aire del local, ni coge aire de él ni suelta humos en él. Ejemplo: la caldera estanca moderna, que coge aire y expulsa humos por un tubo al exterior. Regla para no fallar: el A no tira humos fuera; el B coge aire dentro y tira humos fuera; el C ni entra ni sale del local. Y por qué importa tanto: colocar el tipo equivocado, un B atmosférico en un cuarto de baño, por ejemplo, es causa directa de intoxicación por monóxido de carbono.</a:t>
             </a:r>
           </a:p>
         </p:txBody>
@@ -1880,12 +1947,12 @@
           <a:lstStyle/>
           <a:p>
             <a:r>
-              <a:t>N1: Aparcamiento y garaje, ¿no son lo mismo?</a:t>
-            </a:r>
-          </a:p>
-          <a:p>
-            <a:r>
-              <a:t>N2: Para la norma no, y el número que los separa es cien metros cuadrados. Si la superficie construida supera los cien metros cuadrados, es aparcamiento; si es igual o menor, es garaje, que veremos en el vídeo tres. Y dentro del aparcamiento hay dos clases. Abierto: sus fachadas tienen tanta abertura permanente al exterior que ventilan solas; en concreto, un área abierta de al menos un veinteavo de la superficie, con al menos un cuarentavo repartido de forma uniforme entre las paredes opuestas, y el borde superior de las aberturas a no más de medio metro del techo. Cerrado: el que no cumple eso. Por qué importa: cuanta más ventilación natural, menos riesgo de acumular gas; de ahí que la norma sea tan exigente con las aberturas.</a:t>
+              <a:t>N1: ¿Aparato móvil es cualquier cosa que se pueda mover?</a:t>
+            </a:r>
+          </a:p>
+          <a:p>
+            <a:r>
+              <a:t>N2: Casi. Móvil es el que no está fijado al local ni a un mueble anclado a la estructura, y por tanto lo puedes mover para usarlo o recolocarlo, como una estufa de butano. Y hay una regla de seguridad que no falla: un aparato móvil no se puede conectar nunca con tubería rígida; siempre flexible, porque si va a moverse, un tubo rígido acabaría rompiendo por fatiga y tendrías fuga. El aparato popular es todavía más pequeño: solo se puede conectar a un envase de hasta tres kilos, como el infiernillo de camping. Piensa en el popular como un subconjunto de lo pequeño, y el número que lo marca son tres kilos.</a:t>
             </a:r>
           </a:p>
         </p:txBody>
@@ -4960,7 +5027,7 @@
             <a:r>
               <a:rPr sz="1400" b="1" i="0">
                 <a:solidFill>
-                  <a:srgbClr val="CADCFC"/>
+                  <a:srgbClr val="F4A24C"/>
                 </a:solidFill>
                 <a:latin typeface="Montserrat"/>
               </a:rPr>
@@ -4971,13 +5038,57 @@
       </p:sp>
       <p:sp>
         <p:nvSpPr>
-          <p:cNvPr id="4" name="TextBox 3"/>
+          <p:cNvPr id="4" name="Rounded Rectangle 3"/>
+          <p:cNvSpPr/>
+          <p:nvPr/>
+        </p:nvSpPr>
+        <p:spPr>
+          <a:xfrm>
+            <a:off x="868680" y="2057400"/>
+            <a:ext cx="1463040" cy="82296"/>
+          </a:xfrm>
+          <a:prstGeom prst="roundRect">
+            <a:avLst/>
+          </a:prstGeom>
+          <a:solidFill>
+            <a:srgbClr val="E8801A"/>
+          </a:solidFill>
+          <a:ln>
+            <a:noFill/>
+          </a:ln>
+          <a:effectLst/>
+        </p:spPr>
+        <p:style>
+          <a:lnRef idx="1">
+            <a:schemeClr val="accent1"/>
+          </a:lnRef>
+          <a:fillRef idx="3">
+            <a:schemeClr val="accent1"/>
+          </a:fillRef>
+          <a:effectRef idx="2">
+            <a:schemeClr val="accent1"/>
+          </a:effectRef>
+          <a:fontRef idx="minor">
+            <a:schemeClr val="lt1"/>
+          </a:fontRef>
+        </p:style>
+        <p:txBody>
+          <a:bodyPr rtlCol="0" anchor="ctr"/>
+          <a:lstStyle/>
+          <a:p>
+            <a:pPr algn="ctr"/>
+          </a:p>
+        </p:txBody>
+      </p:sp>
+      <p:sp>
+        <p:nvSpPr>
+          <p:cNvPr id="5" name="TextBox 4"/>
           <p:cNvSpPr txBox="1"/>
           <p:nvPr/>
         </p:nvSpPr>
         <p:spPr>
           <a:xfrm>
-            <a:off x="822960" y="2194560"/>
+            <a:off x="822960" y="2286000"/>
             <a:ext cx="10515600" cy="2011680"/>
           </a:xfrm>
           <a:prstGeom prst="rect">
@@ -5016,7 +5127,7 @@
       </p:sp>
       <p:sp>
         <p:nvSpPr>
-          <p:cNvPr id="5" name="TextBox 4"/>
+          <p:cNvPr id="6" name="TextBox 5"/>
           <p:cNvSpPr txBox="1"/>
           <p:nvPr/>
         </p:nvSpPr>
@@ -5140,7 +5251,7 @@
                 </a:solidFill>
                 <a:latin typeface="Montserrat"/>
               </a:rPr>
-              <a:t>010 / 019</a:t>
+              <a:t>010 / 020</a:t>
             </a:r>
           </a:p>
         </p:txBody>
@@ -5188,7 +5299,7 @@
         <p:spPr>
           <a:xfrm>
             <a:off x="822960" y="457200"/>
-            <a:ext cx="8229600" cy="365760"/>
+            <a:ext cx="10058400" cy="365760"/>
           </a:xfrm>
           <a:prstGeom prst="rect">
             <a:avLst/>
@@ -5202,13 +5313,13 @@
           <a:lstStyle/>
           <a:p>
             <a:r>
-              <a:rPr sz="1200" b="1" i="0">
-                <a:solidFill>
-                  <a:srgbClr val="64748B"/>
-                </a:solidFill>
-                <a:latin typeface="Montserrat"/>
-              </a:rPr>
-              <a:t>TÉRMINOS 3.17 A 3.29</a:t>
+              <a:rPr sz="1300" b="1" i="0">
+                <a:solidFill>
+                  <a:srgbClr val="E8801A"/>
+                </a:solidFill>
+                <a:latin typeface="Montserrat"/>
+              </a:rPr>
+              <a:t>TÉRMINOS 3.14 A 3.16</a:t>
             </a:r>
           </a:p>
         </p:txBody>
@@ -5236,26 +5347,70 @@
           <a:lstStyle/>
           <a:p>
             <a:r>
-              <a:rPr sz="2700" b="1" i="0">
+              <a:rPr sz="2800" b="1" i="0">
                 <a:solidFill>
                   <a:srgbClr val="1E2761"/>
                 </a:solidFill>
                 <a:latin typeface="Montserrat"/>
               </a:rPr>
-              <a:t>Armarios, recintos y conductos</a:t>
-            </a:r>
-          </a:p>
-        </p:txBody>
-      </p:sp>
-      <p:sp>
-        <p:nvSpPr>
-          <p:cNvPr id="7" name="TextBox 6"/>
+              <a:t>Aparcamiento y garaje</a:t>
+            </a:r>
+          </a:p>
+        </p:txBody>
+      </p:sp>
+      <p:sp>
+        <p:nvSpPr>
+          <p:cNvPr id="7" name="Rounded Rectangle 6"/>
+          <p:cNvSpPr/>
+          <p:nvPr/>
+        </p:nvSpPr>
+        <p:spPr>
+          <a:xfrm>
+            <a:off x="868680" y="1627632"/>
+            <a:ext cx="2011680" cy="73152"/>
+          </a:xfrm>
+          <a:prstGeom prst="roundRect">
+            <a:avLst/>
+          </a:prstGeom>
+          <a:solidFill>
+            <a:srgbClr val="E8801A"/>
+          </a:solidFill>
+          <a:ln>
+            <a:noFill/>
+          </a:ln>
+          <a:effectLst/>
+        </p:spPr>
+        <p:style>
+          <a:lnRef idx="1">
+            <a:schemeClr val="accent1"/>
+          </a:lnRef>
+          <a:fillRef idx="3">
+            <a:schemeClr val="accent1"/>
+          </a:fillRef>
+          <a:effectRef idx="2">
+            <a:schemeClr val="accent1"/>
+          </a:effectRef>
+          <a:fontRef idx="minor">
+            <a:schemeClr val="lt1"/>
+          </a:fontRef>
+        </p:style>
+        <p:txBody>
+          <a:bodyPr rtlCol="0" anchor="ctr"/>
+          <a:lstStyle/>
+          <a:p>
+            <a:pPr algn="ctr"/>
+          </a:p>
+        </p:txBody>
+      </p:sp>
+      <p:sp>
+        <p:nvSpPr>
+          <p:cNvPr id="8" name="TextBox 7"/>
           <p:cNvSpPr txBox="1"/>
           <p:nvPr/>
         </p:nvSpPr>
         <p:spPr>
           <a:xfrm>
-            <a:off x="822960" y="1920240"/>
+            <a:off x="822960" y="1965960"/>
             <a:ext cx="4983480" cy="4206240"/>
           </a:xfrm>
           <a:prstGeom prst="rect">
@@ -5271,17 +5426,17 @@
           <a:p>
             <a:pPr>
               <a:spcAft>
-                <a:spcPts val="1000"/>
+                <a:spcPts val="1100"/>
               </a:spcAft>
             </a:pPr>
             <a:r>
               <a:rPr sz="1600" b="1" i="0">
                 <a:solidFill>
-                  <a:srgbClr val="2E3A80"/>
-                </a:solidFill>
-                <a:latin typeface="Montserrat"/>
-              </a:rPr>
-              <a:t>•  </a:t>
+                  <a:srgbClr val="E8801A"/>
+                </a:solidFill>
+                <a:latin typeface="Montserrat"/>
+              </a:rPr>
+              <a:t>▸  </a:t>
             </a:r>
             <a:r>
               <a:rPr sz="1600" b="0" i="0">
@@ -5290,23 +5445,23 @@
                 </a:solidFill>
                 <a:latin typeface="Montserrat"/>
               </a:rPr>
-              <a:t>Armario de contadores: no entran personas</a:t>
+              <a:t>Aparcamiento: superficie &gt; 100 m²</a:t>
             </a:r>
           </a:p>
           <a:p>
             <a:pPr>
               <a:spcAft>
-                <a:spcPts val="1000"/>
+                <a:spcPts val="1100"/>
               </a:spcAft>
             </a:pPr>
             <a:r>
               <a:rPr sz="1600" b="1" i="0">
                 <a:solidFill>
-                  <a:srgbClr val="2E3A80"/>
-                </a:solidFill>
-                <a:latin typeface="Montserrat"/>
-              </a:rPr>
-              <a:t>•  </a:t>
+                  <a:srgbClr val="E8801A"/>
+                </a:solidFill>
+                <a:latin typeface="Montserrat"/>
+              </a:rPr>
+              <a:t>▸  </a:t>
             </a:r>
             <a:r>
               <a:rPr sz="1600" b="0" i="0">
@@ -5315,23 +5470,23 @@
                 </a:solidFill>
                 <a:latin typeface="Montserrat"/>
               </a:rPr>
-              <a:t>Armario-cocina: lado menor ≤ 30 cm</a:t>
+              <a:t>Garaje: ≤ 100 m²</a:t>
             </a:r>
           </a:p>
           <a:p>
             <a:pPr>
               <a:spcAft>
-                <a:spcPts val="1000"/>
+                <a:spcPts val="1100"/>
               </a:spcAft>
             </a:pPr>
             <a:r>
               <a:rPr sz="1600" b="1" i="0">
                 <a:solidFill>
-                  <a:srgbClr val="2E3A80"/>
-                </a:solidFill>
-                <a:latin typeface="Montserrat"/>
-              </a:rPr>
-              <a:t>•  </a:t>
+                  <a:srgbClr val="E8801A"/>
+                </a:solidFill>
+                <a:latin typeface="Montserrat"/>
+              </a:rPr>
+              <a:t>▸  </a:t>
             </a:r>
             <a:r>
               <a:rPr sz="1600" b="0" i="0">
@@ -5340,23 +5495,23 @@
                 </a:solidFill>
                 <a:latin typeface="Montserrat"/>
               </a:rPr>
-              <a:t>Conducto de tuberías: varias tuberías</a:t>
+              <a:t>Abierto: aberturas ≥ 1/20, ≤ 0,5 m al techo</a:t>
             </a:r>
           </a:p>
           <a:p>
             <a:pPr>
               <a:spcAft>
-                <a:spcPts val="1000"/>
+                <a:spcPts val="1100"/>
               </a:spcAft>
             </a:pPr>
             <a:r>
               <a:rPr sz="1600" b="1" i="0">
                 <a:solidFill>
-                  <a:srgbClr val="2E3A80"/>
-                </a:solidFill>
-                <a:latin typeface="Montserrat"/>
-              </a:rPr>
-              <a:t>•  </a:t>
+                  <a:srgbClr val="E8801A"/>
+                </a:solidFill>
+                <a:latin typeface="Montserrat"/>
+              </a:rPr>
+              <a:t>▸  </a:t>
             </a:r>
             <a:r>
               <a:rPr sz="1600" b="0" i="0">
@@ -5365,14 +5520,14 @@
                 </a:solidFill>
                 <a:latin typeface="Montserrat"/>
               </a:rPr>
-              <a:t>Conducto técnico: contadores por planta</a:t>
-            </a:r>
-          </a:p>
-        </p:txBody>
-      </p:sp>
-      <p:sp>
-        <p:nvSpPr>
-          <p:cNvPr id="8" name="imgph" descr="IMGQ:row of gas meters in ventilated cabinet"/>
+              <a:t>Cerrado: el que no cumple</a:t>
+            </a:r>
+          </a:p>
+        </p:txBody>
+      </p:sp>
+      <p:sp>
+        <p:nvSpPr>
+          <p:cNvPr id="9" name="imgph" descr="IMGQ:underground parking garage ventilation"/>
           <p:cNvSpPr/>
           <p:nvPr/>
         </p:nvSpPr>
@@ -5418,7 +5573,7 @@
       </p:sp>
       <p:sp>
         <p:nvSpPr>
-          <p:cNvPr id="9" name="TextBox 8"/>
+          <p:cNvPr id="10" name="TextBox 9"/>
           <p:cNvSpPr txBox="1"/>
           <p:nvPr/>
         </p:nvSpPr>
@@ -5458,7 +5613,7 @@
                 </a:solidFill>
                 <a:latin typeface="Montserrat"/>
               </a:rPr>
-              <a:t>row of gas meters in ventilated cabinet</a:t>
+              <a:t>underground parking garage ventilation</a:t>
             </a:r>
           </a:p>
         </p:txBody>
@@ -5555,7 +5710,7 @@
                 </a:solidFill>
                 <a:latin typeface="Montserrat"/>
               </a:rPr>
-              <a:t>011 / 019</a:t>
+              <a:t>011 / 020</a:t>
             </a:r>
           </a:p>
         </p:txBody>
@@ -5603,7 +5758,7 @@
         <p:spPr>
           <a:xfrm>
             <a:off x="822960" y="457200"/>
-            <a:ext cx="8229600" cy="365760"/>
+            <a:ext cx="10058400" cy="365760"/>
           </a:xfrm>
           <a:prstGeom prst="rect">
             <a:avLst/>
@@ -5617,13 +5772,13 @@
           <a:lstStyle/>
           <a:p>
             <a:r>
-              <a:rPr sz="1200" b="1" i="0">
-                <a:solidFill>
-                  <a:srgbClr val="64748B"/>
-                </a:solidFill>
-                <a:latin typeface="Montserrat"/>
-              </a:rPr>
-              <a:t>TÉRMINOS 3.23 A 3.30</a:t>
+              <a:rPr sz="1300" b="1" i="0">
+                <a:solidFill>
+                  <a:srgbClr val="E8801A"/>
+                </a:solidFill>
+                <a:latin typeface="Montserrat"/>
+              </a:rPr>
+              <a:t>TÉRMINOS 3.17 A 3.29</a:t>
             </a:r>
           </a:p>
         </p:txBody>
@@ -5651,26 +5806,70 @@
           <a:lstStyle/>
           <a:p>
             <a:r>
-              <a:rPr sz="2700" b="1" i="0">
+              <a:rPr sz="2800" b="1" i="0">
                 <a:solidFill>
                   <a:srgbClr val="1E2761"/>
                 </a:solidFill>
                 <a:latin typeface="Montserrat"/>
               </a:rPr>
-              <a:t>Chimenea, conductos y evacuación</a:t>
-            </a:r>
-          </a:p>
-        </p:txBody>
-      </p:sp>
-      <p:sp>
-        <p:nvSpPr>
-          <p:cNvPr id="7" name="TextBox 6"/>
+              <a:t>Armarios, recintos y conductos</a:t>
+            </a:r>
+          </a:p>
+        </p:txBody>
+      </p:sp>
+      <p:sp>
+        <p:nvSpPr>
+          <p:cNvPr id="7" name="Rounded Rectangle 6"/>
+          <p:cNvSpPr/>
+          <p:nvPr/>
+        </p:nvSpPr>
+        <p:spPr>
+          <a:xfrm>
+            <a:off x="868680" y="1627632"/>
+            <a:ext cx="2011680" cy="73152"/>
+          </a:xfrm>
+          <a:prstGeom prst="roundRect">
+            <a:avLst/>
+          </a:prstGeom>
+          <a:solidFill>
+            <a:srgbClr val="E8801A"/>
+          </a:solidFill>
+          <a:ln>
+            <a:noFill/>
+          </a:ln>
+          <a:effectLst/>
+        </p:spPr>
+        <p:style>
+          <a:lnRef idx="1">
+            <a:schemeClr val="accent1"/>
+          </a:lnRef>
+          <a:fillRef idx="3">
+            <a:schemeClr val="accent1"/>
+          </a:fillRef>
+          <a:effectRef idx="2">
+            <a:schemeClr val="accent1"/>
+          </a:effectRef>
+          <a:fontRef idx="minor">
+            <a:schemeClr val="lt1"/>
+          </a:fontRef>
+        </p:style>
+        <p:txBody>
+          <a:bodyPr rtlCol="0" anchor="ctr"/>
+          <a:lstStyle/>
+          <a:p>
+            <a:pPr algn="ctr"/>
+          </a:p>
+        </p:txBody>
+      </p:sp>
+      <p:sp>
+        <p:nvSpPr>
+          <p:cNvPr id="8" name="TextBox 7"/>
           <p:cNvSpPr txBox="1"/>
           <p:nvPr/>
         </p:nvSpPr>
         <p:spPr>
           <a:xfrm>
-            <a:off x="822960" y="1920240"/>
+            <a:off x="822960" y="1965960"/>
             <a:ext cx="4983480" cy="4206240"/>
           </a:xfrm>
           <a:prstGeom prst="rect">
@@ -5686,17 +5885,17 @@
           <a:p>
             <a:pPr>
               <a:spcAft>
-                <a:spcPts val="1000"/>
+                <a:spcPts val="1100"/>
               </a:spcAft>
             </a:pPr>
             <a:r>
               <a:rPr sz="1600" b="1" i="0">
                 <a:solidFill>
-                  <a:srgbClr val="2E3A80"/>
-                </a:solidFill>
-                <a:latin typeface="Montserrat"/>
-              </a:rPr>
-              <a:t>•  </a:t>
+                  <a:srgbClr val="E8801A"/>
+                </a:solidFill>
+                <a:latin typeface="Montserrat"/>
+              </a:rPr>
+              <a:t>▸  </a:t>
             </a:r>
             <a:r>
               <a:rPr sz="1600" b="0" i="0">
@@ -5705,23 +5904,23 @@
                 </a:solidFill>
                 <a:latin typeface="Montserrat"/>
               </a:rPr>
-              <a:t>Conducto de evacuación: continuo y estanco</a:t>
+              <a:t>Armario de contadores: no entran personas</a:t>
             </a:r>
           </a:p>
           <a:p>
             <a:pPr>
               <a:spcAft>
-                <a:spcPts val="1000"/>
+                <a:spcPts val="1100"/>
               </a:spcAft>
             </a:pPr>
             <a:r>
               <a:rPr sz="1600" b="1" i="0">
                 <a:solidFill>
-                  <a:srgbClr val="2E3A80"/>
-                </a:solidFill>
-                <a:latin typeface="Montserrat"/>
-              </a:rPr>
-              <a:t>•  </a:t>
+                  <a:srgbClr val="E8801A"/>
+                </a:solidFill>
+                <a:latin typeface="Montserrat"/>
+              </a:rPr>
+              <a:t>▸  </a:t>
             </a:r>
             <a:r>
               <a:rPr sz="1600" b="0" i="0">
@@ -5730,23 +5929,23 @@
                 </a:solidFill>
                 <a:latin typeface="Montserrat"/>
               </a:rPr>
-              <a:t>Para aparatos tipo B o C</a:t>
+              <a:t>Armario-cocina: lado menor ≤ 30 cm</a:t>
             </a:r>
           </a:p>
           <a:p>
             <a:pPr>
               <a:spcAft>
-                <a:spcPts val="1000"/>
+                <a:spcPts val="1100"/>
               </a:spcAft>
             </a:pPr>
             <a:r>
               <a:rPr sz="1600" b="1" i="0">
                 <a:solidFill>
-                  <a:srgbClr val="2E3A80"/>
-                </a:solidFill>
-                <a:latin typeface="Montserrat"/>
-              </a:rPr>
-              <a:t>•  </a:t>
+                  <a:srgbClr val="E8801A"/>
+                </a:solidFill>
+                <a:latin typeface="Montserrat"/>
+              </a:rPr>
+              <a:t>▸  </a:t>
             </a:r>
             <a:r>
               <a:rPr sz="1600" b="0" i="0">
@@ -5755,23 +5954,23 @@
                 </a:solidFill>
                 <a:latin typeface="Montserrat"/>
               </a:rPr>
-              <a:t>Collarín: la boca del tipo B</a:t>
+              <a:t>Conducto de tuberías: varias tuberías</a:t>
             </a:r>
           </a:p>
           <a:p>
             <a:pPr>
               <a:spcAft>
-                <a:spcPts val="1000"/>
+                <a:spcPts val="1100"/>
               </a:spcAft>
             </a:pPr>
             <a:r>
               <a:rPr sz="1600" b="1" i="0">
                 <a:solidFill>
-                  <a:srgbClr val="2E3A80"/>
-                </a:solidFill>
-                <a:latin typeface="Montserrat"/>
-              </a:rPr>
-              <a:t>•  </a:t>
+                  <a:srgbClr val="E8801A"/>
+                </a:solidFill>
+                <a:latin typeface="Montserrat"/>
+              </a:rPr>
+              <a:t>▸  </a:t>
             </a:r>
             <a:r>
               <a:rPr sz="1600" b="0" i="0">
@@ -5780,14 +5979,14 @@
                 </a:solidFill>
                 <a:latin typeface="Montserrat"/>
               </a:rPr>
-              <a:t>Concéntricos o independientes</a:t>
-            </a:r>
-          </a:p>
-        </p:txBody>
-      </p:sp>
-      <p:sp>
-        <p:nvSpPr>
-          <p:cNvPr id="8" name="imgph" descr="IMGQ:concentric flue pipe on gas boiler"/>
+              <a:t>Conducto técnico: contadores por planta</a:t>
+            </a:r>
+          </a:p>
+        </p:txBody>
+      </p:sp>
+      <p:sp>
+        <p:nvSpPr>
+          <p:cNvPr id="9" name="imgph" descr="IMGQ:row of gas meters in ventilated cabinet"/>
           <p:cNvSpPr/>
           <p:nvPr/>
         </p:nvSpPr>
@@ -5833,7 +6032,7 @@
       </p:sp>
       <p:sp>
         <p:nvSpPr>
-          <p:cNvPr id="9" name="TextBox 8"/>
+          <p:cNvPr id="10" name="TextBox 9"/>
           <p:cNvSpPr txBox="1"/>
           <p:nvPr/>
         </p:nvSpPr>
@@ -5873,7 +6072,7 @@
                 </a:solidFill>
                 <a:latin typeface="Montserrat"/>
               </a:rPr>
-              <a:t>concentric flue pipe on gas boiler</a:t>
+              <a:t>row of gas meters in ventilated cabinet</a:t>
             </a:r>
           </a:p>
         </p:txBody>
@@ -5970,7 +6169,7 @@
                 </a:solidFill>
                 <a:latin typeface="Montserrat"/>
               </a:rPr>
-              <a:t>012 / 019</a:t>
+              <a:t>012 / 020</a:t>
             </a:r>
           </a:p>
         </p:txBody>
@@ -6018,7 +6217,7 @@
         <p:spPr>
           <a:xfrm>
             <a:off x="822960" y="457200"/>
-            <a:ext cx="8229600" cy="365760"/>
+            <a:ext cx="10058400" cy="365760"/>
           </a:xfrm>
           <a:prstGeom prst="rect">
             <a:avLst/>
@@ -6032,13 +6231,13 @@
           <a:lstStyle/>
           <a:p>
             <a:r>
-              <a:rPr sz="1200" b="1" i="0">
-                <a:solidFill>
-                  <a:srgbClr val="64748B"/>
-                </a:solidFill>
-                <a:latin typeface="Montserrat"/>
-              </a:rPr>
-              <a:t>TÉRMINOS 3.25 Y 3.26</a:t>
+              <a:rPr sz="1300" b="1" i="0">
+                <a:solidFill>
+                  <a:srgbClr val="E8801A"/>
+                </a:solidFill>
+                <a:latin typeface="Montserrat"/>
+              </a:rPr>
+              <a:t>TÉRMINOS 3.23 A 3.30</a:t>
             </a:r>
           </a:p>
         </p:txBody>
@@ -6066,26 +6265,70 @@
           <a:lstStyle/>
           <a:p>
             <a:r>
-              <a:rPr sz="2700" b="1" i="0">
+              <a:rPr sz="2800" b="1" i="0">
                 <a:solidFill>
                   <a:srgbClr val="1E2761"/>
                 </a:solidFill>
                 <a:latin typeface="Montserrat"/>
               </a:rPr>
-              <a:t>Referencia frente a normales</a:t>
-            </a:r>
-          </a:p>
-        </p:txBody>
-      </p:sp>
-      <p:sp>
-        <p:nvSpPr>
-          <p:cNvPr id="7" name="TextBox 6"/>
+              <a:t>Chimenea, conductos y evacuación</a:t>
+            </a:r>
+          </a:p>
+        </p:txBody>
+      </p:sp>
+      <p:sp>
+        <p:nvSpPr>
+          <p:cNvPr id="7" name="Rounded Rectangle 6"/>
+          <p:cNvSpPr/>
+          <p:nvPr/>
+        </p:nvSpPr>
+        <p:spPr>
+          <a:xfrm>
+            <a:off x="868680" y="1627632"/>
+            <a:ext cx="2011680" cy="73152"/>
+          </a:xfrm>
+          <a:prstGeom prst="roundRect">
+            <a:avLst/>
+          </a:prstGeom>
+          <a:solidFill>
+            <a:srgbClr val="E8801A"/>
+          </a:solidFill>
+          <a:ln>
+            <a:noFill/>
+          </a:ln>
+          <a:effectLst/>
+        </p:spPr>
+        <p:style>
+          <a:lnRef idx="1">
+            <a:schemeClr val="accent1"/>
+          </a:lnRef>
+          <a:fillRef idx="3">
+            <a:schemeClr val="accent1"/>
+          </a:fillRef>
+          <a:effectRef idx="2">
+            <a:schemeClr val="accent1"/>
+          </a:effectRef>
+          <a:fontRef idx="minor">
+            <a:schemeClr val="lt1"/>
+          </a:fontRef>
+        </p:style>
+        <p:txBody>
+          <a:bodyPr rtlCol="0" anchor="ctr"/>
+          <a:lstStyle/>
+          <a:p>
+            <a:pPr algn="ctr"/>
+          </a:p>
+        </p:txBody>
+      </p:sp>
+      <p:sp>
+        <p:nvSpPr>
+          <p:cNvPr id="8" name="TextBox 7"/>
           <p:cNvSpPr txBox="1"/>
           <p:nvPr/>
         </p:nvSpPr>
         <p:spPr>
           <a:xfrm>
-            <a:off x="822960" y="1920240"/>
+            <a:off x="822960" y="1965960"/>
             <a:ext cx="4983480" cy="4206240"/>
           </a:xfrm>
           <a:prstGeom prst="rect">
@@ -6101,17 +6344,17 @@
           <a:p>
             <a:pPr>
               <a:spcAft>
-                <a:spcPts val="1000"/>
+                <a:spcPts val="1100"/>
               </a:spcAft>
             </a:pPr>
             <a:r>
               <a:rPr sz="1600" b="1" i="0">
                 <a:solidFill>
-                  <a:srgbClr val="2E3A80"/>
-                </a:solidFill>
-                <a:latin typeface="Montserrat"/>
-              </a:rPr>
-              <a:t>•  </a:t>
+                  <a:srgbClr val="E8801A"/>
+                </a:solidFill>
+                <a:latin typeface="Montserrat"/>
+              </a:rPr>
+              <a:t>▸  </a:t>
             </a:r>
             <a:r>
               <a:rPr sz="1600" b="0" i="0">
@@ -6120,23 +6363,23 @@
                 </a:solidFill>
                 <a:latin typeface="Montserrat"/>
               </a:rPr>
-              <a:t>Referencia: 15 °C</a:t>
+              <a:t>Conducto de evacuación: continuo y estanco</a:t>
             </a:r>
           </a:p>
           <a:p>
             <a:pPr>
               <a:spcAft>
-                <a:spcPts val="1000"/>
+                <a:spcPts val="1100"/>
               </a:spcAft>
             </a:pPr>
             <a:r>
               <a:rPr sz="1600" b="1" i="0">
                 <a:solidFill>
-                  <a:srgbClr val="2E3A80"/>
-                </a:solidFill>
-                <a:latin typeface="Montserrat"/>
-              </a:rPr>
-              <a:t>•  </a:t>
+                  <a:srgbClr val="E8801A"/>
+                </a:solidFill>
+                <a:latin typeface="Montserrat"/>
+              </a:rPr>
+              <a:t>▸  </a:t>
             </a:r>
             <a:r>
               <a:rPr sz="1600" b="0" i="0">
@@ -6145,23 +6388,23 @@
                 </a:solidFill>
                 <a:latin typeface="Montserrat"/>
               </a:rPr>
-              <a:t>Normales: 0 °C</a:t>
+              <a:t>Para aparatos tipo B o C</a:t>
             </a:r>
           </a:p>
           <a:p>
             <a:pPr>
               <a:spcAft>
-                <a:spcPts val="1000"/>
+                <a:spcPts val="1100"/>
               </a:spcAft>
             </a:pPr>
             <a:r>
               <a:rPr sz="1600" b="1" i="0">
                 <a:solidFill>
-                  <a:srgbClr val="2E3A80"/>
-                </a:solidFill>
-                <a:latin typeface="Montserrat"/>
-              </a:rPr>
-              <a:t>•  </a:t>
+                  <a:srgbClr val="E8801A"/>
+                </a:solidFill>
+                <a:latin typeface="Montserrat"/>
+              </a:rPr>
+              <a:t>▸  </a:t>
             </a:r>
             <a:r>
               <a:rPr sz="1600" b="0" i="0">
@@ -6170,23 +6413,23 @@
                 </a:solidFill>
                 <a:latin typeface="Montserrat"/>
               </a:rPr>
-              <a:t>Las dos a 1 013,25 mbar</a:t>
+              <a:t>Collarín: la boca del tipo B</a:t>
             </a:r>
           </a:p>
           <a:p>
             <a:pPr>
               <a:spcAft>
-                <a:spcPts val="1000"/>
+                <a:spcPts val="1100"/>
               </a:spcAft>
             </a:pPr>
             <a:r>
               <a:rPr sz="1600" b="1" i="0">
                 <a:solidFill>
-                  <a:srgbClr val="2E3A80"/>
-                </a:solidFill>
-                <a:latin typeface="Montserrat"/>
-              </a:rPr>
-              <a:t>•  </a:t>
+                  <a:srgbClr val="E8801A"/>
+                </a:solidFill>
+                <a:latin typeface="Montserrat"/>
+              </a:rPr>
+              <a:t>▸  </a:t>
             </a:r>
             <a:r>
               <a:rPr sz="1600" b="0" i="0">
@@ -6195,14 +6438,14 @@
                 </a:solidFill>
                 <a:latin typeface="Montserrat"/>
               </a:rPr>
-              <a:t>Referencia quince, normales cero</a:t>
-            </a:r>
-          </a:p>
-        </p:txBody>
-      </p:sp>
-      <p:sp>
-        <p:nvSpPr>
-          <p:cNvPr id="8" name="imgph" descr="IMGQ:gas pressure gauge and thermometer"/>
+              <a:t>Concéntricos o independientes</a:t>
+            </a:r>
+          </a:p>
+        </p:txBody>
+      </p:sp>
+      <p:sp>
+        <p:nvSpPr>
+          <p:cNvPr id="9" name="imgph" descr="IMGQ:concentric flue pipe on gas boiler"/>
           <p:cNvSpPr/>
           <p:nvPr/>
         </p:nvSpPr>
@@ -6248,7 +6491,7 @@
       </p:sp>
       <p:sp>
         <p:nvSpPr>
-          <p:cNvPr id="9" name="TextBox 8"/>
+          <p:cNvPr id="10" name="TextBox 9"/>
           <p:cNvSpPr txBox="1"/>
           <p:nvPr/>
         </p:nvSpPr>
@@ -6288,7 +6531,7 @@
                 </a:solidFill>
                 <a:latin typeface="Montserrat"/>
               </a:rPr>
-              <a:t>gas pressure gauge and thermometer</a:t>
+              <a:t>concentric flue pipe on gas boiler</a:t>
             </a:r>
           </a:p>
         </p:txBody>
@@ -6385,7 +6628,7 @@
                 </a:solidFill>
                 <a:latin typeface="Montserrat"/>
               </a:rPr>
-              <a:t>013 / 019</a:t>
+              <a:t>013 / 020</a:t>
             </a:r>
           </a:p>
         </p:txBody>
@@ -6433,7 +6676,7 @@
         <p:spPr>
           <a:xfrm>
             <a:off x="822960" y="457200"/>
-            <a:ext cx="8229600" cy="365760"/>
+            <a:ext cx="10058400" cy="365760"/>
           </a:xfrm>
           <a:prstGeom prst="rect">
             <a:avLst/>
@@ -6447,13 +6690,13 @@
           <a:lstStyle/>
           <a:p>
             <a:r>
-              <a:rPr sz="1200" b="1" i="0">
-                <a:solidFill>
-                  <a:srgbClr val="64748B"/>
-                </a:solidFill>
-                <a:latin typeface="Montserrat"/>
-              </a:rPr>
-              <a:t>TÉRMINOS 3.22 A 3.36</a:t>
+              <a:rPr sz="1300" b="1" i="0">
+                <a:solidFill>
+                  <a:srgbClr val="E8801A"/>
+                </a:solidFill>
+                <a:latin typeface="Montserrat"/>
+              </a:rPr>
+              <a:t>TÉRMINOS 3.25 Y 3.26</a:t>
             </a:r>
           </a:p>
         </p:txBody>
@@ -6481,26 +6724,70 @@
           <a:lstStyle/>
           <a:p>
             <a:r>
-              <a:rPr sz="2700" b="1" i="0">
+              <a:rPr sz="2800" b="1" i="0">
                 <a:solidFill>
                   <a:srgbClr val="1E2761"/>
                 </a:solidFill>
                 <a:latin typeface="Montserrat"/>
               </a:rPr>
-              <a:t>Caudal de diseño y consumos</a:t>
-            </a:r>
-          </a:p>
-        </p:txBody>
-      </p:sp>
-      <p:sp>
-        <p:nvSpPr>
-          <p:cNvPr id="7" name="TextBox 6"/>
+              <a:t>Referencia frente a normales</a:t>
+            </a:r>
+          </a:p>
+        </p:txBody>
+      </p:sp>
+      <p:sp>
+        <p:nvSpPr>
+          <p:cNvPr id="7" name="Rounded Rectangle 6"/>
+          <p:cNvSpPr/>
+          <p:nvPr/>
+        </p:nvSpPr>
+        <p:spPr>
+          <a:xfrm>
+            <a:off x="868680" y="1627632"/>
+            <a:ext cx="2011680" cy="73152"/>
+          </a:xfrm>
+          <a:prstGeom prst="roundRect">
+            <a:avLst/>
+          </a:prstGeom>
+          <a:solidFill>
+            <a:srgbClr val="E8801A"/>
+          </a:solidFill>
+          <a:ln>
+            <a:noFill/>
+          </a:ln>
+          <a:effectLst/>
+        </p:spPr>
+        <p:style>
+          <a:lnRef idx="1">
+            <a:schemeClr val="accent1"/>
+          </a:lnRef>
+          <a:fillRef idx="3">
+            <a:schemeClr val="accent1"/>
+          </a:fillRef>
+          <a:effectRef idx="2">
+            <a:schemeClr val="accent1"/>
+          </a:effectRef>
+          <a:fontRef idx="minor">
+            <a:schemeClr val="lt1"/>
+          </a:fontRef>
+        </p:style>
+        <p:txBody>
+          <a:bodyPr rtlCol="0" anchor="ctr"/>
+          <a:lstStyle/>
+          <a:p>
+            <a:pPr algn="ctr"/>
+          </a:p>
+        </p:txBody>
+      </p:sp>
+      <p:sp>
+        <p:nvSpPr>
+          <p:cNvPr id="8" name="TextBox 7"/>
           <p:cNvSpPr txBox="1"/>
           <p:nvPr/>
         </p:nvSpPr>
         <p:spPr>
           <a:xfrm>
-            <a:off x="822960" y="1920240"/>
+            <a:off x="822960" y="1965960"/>
             <a:ext cx="4983480" cy="4206240"/>
           </a:xfrm>
           <a:prstGeom prst="rect">
@@ -6516,17 +6803,17 @@
           <a:p>
             <a:pPr>
               <a:spcAft>
-                <a:spcPts val="1000"/>
+                <a:spcPts val="1100"/>
               </a:spcAft>
             </a:pPr>
             <a:r>
               <a:rPr sz="1600" b="1" i="0">
                 <a:solidFill>
-                  <a:srgbClr val="2E3A80"/>
-                </a:solidFill>
-                <a:latin typeface="Montserrat"/>
-              </a:rPr>
-              <a:t>•  </a:t>
+                  <a:srgbClr val="E8801A"/>
+                </a:solidFill>
+                <a:latin typeface="Montserrat"/>
+              </a:rPr>
+              <a:t>▸  </a:t>
             </a:r>
             <a:r>
               <a:rPr sz="1600" b="0" i="0">
@@ -6535,23 +6822,23 @@
                 </a:solidFill>
                 <a:latin typeface="Montserrat"/>
               </a:rPr>
-              <a:t>Caudal de diseño qs: para dimensionar</a:t>
+              <a:t>Referencia: 15 °C</a:t>
             </a:r>
           </a:p>
           <a:p>
             <a:pPr>
               <a:spcAft>
-                <a:spcPts val="1000"/>
+                <a:spcPts val="1100"/>
               </a:spcAft>
             </a:pPr>
             <a:r>
               <a:rPr sz="1600" b="1" i="0">
                 <a:solidFill>
-                  <a:srgbClr val="2E3A80"/>
-                </a:solidFill>
-                <a:latin typeface="Montserrat"/>
-              </a:rPr>
-              <a:t>•  </a:t>
+                  <a:srgbClr val="E8801A"/>
+                </a:solidFill>
+                <a:latin typeface="Montserrat"/>
+              </a:rPr>
+              <a:t>▸  </a:t>
             </a:r>
             <a:r>
               <a:rPr sz="1600" b="0" i="0">
@@ -6560,23 +6847,23 @@
                 </a:solidFill>
                 <a:latin typeface="Montserrat"/>
               </a:rPr>
-              <a:t>Consumo calorífico Q: en kW</a:t>
+              <a:t>Normales: 0 °C</a:t>
             </a:r>
           </a:p>
           <a:p>
             <a:pPr>
               <a:spcAft>
-                <a:spcPts val="1000"/>
+                <a:spcPts val="1100"/>
               </a:spcAft>
             </a:pPr>
             <a:r>
               <a:rPr sz="1600" b="1" i="0">
                 <a:solidFill>
-                  <a:srgbClr val="2E3A80"/>
-                </a:solidFill>
-                <a:latin typeface="Montserrat"/>
-              </a:rPr>
-              <a:t>•  </a:t>
+                  <a:srgbClr val="E8801A"/>
+                </a:solidFill>
+                <a:latin typeface="Montserrat"/>
+              </a:rPr>
+              <a:t>▸  </a:t>
             </a:r>
             <a:r>
               <a:rPr sz="1600" b="0" i="0">
@@ -6585,23 +6872,23 @@
                 </a:solidFill>
                 <a:latin typeface="Montserrat"/>
               </a:rPr>
-              <a:t>Nominal Qn: lo da el fabricante</a:t>
+              <a:t>Las dos a 1 013,25 mbar</a:t>
             </a:r>
           </a:p>
           <a:p>
             <a:pPr>
               <a:spcAft>
-                <a:spcPts val="1000"/>
+                <a:spcPts val="1100"/>
               </a:spcAft>
             </a:pPr>
             <a:r>
               <a:rPr sz="1600" b="1" i="0">
                 <a:solidFill>
-                  <a:srgbClr val="2E3A80"/>
-                </a:solidFill>
-                <a:latin typeface="Montserrat"/>
-              </a:rPr>
-              <a:t>•  </a:t>
+                  <a:srgbClr val="E8801A"/>
+                </a:solidFill>
+                <a:latin typeface="Montserrat"/>
+              </a:rPr>
+              <a:t>▸  </a:t>
             </a:r>
             <a:r>
               <a:rPr sz="1600" b="0" i="0">
@@ -6610,14 +6897,14 @@
                 </a:solidFill>
                 <a:latin typeface="Montserrat"/>
               </a:rPr>
-              <a:t>Volumétrico qv y másico qm</a:t>
-            </a:r>
-          </a:p>
-        </p:txBody>
-      </p:sp>
-      <p:sp>
-        <p:nvSpPr>
-          <p:cNvPr id="8" name="imgph" descr="IMGQ:gas appliance rating plate with kW value"/>
+              <a:t>Referencia quince, normales cero</a:t>
+            </a:r>
+          </a:p>
+        </p:txBody>
+      </p:sp>
+      <p:sp>
+        <p:nvSpPr>
+          <p:cNvPr id="9" name="imgph" descr="IMGQ:gas pressure gauge and thermometer"/>
           <p:cNvSpPr/>
           <p:nvPr/>
         </p:nvSpPr>
@@ -6663,7 +6950,7 @@
       </p:sp>
       <p:sp>
         <p:nvSpPr>
-          <p:cNvPr id="9" name="TextBox 8"/>
+          <p:cNvPr id="10" name="TextBox 9"/>
           <p:cNvSpPr txBox="1"/>
           <p:nvPr/>
         </p:nvSpPr>
@@ -6703,7 +6990,7 @@
                 </a:solidFill>
                 <a:latin typeface="Montserrat"/>
               </a:rPr>
-              <a:t>gas appliance rating plate with kW value</a:t>
+              <a:t>gas pressure gauge and thermometer</a:t>
             </a:r>
           </a:p>
         </p:txBody>
@@ -6800,7 +7087,7 @@
                 </a:solidFill>
                 <a:latin typeface="Montserrat"/>
               </a:rPr>
-              <a:t>014 / 019</a:t>
+              <a:t>014 / 020</a:t>
             </a:r>
           </a:p>
         </p:txBody>
@@ -6848,7 +7135,7 @@
         <p:spPr>
           <a:xfrm>
             <a:off x="822960" y="457200"/>
-            <a:ext cx="8229600" cy="365760"/>
+            <a:ext cx="10058400" cy="365760"/>
           </a:xfrm>
           <a:prstGeom prst="rect">
             <a:avLst/>
@@ -6862,13 +7149,13 @@
           <a:lstStyle/>
           <a:p>
             <a:r>
-              <a:rPr sz="1200" b="1" i="0">
-                <a:solidFill>
-                  <a:srgbClr val="64748B"/>
-                </a:solidFill>
-                <a:latin typeface="Montserrat"/>
-              </a:rPr>
-              <a:t>TÉRMINOS 3.31 Y 3.32</a:t>
+              <a:rPr sz="1300" b="1" i="0">
+                <a:solidFill>
+                  <a:srgbClr val="E8801A"/>
+                </a:solidFill>
+                <a:latin typeface="Montserrat"/>
+              </a:rPr>
+              <a:t>TÉRMINOS 3.22 A 3.36</a:t>
             </a:r>
           </a:p>
         </p:txBody>
@@ -6896,26 +7183,70 @@
           <a:lstStyle/>
           <a:p>
             <a:r>
-              <a:rPr sz="2700" b="1" i="0">
+              <a:rPr sz="2800" b="1" i="0">
                 <a:solidFill>
                   <a:srgbClr val="1E2761"/>
                 </a:solidFill>
                 <a:latin typeface="Montserrat"/>
               </a:rPr>
-              <a:t>Conexión de aparato y regulación</a:t>
-            </a:r>
-          </a:p>
-        </p:txBody>
-      </p:sp>
-      <p:sp>
-        <p:nvSpPr>
-          <p:cNvPr id="7" name="TextBox 6"/>
+              <a:t>Caudal de diseño y consumos</a:t>
+            </a:r>
+          </a:p>
+        </p:txBody>
+      </p:sp>
+      <p:sp>
+        <p:nvSpPr>
+          <p:cNvPr id="7" name="Rounded Rectangle 6"/>
+          <p:cNvSpPr/>
+          <p:nvPr/>
+        </p:nvSpPr>
+        <p:spPr>
+          <a:xfrm>
+            <a:off x="868680" y="1627632"/>
+            <a:ext cx="2011680" cy="73152"/>
+          </a:xfrm>
+          <a:prstGeom prst="roundRect">
+            <a:avLst/>
+          </a:prstGeom>
+          <a:solidFill>
+            <a:srgbClr val="E8801A"/>
+          </a:solidFill>
+          <a:ln>
+            <a:noFill/>
+          </a:ln>
+          <a:effectLst/>
+        </p:spPr>
+        <p:style>
+          <a:lnRef idx="1">
+            <a:schemeClr val="accent1"/>
+          </a:lnRef>
+          <a:fillRef idx="3">
+            <a:schemeClr val="accent1"/>
+          </a:fillRef>
+          <a:effectRef idx="2">
+            <a:schemeClr val="accent1"/>
+          </a:effectRef>
+          <a:fontRef idx="minor">
+            <a:schemeClr val="lt1"/>
+          </a:fontRef>
+        </p:style>
+        <p:txBody>
+          <a:bodyPr rtlCol="0" anchor="ctr"/>
+          <a:lstStyle/>
+          <a:p>
+            <a:pPr algn="ctr"/>
+          </a:p>
+        </p:txBody>
+      </p:sp>
+      <p:sp>
+        <p:nvSpPr>
+          <p:cNvPr id="8" name="TextBox 7"/>
           <p:cNvSpPr txBox="1"/>
           <p:nvPr/>
         </p:nvSpPr>
         <p:spPr>
           <a:xfrm>
-            <a:off x="822960" y="1920240"/>
+            <a:off x="822960" y="1965960"/>
             <a:ext cx="4983480" cy="4206240"/>
           </a:xfrm>
           <a:prstGeom prst="rect">
@@ -6931,17 +7262,17 @@
           <a:p>
             <a:pPr>
               <a:spcAft>
-                <a:spcPts val="1000"/>
+                <a:spcPts val="1100"/>
               </a:spcAft>
             </a:pPr>
             <a:r>
               <a:rPr sz="1600" b="1" i="0">
                 <a:solidFill>
-                  <a:srgbClr val="2E3A80"/>
-                </a:solidFill>
-                <a:latin typeface="Montserrat"/>
-              </a:rPr>
-              <a:t>•  </a:t>
+                  <a:srgbClr val="E8801A"/>
+                </a:solidFill>
+                <a:latin typeface="Montserrat"/>
+              </a:rPr>
+              <a:t>▸  </a:t>
             </a:r>
             <a:r>
               <a:rPr sz="1600" b="0" i="0">
@@ -6950,23 +7281,23 @@
                 </a:solidFill>
                 <a:latin typeface="Montserrat"/>
               </a:rPr>
-              <a:t>Conexión: de la llave del aparato al aparato</a:t>
+              <a:t>Caudal de diseño qs: para dimensionar</a:t>
             </a:r>
           </a:p>
           <a:p>
             <a:pPr>
               <a:spcAft>
-                <a:spcPts val="1000"/>
+                <a:spcPts val="1100"/>
               </a:spcAft>
             </a:pPr>
             <a:r>
               <a:rPr sz="1600" b="1" i="0">
                 <a:solidFill>
-                  <a:srgbClr val="2E3A80"/>
-                </a:solidFill>
-                <a:latin typeface="Montserrat"/>
-              </a:rPr>
-              <a:t>•  </a:t>
+                  <a:srgbClr val="E8801A"/>
+                </a:solidFill>
+                <a:latin typeface="Montserrat"/>
+              </a:rPr>
+              <a:t>▸  </a:t>
             </a:r>
             <a:r>
               <a:rPr sz="1600" b="0" i="0">
@@ -6975,23 +7306,23 @@
                 </a:solidFill>
                 <a:latin typeface="Montserrat"/>
               </a:rPr>
-              <a:t>Puede ser flexible o rígida</a:t>
+              <a:t>Consumo calorífico Q: en kW</a:t>
             </a:r>
           </a:p>
           <a:p>
             <a:pPr>
               <a:spcAft>
-                <a:spcPts val="1000"/>
+                <a:spcPts val="1100"/>
               </a:spcAft>
             </a:pPr>
             <a:r>
               <a:rPr sz="1600" b="1" i="0">
                 <a:solidFill>
-                  <a:srgbClr val="2E3A80"/>
-                </a:solidFill>
-                <a:latin typeface="Montserrat"/>
-              </a:rPr>
-              <a:t>•  </a:t>
+                  <a:srgbClr val="E8801A"/>
+                </a:solidFill>
+                <a:latin typeface="Montserrat"/>
+              </a:rPr>
+              <a:t>▸  </a:t>
             </a:r>
             <a:r>
               <a:rPr sz="1600" b="0" i="0">
@@ -7000,23 +7331,23 @@
                 </a:solidFill>
                 <a:latin typeface="Montserrat"/>
               </a:rPr>
-              <a:t>Conjunto de regulación: regulador y accesorios</a:t>
+              <a:t>Nominal Qn: lo da el fabricante</a:t>
             </a:r>
           </a:p>
           <a:p>
             <a:pPr>
               <a:spcAft>
-                <a:spcPts val="1000"/>
+                <a:spcPts val="1100"/>
               </a:spcAft>
             </a:pPr>
             <a:r>
               <a:rPr sz="1600" b="1" i="0">
                 <a:solidFill>
-                  <a:srgbClr val="2E3A80"/>
-                </a:solidFill>
-                <a:latin typeface="Montserrat"/>
-              </a:rPr>
-              <a:t>•  </a:t>
+                  <a:srgbClr val="E8801A"/>
+                </a:solidFill>
+                <a:latin typeface="Montserrat"/>
+              </a:rPr>
+              <a:t>▸  </a:t>
             </a:r>
             <a:r>
               <a:rPr sz="1600" b="0" i="0">
@@ -7025,14 +7356,14 @@
                 </a:solidFill>
                 <a:latin typeface="Montserrat"/>
               </a:rPr>
-              <a:t>En armario: armario de regulación</a:t>
-            </a:r>
-          </a:p>
-        </p:txBody>
-      </p:sp>
-      <p:sp>
-        <p:nvSpPr>
-          <p:cNvPr id="8" name="imgph" descr="IMGQ:gas regulator with filter and valves"/>
+              <a:t>Volumétrico qv y másico qm</a:t>
+            </a:r>
+          </a:p>
+        </p:txBody>
+      </p:sp>
+      <p:sp>
+        <p:nvSpPr>
+          <p:cNvPr id="9" name="imgph" descr="IMGQ:gas appliance rating plate with kW value"/>
           <p:cNvSpPr/>
           <p:nvPr/>
         </p:nvSpPr>
@@ -7078,7 +7409,7 @@
       </p:sp>
       <p:sp>
         <p:nvSpPr>
-          <p:cNvPr id="9" name="TextBox 8"/>
+          <p:cNvPr id="10" name="TextBox 9"/>
           <p:cNvSpPr txBox="1"/>
           <p:nvPr/>
         </p:nvSpPr>
@@ -7118,7 +7449,7 @@
                 </a:solidFill>
                 <a:latin typeface="Montserrat"/>
               </a:rPr>
-              <a:t>gas regulator with filter and valves</a:t>
+              <a:t>gas appliance rating plate with kW value</a:t>
             </a:r>
           </a:p>
         </p:txBody>
@@ -7215,7 +7546,7 @@
                 </a:solidFill>
                 <a:latin typeface="Montserrat"/>
               </a:rPr>
-              <a:t>015 / 019</a:t>
+              <a:t>015 / 020</a:t>
             </a:r>
           </a:p>
         </p:txBody>
@@ -7263,7 +7594,7 @@
         <p:spPr>
           <a:xfrm>
             <a:off x="822960" y="457200"/>
-            <a:ext cx="8229600" cy="365760"/>
+            <a:ext cx="10058400" cy="365760"/>
           </a:xfrm>
           <a:prstGeom prst="rect">
             <a:avLst/>
@@ -7277,13 +7608,13 @@
           <a:lstStyle/>
           <a:p>
             <a:r>
-              <a:rPr sz="1200" b="1" i="0">
-                <a:solidFill>
-                  <a:srgbClr val="64748B"/>
-                </a:solidFill>
-                <a:latin typeface="Montserrat"/>
-              </a:rPr>
-              <a:t>TÉRMINOS 3.37 A 3.44</a:t>
+              <a:rPr sz="1300" b="1" i="0">
+                <a:solidFill>
+                  <a:srgbClr val="E8801A"/>
+                </a:solidFill>
+                <a:latin typeface="Montserrat"/>
+              </a:rPr>
+              <a:t>TÉRMINOS 3.31 Y 3.32</a:t>
             </a:r>
           </a:p>
         </p:txBody>
@@ -7311,26 +7642,70 @@
           <a:lstStyle/>
           <a:p>
             <a:r>
-              <a:rPr sz="2700" b="1" i="0">
+              <a:rPr sz="2800" b="1" i="0">
                 <a:solidFill>
                   <a:srgbClr val="1E2761"/>
                 </a:solidFill>
                 <a:latin typeface="Montserrat"/>
               </a:rPr>
-              <a:t>Cortatiro y evacuación asistida</a:t>
-            </a:r>
-          </a:p>
-        </p:txBody>
-      </p:sp>
-      <p:sp>
-        <p:nvSpPr>
-          <p:cNvPr id="7" name="TextBox 6"/>
+              <a:t>Conexión de aparato y regulación</a:t>
+            </a:r>
+          </a:p>
+        </p:txBody>
+      </p:sp>
+      <p:sp>
+        <p:nvSpPr>
+          <p:cNvPr id="7" name="Rounded Rectangle 6"/>
+          <p:cNvSpPr/>
+          <p:nvPr/>
+        </p:nvSpPr>
+        <p:spPr>
+          <a:xfrm>
+            <a:off x="868680" y="1627632"/>
+            <a:ext cx="2011680" cy="73152"/>
+          </a:xfrm>
+          <a:prstGeom prst="roundRect">
+            <a:avLst/>
+          </a:prstGeom>
+          <a:solidFill>
+            <a:srgbClr val="E8801A"/>
+          </a:solidFill>
+          <a:ln>
+            <a:noFill/>
+          </a:ln>
+          <a:effectLst/>
+        </p:spPr>
+        <p:style>
+          <a:lnRef idx="1">
+            <a:schemeClr val="accent1"/>
+          </a:lnRef>
+          <a:fillRef idx="3">
+            <a:schemeClr val="accent1"/>
+          </a:fillRef>
+          <a:effectRef idx="2">
+            <a:schemeClr val="accent1"/>
+          </a:effectRef>
+          <a:fontRef idx="minor">
+            <a:schemeClr val="lt1"/>
+          </a:fontRef>
+        </p:style>
+        <p:txBody>
+          <a:bodyPr rtlCol="0" anchor="ctr"/>
+          <a:lstStyle/>
+          <a:p>
+            <a:pPr algn="ctr"/>
+          </a:p>
+        </p:txBody>
+      </p:sp>
+      <p:sp>
+        <p:nvSpPr>
+          <p:cNvPr id="8" name="TextBox 7"/>
           <p:cNvSpPr txBox="1"/>
           <p:nvPr/>
         </p:nvSpPr>
         <p:spPr>
           <a:xfrm>
-            <a:off x="822960" y="1920240"/>
+            <a:off x="822960" y="1965960"/>
             <a:ext cx="4983480" cy="4206240"/>
           </a:xfrm>
           <a:prstGeom prst="rect">
@@ -7346,17 +7721,17 @@
           <a:p>
             <a:pPr>
               <a:spcAft>
-                <a:spcPts val="1000"/>
+                <a:spcPts val="1100"/>
               </a:spcAft>
             </a:pPr>
             <a:r>
               <a:rPr sz="1600" b="1" i="0">
                 <a:solidFill>
-                  <a:srgbClr val="2E3A80"/>
-                </a:solidFill>
-                <a:latin typeface="Montserrat"/>
-              </a:rPr>
-              <a:t>•  </a:t>
+                  <a:srgbClr val="E8801A"/>
+                </a:solidFill>
+                <a:latin typeface="Montserrat"/>
+              </a:rPr>
+              <a:t>▸  </a:t>
             </a:r>
             <a:r>
               <a:rPr sz="1600" b="0" i="0">
@@ -7365,23 +7740,23 @@
                 </a:solidFill>
                 <a:latin typeface="Montserrat"/>
               </a:rPr>
-              <a:t>Cortatiro: estabiliza el tiro (tipo B)</a:t>
+              <a:t>Conexión: de la llave del aparato al aparato</a:t>
             </a:r>
           </a:p>
           <a:p>
             <a:pPr>
               <a:spcAft>
-                <a:spcPts val="1000"/>
+                <a:spcPts val="1100"/>
               </a:spcAft>
             </a:pPr>
             <a:r>
               <a:rPr sz="1600" b="1" i="0">
                 <a:solidFill>
-                  <a:srgbClr val="2E3A80"/>
-                </a:solidFill>
-                <a:latin typeface="Montserrat"/>
-              </a:rPr>
-              <a:t>•  </a:t>
+                  <a:srgbClr val="E8801A"/>
+                </a:solidFill>
+                <a:latin typeface="Montserrat"/>
+              </a:rPr>
+              <a:t>▸  </a:t>
             </a:r>
             <a:r>
               <a:rPr sz="1600" b="0" i="0">
@@ -7390,23 +7765,23 @@
                 </a:solidFill>
                 <a:latin typeface="Montserrat"/>
               </a:rPr>
-              <a:t>Control de evacuación: para si hay revoco</a:t>
+              <a:t>Puede ser flexible o rígida</a:t>
             </a:r>
           </a:p>
           <a:p>
             <a:pPr>
               <a:spcAft>
-                <a:spcPts val="1000"/>
+                <a:spcPts val="1100"/>
               </a:spcAft>
             </a:pPr>
             <a:r>
               <a:rPr sz="1600" b="1" i="0">
                 <a:solidFill>
-                  <a:srgbClr val="2E3A80"/>
-                </a:solidFill>
-                <a:latin typeface="Montserrat"/>
-              </a:rPr>
-              <a:t>•  </a:t>
+                  <a:srgbClr val="E8801A"/>
+                </a:solidFill>
+                <a:latin typeface="Montserrat"/>
+              </a:rPr>
+              <a:t>▸  </a:t>
             </a:r>
             <a:r>
               <a:rPr sz="1600" b="0" i="0">
@@ -7415,23 +7790,23 @@
                 </a:solidFill>
                 <a:latin typeface="Montserrat"/>
               </a:rPr>
-              <a:t>Ayuda a la evacuación: ventilador que empuja</a:t>
+              <a:t>Conjunto de regulación: regulador y accesorios</a:t>
             </a:r>
           </a:p>
           <a:p>
             <a:pPr>
               <a:spcAft>
-                <a:spcPts val="1000"/>
+                <a:spcPts val="1100"/>
               </a:spcAft>
             </a:pPr>
             <a:r>
               <a:rPr sz="1600" b="1" i="0">
                 <a:solidFill>
-                  <a:srgbClr val="2E3A80"/>
-                </a:solidFill>
-                <a:latin typeface="Montserrat"/>
-              </a:rPr>
-              <a:t>•  </a:t>
+                  <a:srgbClr val="E8801A"/>
+                </a:solidFill>
+                <a:latin typeface="Montserrat"/>
+              </a:rPr>
+              <a:t>▸  </a:t>
             </a:r>
             <a:r>
               <a:rPr sz="1600" b="0" i="0">
@@ -7440,14 +7815,14 @@
                 </a:solidFill>
                 <a:latin typeface="Montserrat"/>
               </a:rPr>
-              <a:t>Uno vigila y corta; otro empuja</a:t>
-            </a:r>
-          </a:p>
-        </p:txBody>
-      </p:sp>
-      <p:sp>
-        <p:nvSpPr>
-          <p:cNvPr id="8" name="imgph" descr="IMGQ:draught diverter on gas water heater"/>
+              <a:t>En armario: armario de regulación</a:t>
+            </a:r>
+          </a:p>
+        </p:txBody>
+      </p:sp>
+      <p:sp>
+        <p:nvSpPr>
+          <p:cNvPr id="9" name="imgph" descr="IMGQ:gas regulator with filter and valves"/>
           <p:cNvSpPr/>
           <p:nvPr/>
         </p:nvSpPr>
@@ -7493,7 +7868,7 @@
       </p:sp>
       <p:sp>
         <p:nvSpPr>
-          <p:cNvPr id="9" name="TextBox 8"/>
+          <p:cNvPr id="10" name="TextBox 9"/>
           <p:cNvSpPr txBox="1"/>
           <p:nvPr/>
         </p:nvSpPr>
@@ -7533,7 +7908,7 @@
                 </a:solidFill>
                 <a:latin typeface="Montserrat"/>
               </a:rPr>
-              <a:t>draught diverter on gas water heater</a:t>
+              <a:t>gas regulator with filter and valves</a:t>
             </a:r>
           </a:p>
         </p:txBody>
@@ -7630,7 +8005,7 @@
                 </a:solidFill>
                 <a:latin typeface="Montserrat"/>
               </a:rPr>
-              <a:t>016 / 019</a:t>
+              <a:t>016 / 020</a:t>
             </a:r>
           </a:p>
         </p:txBody>
@@ -7678,7 +8053,7 @@
         <p:spPr>
           <a:xfrm>
             <a:off x="822960" y="457200"/>
-            <a:ext cx="8229600" cy="365760"/>
+            <a:ext cx="10058400" cy="365760"/>
           </a:xfrm>
           <a:prstGeom prst="rect">
             <a:avLst/>
@@ -7692,13 +8067,13 @@
           <a:lstStyle/>
           <a:p>
             <a:r>
-              <a:rPr sz="1200" b="1" i="0">
-                <a:solidFill>
-                  <a:srgbClr val="64748B"/>
-                </a:solidFill>
-                <a:latin typeface="Montserrat"/>
-              </a:rPr>
-              <a:t>TÉRMINOS 3.38 A 3.47</a:t>
+              <a:rPr sz="1300" b="1" i="0">
+                <a:solidFill>
+                  <a:srgbClr val="E8801A"/>
+                </a:solidFill>
+                <a:latin typeface="Montserrat"/>
+              </a:rPr>
+              <a:t>TÉRMINOS 3.37 A 3.44</a:t>
             </a:r>
           </a:p>
         </p:txBody>
@@ -7726,26 +8101,70 @@
           <a:lstStyle/>
           <a:p>
             <a:r>
-              <a:rPr sz="2700" b="1" i="0">
+              <a:rPr sz="2800" b="1" i="0">
                 <a:solidFill>
                   <a:srgbClr val="1E2761"/>
                 </a:solidFill>
                 <a:latin typeface="Montserrat"/>
               </a:rPr>
-              <a:t>Detectores y corte de gas</a:t>
-            </a:r>
-          </a:p>
-        </p:txBody>
-      </p:sp>
-      <p:sp>
-        <p:nvSpPr>
-          <p:cNvPr id="7" name="TextBox 6"/>
+              <a:t>Cortatiro y evacuación asistida</a:t>
+            </a:r>
+          </a:p>
+        </p:txBody>
+      </p:sp>
+      <p:sp>
+        <p:nvSpPr>
+          <p:cNvPr id="7" name="Rounded Rectangle 6"/>
+          <p:cNvSpPr/>
+          <p:nvPr/>
+        </p:nvSpPr>
+        <p:spPr>
+          <a:xfrm>
+            <a:off x="868680" y="1627632"/>
+            <a:ext cx="2011680" cy="73152"/>
+          </a:xfrm>
+          <a:prstGeom prst="roundRect">
+            <a:avLst/>
+          </a:prstGeom>
+          <a:solidFill>
+            <a:srgbClr val="E8801A"/>
+          </a:solidFill>
+          <a:ln>
+            <a:noFill/>
+          </a:ln>
+          <a:effectLst/>
+        </p:spPr>
+        <p:style>
+          <a:lnRef idx="1">
+            <a:schemeClr val="accent1"/>
+          </a:lnRef>
+          <a:fillRef idx="3">
+            <a:schemeClr val="accent1"/>
+          </a:fillRef>
+          <a:effectRef idx="2">
+            <a:schemeClr val="accent1"/>
+          </a:effectRef>
+          <a:fontRef idx="minor">
+            <a:schemeClr val="lt1"/>
+          </a:fontRef>
+        </p:style>
+        <p:txBody>
+          <a:bodyPr rtlCol="0" anchor="ctr"/>
+          <a:lstStyle/>
+          <a:p>
+            <a:pPr algn="ctr"/>
+          </a:p>
+        </p:txBody>
+      </p:sp>
+      <p:sp>
+        <p:nvSpPr>
+          <p:cNvPr id="8" name="TextBox 7"/>
           <p:cNvSpPr txBox="1"/>
           <p:nvPr/>
         </p:nvSpPr>
         <p:spPr>
           <a:xfrm>
-            <a:off x="822960" y="1920240"/>
+            <a:off x="822960" y="1965960"/>
             <a:ext cx="4983480" cy="4206240"/>
           </a:xfrm>
           <a:prstGeom prst="rect">
@@ -7761,17 +8180,17 @@
           <a:p>
             <a:pPr>
               <a:spcAft>
-                <a:spcPts val="1000"/>
+                <a:spcPts val="1100"/>
               </a:spcAft>
             </a:pPr>
             <a:r>
               <a:rPr sz="1600" b="1" i="0">
                 <a:solidFill>
-                  <a:srgbClr val="2E3A80"/>
-                </a:solidFill>
-                <a:latin typeface="Montserrat"/>
-              </a:rPr>
-              <a:t>•  </a:t>
+                  <a:srgbClr val="E8801A"/>
+                </a:solidFill>
+                <a:latin typeface="Montserrat"/>
+              </a:rPr>
+              <a:t>▸  </a:t>
             </a:r>
             <a:r>
               <a:rPr sz="1600" b="0" i="0">
@@ -7780,23 +8199,23 @@
                 </a:solidFill>
                 <a:latin typeface="Montserrat"/>
               </a:rPr>
-              <a:t>Detector de gas: avisa por concentración</a:t>
+              <a:t>Cortatiro: estabiliza el tiro (tipo B)</a:t>
             </a:r>
           </a:p>
           <a:p>
             <a:pPr>
               <a:spcAft>
-                <a:spcPts val="1000"/>
+                <a:spcPts val="1100"/>
               </a:spcAft>
             </a:pPr>
             <a:r>
               <a:rPr sz="1600" b="1" i="0">
                 <a:solidFill>
-                  <a:srgbClr val="2E3A80"/>
-                </a:solidFill>
-                <a:latin typeface="Montserrat"/>
-              </a:rPr>
-              <a:t>•  </a:t>
+                  <a:srgbClr val="E8801A"/>
+                </a:solidFill>
+                <a:latin typeface="Montserrat"/>
+              </a:rPr>
+              <a:t>▸  </a:t>
             </a:r>
             <a:r>
               <a:rPr sz="1600" b="0" i="0">
@@ -7805,23 +8224,23 @@
                 </a:solidFill>
                 <a:latin typeface="Montserrat"/>
               </a:rPr>
-              <a:t>Corte automático: normalmente cerrado</a:t>
+              <a:t>Control de evacuación: para si hay revoco</a:t>
             </a:r>
           </a:p>
           <a:p>
             <a:pPr>
               <a:spcAft>
-                <a:spcPts val="1000"/>
+                <a:spcPts val="1100"/>
               </a:spcAft>
             </a:pPr>
             <a:r>
               <a:rPr sz="1600" b="1" i="0">
                 <a:solidFill>
-                  <a:srgbClr val="2E3A80"/>
-                </a:solidFill>
-                <a:latin typeface="Montserrat"/>
-              </a:rPr>
-              <a:t>•  </a:t>
+                  <a:srgbClr val="E8801A"/>
+                </a:solidFill>
+                <a:latin typeface="Montserrat"/>
+              </a:rPr>
+              <a:t>▸  </a:t>
             </a:r>
             <a:r>
               <a:rPr sz="1600" b="0" i="0">
@@ -7830,23 +8249,23 @@
                 </a:solidFill>
                 <a:latin typeface="Montserrat"/>
               </a:rPr>
-              <a:t>Rearme siempre manual</a:t>
+              <a:t>Ayuda a la evacuación: ventilador que empuja</a:t>
             </a:r>
           </a:p>
           <a:p>
             <a:pPr>
               <a:spcAft>
-                <a:spcPts val="1000"/>
+                <a:spcPts val="1100"/>
               </a:spcAft>
             </a:pPr>
             <a:r>
               <a:rPr sz="1600" b="1" i="0">
                 <a:solidFill>
-                  <a:srgbClr val="2E3A80"/>
-                </a:solidFill>
-                <a:latin typeface="Montserrat"/>
-              </a:rPr>
-              <a:t>•  </a:t>
+                  <a:srgbClr val="E8801A"/>
+                </a:solidFill>
+                <a:latin typeface="Montserrat"/>
+              </a:rPr>
+              <a:t>▸  </a:t>
             </a:r>
             <a:r>
               <a:rPr sz="1600" b="0" i="0">
@@ -7855,14 +8274,14 @@
                 </a:solidFill>
                 <a:latin typeface="Montserrat"/>
               </a:rPr>
-              <a:t>Emplazamiento peligroso: puede haber explosivo</a:t>
-            </a:r>
-          </a:p>
-        </p:txBody>
-      </p:sp>
-      <p:sp>
-        <p:nvSpPr>
-          <p:cNvPr id="8" name="imgph" descr="IMGQ:gas leak detector mounted on wall"/>
+              <a:t>Uno vigila y corta; otro empuja</a:t>
+            </a:r>
+          </a:p>
+        </p:txBody>
+      </p:sp>
+      <p:sp>
+        <p:nvSpPr>
+          <p:cNvPr id="9" name="imgph" descr="IMGQ:draught diverter on gas water heater"/>
           <p:cNvSpPr/>
           <p:nvPr/>
         </p:nvSpPr>
@@ -7908,7 +8327,7 @@
       </p:sp>
       <p:sp>
         <p:nvSpPr>
-          <p:cNvPr id="9" name="TextBox 8"/>
+          <p:cNvPr id="10" name="TextBox 9"/>
           <p:cNvSpPr txBox="1"/>
           <p:nvPr/>
         </p:nvSpPr>
@@ -7948,7 +8367,7 @@
                 </a:solidFill>
                 <a:latin typeface="Montserrat"/>
               </a:rPr>
-              <a:t>gas leak detector mounted on wall</a:t>
+              <a:t>draught diverter on gas water heater</a:t>
             </a:r>
           </a:p>
         </p:txBody>
@@ -8045,7 +8464,7 @@
                 </a:solidFill>
                 <a:latin typeface="Montserrat"/>
               </a:rPr>
-              <a:t>017 / 019</a:t>
+              <a:t>017 / 020</a:t>
             </a:r>
           </a:p>
         </p:txBody>
@@ -8093,7 +8512,7 @@
         <p:spPr>
           <a:xfrm>
             <a:off x="822960" y="457200"/>
-            <a:ext cx="8229600" cy="365760"/>
+            <a:ext cx="10058400" cy="365760"/>
           </a:xfrm>
           <a:prstGeom prst="rect">
             <a:avLst/>
@@ -8107,13 +8526,13 @@
           <a:lstStyle/>
           <a:p>
             <a:r>
-              <a:rPr sz="1200" b="1" i="0">
-                <a:solidFill>
-                  <a:srgbClr val="64748B"/>
-                </a:solidFill>
-                <a:latin typeface="Montserrat"/>
-              </a:rPr>
-              <a:t>TÉRMINOS 3.52 A 3.55</a:t>
+              <a:rPr sz="1300" b="1" i="0">
+                <a:solidFill>
+                  <a:srgbClr val="E8801A"/>
+                </a:solidFill>
+                <a:latin typeface="Montserrat"/>
+              </a:rPr>
+              <a:t>TÉRMINOS 3.38 A 3.47</a:t>
             </a:r>
           </a:p>
         </p:txBody>
@@ -8141,26 +8560,70 @@
           <a:lstStyle/>
           <a:p>
             <a:r>
-              <a:rPr sz="2700" b="1" i="0">
+              <a:rPr sz="2800" b="1" i="0">
                 <a:solidFill>
                   <a:srgbClr val="1E2761"/>
                 </a:solidFill>
                 <a:latin typeface="Montserrat"/>
               </a:rPr>
-              <a:t>Las tres familias de gas</a:t>
-            </a:r>
-          </a:p>
-        </p:txBody>
-      </p:sp>
-      <p:sp>
-        <p:nvSpPr>
-          <p:cNvPr id="7" name="TextBox 6"/>
+              <a:t>Detectores y corte de gas</a:t>
+            </a:r>
+          </a:p>
+        </p:txBody>
+      </p:sp>
+      <p:sp>
+        <p:nvSpPr>
+          <p:cNvPr id="7" name="Rounded Rectangle 6"/>
+          <p:cNvSpPr/>
+          <p:nvPr/>
+        </p:nvSpPr>
+        <p:spPr>
+          <a:xfrm>
+            <a:off x="868680" y="1627632"/>
+            <a:ext cx="2011680" cy="73152"/>
+          </a:xfrm>
+          <a:prstGeom prst="roundRect">
+            <a:avLst/>
+          </a:prstGeom>
+          <a:solidFill>
+            <a:srgbClr val="E8801A"/>
+          </a:solidFill>
+          <a:ln>
+            <a:noFill/>
+          </a:ln>
+          <a:effectLst/>
+        </p:spPr>
+        <p:style>
+          <a:lnRef idx="1">
+            <a:schemeClr val="accent1"/>
+          </a:lnRef>
+          <a:fillRef idx="3">
+            <a:schemeClr val="accent1"/>
+          </a:fillRef>
+          <a:effectRef idx="2">
+            <a:schemeClr val="accent1"/>
+          </a:effectRef>
+          <a:fontRef idx="minor">
+            <a:schemeClr val="lt1"/>
+          </a:fontRef>
+        </p:style>
+        <p:txBody>
+          <a:bodyPr rtlCol="0" anchor="ctr"/>
+          <a:lstStyle/>
+          <a:p>
+            <a:pPr algn="ctr"/>
+          </a:p>
+        </p:txBody>
+      </p:sp>
+      <p:sp>
+        <p:nvSpPr>
+          <p:cNvPr id="8" name="TextBox 7"/>
           <p:cNvSpPr txBox="1"/>
           <p:nvPr/>
         </p:nvSpPr>
         <p:spPr>
           <a:xfrm>
-            <a:off x="822960" y="1920240"/>
+            <a:off x="822960" y="1965960"/>
             <a:ext cx="4983480" cy="4206240"/>
           </a:xfrm>
           <a:prstGeom prst="rect">
@@ -8176,17 +8639,17 @@
           <a:p>
             <a:pPr>
               <a:spcAft>
-                <a:spcPts val="1000"/>
+                <a:spcPts val="1100"/>
               </a:spcAft>
             </a:pPr>
             <a:r>
               <a:rPr sz="1600" b="1" i="0">
                 <a:solidFill>
-                  <a:srgbClr val="2E3A80"/>
-                </a:solidFill>
-                <a:latin typeface="Montserrat"/>
-              </a:rPr>
-              <a:t>•  </a:t>
+                  <a:srgbClr val="E8801A"/>
+                </a:solidFill>
+                <a:latin typeface="Montserrat"/>
+              </a:rPr>
+              <a:t>▸  </a:t>
             </a:r>
             <a:r>
               <a:rPr sz="1600" b="0" i="0">
@@ -8195,23 +8658,23 @@
                 </a:solidFill>
                 <a:latin typeface="Montserrat"/>
               </a:rPr>
-              <a:t>Wobbe: poder calorífico ÷ √densidad</a:t>
+              <a:t>Detector de gas: avisa por concentración</a:t>
             </a:r>
           </a:p>
           <a:p>
             <a:pPr>
               <a:spcAft>
-                <a:spcPts val="1000"/>
+                <a:spcPts val="1100"/>
               </a:spcAft>
             </a:pPr>
             <a:r>
               <a:rPr sz="1600" b="1" i="0">
                 <a:solidFill>
-                  <a:srgbClr val="2E3A80"/>
-                </a:solidFill>
-                <a:latin typeface="Montserrat"/>
-              </a:rPr>
-              <a:t>•  </a:t>
+                  <a:srgbClr val="E8801A"/>
+                </a:solidFill>
+                <a:latin typeface="Montserrat"/>
+              </a:rPr>
+              <a:t>▸  </a:t>
             </a:r>
             <a:r>
               <a:rPr sz="1600" b="0" i="0">
@@ -8220,23 +8683,23 @@
                 </a:solidFill>
                 <a:latin typeface="Montserrat"/>
               </a:rPr>
-              <a:t>1ª familia: Ws 22,4 a 24,8</a:t>
+              <a:t>Corte automático: normalmente cerrado</a:t>
             </a:r>
           </a:p>
           <a:p>
             <a:pPr>
               <a:spcAft>
-                <a:spcPts val="1000"/>
+                <a:spcPts val="1100"/>
               </a:spcAft>
             </a:pPr>
             <a:r>
               <a:rPr sz="1600" b="1" i="0">
                 <a:solidFill>
-                  <a:srgbClr val="2E3A80"/>
-                </a:solidFill>
-                <a:latin typeface="Montserrat"/>
-              </a:rPr>
-              <a:t>•  </a:t>
+                  <a:srgbClr val="E8801A"/>
+                </a:solidFill>
+                <a:latin typeface="Montserrat"/>
+              </a:rPr>
+              <a:t>▸  </a:t>
             </a:r>
             <a:r>
               <a:rPr sz="1600" b="0" i="0">
@@ -8245,23 +8708,23 @@
                 </a:solidFill>
                 <a:latin typeface="Montserrat"/>
               </a:rPr>
-              <a:t>2ª familia (gas natural): 39,1 a 54,7</a:t>
+              <a:t>Rearme siempre manual</a:t>
             </a:r>
           </a:p>
           <a:p>
             <a:pPr>
               <a:spcAft>
-                <a:spcPts val="1000"/>
+                <a:spcPts val="1100"/>
               </a:spcAft>
             </a:pPr>
             <a:r>
               <a:rPr sz="1600" b="1" i="0">
                 <a:solidFill>
-                  <a:srgbClr val="2E3A80"/>
-                </a:solidFill>
-                <a:latin typeface="Montserrat"/>
-              </a:rPr>
-              <a:t>•  </a:t>
+                  <a:srgbClr val="E8801A"/>
+                </a:solidFill>
+                <a:latin typeface="Montserrat"/>
+              </a:rPr>
+              <a:t>▸  </a:t>
             </a:r>
             <a:r>
               <a:rPr sz="1600" b="0" i="0">
@@ -8270,14 +8733,14 @@
                 </a:solidFill>
                 <a:latin typeface="Montserrat"/>
               </a:rPr>
-              <a:t>3ª familia (GLP): 72,9 a 87,3</a:t>
-            </a:r>
-          </a:p>
-        </p:txBody>
-      </p:sp>
-      <p:sp>
-        <p:nvSpPr>
-          <p:cNvPr id="8" name="imgph" descr="IMGQ:blue and orange gas burner flame comparison"/>
+              <a:t>Emplazamiento peligroso: puede haber explosivo</a:t>
+            </a:r>
+          </a:p>
+        </p:txBody>
+      </p:sp>
+      <p:sp>
+        <p:nvSpPr>
+          <p:cNvPr id="9" name="imgph" descr="IMGQ:gas leak detector mounted on wall"/>
           <p:cNvSpPr/>
           <p:nvPr/>
         </p:nvSpPr>
@@ -8323,7 +8786,7 @@
       </p:sp>
       <p:sp>
         <p:nvSpPr>
-          <p:cNvPr id="9" name="TextBox 8"/>
+          <p:cNvPr id="10" name="TextBox 9"/>
           <p:cNvSpPr txBox="1"/>
           <p:nvPr/>
         </p:nvSpPr>
@@ -8363,7 +8826,7 @@
                 </a:solidFill>
                 <a:latin typeface="Montserrat"/>
               </a:rPr>
-              <a:t>blue and orange gas burner flame comparison</a:t>
+              <a:t>gas leak detector mounted on wall</a:t>
             </a:r>
           </a:p>
         </p:txBody>
@@ -8460,7 +8923,7 @@
                 </a:solidFill>
                 <a:latin typeface="Montserrat"/>
               </a:rPr>
-              <a:t>018 / 019</a:t>
+              <a:t>018 / 020</a:t>
             </a:r>
           </a:p>
         </p:txBody>
@@ -8508,7 +8971,7 @@
         <p:spPr>
           <a:xfrm>
             <a:off x="822960" y="457200"/>
-            <a:ext cx="8229600" cy="365760"/>
+            <a:ext cx="10058400" cy="365760"/>
           </a:xfrm>
           <a:prstGeom prst="rect">
             <a:avLst/>
@@ -8522,13 +8985,13 @@
           <a:lstStyle/>
           <a:p>
             <a:r>
-              <a:rPr sz="1200" b="1" i="0">
-                <a:solidFill>
-                  <a:srgbClr val="64748B"/>
-                </a:solidFill>
-                <a:latin typeface="Montserrat"/>
-              </a:rPr>
-              <a:t>TÉRMINOS 3.56 A 3.60</a:t>
+              <a:rPr sz="1300" b="1" i="0">
+                <a:solidFill>
+                  <a:srgbClr val="E8801A"/>
+                </a:solidFill>
+                <a:latin typeface="Montserrat"/>
+              </a:rPr>
+              <a:t>TÉRMINOS 3.52 A 3.55</a:t>
             </a:r>
           </a:p>
         </p:txBody>
@@ -8556,26 +9019,70 @@
           <a:lstStyle/>
           <a:p>
             <a:r>
-              <a:rPr sz="2700" b="1" i="0">
+              <a:rPr sz="2800" b="1" i="0">
                 <a:solidFill>
                   <a:srgbClr val="1E2761"/>
                 </a:solidFill>
                 <a:latin typeface="Montserrat"/>
               </a:rPr>
-              <a:t>Común, individual y receptora</a:t>
-            </a:r>
-          </a:p>
-        </p:txBody>
-      </p:sp>
-      <p:sp>
-        <p:nvSpPr>
-          <p:cNvPr id="7" name="TextBox 6"/>
+              <a:t>Las tres familias de gas</a:t>
+            </a:r>
+          </a:p>
+        </p:txBody>
+      </p:sp>
+      <p:sp>
+        <p:nvSpPr>
+          <p:cNvPr id="7" name="Rounded Rectangle 6"/>
+          <p:cNvSpPr/>
+          <p:nvPr/>
+        </p:nvSpPr>
+        <p:spPr>
+          <a:xfrm>
+            <a:off x="868680" y="1627632"/>
+            <a:ext cx="2011680" cy="73152"/>
+          </a:xfrm>
+          <a:prstGeom prst="roundRect">
+            <a:avLst/>
+          </a:prstGeom>
+          <a:solidFill>
+            <a:srgbClr val="E8801A"/>
+          </a:solidFill>
+          <a:ln>
+            <a:noFill/>
+          </a:ln>
+          <a:effectLst/>
+        </p:spPr>
+        <p:style>
+          <a:lnRef idx="1">
+            <a:schemeClr val="accent1"/>
+          </a:lnRef>
+          <a:fillRef idx="3">
+            <a:schemeClr val="accent1"/>
+          </a:fillRef>
+          <a:effectRef idx="2">
+            <a:schemeClr val="accent1"/>
+          </a:effectRef>
+          <a:fontRef idx="minor">
+            <a:schemeClr val="lt1"/>
+          </a:fontRef>
+        </p:style>
+        <p:txBody>
+          <a:bodyPr rtlCol="0" anchor="ctr"/>
+          <a:lstStyle/>
+          <a:p>
+            <a:pPr algn="ctr"/>
+          </a:p>
+        </p:txBody>
+      </p:sp>
+      <p:sp>
+        <p:nvSpPr>
+          <p:cNvPr id="8" name="TextBox 7"/>
           <p:cNvSpPr txBox="1"/>
           <p:nvPr/>
         </p:nvSpPr>
         <p:spPr>
           <a:xfrm>
-            <a:off x="822960" y="1920240"/>
+            <a:off x="822960" y="1965960"/>
             <a:ext cx="4983480" cy="4206240"/>
           </a:xfrm>
           <a:prstGeom prst="rect">
@@ -8591,17 +9098,17 @@
           <a:p>
             <a:pPr>
               <a:spcAft>
-                <a:spcPts val="1000"/>
+                <a:spcPts val="1100"/>
               </a:spcAft>
             </a:pPr>
             <a:r>
               <a:rPr sz="1600" b="1" i="0">
                 <a:solidFill>
-                  <a:srgbClr val="2E3A80"/>
-                </a:solidFill>
-                <a:latin typeface="Montserrat"/>
-              </a:rPr>
-              <a:t>•  </a:t>
+                  <a:srgbClr val="E8801A"/>
+                </a:solidFill>
+                <a:latin typeface="Montserrat"/>
+              </a:rPr>
+              <a:t>▸  </a:t>
             </a:r>
             <a:r>
               <a:rPr sz="1600" b="0" i="0">
@@ -8610,23 +9117,23 @@
                 </a:solidFill>
                 <a:latin typeface="Montserrat"/>
               </a:rPr>
-              <a:t>Común: de la llave de edificio a las de usuario</a:t>
+              <a:t>Wobbe: poder calorífico ÷ √densidad</a:t>
             </a:r>
           </a:p>
           <a:p>
             <a:pPr>
               <a:spcAft>
-                <a:spcPts val="1000"/>
+                <a:spcPts val="1100"/>
               </a:spcAft>
             </a:pPr>
             <a:r>
               <a:rPr sz="1600" b="1" i="0">
                 <a:solidFill>
-                  <a:srgbClr val="2E3A80"/>
-                </a:solidFill>
-                <a:latin typeface="Montserrat"/>
-              </a:rPr>
-              <a:t>•  </a:t>
+                  <a:srgbClr val="E8801A"/>
+                </a:solidFill>
+                <a:latin typeface="Montserrat"/>
+              </a:rPr>
+              <a:t>▸  </a:t>
             </a:r>
             <a:r>
               <a:rPr sz="1600" b="0" i="0">
@@ -8635,23 +9142,23 @@
                 </a:solidFill>
                 <a:latin typeface="Montserrat"/>
               </a:rPr>
-              <a:t>Individual: de la llave de usuario al aparato</a:t>
+              <a:t>1ª familia: Ws 22,4 a 24,8</a:t>
             </a:r>
           </a:p>
           <a:p>
             <a:pPr>
               <a:spcAft>
-                <a:spcPts val="1000"/>
+                <a:spcPts val="1100"/>
               </a:spcAft>
             </a:pPr>
             <a:r>
               <a:rPr sz="1600" b="1" i="0">
                 <a:solidFill>
-                  <a:srgbClr val="2E3A80"/>
-                </a:solidFill>
-                <a:latin typeface="Montserrat"/>
-              </a:rPr>
-              <a:t>•  </a:t>
+                  <a:srgbClr val="E8801A"/>
+                </a:solidFill>
+                <a:latin typeface="Montserrat"/>
+              </a:rPr>
+              <a:t>▸  </a:t>
             </a:r>
             <a:r>
               <a:rPr sz="1600" b="0" i="0">
@@ -8660,23 +9167,23 @@
                 </a:solidFill>
                 <a:latin typeface="Montserrat"/>
               </a:rPr>
-              <a:t>Receptora: de la acometida al aparato</a:t>
+              <a:t>2ª familia (gas natural): 39,1 a 54,7</a:t>
             </a:r>
           </a:p>
           <a:p>
             <a:pPr>
               <a:spcAft>
-                <a:spcPts val="1000"/>
+                <a:spcPts val="1100"/>
               </a:spcAft>
             </a:pPr>
             <a:r>
               <a:rPr sz="1600" b="1" i="0">
                 <a:solidFill>
-                  <a:srgbClr val="2E3A80"/>
-                </a:solidFill>
-                <a:latin typeface="Montserrat"/>
-              </a:rPr>
-              <a:t>•  </a:t>
+                  <a:srgbClr val="E8801A"/>
+                </a:solidFill>
+                <a:latin typeface="Montserrat"/>
+              </a:rPr>
+              <a:t>▸  </a:t>
             </a:r>
             <a:r>
               <a:rPr sz="1600" b="0" i="0">
@@ -8685,14 +9192,14 @@
                 </a:solidFill>
                 <a:latin typeface="Montserrat"/>
               </a:rPr>
-              <a:t>Intemperie: a cielo descubierto</a:t>
-            </a:r>
-          </a:p>
-        </p:txBody>
-      </p:sp>
-      <p:sp>
-        <p:nvSpPr>
-          <p:cNvPr id="8" name="imgph" descr="IMGQ:gas riser pipe in apartment stairwell"/>
+              <a:t>3ª familia (GLP): 72,9 a 87,3</a:t>
+            </a:r>
+          </a:p>
+        </p:txBody>
+      </p:sp>
+      <p:sp>
+        <p:nvSpPr>
+          <p:cNvPr id="9" name="imgph" descr="IMGQ:blue and orange gas burner flame comparison"/>
           <p:cNvSpPr/>
           <p:nvPr/>
         </p:nvSpPr>
@@ -8738,7 +9245,7 @@
       </p:sp>
       <p:sp>
         <p:nvSpPr>
-          <p:cNvPr id="9" name="TextBox 8"/>
+          <p:cNvPr id="10" name="TextBox 9"/>
           <p:cNvSpPr txBox="1"/>
           <p:nvPr/>
         </p:nvSpPr>
@@ -8778,7 +9285,7 @@
                 </a:solidFill>
                 <a:latin typeface="Montserrat"/>
               </a:rPr>
-              <a:t>gas riser pipe in apartment stairwell</a:t>
+              <a:t>blue and orange gas burner flame comparison</a:t>
             </a:r>
           </a:p>
         </p:txBody>
@@ -8816,7 +9323,7 @@
             <a:avLst/>
           </a:prstGeom>
           <a:solidFill>
-            <a:srgbClr val="1E2761"/>
+            <a:srgbClr val="FFFFFF"/>
           </a:solidFill>
           <a:ln>
             <a:noFill/>
@@ -8853,8 +9360,8 @@
         </p:nvSpPr>
         <p:spPr>
           <a:xfrm>
-            <a:off x="822960" y="640080"/>
-            <a:ext cx="10515600" cy="457200"/>
+            <a:off x="10607040" y="320040"/>
+            <a:ext cx="1371600" cy="365760"/>
           </a:xfrm>
           <a:prstGeom prst="rect">
             <a:avLst/>
@@ -8867,14 +9374,15 @@
           </a:bodyPr>
           <a:lstStyle/>
           <a:p>
-            <a:r>
-              <a:rPr sz="1400" b="1" i="0">
-                <a:solidFill>
-                  <a:srgbClr val="CADCFC"/>
-                </a:solidFill>
-                <a:latin typeface="Montserrat"/>
-              </a:rPr>
-              <a:t>LO QUE YA DOMINAS</a:t>
+            <a:pPr algn="r"/>
+            <a:r>
+              <a:rPr sz="1000" b="1" i="0">
+                <a:solidFill>
+                  <a:srgbClr val="64748B"/>
+                </a:solidFill>
+                <a:latin typeface="Montserrat"/>
+              </a:rPr>
+              <a:t>019 / 020</a:t>
             </a:r>
           </a:p>
         </p:txBody>
@@ -8887,8 +9395,8 @@
         </p:nvSpPr>
         <p:spPr>
           <a:xfrm>
-            <a:off x="822960" y="1143000"/>
-            <a:ext cx="10515600" cy="1097280"/>
+            <a:off x="457200" y="6419088"/>
+            <a:ext cx="8229600" cy="365760"/>
           </a:xfrm>
           <a:prstGeom prst="rect">
             <a:avLst/>
@@ -8902,13 +9410,13 @@
           <a:lstStyle/>
           <a:p>
             <a:r>
-              <a:rPr sz="3400" b="1" i="0">
-                <a:solidFill>
-                  <a:srgbClr val="FFFFFF"/>
-                </a:solidFill>
-                <a:latin typeface="Montserrat"/>
-              </a:rPr>
-              <a:t>Ya hablas el idioma de la norma</a:t>
+              <a:rPr sz="900" b="0" i="0">
+                <a:solidFill>
+                  <a:srgbClr val="64748B"/>
+                </a:solidFill>
+                <a:latin typeface="Montserrat"/>
+              </a:rPr>
+              <a:t>Curso Gas B · Tema 09 · UNE 60670-1 y -2</a:t>
             </a:r>
           </a:p>
         </p:txBody>
@@ -8921,8 +9429,8 @@
         </p:nvSpPr>
         <p:spPr>
           <a:xfrm>
-            <a:off x="822960" y="2514600"/>
-            <a:ext cx="10515600" cy="2834640"/>
+            <a:off x="822960" y="457200"/>
+            <a:ext cx="10058400" cy="365760"/>
           </a:xfrm>
           <a:prstGeom prst="rect">
             <a:avLst/>
@@ -8935,123 +9443,68 @@
           </a:bodyPr>
           <a:lstStyle/>
           <a:p>
-            <a:pPr>
-              <a:spcAft>
-                <a:spcPts val="1200"/>
-              </a:spcAft>
-            </a:pPr>
-            <a:r>
-              <a:rPr sz="2000" b="1" i="0">
-                <a:solidFill>
-                  <a:srgbClr val="CADCFC"/>
-                </a:solidFill>
-                <a:latin typeface="Montserrat"/>
-              </a:rPr>
-              <a:t>✓  </a:t>
-            </a:r>
-            <a:r>
-              <a:rPr sz="1900" b="0" i="0">
-                <a:solidFill>
-                  <a:srgbClr val="FFFFFF"/>
-                </a:solidFill>
-                <a:latin typeface="Montserrat"/>
-              </a:rPr>
-              <a:t>Tipos A, B y C: ventilación y CO</a:t>
-            </a:r>
-          </a:p>
-          <a:p>
-            <a:pPr>
-              <a:spcAft>
-                <a:spcPts val="1200"/>
-              </a:spcAft>
-            </a:pPr>
-            <a:r>
-              <a:rPr sz="2000" b="1" i="0">
-                <a:solidFill>
-                  <a:srgbClr val="CADCFC"/>
-                </a:solidFill>
-                <a:latin typeface="Montserrat"/>
-              </a:rPr>
-              <a:t>✓  </a:t>
-            </a:r>
-            <a:r>
-              <a:rPr sz="1900" b="0" i="0">
-                <a:solidFill>
-                  <a:srgbClr val="FFFFFF"/>
-                </a:solidFill>
-                <a:latin typeface="Montserrat"/>
-              </a:rPr>
-              <a:t>Accesibilidad 1, 2 y 3 para el mantenimiento</a:t>
-            </a:r>
-          </a:p>
-          <a:p>
-            <a:pPr>
-              <a:spcAft>
-                <a:spcPts val="1200"/>
-              </a:spcAft>
-            </a:pPr>
-            <a:r>
-              <a:rPr sz="2000" b="1" i="0">
-                <a:solidFill>
-                  <a:srgbClr val="CADCFC"/>
-                </a:solidFill>
-                <a:latin typeface="Montserrat"/>
-              </a:rPr>
-              <a:t>✓  </a:t>
-            </a:r>
-            <a:r>
-              <a:rPr sz="1900" b="0" i="0">
-                <a:solidFill>
-                  <a:srgbClr val="FFFFFF"/>
-                </a:solidFill>
-                <a:latin typeface="Montserrat"/>
-              </a:rPr>
-              <a:t>Familias de gas por índice de Wobbe</a:t>
-            </a:r>
-          </a:p>
-          <a:p>
-            <a:pPr>
-              <a:spcAft>
-                <a:spcPts val="1200"/>
-              </a:spcAft>
-            </a:pPr>
-            <a:r>
-              <a:rPr sz="2000" b="1" i="0">
-                <a:solidFill>
-                  <a:srgbClr val="CADCFC"/>
-                </a:solidFill>
-                <a:latin typeface="Montserrat"/>
-              </a:rPr>
-              <a:t>✓  </a:t>
-            </a:r>
-            <a:r>
-              <a:rPr sz="1900" b="0" i="0">
-                <a:solidFill>
-                  <a:srgbClr val="FFFFFF"/>
-                </a:solidFill>
-                <a:latin typeface="Montserrat"/>
-              </a:rPr>
-              <a:t>Límites excluida/incluida: qué firmas y quién responde</a:t>
-            </a:r>
-          </a:p>
-        </p:txBody>
-      </p:sp>
-      <p:sp>
-        <p:nvSpPr>
-          <p:cNvPr id="6" name="Rounded Rectangle 5"/>
+            <a:r>
+              <a:rPr sz="1300" b="1" i="0">
+                <a:solidFill>
+                  <a:srgbClr val="E8801A"/>
+                </a:solidFill>
+                <a:latin typeface="Montserrat"/>
+              </a:rPr>
+              <a:t>TÉRMINOS 3.56 A 3.60</a:t>
+            </a:r>
+          </a:p>
+        </p:txBody>
+      </p:sp>
+      <p:sp>
+        <p:nvSpPr>
+          <p:cNvPr id="6" name="TextBox 5"/>
+          <p:cNvSpPr txBox="1"/>
+          <p:nvPr/>
+        </p:nvSpPr>
+        <p:spPr>
+          <a:xfrm>
+            <a:off x="822960" y="868680"/>
+            <a:ext cx="10515600" cy="914400"/>
+          </a:xfrm>
+          <a:prstGeom prst="rect">
+            <a:avLst/>
+          </a:prstGeom>
+          <a:noFill/>
+        </p:spPr>
+        <p:txBody>
+          <a:bodyPr wrap="square">
+            <a:spAutoFit/>
+          </a:bodyPr>
+          <a:lstStyle/>
+          <a:p>
+            <a:r>
+              <a:rPr sz="2800" b="1" i="0">
+                <a:solidFill>
+                  <a:srgbClr val="1E2761"/>
+                </a:solidFill>
+                <a:latin typeface="Montserrat"/>
+              </a:rPr>
+              <a:t>Común, individual y receptora</a:t>
+            </a:r>
+          </a:p>
+        </p:txBody>
+      </p:sp>
+      <p:sp>
+        <p:nvSpPr>
+          <p:cNvPr id="7" name="Rounded Rectangle 6"/>
           <p:cNvSpPr/>
           <p:nvPr/>
         </p:nvSpPr>
         <p:spPr>
           <a:xfrm>
-            <a:off x="822960" y="5532120"/>
-            <a:ext cx="10515600" cy="777240"/>
+            <a:off x="868680" y="1627632"/>
+            <a:ext cx="2011680" cy="73152"/>
           </a:xfrm>
           <a:prstGeom prst="roundRect">
             <a:avLst/>
           </a:prstGeom>
           <a:solidFill>
-            <a:srgbClr val="2E3A80"/>
+            <a:srgbClr val="E8801A"/>
           </a:solidFill>
           <a:ln>
             <a:noFill/>
@@ -9082,14 +9535,14 @@
       </p:sp>
       <p:sp>
         <p:nvSpPr>
-          <p:cNvPr id="7" name="TextBox 6"/>
+          <p:cNvPr id="8" name="TextBox 7"/>
           <p:cNvSpPr txBox="1"/>
           <p:nvPr/>
         </p:nvSpPr>
         <p:spPr>
           <a:xfrm>
-            <a:off x="1051560" y="5605272"/>
-            <a:ext cx="10058400" cy="640080"/>
+            <a:off x="822960" y="1965960"/>
+            <a:ext cx="4983480" cy="4206240"/>
           </a:xfrm>
           <a:prstGeom prst="rect">
             <a:avLst/>
@@ -9102,14 +9555,196 @@
           </a:bodyPr>
           <a:lstStyle/>
           <a:p>
-            <a:r>
-              <a:rPr sz="1500" b="1" i="1">
-                <a:solidFill>
-                  <a:srgbClr val="CADCFC"/>
-                </a:solidFill>
-                <a:latin typeface="Montserrat"/>
-              </a:rPr>
-              <a:t>Media exposición del examen, cazada. Nos queda la mitad más técnica.</a:t>
+            <a:pPr>
+              <a:spcAft>
+                <a:spcPts val="1100"/>
+              </a:spcAft>
+            </a:pPr>
+            <a:r>
+              <a:rPr sz="1600" b="1" i="0">
+                <a:solidFill>
+                  <a:srgbClr val="E8801A"/>
+                </a:solidFill>
+                <a:latin typeface="Montserrat"/>
+              </a:rPr>
+              <a:t>▸  </a:t>
+            </a:r>
+            <a:r>
+              <a:rPr sz="1600" b="0" i="0">
+                <a:solidFill>
+                  <a:srgbClr val="1B2330"/>
+                </a:solidFill>
+                <a:latin typeface="Montserrat"/>
+              </a:rPr>
+              <a:t>Común: de la llave de edificio a las de usuario</a:t>
+            </a:r>
+          </a:p>
+          <a:p>
+            <a:pPr>
+              <a:spcAft>
+                <a:spcPts val="1100"/>
+              </a:spcAft>
+            </a:pPr>
+            <a:r>
+              <a:rPr sz="1600" b="1" i="0">
+                <a:solidFill>
+                  <a:srgbClr val="E8801A"/>
+                </a:solidFill>
+                <a:latin typeface="Montserrat"/>
+              </a:rPr>
+              <a:t>▸  </a:t>
+            </a:r>
+            <a:r>
+              <a:rPr sz="1600" b="0" i="0">
+                <a:solidFill>
+                  <a:srgbClr val="1B2330"/>
+                </a:solidFill>
+                <a:latin typeface="Montserrat"/>
+              </a:rPr>
+              <a:t>Individual: de la llave de usuario al aparato</a:t>
+            </a:r>
+          </a:p>
+          <a:p>
+            <a:pPr>
+              <a:spcAft>
+                <a:spcPts val="1100"/>
+              </a:spcAft>
+            </a:pPr>
+            <a:r>
+              <a:rPr sz="1600" b="1" i="0">
+                <a:solidFill>
+                  <a:srgbClr val="E8801A"/>
+                </a:solidFill>
+                <a:latin typeface="Montserrat"/>
+              </a:rPr>
+              <a:t>▸  </a:t>
+            </a:r>
+            <a:r>
+              <a:rPr sz="1600" b="0" i="0">
+                <a:solidFill>
+                  <a:srgbClr val="1B2330"/>
+                </a:solidFill>
+                <a:latin typeface="Montserrat"/>
+              </a:rPr>
+              <a:t>Receptora: de la acometida al aparato</a:t>
+            </a:r>
+          </a:p>
+          <a:p>
+            <a:pPr>
+              <a:spcAft>
+                <a:spcPts val="1100"/>
+              </a:spcAft>
+            </a:pPr>
+            <a:r>
+              <a:rPr sz="1600" b="1" i="0">
+                <a:solidFill>
+                  <a:srgbClr val="E8801A"/>
+                </a:solidFill>
+                <a:latin typeface="Montserrat"/>
+              </a:rPr>
+              <a:t>▸  </a:t>
+            </a:r>
+            <a:r>
+              <a:rPr sz="1600" b="0" i="0">
+                <a:solidFill>
+                  <a:srgbClr val="1B2330"/>
+                </a:solidFill>
+                <a:latin typeface="Montserrat"/>
+              </a:rPr>
+              <a:t>Intemperie: a cielo descubierto</a:t>
+            </a:r>
+          </a:p>
+        </p:txBody>
+      </p:sp>
+      <p:sp>
+        <p:nvSpPr>
+          <p:cNvPr id="9" name="imgph" descr="IMGQ:gas riser pipe in apartment stairwell"/>
+          <p:cNvSpPr/>
+          <p:nvPr/>
+        </p:nvSpPr>
+        <p:spPr>
+          <a:xfrm>
+            <a:off x="5806440" y="1051560"/>
+            <a:ext cx="5298947" cy="4629150"/>
+          </a:xfrm>
+          <a:prstGeom prst="roundRect">
+            <a:avLst/>
+          </a:prstGeom>
+          <a:solidFill>
+            <a:srgbClr val="F3F6FB"/>
+          </a:solidFill>
+          <a:ln w="12700">
+            <a:solidFill>
+              <a:srgbClr val="C7D2E6"/>
+            </a:solidFill>
+          </a:ln>
+          <a:effectLst/>
+        </p:spPr>
+        <p:style>
+          <a:lnRef idx="1">
+            <a:schemeClr val="accent1"/>
+          </a:lnRef>
+          <a:fillRef idx="3">
+            <a:schemeClr val="accent1"/>
+          </a:fillRef>
+          <a:effectRef idx="2">
+            <a:schemeClr val="accent1"/>
+          </a:effectRef>
+          <a:fontRef idx="minor">
+            <a:schemeClr val="lt1"/>
+          </a:fontRef>
+        </p:style>
+        <p:txBody>
+          <a:bodyPr rtlCol="0" anchor="ctr"/>
+          <a:lstStyle/>
+          <a:p>
+            <a:pPr algn="ctr"/>
+          </a:p>
+        </p:txBody>
+      </p:sp>
+      <p:sp>
+        <p:nvSpPr>
+          <p:cNvPr id="10" name="TextBox 9"/>
+          <p:cNvSpPr txBox="1"/>
+          <p:nvPr/>
+        </p:nvSpPr>
+        <p:spPr>
+          <a:xfrm>
+            <a:off x="6080760" y="2726055"/>
+            <a:ext cx="4750307" cy="1280160"/>
+          </a:xfrm>
+          <a:prstGeom prst="rect">
+            <a:avLst/>
+          </a:prstGeom>
+          <a:noFill/>
+        </p:spPr>
+        <p:txBody>
+          <a:bodyPr wrap="square">
+            <a:spAutoFit/>
+          </a:bodyPr>
+          <a:lstStyle/>
+          <a:p>
+            <a:pPr algn="ctr"/>
+            <a:r>
+              <a:rPr sz="1400" b="1" i="0">
+                <a:solidFill>
+                  <a:srgbClr val="64748B"/>
+                </a:solidFill>
+                <a:latin typeface="Montserrat"/>
+              </a:rPr>
+              <a:t>IMAGEN REALISTA</a:t>
+            </a:r>
+          </a:p>
+          <a:p>
+            <a:pPr algn="ctr"/>
+            <a:r>
+              <a:rPr sz="1100" b="0" i="1">
+                <a:solidFill>
+                  <a:srgbClr val="64748B"/>
+                </a:solidFill>
+                <a:latin typeface="Montserrat"/>
+              </a:rPr>
+              <a:t>gas riser pipe in apartment stairwell</a:t>
             </a:r>
           </a:p>
         </p:txBody>
@@ -9206,7 +9841,7 @@
                 </a:solidFill>
                 <a:latin typeface="Montserrat"/>
               </a:rPr>
-              <a:t>002 / 019</a:t>
+              <a:t>002 / 020</a:t>
             </a:r>
           </a:p>
         </p:txBody>
@@ -9270,7 +9905,7 @@
             <a:r>
               <a:rPr sz="2700" b="1" i="0">
                 <a:solidFill>
-                  <a:srgbClr val="1E2761"/>
+                  <a:srgbClr val="E8801A"/>
                 </a:solidFill>
                 <a:latin typeface="Montserrat"/>
               </a:rPr>
@@ -9282,6 +9917,50 @@
       <p:sp>
         <p:nvSpPr>
           <p:cNvPr id="6" name="Rounded Rectangle 5"/>
+          <p:cNvSpPr/>
+          <p:nvPr/>
+        </p:nvSpPr>
+        <p:spPr>
+          <a:xfrm>
+            <a:off x="868680" y="1234440"/>
+            <a:ext cx="1463040" cy="73152"/>
+          </a:xfrm>
+          <a:prstGeom prst="roundRect">
+            <a:avLst/>
+          </a:prstGeom>
+          <a:solidFill>
+            <a:srgbClr val="1E2761"/>
+          </a:solidFill>
+          <a:ln>
+            <a:noFill/>
+          </a:ln>
+          <a:effectLst/>
+        </p:spPr>
+        <p:style>
+          <a:lnRef idx="1">
+            <a:schemeClr val="accent1"/>
+          </a:lnRef>
+          <a:fillRef idx="3">
+            <a:schemeClr val="accent1"/>
+          </a:fillRef>
+          <a:effectRef idx="2">
+            <a:schemeClr val="accent1"/>
+          </a:effectRef>
+          <a:fontRef idx="minor">
+            <a:schemeClr val="lt1"/>
+          </a:fontRef>
+        </p:style>
+        <p:txBody>
+          <a:bodyPr rtlCol="0" anchor="ctr"/>
+          <a:lstStyle/>
+          <a:p>
+            <a:pPr algn="ctr"/>
+          </a:p>
+        </p:txBody>
+      </p:sp>
+      <p:sp>
+        <p:nvSpPr>
+          <p:cNvPr id="7" name="Rounded Rectangle 6"/>
           <p:cNvSpPr/>
           <p:nvPr/>
         </p:nvSpPr>
@@ -9327,7 +10006,7 @@
       </p:sp>
       <p:sp>
         <p:nvSpPr>
-          <p:cNvPr id="7" name="TextBox 6"/>
+          <p:cNvPr id="8" name="TextBox 7"/>
           <p:cNvSpPr txBox="1"/>
           <p:nvPr/>
         </p:nvSpPr>
@@ -9362,7 +10041,7 @@
       </p:sp>
       <p:sp>
         <p:nvSpPr>
-          <p:cNvPr id="8" name="TextBox 7"/>
+          <p:cNvPr id="9" name="TextBox 8"/>
           <p:cNvSpPr txBox="1"/>
           <p:nvPr/>
         </p:nvSpPr>
@@ -9397,7 +10076,7 @@
       </p:sp>
       <p:sp>
         <p:nvSpPr>
-          <p:cNvPr id="9" name="Rounded Rectangle 8"/>
+          <p:cNvPr id="10" name="Rounded Rectangle 9"/>
           <p:cNvSpPr/>
           <p:nvPr/>
         </p:nvSpPr>
@@ -9443,7 +10122,7 @@
       </p:sp>
       <p:sp>
         <p:nvSpPr>
-          <p:cNvPr id="10" name="TextBox 9"/>
+          <p:cNvPr id="11" name="TextBox 10"/>
           <p:cNvSpPr txBox="1"/>
           <p:nvPr/>
         </p:nvSpPr>
@@ -9478,7 +10157,7 @@
       </p:sp>
       <p:sp>
         <p:nvSpPr>
-          <p:cNvPr id="11" name="TextBox 10"/>
+          <p:cNvPr id="12" name="TextBox 11"/>
           <p:cNvSpPr txBox="1"/>
           <p:nvPr/>
         </p:nvSpPr>
@@ -9513,7 +10192,7 @@
       </p:sp>
       <p:sp>
         <p:nvSpPr>
-          <p:cNvPr id="12" name="Rounded Rectangle 11"/>
+          <p:cNvPr id="13" name="Rounded Rectangle 12"/>
           <p:cNvSpPr/>
           <p:nvPr/>
         </p:nvSpPr>
@@ -9559,7 +10238,7 @@
       </p:sp>
       <p:sp>
         <p:nvSpPr>
-          <p:cNvPr id="13" name="TextBox 12"/>
+          <p:cNvPr id="14" name="TextBox 13"/>
           <p:cNvSpPr txBox="1"/>
           <p:nvPr/>
         </p:nvSpPr>
@@ -9594,7 +10273,7 @@
       </p:sp>
       <p:sp>
         <p:nvSpPr>
-          <p:cNvPr id="14" name="TextBox 13"/>
+          <p:cNvPr id="15" name="TextBox 14"/>
           <p:cNvSpPr txBox="1"/>
           <p:nvPr/>
         </p:nvSpPr>
@@ -9623,6 +10302,381 @@
                 <a:latin typeface="Montserrat"/>
               </a:rPr>
               <a:t>separan aparcamiento de garaje</a:t>
+            </a:r>
+          </a:p>
+        </p:txBody>
+      </p:sp>
+    </p:spTree>
+  </p:cSld>
+  <p:clrMapOvr>
+    <a:masterClrMapping/>
+  </p:clrMapOvr>
+</p:sld>
+</file>
+
+<file path=ppt/slides/slide20.xml><?xml version="1.0" encoding="utf-8"?>
+<p:sld xmlns:a="http://schemas.openxmlformats.org/drawingml/2006/main" xmlns:p="http://schemas.openxmlformats.org/presentationml/2006/main" xmlns:r="http://schemas.openxmlformats.org/officeDocument/2006/relationships">
+  <p:cSld>
+    <p:spTree>
+      <p:nvGrpSpPr>
+        <p:cNvPr id="1" name=""/>
+        <p:cNvGrpSpPr/>
+        <p:nvPr/>
+      </p:nvGrpSpPr>
+      <p:grpSpPr/>
+      <p:sp>
+        <p:nvSpPr>
+          <p:cNvPr id="2" name="Rectangle 1"/>
+          <p:cNvSpPr/>
+          <p:nvPr/>
+        </p:nvSpPr>
+        <p:spPr>
+          <a:xfrm>
+            <a:off x="0" y="0"/>
+            <a:ext cx="12191695" cy="6858000"/>
+          </a:xfrm>
+          <a:prstGeom prst="rect">
+            <a:avLst/>
+          </a:prstGeom>
+          <a:solidFill>
+            <a:srgbClr val="1E2761"/>
+          </a:solidFill>
+          <a:ln>
+            <a:noFill/>
+          </a:ln>
+          <a:effectLst/>
+        </p:spPr>
+        <p:style>
+          <a:lnRef idx="1">
+            <a:schemeClr val="accent1"/>
+          </a:lnRef>
+          <a:fillRef idx="3">
+            <a:schemeClr val="accent1"/>
+          </a:fillRef>
+          <a:effectRef idx="2">
+            <a:schemeClr val="accent1"/>
+          </a:effectRef>
+          <a:fontRef idx="minor">
+            <a:schemeClr val="lt1"/>
+          </a:fontRef>
+        </p:style>
+        <p:txBody>
+          <a:bodyPr rtlCol="0" anchor="ctr"/>
+          <a:lstStyle/>
+          <a:p>
+            <a:pPr algn="ctr"/>
+          </a:p>
+        </p:txBody>
+      </p:sp>
+      <p:sp>
+        <p:nvSpPr>
+          <p:cNvPr id="3" name="TextBox 2"/>
+          <p:cNvSpPr txBox="1"/>
+          <p:nvPr/>
+        </p:nvSpPr>
+        <p:spPr>
+          <a:xfrm>
+            <a:off x="822960" y="640080"/>
+            <a:ext cx="10515600" cy="457200"/>
+          </a:xfrm>
+          <a:prstGeom prst="rect">
+            <a:avLst/>
+          </a:prstGeom>
+          <a:noFill/>
+        </p:spPr>
+        <p:txBody>
+          <a:bodyPr wrap="square">
+            <a:spAutoFit/>
+          </a:bodyPr>
+          <a:lstStyle/>
+          <a:p>
+            <a:r>
+              <a:rPr sz="1400" b="1" i="0">
+                <a:solidFill>
+                  <a:srgbClr val="F4A24C"/>
+                </a:solidFill>
+                <a:latin typeface="Montserrat"/>
+              </a:rPr>
+              <a:t>LO QUE YA DOMINAS</a:t>
+            </a:r>
+          </a:p>
+        </p:txBody>
+      </p:sp>
+      <p:sp>
+        <p:nvSpPr>
+          <p:cNvPr id="4" name="Rounded Rectangle 3"/>
+          <p:cNvSpPr/>
+          <p:nvPr/>
+        </p:nvSpPr>
+        <p:spPr>
+          <a:xfrm>
+            <a:off x="868680" y="1051560"/>
+            <a:ext cx="1463040" cy="82296"/>
+          </a:xfrm>
+          <a:prstGeom prst="roundRect">
+            <a:avLst/>
+          </a:prstGeom>
+          <a:solidFill>
+            <a:srgbClr val="E8801A"/>
+          </a:solidFill>
+          <a:ln>
+            <a:noFill/>
+          </a:ln>
+          <a:effectLst/>
+        </p:spPr>
+        <p:style>
+          <a:lnRef idx="1">
+            <a:schemeClr val="accent1"/>
+          </a:lnRef>
+          <a:fillRef idx="3">
+            <a:schemeClr val="accent1"/>
+          </a:fillRef>
+          <a:effectRef idx="2">
+            <a:schemeClr val="accent1"/>
+          </a:effectRef>
+          <a:fontRef idx="minor">
+            <a:schemeClr val="lt1"/>
+          </a:fontRef>
+        </p:style>
+        <p:txBody>
+          <a:bodyPr rtlCol="0" anchor="ctr"/>
+          <a:lstStyle/>
+          <a:p>
+            <a:pPr algn="ctr"/>
+          </a:p>
+        </p:txBody>
+      </p:sp>
+      <p:sp>
+        <p:nvSpPr>
+          <p:cNvPr id="5" name="TextBox 4"/>
+          <p:cNvSpPr txBox="1"/>
+          <p:nvPr/>
+        </p:nvSpPr>
+        <p:spPr>
+          <a:xfrm>
+            <a:off x="822960" y="1234440"/>
+            <a:ext cx="10515600" cy="1097280"/>
+          </a:xfrm>
+          <a:prstGeom prst="rect">
+            <a:avLst/>
+          </a:prstGeom>
+          <a:noFill/>
+        </p:spPr>
+        <p:txBody>
+          <a:bodyPr wrap="square">
+            <a:spAutoFit/>
+          </a:bodyPr>
+          <a:lstStyle/>
+          <a:p>
+            <a:r>
+              <a:rPr sz="3400" b="1" i="0">
+                <a:solidFill>
+                  <a:srgbClr val="FFFFFF"/>
+                </a:solidFill>
+                <a:latin typeface="Montserrat"/>
+              </a:rPr>
+              <a:t>Ya hablas el idioma de la norma</a:t>
+            </a:r>
+          </a:p>
+        </p:txBody>
+      </p:sp>
+      <p:sp>
+        <p:nvSpPr>
+          <p:cNvPr id="6" name="TextBox 5"/>
+          <p:cNvSpPr txBox="1"/>
+          <p:nvPr/>
+        </p:nvSpPr>
+        <p:spPr>
+          <a:xfrm>
+            <a:off x="822960" y="2606040"/>
+            <a:ext cx="10515600" cy="2743200"/>
+          </a:xfrm>
+          <a:prstGeom prst="rect">
+            <a:avLst/>
+          </a:prstGeom>
+          <a:noFill/>
+        </p:spPr>
+        <p:txBody>
+          <a:bodyPr wrap="square">
+            <a:spAutoFit/>
+          </a:bodyPr>
+          <a:lstStyle/>
+          <a:p>
+            <a:pPr>
+              <a:spcAft>
+                <a:spcPts val="1200"/>
+              </a:spcAft>
+            </a:pPr>
+            <a:r>
+              <a:rPr sz="2000" b="1" i="0">
+                <a:solidFill>
+                  <a:srgbClr val="F4A24C"/>
+                </a:solidFill>
+                <a:latin typeface="Montserrat"/>
+              </a:rPr>
+              <a:t>✓  </a:t>
+            </a:r>
+            <a:r>
+              <a:rPr sz="1900" b="0" i="0">
+                <a:solidFill>
+                  <a:srgbClr val="FFFFFF"/>
+                </a:solidFill>
+                <a:latin typeface="Montserrat"/>
+              </a:rPr>
+              <a:t>Tipos A, B y C: ventilación y CO</a:t>
+            </a:r>
+          </a:p>
+          <a:p>
+            <a:pPr>
+              <a:spcAft>
+                <a:spcPts val="1200"/>
+              </a:spcAft>
+            </a:pPr>
+            <a:r>
+              <a:rPr sz="2000" b="1" i="0">
+                <a:solidFill>
+                  <a:srgbClr val="F4A24C"/>
+                </a:solidFill>
+                <a:latin typeface="Montserrat"/>
+              </a:rPr>
+              <a:t>✓  </a:t>
+            </a:r>
+            <a:r>
+              <a:rPr sz="1900" b="0" i="0">
+                <a:solidFill>
+                  <a:srgbClr val="FFFFFF"/>
+                </a:solidFill>
+                <a:latin typeface="Montserrat"/>
+              </a:rPr>
+              <a:t>Accesibilidad 1, 2 y 3 para el mantenimiento</a:t>
+            </a:r>
+          </a:p>
+          <a:p>
+            <a:pPr>
+              <a:spcAft>
+                <a:spcPts val="1200"/>
+              </a:spcAft>
+            </a:pPr>
+            <a:r>
+              <a:rPr sz="2000" b="1" i="0">
+                <a:solidFill>
+                  <a:srgbClr val="F4A24C"/>
+                </a:solidFill>
+                <a:latin typeface="Montserrat"/>
+              </a:rPr>
+              <a:t>✓  </a:t>
+            </a:r>
+            <a:r>
+              <a:rPr sz="1900" b="0" i="0">
+                <a:solidFill>
+                  <a:srgbClr val="FFFFFF"/>
+                </a:solidFill>
+                <a:latin typeface="Montserrat"/>
+              </a:rPr>
+              <a:t>Familias de gas por índice de Wobbe</a:t>
+            </a:r>
+          </a:p>
+          <a:p>
+            <a:pPr>
+              <a:spcAft>
+                <a:spcPts val="1200"/>
+              </a:spcAft>
+            </a:pPr>
+            <a:r>
+              <a:rPr sz="2000" b="1" i="0">
+                <a:solidFill>
+                  <a:srgbClr val="F4A24C"/>
+                </a:solidFill>
+                <a:latin typeface="Montserrat"/>
+              </a:rPr>
+              <a:t>✓  </a:t>
+            </a:r>
+            <a:r>
+              <a:rPr sz="1900" b="0" i="0">
+                <a:solidFill>
+                  <a:srgbClr val="FFFFFF"/>
+                </a:solidFill>
+                <a:latin typeface="Montserrat"/>
+              </a:rPr>
+              <a:t>Límites excluida/incluida: qué firmas y quién responde</a:t>
+            </a:r>
+          </a:p>
+        </p:txBody>
+      </p:sp>
+      <p:sp>
+        <p:nvSpPr>
+          <p:cNvPr id="7" name="Rounded Rectangle 6"/>
+          <p:cNvSpPr/>
+          <p:nvPr/>
+        </p:nvSpPr>
+        <p:spPr>
+          <a:xfrm>
+            <a:off x="822960" y="5532120"/>
+            <a:ext cx="10515600" cy="822960"/>
+          </a:xfrm>
+          <a:prstGeom prst="roundRect">
+            <a:avLst/>
+          </a:prstGeom>
+          <a:solidFill>
+            <a:srgbClr val="E8801A"/>
+          </a:solidFill>
+          <a:ln>
+            <a:noFill/>
+          </a:ln>
+          <a:effectLst/>
+        </p:spPr>
+        <p:style>
+          <a:lnRef idx="1">
+            <a:schemeClr val="accent1"/>
+          </a:lnRef>
+          <a:fillRef idx="3">
+            <a:schemeClr val="accent1"/>
+          </a:fillRef>
+          <a:effectRef idx="2">
+            <a:schemeClr val="accent1"/>
+          </a:effectRef>
+          <a:fontRef idx="minor">
+            <a:schemeClr val="lt1"/>
+          </a:fontRef>
+        </p:style>
+        <p:txBody>
+          <a:bodyPr rtlCol="0" anchor="ctr"/>
+          <a:lstStyle/>
+          <a:p>
+            <a:pPr algn="ctr"/>
+          </a:p>
+        </p:txBody>
+      </p:sp>
+      <p:sp>
+        <p:nvSpPr>
+          <p:cNvPr id="8" name="TextBox 7"/>
+          <p:cNvSpPr txBox="1"/>
+          <p:nvPr/>
+        </p:nvSpPr>
+        <p:spPr>
+          <a:xfrm>
+            <a:off x="1051560" y="5623560"/>
+            <a:ext cx="10058400" cy="640080"/>
+          </a:xfrm>
+          <a:prstGeom prst="rect">
+            <a:avLst/>
+          </a:prstGeom>
+          <a:noFill/>
+        </p:spPr>
+        <p:txBody>
+          <a:bodyPr wrap="square">
+            <a:spAutoFit/>
+          </a:bodyPr>
+          <a:lstStyle/>
+          <a:p>
+            <a:r>
+              <a:rPr sz="1500" b="1" i="1">
+                <a:solidFill>
+                  <a:srgbClr val="1E2761"/>
+                </a:solidFill>
+                <a:latin typeface="Montserrat"/>
+              </a:rPr>
+              <a:t>Media exposición del examen, cazada. Nos queda la mitad más técnica.</a:t>
             </a:r>
           </a:p>
         </p:txBody>
@@ -9719,7 +10773,7 @@
                 </a:solidFill>
                 <a:latin typeface="Montserrat"/>
               </a:rPr>
-              <a:t>003 / 019</a:t>
+              <a:t>003 / 020</a:t>
             </a:r>
           </a:p>
         </p:txBody>
@@ -9766,7 +10820,7 @@
         </p:nvSpPr>
         <p:spPr>
           <a:xfrm>
-            <a:off x="822960" y="457200"/>
+            <a:off x="822960" y="502920"/>
             <a:ext cx="8229600" cy="365760"/>
           </a:xfrm>
           <a:prstGeom prst="rect">
@@ -9781,13 +10835,13 @@
           <a:lstStyle/>
           <a:p>
             <a:r>
-              <a:rPr sz="1200" b="1" i="0">
-                <a:solidFill>
-                  <a:srgbClr val="64748B"/>
-                </a:solidFill>
-                <a:latin typeface="Montserrat"/>
-              </a:rPr>
-              <a:t>PARTE 2 · OBJETO</a:t>
+              <a:rPr sz="1300" b="1" i="0">
+                <a:solidFill>
+                  <a:srgbClr val="E8801A"/>
+                </a:solidFill>
+                <a:latin typeface="Montserrat"/>
+              </a:rPr>
+              <a:t>PARTES DE ESTE VÍDEO</a:t>
             </a:r>
           </a:p>
         </p:txBody>
@@ -9800,7 +10854,7 @@
         </p:nvSpPr>
         <p:spPr>
           <a:xfrm>
-            <a:off x="822960" y="868680"/>
+            <a:off x="822960" y="914400"/>
             <a:ext cx="10515600" cy="914400"/>
           </a:xfrm>
           <a:prstGeom prst="rect">
@@ -9821,155 +10875,30 @@
                 </a:solidFill>
                 <a:latin typeface="Montserrat"/>
               </a:rPr>
-              <a:t>El diccionario de la norma</a:t>
-            </a:r>
-          </a:p>
-        </p:txBody>
-      </p:sp>
-      <p:sp>
-        <p:nvSpPr>
-          <p:cNvPr id="7" name="TextBox 6"/>
-          <p:cNvSpPr txBox="1"/>
-          <p:nvPr/>
-        </p:nvSpPr>
-        <p:spPr>
-          <a:xfrm>
-            <a:off x="822960" y="1920240"/>
-            <a:ext cx="4983480" cy="4206240"/>
-          </a:xfrm>
-          <a:prstGeom prst="rect">
-            <a:avLst/>
-          </a:prstGeom>
-          <a:noFill/>
-        </p:spPr>
-        <p:txBody>
-          <a:bodyPr wrap="square">
-            <a:spAutoFit/>
-          </a:bodyPr>
-          <a:lstStyle/>
-          <a:p>
-            <a:pPr>
-              <a:spcAft>
-                <a:spcPts val="1000"/>
-              </a:spcAft>
-            </a:pPr>
-            <a:r>
-              <a:rPr sz="1600" b="1" i="0">
-                <a:solidFill>
-                  <a:srgbClr val="2E3A80"/>
-                </a:solidFill>
-                <a:latin typeface="Montserrat"/>
-              </a:rPr>
-              <a:t>•  </a:t>
-            </a:r>
-            <a:r>
-              <a:rPr sz="1600" b="0" i="0">
-                <a:solidFill>
-                  <a:srgbClr val="1B2330"/>
-                </a:solidFill>
-                <a:latin typeface="Montserrat"/>
-              </a:rPr>
-              <a:t>Fija el significado exacto</a:t>
-            </a:r>
-          </a:p>
-          <a:p>
-            <a:pPr>
-              <a:spcAft>
-                <a:spcPts val="1000"/>
-              </a:spcAft>
-            </a:pPr>
-            <a:r>
-              <a:rPr sz="1600" b="1" i="0">
-                <a:solidFill>
-                  <a:srgbClr val="2E3A80"/>
-                </a:solidFill>
-                <a:latin typeface="Montserrat"/>
-              </a:rPr>
-              <a:t>•  </a:t>
-            </a:r>
-            <a:r>
-              <a:rPr sz="1600" b="0" i="0">
-                <a:solidFill>
-                  <a:srgbClr val="1B2330"/>
-                </a:solidFill>
-                <a:latin typeface="Montserrat"/>
-              </a:rPr>
-              <a:t>Términos nuevos: móvil, loft, intemperie</a:t>
-            </a:r>
-          </a:p>
-          <a:p>
-            <a:pPr>
-              <a:spcAft>
-                <a:spcPts val="1000"/>
-              </a:spcAft>
-            </a:pPr>
-            <a:r>
-              <a:rPr sz="1600" b="1" i="0">
-                <a:solidFill>
-                  <a:srgbClr val="2E3A80"/>
-                </a:solidFill>
-                <a:latin typeface="Montserrat"/>
-              </a:rPr>
-              <a:t>•  </a:t>
-            </a:r>
-            <a:r>
-              <a:rPr sz="1600" b="0" i="0">
-                <a:solidFill>
-                  <a:srgbClr val="1B2330"/>
-                </a:solidFill>
-                <a:latin typeface="Montserrat"/>
-              </a:rPr>
-              <a:t>Desaparece el primer sótano</a:t>
-            </a:r>
-          </a:p>
-          <a:p>
-            <a:pPr>
-              <a:spcAft>
-                <a:spcPts val="1000"/>
-              </a:spcAft>
-            </a:pPr>
-            <a:r>
-              <a:rPr sz="1600" b="1" i="0">
-                <a:solidFill>
-                  <a:srgbClr val="2E3A80"/>
-                </a:solidFill>
-                <a:latin typeface="Montserrat"/>
-              </a:rPr>
-              <a:t>•  </a:t>
-            </a:r>
-            <a:r>
-              <a:rPr sz="1600" b="0" i="0">
-                <a:solidFill>
-                  <a:srgbClr val="1B2330"/>
-                </a:solidFill>
-                <a:latin typeface="Montserrat"/>
-              </a:rPr>
-              <a:t>Estudia: lee, tapa y explica</a:t>
-            </a:r>
-          </a:p>
-        </p:txBody>
-      </p:sp>
-      <p:sp>
-        <p:nvSpPr>
-          <p:cNvPr id="8" name="imgph" descr="IMGQ:open technical dictionary book on table"/>
+              <a:t>En este vídeo</a:t>
+            </a:r>
+          </a:p>
+        </p:txBody>
+      </p:sp>
+      <p:sp>
+        <p:nvSpPr>
+          <p:cNvPr id="7" name="Rounded Rectangle 6"/>
           <p:cNvSpPr/>
           <p:nvPr/>
         </p:nvSpPr>
         <p:spPr>
           <a:xfrm>
-            <a:off x="5806440" y="1051560"/>
-            <a:ext cx="5298947" cy="4629150"/>
+            <a:off x="868680" y="1673352"/>
+            <a:ext cx="2011680" cy="73152"/>
           </a:xfrm>
           <a:prstGeom prst="roundRect">
             <a:avLst/>
           </a:prstGeom>
           <a:solidFill>
-            <a:srgbClr val="F3F6FB"/>
+            <a:srgbClr val="E8801A"/>
           </a:solidFill>
-          <a:ln w="12700">
-            <a:solidFill>
-              <a:srgbClr val="C7D2E6"/>
-            </a:solidFill>
+          <a:ln>
+            <a:noFill/>
           </a:ln>
           <a:effectLst/>
         </p:spPr>
@@ -9997,14 +10926,14 @@
       </p:sp>
       <p:sp>
         <p:nvSpPr>
-          <p:cNvPr id="9" name="TextBox 8"/>
+          <p:cNvPr id="8" name="TextBox 7"/>
           <p:cNvSpPr txBox="1"/>
           <p:nvPr/>
         </p:nvSpPr>
         <p:spPr>
           <a:xfrm>
-            <a:off x="6080760" y="2726055"/>
-            <a:ext cx="4750307" cy="1280160"/>
+            <a:off x="822960" y="2103120"/>
+            <a:ext cx="10515600" cy="4023360"/>
           </a:xfrm>
           <a:prstGeom prst="rect">
             <a:avLst/>
@@ -10017,27 +10946,228 @@
           </a:bodyPr>
           <a:lstStyle/>
           <a:p>
-            <a:pPr algn="ctr"/>
-            <a:r>
-              <a:rPr sz="1400" b="1" i="0">
-                <a:solidFill>
-                  <a:srgbClr val="64748B"/>
-                </a:solidFill>
-                <a:latin typeface="Montserrat"/>
-              </a:rPr>
-              <a:t>IMAGEN REALISTA</a:t>
-            </a:r>
-          </a:p>
-          <a:p>
-            <a:pPr algn="ctr"/>
-            <a:r>
-              <a:rPr sz="1100" b="0" i="1">
-                <a:solidFill>
-                  <a:srgbClr val="64748B"/>
-                </a:solidFill>
-                <a:latin typeface="Montserrat"/>
-              </a:rPr>
-              <a:t>open technical dictionary book on table</a:t>
+            <a:pPr>
+              <a:spcAft>
+                <a:spcPts val="900"/>
+              </a:spcAft>
+            </a:pPr>
+            <a:r>
+              <a:rPr sz="1800" b="1" i="0">
+                <a:solidFill>
+                  <a:srgbClr val="E8801A"/>
+                </a:solidFill>
+                <a:latin typeface="Montserrat"/>
+              </a:rPr>
+              <a:t>01   </a:t>
+            </a:r>
+            <a:r>
+              <a:rPr sz="1700" b="0" i="0">
+                <a:solidFill>
+                  <a:srgbClr val="1B2330"/>
+                </a:solidFill>
+                <a:latin typeface="Montserrat"/>
+              </a:rPr>
+              <a:t>Parte 2</a:t>
+            </a:r>
+          </a:p>
+          <a:p>
+            <a:pPr>
+              <a:spcAft>
+                <a:spcPts val="900"/>
+              </a:spcAft>
+            </a:pPr>
+            <a:r>
+              <a:rPr sz="1800" b="1" i="0">
+                <a:solidFill>
+                  <a:srgbClr val="E8801A"/>
+                </a:solidFill>
+                <a:latin typeface="Montserrat"/>
+              </a:rPr>
+              <a:t>02   </a:t>
+            </a:r>
+            <a:r>
+              <a:rPr sz="1700" b="0" i="0">
+                <a:solidFill>
+                  <a:srgbClr val="1B2330"/>
+                </a:solidFill>
+                <a:latin typeface="Montserrat"/>
+              </a:rPr>
+              <a:t>Términos 3.1 a 3.3</a:t>
+            </a:r>
+          </a:p>
+          <a:p>
+            <a:pPr>
+              <a:spcAft>
+                <a:spcPts val="900"/>
+              </a:spcAft>
+            </a:pPr>
+            <a:r>
+              <a:rPr sz="1800" b="1" i="0">
+                <a:solidFill>
+                  <a:srgbClr val="E8801A"/>
+                </a:solidFill>
+                <a:latin typeface="Montserrat"/>
+              </a:rPr>
+              <a:t>03   </a:t>
+            </a:r>
+            <a:r>
+              <a:rPr sz="1700" b="0" i="0">
+                <a:solidFill>
+                  <a:srgbClr val="1B2330"/>
+                </a:solidFill>
+                <a:latin typeface="Montserrat"/>
+              </a:rPr>
+              <a:t>Términos 3.4 y 3.5</a:t>
+            </a:r>
+          </a:p>
+          <a:p>
+            <a:pPr>
+              <a:spcAft>
+                <a:spcPts val="900"/>
+              </a:spcAft>
+            </a:pPr>
+            <a:r>
+              <a:rPr sz="1800" b="1" i="0">
+                <a:solidFill>
+                  <a:srgbClr val="E8801A"/>
+                </a:solidFill>
+                <a:latin typeface="Montserrat"/>
+              </a:rPr>
+              <a:t>04   </a:t>
+            </a:r>
+            <a:r>
+              <a:rPr sz="1700" b="0" i="0">
+                <a:solidFill>
+                  <a:srgbClr val="1B2330"/>
+                </a:solidFill>
+                <a:latin typeface="Montserrat"/>
+              </a:rPr>
+              <a:t>Términos 3.7 y 3.8</a:t>
+            </a:r>
+          </a:p>
+          <a:p>
+            <a:pPr>
+              <a:spcAft>
+                <a:spcPts val="900"/>
+              </a:spcAft>
+            </a:pPr>
+            <a:r>
+              <a:rPr sz="1800" b="1" i="0">
+                <a:solidFill>
+                  <a:srgbClr val="E8801A"/>
+                </a:solidFill>
+                <a:latin typeface="Montserrat"/>
+              </a:rPr>
+              <a:t>05   </a:t>
+            </a:r>
+            <a:r>
+              <a:rPr sz="1700" b="0" i="0">
+                <a:solidFill>
+                  <a:srgbClr val="1B2330"/>
+                </a:solidFill>
+                <a:latin typeface="Montserrat"/>
+              </a:rPr>
+              <a:t>Términos 3.9 a 3.11</a:t>
+            </a:r>
+          </a:p>
+          <a:p>
+            <a:pPr>
+              <a:spcAft>
+                <a:spcPts val="900"/>
+              </a:spcAft>
+            </a:pPr>
+            <a:r>
+              <a:rPr sz="1800" b="1" i="0">
+                <a:solidFill>
+                  <a:srgbClr val="E8801A"/>
+                </a:solidFill>
+                <a:latin typeface="Montserrat"/>
+              </a:rPr>
+              <a:t>06   </a:t>
+            </a:r>
+            <a:r>
+              <a:rPr sz="1700" b="0" i="0">
+                <a:solidFill>
+                  <a:srgbClr val="1B2330"/>
+                </a:solidFill>
+                <a:latin typeface="Montserrat"/>
+              </a:rPr>
+              <a:t>Términos 3.12 y 3.13</a:t>
+            </a:r>
+          </a:p>
+          <a:p>
+            <a:pPr>
+              <a:spcAft>
+                <a:spcPts val="900"/>
+              </a:spcAft>
+            </a:pPr>
+            <a:r>
+              <a:rPr sz="1800" b="1" i="0">
+                <a:solidFill>
+                  <a:srgbClr val="E8801A"/>
+                </a:solidFill>
+                <a:latin typeface="Montserrat"/>
+              </a:rPr>
+              <a:t>07   </a:t>
+            </a:r>
+            <a:r>
+              <a:rPr sz="1700" b="0" i="0">
+                <a:solidFill>
+                  <a:srgbClr val="1B2330"/>
+                </a:solidFill>
+                <a:latin typeface="Montserrat"/>
+              </a:rPr>
+              <a:t>Términos 3.14 a 3.16</a:t>
+            </a:r>
+          </a:p>
+          <a:p>
+            <a:pPr>
+              <a:spcAft>
+                <a:spcPts val="900"/>
+              </a:spcAft>
+            </a:pPr>
+            <a:r>
+              <a:rPr sz="1800" b="1" i="0">
+                <a:solidFill>
+                  <a:srgbClr val="E8801A"/>
+                </a:solidFill>
+                <a:latin typeface="Montserrat"/>
+              </a:rPr>
+              <a:t>08   </a:t>
+            </a:r>
+            <a:r>
+              <a:rPr sz="1700" b="0" i="0">
+                <a:solidFill>
+                  <a:srgbClr val="1B2330"/>
+                </a:solidFill>
+                <a:latin typeface="Montserrat"/>
+              </a:rPr>
+              <a:t>Términos 3.17 a 3.29</a:t>
+            </a:r>
+          </a:p>
+          <a:p>
+            <a:pPr>
+              <a:spcAft>
+                <a:spcPts val="900"/>
+              </a:spcAft>
+            </a:pPr>
+            <a:r>
+              <a:rPr sz="1800" b="1" i="0">
+                <a:solidFill>
+                  <a:srgbClr val="E8801A"/>
+                </a:solidFill>
+                <a:latin typeface="Montserrat"/>
+              </a:rPr>
+              <a:t>09   </a:t>
+            </a:r>
+            <a:r>
+              <a:rPr sz="1700" b="0" i="0">
+                <a:solidFill>
+                  <a:srgbClr val="1B2330"/>
+                </a:solidFill>
+                <a:latin typeface="Montserrat"/>
+              </a:rPr>
+              <a:t>Términos 3.23 a 3.30</a:t>
             </a:r>
           </a:p>
         </p:txBody>
@@ -10134,7 +11264,7 @@
                 </a:solidFill>
                 <a:latin typeface="Montserrat"/>
               </a:rPr>
-              <a:t>004 / 019</a:t>
+              <a:t>004 / 020</a:t>
             </a:r>
           </a:p>
         </p:txBody>
@@ -10182,7 +11312,7 @@
         <p:spPr>
           <a:xfrm>
             <a:off x="822960" y="457200"/>
-            <a:ext cx="8229600" cy="365760"/>
+            <a:ext cx="10058400" cy="365760"/>
           </a:xfrm>
           <a:prstGeom prst="rect">
             <a:avLst/>
@@ -10196,13 +11326,13 @@
           <a:lstStyle/>
           <a:p>
             <a:r>
-              <a:rPr sz="1200" b="1" i="0">
-                <a:solidFill>
-                  <a:srgbClr val="64748B"/>
-                </a:solidFill>
-                <a:latin typeface="Montserrat"/>
-              </a:rPr>
-              <a:t>TÉRMINOS 3.1 A 3.3</a:t>
+              <a:rPr sz="1300" b="1" i="0">
+                <a:solidFill>
+                  <a:srgbClr val="E8801A"/>
+                </a:solidFill>
+                <a:latin typeface="Montserrat"/>
+              </a:rPr>
+              <a:t>PARTE 2 · OBJETO</a:t>
             </a:r>
           </a:p>
         </p:txBody>
@@ -10230,26 +11360,70 @@
           <a:lstStyle/>
           <a:p>
             <a:r>
-              <a:rPr sz="2700" b="1" i="0">
+              <a:rPr sz="2800" b="1" i="0">
                 <a:solidFill>
                   <a:srgbClr val="1E2761"/>
                 </a:solidFill>
                 <a:latin typeface="Montserrat"/>
               </a:rPr>
-              <a:t>Accesibilidad: grados 1, 2 y 3</a:t>
-            </a:r>
-          </a:p>
-        </p:txBody>
-      </p:sp>
-      <p:sp>
-        <p:nvSpPr>
-          <p:cNvPr id="7" name="TextBox 6"/>
+              <a:t>El diccionario de la norma</a:t>
+            </a:r>
+          </a:p>
+        </p:txBody>
+      </p:sp>
+      <p:sp>
+        <p:nvSpPr>
+          <p:cNvPr id="7" name="Rounded Rectangle 6"/>
+          <p:cNvSpPr/>
+          <p:nvPr/>
+        </p:nvSpPr>
+        <p:spPr>
+          <a:xfrm>
+            <a:off x="868680" y="1627632"/>
+            <a:ext cx="2011680" cy="73152"/>
+          </a:xfrm>
+          <a:prstGeom prst="roundRect">
+            <a:avLst/>
+          </a:prstGeom>
+          <a:solidFill>
+            <a:srgbClr val="E8801A"/>
+          </a:solidFill>
+          <a:ln>
+            <a:noFill/>
+          </a:ln>
+          <a:effectLst/>
+        </p:spPr>
+        <p:style>
+          <a:lnRef idx="1">
+            <a:schemeClr val="accent1"/>
+          </a:lnRef>
+          <a:fillRef idx="3">
+            <a:schemeClr val="accent1"/>
+          </a:fillRef>
+          <a:effectRef idx="2">
+            <a:schemeClr val="accent1"/>
+          </a:effectRef>
+          <a:fontRef idx="minor">
+            <a:schemeClr val="lt1"/>
+          </a:fontRef>
+        </p:style>
+        <p:txBody>
+          <a:bodyPr rtlCol="0" anchor="ctr"/>
+          <a:lstStyle/>
+          <a:p>
+            <a:pPr algn="ctr"/>
+          </a:p>
+        </p:txBody>
+      </p:sp>
+      <p:sp>
+        <p:nvSpPr>
+          <p:cNvPr id="8" name="TextBox 7"/>
           <p:cNvSpPr txBox="1"/>
           <p:nvPr/>
         </p:nvSpPr>
         <p:spPr>
           <a:xfrm>
-            <a:off x="822960" y="1920240"/>
+            <a:off x="822960" y="1965960"/>
             <a:ext cx="4983480" cy="4206240"/>
           </a:xfrm>
           <a:prstGeom prst="rect">
@@ -10265,17 +11439,17 @@
           <a:p>
             <a:pPr>
               <a:spcAft>
-                <a:spcPts val="1000"/>
+                <a:spcPts val="1100"/>
               </a:spcAft>
             </a:pPr>
             <a:r>
               <a:rPr sz="1600" b="1" i="0">
                 <a:solidFill>
-                  <a:srgbClr val="2E3A80"/>
-                </a:solidFill>
-                <a:latin typeface="Montserrat"/>
-              </a:rPr>
-              <a:t>•  </a:t>
+                  <a:srgbClr val="E8801A"/>
+                </a:solidFill>
+                <a:latin typeface="Montserrat"/>
+              </a:rPr>
+              <a:t>▸  </a:t>
             </a:r>
             <a:r>
               <a:rPr sz="1600" b="0" i="0">
@@ -10284,23 +11458,23 @@
                 </a:solidFill>
                 <a:latin typeface="Montserrat"/>
               </a:rPr>
-              <a:t>Grado 1: sin llaves ni escaleras</a:t>
+              <a:t>Fija el significado exacto</a:t>
             </a:r>
           </a:p>
           <a:p>
             <a:pPr>
               <a:spcAft>
-                <a:spcPts val="1000"/>
+                <a:spcPts val="1100"/>
               </a:spcAft>
             </a:pPr>
             <a:r>
               <a:rPr sz="1600" b="1" i="0">
                 <a:solidFill>
-                  <a:srgbClr val="2E3A80"/>
-                </a:solidFill>
-                <a:latin typeface="Montserrat"/>
-              </a:rPr>
-              <a:t>•  </a:t>
+                  <a:srgbClr val="E8801A"/>
+                </a:solidFill>
+                <a:latin typeface="Montserrat"/>
+              </a:rPr>
+              <a:t>▸  </a:t>
             </a:r>
             <a:r>
               <a:rPr sz="1600" b="0" i="0">
@@ -10309,23 +11483,23 @@
                 </a:solidFill>
                 <a:latin typeface="Montserrat"/>
               </a:rPr>
-              <a:t>Grado 2: armario con cerradura normalizada</a:t>
+              <a:t>Términos nuevos: móvil, loft, intemperie</a:t>
             </a:r>
           </a:p>
           <a:p>
             <a:pPr>
               <a:spcAft>
-                <a:spcPts val="1000"/>
+                <a:spcPts val="1100"/>
               </a:spcAft>
             </a:pPr>
             <a:r>
               <a:rPr sz="1600" b="1" i="0">
                 <a:solidFill>
-                  <a:srgbClr val="2E3A80"/>
-                </a:solidFill>
-                <a:latin typeface="Montserrat"/>
-              </a:rPr>
-              <a:t>•  </a:t>
+                  <a:srgbClr val="E8801A"/>
+                </a:solidFill>
+                <a:latin typeface="Montserrat"/>
+              </a:rPr>
+              <a:t>▸  </a:t>
             </a:r>
             <a:r>
               <a:rPr sz="1600" b="0" i="0">
@@ -10334,23 +11508,23 @@
                 </a:solidFill>
                 <a:latin typeface="Montserrat"/>
               </a:rPr>
-              <a:t>Grado 3: escalera o zona privada</a:t>
+              <a:t>Desaparece el primer sótano</a:t>
             </a:r>
           </a:p>
           <a:p>
             <a:pPr>
               <a:spcAft>
-                <a:spcPts val="1000"/>
+                <a:spcPts val="1100"/>
               </a:spcAft>
             </a:pPr>
             <a:r>
               <a:rPr sz="1600" b="1" i="0">
                 <a:solidFill>
-                  <a:srgbClr val="2E3A80"/>
-                </a:solidFill>
-                <a:latin typeface="Montserrat"/>
-              </a:rPr>
-              <a:t>•  </a:t>
+                  <a:srgbClr val="E8801A"/>
+                </a:solidFill>
+                <a:latin typeface="Montserrat"/>
+              </a:rPr>
+              <a:t>▸  </a:t>
             </a:r>
             <a:r>
               <a:rPr sz="1600" b="0" i="0">
@@ -10359,14 +11533,14 @@
                 </a:solidFill>
                 <a:latin typeface="Montserrat"/>
               </a:rPr>
-              <a:t>Más número, más difícil</a:t>
-            </a:r>
-          </a:p>
-        </p:txBody>
-      </p:sp>
-      <p:sp>
-        <p:nvSpPr>
-          <p:cNvPr id="8" name="imgph" descr="IMGQ:locked gas meter cabinet with key"/>
+              <a:t>Estudia: lee, tapa y explica</a:t>
+            </a:r>
+          </a:p>
+        </p:txBody>
+      </p:sp>
+      <p:sp>
+        <p:nvSpPr>
+          <p:cNvPr id="9" name="imgph" descr="IMGQ:open technical dictionary book on table"/>
           <p:cNvSpPr/>
           <p:nvPr/>
         </p:nvSpPr>
@@ -10412,7 +11586,7 @@
       </p:sp>
       <p:sp>
         <p:nvSpPr>
-          <p:cNvPr id="9" name="TextBox 8"/>
+          <p:cNvPr id="10" name="TextBox 9"/>
           <p:cNvSpPr txBox="1"/>
           <p:nvPr/>
         </p:nvSpPr>
@@ -10452,7 +11626,7 @@
                 </a:solidFill>
                 <a:latin typeface="Montserrat"/>
               </a:rPr>
-              <a:t>locked gas meter cabinet with key</a:t>
+              <a:t>open technical dictionary book on table</a:t>
             </a:r>
           </a:p>
         </p:txBody>
@@ -10549,7 +11723,7 @@
                 </a:solidFill>
                 <a:latin typeface="Montserrat"/>
               </a:rPr>
-              <a:t>005 / 019</a:t>
+              <a:t>005 / 020</a:t>
             </a:r>
           </a:p>
         </p:txBody>
@@ -10597,7 +11771,7 @@
         <p:spPr>
           <a:xfrm>
             <a:off x="822960" y="457200"/>
-            <a:ext cx="8229600" cy="365760"/>
+            <a:ext cx="10058400" cy="365760"/>
           </a:xfrm>
           <a:prstGeom prst="rect">
             <a:avLst/>
@@ -10611,13 +11785,13 @@
           <a:lstStyle/>
           <a:p>
             <a:r>
-              <a:rPr sz="1200" b="1" i="0">
-                <a:solidFill>
-                  <a:srgbClr val="64748B"/>
-                </a:solidFill>
-                <a:latin typeface="Montserrat"/>
-              </a:rPr>
-              <a:t>TÉRMINOS 3.4 Y 3.5</a:t>
+              <a:rPr sz="1300" b="1" i="0">
+                <a:solidFill>
+                  <a:srgbClr val="E8801A"/>
+                </a:solidFill>
+                <a:latin typeface="Montserrat"/>
+              </a:rPr>
+              <a:t>TÉRMINOS 3.1 A 3.3</a:t>
             </a:r>
           </a:p>
         </p:txBody>
@@ -10645,26 +11819,70 @@
           <a:lstStyle/>
           <a:p>
             <a:r>
-              <a:rPr sz="2700" b="1" i="0">
+              <a:rPr sz="2800" b="1" i="0">
                 <a:solidFill>
                   <a:srgbClr val="1E2761"/>
                 </a:solidFill>
                 <a:latin typeface="Montserrat"/>
               </a:rPr>
-              <a:t>Acometida y acometida interior</a:t>
-            </a:r>
-          </a:p>
-        </p:txBody>
-      </p:sp>
-      <p:sp>
-        <p:nvSpPr>
-          <p:cNvPr id="7" name="TextBox 6"/>
+              <a:t>Accesibilidad: grados 1, 2 y 3</a:t>
+            </a:r>
+          </a:p>
+        </p:txBody>
+      </p:sp>
+      <p:sp>
+        <p:nvSpPr>
+          <p:cNvPr id="7" name="Rounded Rectangle 6"/>
+          <p:cNvSpPr/>
+          <p:nvPr/>
+        </p:nvSpPr>
+        <p:spPr>
+          <a:xfrm>
+            <a:off x="868680" y="1627632"/>
+            <a:ext cx="2011680" cy="73152"/>
+          </a:xfrm>
+          <a:prstGeom prst="roundRect">
+            <a:avLst/>
+          </a:prstGeom>
+          <a:solidFill>
+            <a:srgbClr val="E8801A"/>
+          </a:solidFill>
+          <a:ln>
+            <a:noFill/>
+          </a:ln>
+          <a:effectLst/>
+        </p:spPr>
+        <p:style>
+          <a:lnRef idx="1">
+            <a:schemeClr val="accent1"/>
+          </a:lnRef>
+          <a:fillRef idx="3">
+            <a:schemeClr val="accent1"/>
+          </a:fillRef>
+          <a:effectRef idx="2">
+            <a:schemeClr val="accent1"/>
+          </a:effectRef>
+          <a:fontRef idx="minor">
+            <a:schemeClr val="lt1"/>
+          </a:fontRef>
+        </p:style>
+        <p:txBody>
+          <a:bodyPr rtlCol="0" anchor="ctr"/>
+          <a:lstStyle/>
+          <a:p>
+            <a:pPr algn="ctr"/>
+          </a:p>
+        </p:txBody>
+      </p:sp>
+      <p:sp>
+        <p:nvSpPr>
+          <p:cNvPr id="8" name="TextBox 7"/>
           <p:cNvSpPr txBox="1"/>
           <p:nvPr/>
         </p:nvSpPr>
         <p:spPr>
           <a:xfrm>
-            <a:off x="822960" y="1920240"/>
+            <a:off x="822960" y="1965960"/>
             <a:ext cx="4983480" cy="4206240"/>
           </a:xfrm>
           <a:prstGeom prst="rect">
@@ -10680,17 +11898,17 @@
           <a:p>
             <a:pPr>
               <a:spcAft>
-                <a:spcPts val="1000"/>
+                <a:spcPts val="1100"/>
               </a:spcAft>
             </a:pPr>
             <a:r>
               <a:rPr sz="1600" b="1" i="0">
                 <a:solidFill>
-                  <a:srgbClr val="2E3A80"/>
-                </a:solidFill>
-                <a:latin typeface="Montserrat"/>
-              </a:rPr>
-              <a:t>•  </a:t>
+                  <a:srgbClr val="E8801A"/>
+                </a:solidFill>
+                <a:latin typeface="Montserrat"/>
+              </a:rPr>
+              <a:t>▸  </a:t>
             </a:r>
             <a:r>
               <a:rPr sz="1600" b="0" i="0">
@@ -10699,23 +11917,23 @@
                 </a:solidFill>
                 <a:latin typeface="Montserrat"/>
               </a:rPr>
-              <a:t>Acometida: red hasta la llave, incluida</a:t>
+              <a:t>Grado 1: sin llaves ni escaleras</a:t>
             </a:r>
           </a:p>
           <a:p>
             <a:pPr>
               <a:spcAft>
-                <a:spcPts val="1000"/>
+                <a:spcPts val="1100"/>
               </a:spcAft>
             </a:pPr>
             <a:r>
               <a:rPr sz="1600" b="1" i="0">
                 <a:solidFill>
-                  <a:srgbClr val="2E3A80"/>
-                </a:solidFill>
-                <a:latin typeface="Montserrat"/>
-              </a:rPr>
-              <a:t>•  </a:t>
+                  <a:srgbClr val="E8801A"/>
+                </a:solidFill>
+                <a:latin typeface="Montserrat"/>
+              </a:rPr>
+              <a:t>▸  </a:t>
             </a:r>
             <a:r>
               <a:rPr sz="1600" b="0" i="0">
@@ -10724,23 +11942,23 @@
                 </a:solidFill>
                 <a:latin typeface="Montserrat"/>
               </a:rPr>
-              <a:t>No forma parte de la receptora</a:t>
+              <a:t>Grado 2: armario con cerradura normalizada</a:t>
             </a:r>
           </a:p>
           <a:p>
             <a:pPr>
               <a:spcAft>
-                <a:spcPts val="1000"/>
+                <a:spcPts val="1100"/>
               </a:spcAft>
             </a:pPr>
             <a:r>
               <a:rPr sz="1600" b="1" i="0">
                 <a:solidFill>
-                  <a:srgbClr val="2E3A80"/>
-                </a:solidFill>
-                <a:latin typeface="Montserrat"/>
-              </a:rPr>
-              <a:t>•  </a:t>
+                  <a:srgbClr val="E8801A"/>
+                </a:solidFill>
+                <a:latin typeface="Montserrat"/>
+              </a:rPr>
+              <a:t>▸  </a:t>
             </a:r>
             <a:r>
               <a:rPr sz="1600" b="0" i="0">
@@ -10749,23 +11967,23 @@
                 </a:solidFill>
                 <a:latin typeface="Montserrat"/>
               </a:rPr>
-              <a:t>Interior: de la llave de acometida al edificio</a:t>
+              <a:t>Grado 3: escalera o zona privada</a:t>
             </a:r>
           </a:p>
           <a:p>
             <a:pPr>
               <a:spcAft>
-                <a:spcPts val="1000"/>
+                <a:spcPts val="1100"/>
               </a:spcAft>
             </a:pPr>
             <a:r>
               <a:rPr sz="1600" b="1" i="0">
                 <a:solidFill>
-                  <a:srgbClr val="2E3A80"/>
-                </a:solidFill>
-                <a:latin typeface="Montserrat"/>
-              </a:rPr>
-              <a:t>•  </a:t>
+                  <a:srgbClr val="E8801A"/>
+                </a:solidFill>
+                <a:latin typeface="Montserrat"/>
+              </a:rPr>
+              <a:t>▸  </a:t>
             </a:r>
             <a:r>
               <a:rPr sz="1600" b="0" i="0">
@@ -10774,14 +11992,14 @@
                 </a:solidFill>
                 <a:latin typeface="Montserrat"/>
               </a:rPr>
-              <a:t>La frontera es la llave de acometida</a:t>
-            </a:r>
-          </a:p>
-        </p:txBody>
-      </p:sp>
-      <p:sp>
-        <p:nvSpPr>
-          <p:cNvPr id="8" name="imgph" descr="IMGQ:gas service valve entering building wall"/>
+              <a:t>Más número, más difícil</a:t>
+            </a:r>
+          </a:p>
+        </p:txBody>
+      </p:sp>
+      <p:sp>
+        <p:nvSpPr>
+          <p:cNvPr id="9" name="imgph" descr="IMGQ:locked gas meter cabinet with key"/>
           <p:cNvSpPr/>
           <p:nvPr/>
         </p:nvSpPr>
@@ -10827,7 +12045,7 @@
       </p:sp>
       <p:sp>
         <p:nvSpPr>
-          <p:cNvPr id="9" name="TextBox 8"/>
+          <p:cNvPr id="10" name="TextBox 9"/>
           <p:cNvSpPr txBox="1"/>
           <p:nvPr/>
         </p:nvSpPr>
@@ -10867,7 +12085,7 @@
                 </a:solidFill>
                 <a:latin typeface="Montserrat"/>
               </a:rPr>
-              <a:t>gas service valve entering building wall</a:t>
+              <a:t>locked gas meter cabinet with key</a:t>
             </a:r>
           </a:p>
         </p:txBody>
@@ -10964,7 +12182,7 @@
                 </a:solidFill>
                 <a:latin typeface="Montserrat"/>
               </a:rPr>
-              <a:t>006 / 019</a:t>
+              <a:t>006 / 020</a:t>
             </a:r>
           </a:p>
         </p:txBody>
@@ -11012,7 +12230,7 @@
         <p:spPr>
           <a:xfrm>
             <a:off x="822960" y="457200"/>
-            <a:ext cx="8229600" cy="365760"/>
+            <a:ext cx="10058400" cy="365760"/>
           </a:xfrm>
           <a:prstGeom prst="rect">
             <a:avLst/>
@@ -11026,13 +12244,13 @@
           <a:lstStyle/>
           <a:p>
             <a:r>
-              <a:rPr sz="1200" b="1" i="0">
-                <a:solidFill>
-                  <a:srgbClr val="64748B"/>
-                </a:solidFill>
-                <a:latin typeface="Montserrat"/>
-              </a:rPr>
-              <a:t>TÉRMINOS 3.7 Y 3.8</a:t>
+              <a:rPr sz="1300" b="1" i="0">
+                <a:solidFill>
+                  <a:srgbClr val="E8801A"/>
+                </a:solidFill>
+                <a:latin typeface="Montserrat"/>
+              </a:rPr>
+              <a:t>TÉRMINOS 3.4 Y 3.5</a:t>
             </a:r>
           </a:p>
         </p:txBody>
@@ -11060,26 +12278,70 @@
           <a:lstStyle/>
           <a:p>
             <a:r>
-              <a:rPr sz="2700" b="1" i="0">
+              <a:rPr sz="2800" b="1" i="0">
                 <a:solidFill>
                   <a:srgbClr val="1E2761"/>
                 </a:solidFill>
                 <a:latin typeface="Montserrat"/>
               </a:rPr>
-              <a:t>Aparato de gas y circuito abierto</a:t>
-            </a:r>
-          </a:p>
-        </p:txBody>
-      </p:sp>
-      <p:sp>
-        <p:nvSpPr>
-          <p:cNvPr id="7" name="TextBox 6"/>
+              <a:t>Acometida y acometida interior</a:t>
+            </a:r>
+          </a:p>
+        </p:txBody>
+      </p:sp>
+      <p:sp>
+        <p:nvSpPr>
+          <p:cNvPr id="7" name="Rounded Rectangle 6"/>
+          <p:cNvSpPr/>
+          <p:nvPr/>
+        </p:nvSpPr>
+        <p:spPr>
+          <a:xfrm>
+            <a:off x="868680" y="1627632"/>
+            <a:ext cx="2011680" cy="73152"/>
+          </a:xfrm>
+          <a:prstGeom prst="roundRect">
+            <a:avLst/>
+          </a:prstGeom>
+          <a:solidFill>
+            <a:srgbClr val="E8801A"/>
+          </a:solidFill>
+          <a:ln>
+            <a:noFill/>
+          </a:ln>
+          <a:effectLst/>
+        </p:spPr>
+        <p:style>
+          <a:lnRef idx="1">
+            <a:schemeClr val="accent1"/>
+          </a:lnRef>
+          <a:fillRef idx="3">
+            <a:schemeClr val="accent1"/>
+          </a:fillRef>
+          <a:effectRef idx="2">
+            <a:schemeClr val="accent1"/>
+          </a:effectRef>
+          <a:fontRef idx="minor">
+            <a:schemeClr val="lt1"/>
+          </a:fontRef>
+        </p:style>
+        <p:txBody>
+          <a:bodyPr rtlCol="0" anchor="ctr"/>
+          <a:lstStyle/>
+          <a:p>
+            <a:pPr algn="ctr"/>
+          </a:p>
+        </p:txBody>
+      </p:sp>
+      <p:sp>
+        <p:nvSpPr>
+          <p:cNvPr id="8" name="TextBox 7"/>
           <p:cNvSpPr txBox="1"/>
           <p:nvPr/>
         </p:nvSpPr>
         <p:spPr>
           <a:xfrm>
-            <a:off x="822960" y="1920240"/>
+            <a:off x="822960" y="1965960"/>
             <a:ext cx="4983480" cy="4206240"/>
           </a:xfrm>
           <a:prstGeom prst="rect">
@@ -11095,17 +12357,17 @@
           <a:p>
             <a:pPr>
               <a:spcAft>
-                <a:spcPts val="1000"/>
+                <a:spcPts val="1100"/>
               </a:spcAft>
             </a:pPr>
             <a:r>
               <a:rPr sz="1600" b="1" i="0">
                 <a:solidFill>
-                  <a:srgbClr val="2E3A80"/>
-                </a:solidFill>
-                <a:latin typeface="Montserrat"/>
-              </a:rPr>
-              <a:t>•  </a:t>
+                  <a:srgbClr val="E8801A"/>
+                </a:solidFill>
+                <a:latin typeface="Montserrat"/>
+              </a:rPr>
+              <a:t>▸  </a:t>
             </a:r>
             <a:r>
               <a:rPr sz="1600" b="0" i="0">
@@ -11114,23 +12376,23 @@
                 </a:solidFill>
                 <a:latin typeface="Montserrat"/>
               </a:rPr>
-              <a:t>Aparato de gas: usa gas normalizado</a:t>
+              <a:t>Acometida: red hasta la llave, incluida</a:t>
             </a:r>
           </a:p>
           <a:p>
             <a:pPr>
               <a:spcAft>
-                <a:spcPts val="1000"/>
+                <a:spcPts val="1100"/>
               </a:spcAft>
             </a:pPr>
             <a:r>
               <a:rPr sz="1600" b="1" i="0">
                 <a:solidFill>
-                  <a:srgbClr val="2E3A80"/>
-                </a:solidFill>
-                <a:latin typeface="Montserrat"/>
-              </a:rPr>
-              <a:t>•  </a:t>
+                  <a:srgbClr val="E8801A"/>
+                </a:solidFill>
+                <a:latin typeface="Montserrat"/>
+              </a:rPr>
+              <a:t>▸  </a:t>
             </a:r>
             <a:r>
               <a:rPr sz="1600" b="0" i="0">
@@ -11139,23 +12401,23 @@
                 </a:solidFill>
                 <a:latin typeface="Montserrat"/>
               </a:rPr>
-              <a:t>Circuito abierto: coge aire del local</a:t>
+              <a:t>No forma parte de la receptora</a:t>
             </a:r>
           </a:p>
           <a:p>
             <a:pPr>
               <a:spcAft>
-                <a:spcPts val="1000"/>
+                <a:spcPts val="1100"/>
               </a:spcAft>
             </a:pPr>
             <a:r>
               <a:rPr sz="1600" b="1" i="0">
                 <a:solidFill>
-                  <a:srgbClr val="2E3A80"/>
-                </a:solidFill>
-                <a:latin typeface="Montserrat"/>
-              </a:rPr>
-              <a:t>•  </a:t>
+                  <a:srgbClr val="E8801A"/>
+                </a:solidFill>
+                <a:latin typeface="Montserrat"/>
+              </a:rPr>
+              <a:t>▸  </a:t>
             </a:r>
             <a:r>
               <a:rPr sz="1600" b="0" i="0">
@@ -11164,23 +12426,23 @@
                 </a:solidFill>
                 <a:latin typeface="Montserrat"/>
               </a:rPr>
-              <a:t>Puede ser tipo A o tipo B</a:t>
+              <a:t>Interior: de la llave de acometida al edificio</a:t>
             </a:r>
           </a:p>
           <a:p>
             <a:pPr>
               <a:spcAft>
-                <a:spcPts val="1000"/>
+                <a:spcPts val="1100"/>
               </a:spcAft>
             </a:pPr>
             <a:r>
               <a:rPr sz="1600" b="1" i="0">
                 <a:solidFill>
-                  <a:srgbClr val="2E3A80"/>
-                </a:solidFill>
-                <a:latin typeface="Montserrat"/>
-              </a:rPr>
-              <a:t>•  </a:t>
+                  <a:srgbClr val="E8801A"/>
+                </a:solidFill>
+                <a:latin typeface="Montserrat"/>
+              </a:rPr>
+              <a:t>▸  </a:t>
             </a:r>
             <a:r>
               <a:rPr sz="1600" b="0" i="0">
@@ -11189,14 +12451,14 @@
                 </a:solidFill>
                 <a:latin typeface="Montserrat"/>
               </a:rPr>
-              <a:t>El tipo C no es abierto</a:t>
-            </a:r>
-          </a:p>
-        </p:txBody>
-      </p:sp>
-      <p:sp>
-        <p:nvSpPr>
-          <p:cNvPr id="8" name="imgph" descr="IMGQ:domestic gas water heater on wall"/>
+              <a:t>La frontera es la llave de acometida</a:t>
+            </a:r>
+          </a:p>
+        </p:txBody>
+      </p:sp>
+      <p:sp>
+        <p:nvSpPr>
+          <p:cNvPr id="9" name="imgph" descr="IMGQ:gas service valve entering building wall"/>
           <p:cNvSpPr/>
           <p:nvPr/>
         </p:nvSpPr>
@@ -11242,7 +12504,7 @@
       </p:sp>
       <p:sp>
         <p:nvSpPr>
-          <p:cNvPr id="9" name="TextBox 8"/>
+          <p:cNvPr id="10" name="TextBox 9"/>
           <p:cNvSpPr txBox="1"/>
           <p:nvPr/>
         </p:nvSpPr>
@@ -11282,7 +12544,7 @@
                 </a:solidFill>
                 <a:latin typeface="Montserrat"/>
               </a:rPr>
-              <a:t>domestic gas water heater on wall</a:t>
+              <a:t>gas service valve entering building wall</a:t>
             </a:r>
           </a:p>
         </p:txBody>
@@ -11379,7 +12641,7 @@
                 </a:solidFill>
                 <a:latin typeface="Montserrat"/>
               </a:rPr>
-              <a:t>007 / 019</a:t>
+              <a:t>007 / 020</a:t>
             </a:r>
           </a:p>
         </p:txBody>
@@ -11427,7 +12689,7 @@
         <p:spPr>
           <a:xfrm>
             <a:off x="822960" y="457200"/>
-            <a:ext cx="8229600" cy="365760"/>
+            <a:ext cx="10058400" cy="365760"/>
           </a:xfrm>
           <a:prstGeom prst="rect">
             <a:avLst/>
@@ -11441,13 +12703,13 @@
           <a:lstStyle/>
           <a:p>
             <a:r>
-              <a:rPr sz="1200" b="1" i="0">
-                <a:solidFill>
-                  <a:srgbClr val="64748B"/>
-                </a:solidFill>
-                <a:latin typeface="Montserrat"/>
-              </a:rPr>
-              <a:t>TÉRMINOS 3.9 A 3.11</a:t>
+              <a:rPr sz="1300" b="1" i="0">
+                <a:solidFill>
+                  <a:srgbClr val="E8801A"/>
+                </a:solidFill>
+                <a:latin typeface="Montserrat"/>
+              </a:rPr>
+              <a:t>TÉRMINOS 3.7 Y 3.8</a:t>
             </a:r>
           </a:p>
         </p:txBody>
@@ -11475,26 +12737,70 @@
           <a:lstStyle/>
           <a:p>
             <a:r>
-              <a:rPr sz="2700" b="1" i="0">
+              <a:rPr sz="2800" b="1" i="0">
                 <a:solidFill>
                   <a:srgbClr val="1E2761"/>
                 </a:solidFill>
                 <a:latin typeface="Montserrat"/>
               </a:rPr>
-              <a:t>Tipos A, B y C</a:t>
-            </a:r>
-          </a:p>
-        </p:txBody>
-      </p:sp>
-      <p:sp>
-        <p:nvSpPr>
-          <p:cNvPr id="7" name="TextBox 6"/>
+              <a:t>Aparato de gas y circuito abierto</a:t>
+            </a:r>
+          </a:p>
+        </p:txBody>
+      </p:sp>
+      <p:sp>
+        <p:nvSpPr>
+          <p:cNvPr id="7" name="Rounded Rectangle 6"/>
+          <p:cNvSpPr/>
+          <p:nvPr/>
+        </p:nvSpPr>
+        <p:spPr>
+          <a:xfrm>
+            <a:off x="868680" y="1627632"/>
+            <a:ext cx="2011680" cy="73152"/>
+          </a:xfrm>
+          <a:prstGeom prst="roundRect">
+            <a:avLst/>
+          </a:prstGeom>
+          <a:solidFill>
+            <a:srgbClr val="E8801A"/>
+          </a:solidFill>
+          <a:ln>
+            <a:noFill/>
+          </a:ln>
+          <a:effectLst/>
+        </p:spPr>
+        <p:style>
+          <a:lnRef idx="1">
+            <a:schemeClr val="accent1"/>
+          </a:lnRef>
+          <a:fillRef idx="3">
+            <a:schemeClr val="accent1"/>
+          </a:fillRef>
+          <a:effectRef idx="2">
+            <a:schemeClr val="accent1"/>
+          </a:effectRef>
+          <a:fontRef idx="minor">
+            <a:schemeClr val="lt1"/>
+          </a:fontRef>
+        </p:style>
+        <p:txBody>
+          <a:bodyPr rtlCol="0" anchor="ctr"/>
+          <a:lstStyle/>
+          <a:p>
+            <a:pPr algn="ctr"/>
+          </a:p>
+        </p:txBody>
+      </p:sp>
+      <p:sp>
+        <p:nvSpPr>
+          <p:cNvPr id="8" name="TextBox 7"/>
           <p:cNvSpPr txBox="1"/>
           <p:nvPr/>
         </p:nvSpPr>
         <p:spPr>
           <a:xfrm>
-            <a:off x="822960" y="1920240"/>
+            <a:off x="822960" y="1965960"/>
             <a:ext cx="4983480" cy="4206240"/>
           </a:xfrm>
           <a:prstGeom prst="rect">
@@ -11510,17 +12816,17 @@
           <a:p>
             <a:pPr>
               <a:spcAft>
-                <a:spcPts val="1000"/>
+                <a:spcPts val="1100"/>
               </a:spcAft>
             </a:pPr>
             <a:r>
               <a:rPr sz="1600" b="1" i="0">
                 <a:solidFill>
-                  <a:srgbClr val="2E3A80"/>
-                </a:solidFill>
-                <a:latin typeface="Montserrat"/>
-              </a:rPr>
-              <a:t>•  </a:t>
+                  <a:srgbClr val="E8801A"/>
+                </a:solidFill>
+                <a:latin typeface="Montserrat"/>
+              </a:rPr>
+              <a:t>▸  </a:t>
             </a:r>
             <a:r>
               <a:rPr sz="1600" b="0" i="0">
@@ -11529,23 +12835,23 @@
                 </a:solidFill>
                 <a:latin typeface="Montserrat"/>
               </a:rPr>
-              <a:t>Tipo A: aire del local, no evacúa</a:t>
+              <a:t>Aparato de gas: usa gas normalizado</a:t>
             </a:r>
           </a:p>
           <a:p>
             <a:pPr>
               <a:spcAft>
-                <a:spcPts val="1000"/>
+                <a:spcPts val="1100"/>
               </a:spcAft>
             </a:pPr>
             <a:r>
               <a:rPr sz="1600" b="1" i="0">
                 <a:solidFill>
-                  <a:srgbClr val="2E3A80"/>
-                </a:solidFill>
-                <a:latin typeface="Montserrat"/>
-              </a:rPr>
-              <a:t>•  </a:t>
+                  <a:srgbClr val="E8801A"/>
+                </a:solidFill>
+                <a:latin typeface="Montserrat"/>
+              </a:rPr>
+              <a:t>▸  </a:t>
             </a:r>
             <a:r>
               <a:rPr sz="1600" b="0" i="0">
@@ -11554,23 +12860,23 @@
                 </a:solidFill>
                 <a:latin typeface="Montserrat"/>
               </a:rPr>
-              <a:t>Tipo B: aire del local, evacúa por conducto</a:t>
+              <a:t>Circuito abierto: coge aire del local</a:t>
             </a:r>
           </a:p>
           <a:p>
             <a:pPr>
               <a:spcAft>
-                <a:spcPts val="1000"/>
+                <a:spcPts val="1100"/>
               </a:spcAft>
             </a:pPr>
             <a:r>
               <a:rPr sz="1600" b="1" i="0">
                 <a:solidFill>
-                  <a:srgbClr val="2E3A80"/>
-                </a:solidFill>
-                <a:latin typeface="Montserrat"/>
-              </a:rPr>
-              <a:t>•  </a:t>
+                  <a:srgbClr val="E8801A"/>
+                </a:solidFill>
+                <a:latin typeface="Montserrat"/>
+              </a:rPr>
+              <a:t>▸  </a:t>
             </a:r>
             <a:r>
               <a:rPr sz="1600" b="0" i="0">
@@ -11579,23 +12885,23 @@
                 </a:solidFill>
                 <a:latin typeface="Montserrat"/>
               </a:rPr>
-              <a:t>Tipo C: estanco, ni entra ni sale</a:t>
+              <a:t>Puede ser tipo A o tipo B</a:t>
             </a:r>
           </a:p>
           <a:p>
             <a:pPr>
               <a:spcAft>
-                <a:spcPts val="1000"/>
+                <a:spcPts val="1100"/>
               </a:spcAft>
             </a:pPr>
             <a:r>
               <a:rPr sz="1600" b="1" i="0">
                 <a:solidFill>
-                  <a:srgbClr val="2E3A80"/>
-                </a:solidFill>
-                <a:latin typeface="Montserrat"/>
-              </a:rPr>
-              <a:t>•  </a:t>
+                  <a:srgbClr val="E8801A"/>
+                </a:solidFill>
+                <a:latin typeface="Montserrat"/>
+              </a:rPr>
+              <a:t>▸  </a:t>
             </a:r>
             <a:r>
               <a:rPr sz="1600" b="0" i="0">
@@ -11604,14 +12910,14 @@
                 </a:solidFill>
                 <a:latin typeface="Montserrat"/>
               </a:rPr>
-              <a:t>A y B abiertos; C estanco</a:t>
-            </a:r>
-          </a:p>
-        </p:txBody>
-      </p:sp>
-      <p:sp>
-        <p:nvSpPr>
-          <p:cNvPr id="8" name="imgph" descr="IMGQ:modern sealed gas condensing boiler"/>
+              <a:t>El tipo C no es abierto</a:t>
+            </a:r>
+          </a:p>
+        </p:txBody>
+      </p:sp>
+      <p:sp>
+        <p:nvSpPr>
+          <p:cNvPr id="9" name="imgph" descr="IMGQ:domestic gas water heater on wall"/>
           <p:cNvSpPr/>
           <p:nvPr/>
         </p:nvSpPr>
@@ -11657,7 +12963,7 @@
       </p:sp>
       <p:sp>
         <p:nvSpPr>
-          <p:cNvPr id="9" name="TextBox 8"/>
+          <p:cNvPr id="10" name="TextBox 9"/>
           <p:cNvSpPr txBox="1"/>
           <p:nvPr/>
         </p:nvSpPr>
@@ -11697,7 +13003,7 @@
                 </a:solidFill>
                 <a:latin typeface="Montserrat"/>
               </a:rPr>
-              <a:t>modern sealed gas condensing boiler</a:t>
+              <a:t>domestic gas water heater on wall</a:t>
             </a:r>
           </a:p>
         </p:txBody>
@@ -11794,7 +13100,7 @@
                 </a:solidFill>
                 <a:latin typeface="Montserrat"/>
               </a:rPr>
-              <a:t>008 / 019</a:t>
+              <a:t>008 / 020</a:t>
             </a:r>
           </a:p>
         </p:txBody>
@@ -11842,7 +13148,7 @@
         <p:spPr>
           <a:xfrm>
             <a:off x="822960" y="457200"/>
-            <a:ext cx="8229600" cy="365760"/>
+            <a:ext cx="10058400" cy="365760"/>
           </a:xfrm>
           <a:prstGeom prst="rect">
             <a:avLst/>
@@ -11856,13 +13162,13 @@
           <a:lstStyle/>
           <a:p>
             <a:r>
-              <a:rPr sz="1200" b="1" i="0">
-                <a:solidFill>
-                  <a:srgbClr val="64748B"/>
-                </a:solidFill>
-                <a:latin typeface="Montserrat"/>
-              </a:rPr>
-              <a:t>TÉRMINOS 3.12 Y 3.13</a:t>
+              <a:rPr sz="1300" b="1" i="0">
+                <a:solidFill>
+                  <a:srgbClr val="E8801A"/>
+                </a:solidFill>
+                <a:latin typeface="Montserrat"/>
+              </a:rPr>
+              <a:t>TÉRMINOS 3.9 A 3.11</a:t>
             </a:r>
           </a:p>
         </p:txBody>
@@ -11890,26 +13196,70 @@
           <a:lstStyle/>
           <a:p>
             <a:r>
-              <a:rPr sz="2700" b="1" i="0">
+              <a:rPr sz="2800" b="1" i="0">
                 <a:solidFill>
                   <a:srgbClr val="1E2761"/>
                 </a:solidFill>
                 <a:latin typeface="Montserrat"/>
               </a:rPr>
-              <a:t>Aparato móvil y aparato popular</a:t>
-            </a:r>
-          </a:p>
-        </p:txBody>
-      </p:sp>
-      <p:sp>
-        <p:nvSpPr>
-          <p:cNvPr id="7" name="TextBox 6"/>
+              <a:t>Tipos A, B y C</a:t>
+            </a:r>
+          </a:p>
+        </p:txBody>
+      </p:sp>
+      <p:sp>
+        <p:nvSpPr>
+          <p:cNvPr id="7" name="Rounded Rectangle 6"/>
+          <p:cNvSpPr/>
+          <p:nvPr/>
+        </p:nvSpPr>
+        <p:spPr>
+          <a:xfrm>
+            <a:off x="868680" y="1627632"/>
+            <a:ext cx="2011680" cy="73152"/>
+          </a:xfrm>
+          <a:prstGeom prst="roundRect">
+            <a:avLst/>
+          </a:prstGeom>
+          <a:solidFill>
+            <a:srgbClr val="E8801A"/>
+          </a:solidFill>
+          <a:ln>
+            <a:noFill/>
+          </a:ln>
+          <a:effectLst/>
+        </p:spPr>
+        <p:style>
+          <a:lnRef idx="1">
+            <a:schemeClr val="accent1"/>
+          </a:lnRef>
+          <a:fillRef idx="3">
+            <a:schemeClr val="accent1"/>
+          </a:fillRef>
+          <a:effectRef idx="2">
+            <a:schemeClr val="accent1"/>
+          </a:effectRef>
+          <a:fontRef idx="minor">
+            <a:schemeClr val="lt1"/>
+          </a:fontRef>
+        </p:style>
+        <p:txBody>
+          <a:bodyPr rtlCol="0" anchor="ctr"/>
+          <a:lstStyle/>
+          <a:p>
+            <a:pPr algn="ctr"/>
+          </a:p>
+        </p:txBody>
+      </p:sp>
+      <p:sp>
+        <p:nvSpPr>
+          <p:cNvPr id="8" name="TextBox 7"/>
           <p:cNvSpPr txBox="1"/>
           <p:nvPr/>
         </p:nvSpPr>
         <p:spPr>
           <a:xfrm>
-            <a:off x="822960" y="1920240"/>
+            <a:off x="822960" y="1965960"/>
             <a:ext cx="4983480" cy="4206240"/>
           </a:xfrm>
           <a:prstGeom prst="rect">
@@ -11925,17 +13275,17 @@
           <a:p>
             <a:pPr>
               <a:spcAft>
-                <a:spcPts val="1000"/>
+                <a:spcPts val="1100"/>
               </a:spcAft>
             </a:pPr>
             <a:r>
               <a:rPr sz="1600" b="1" i="0">
                 <a:solidFill>
-                  <a:srgbClr val="2E3A80"/>
-                </a:solidFill>
-                <a:latin typeface="Montserrat"/>
-              </a:rPr>
-              <a:t>•  </a:t>
+                  <a:srgbClr val="E8801A"/>
+                </a:solidFill>
+                <a:latin typeface="Montserrat"/>
+              </a:rPr>
+              <a:t>▸  </a:t>
             </a:r>
             <a:r>
               <a:rPr sz="1600" b="0" i="0">
@@ -11944,23 +13294,23 @@
                 </a:solidFill>
                 <a:latin typeface="Montserrat"/>
               </a:rPr>
-              <a:t>Móvil: no está fijo, se puede desplazar</a:t>
+              <a:t>Tipo A: aire del local, no evacúa</a:t>
             </a:r>
           </a:p>
           <a:p>
             <a:pPr>
               <a:spcAft>
-                <a:spcPts val="1000"/>
+                <a:spcPts val="1100"/>
               </a:spcAft>
             </a:pPr>
             <a:r>
               <a:rPr sz="1600" b="1" i="0">
                 <a:solidFill>
-                  <a:srgbClr val="2E3A80"/>
-                </a:solidFill>
-                <a:latin typeface="Montserrat"/>
-              </a:rPr>
-              <a:t>•  </a:t>
+                  <a:srgbClr val="E8801A"/>
+                </a:solidFill>
+                <a:latin typeface="Montserrat"/>
+              </a:rPr>
+              <a:t>▸  </a:t>
             </a:r>
             <a:r>
               <a:rPr sz="1600" b="0" i="0">
@@ -11969,23 +13319,23 @@
                 </a:solidFill>
                 <a:latin typeface="Montserrat"/>
               </a:rPr>
-              <a:t>Nunca con tubería rígida</a:t>
+              <a:t>Tipo B: aire del local, evacúa por conducto</a:t>
             </a:r>
           </a:p>
           <a:p>
             <a:pPr>
               <a:spcAft>
-                <a:spcPts val="1000"/>
+                <a:spcPts val="1100"/>
               </a:spcAft>
             </a:pPr>
             <a:r>
               <a:rPr sz="1600" b="1" i="0">
                 <a:solidFill>
-                  <a:srgbClr val="2E3A80"/>
-                </a:solidFill>
-                <a:latin typeface="Montserrat"/>
-              </a:rPr>
-              <a:t>•  </a:t>
+                  <a:srgbClr val="E8801A"/>
+                </a:solidFill>
+                <a:latin typeface="Montserrat"/>
+              </a:rPr>
+              <a:t>▸  </a:t>
             </a:r>
             <a:r>
               <a:rPr sz="1600" b="0" i="0">
@@ -11994,23 +13344,23 @@
                 </a:solidFill>
                 <a:latin typeface="Montserrat"/>
               </a:rPr>
-              <a:t>Popular: solo envase ≤ 3 kg</a:t>
+              <a:t>Tipo C: estanco, ni entra ni sale</a:t>
             </a:r>
           </a:p>
           <a:p>
             <a:pPr>
               <a:spcAft>
-                <a:spcPts val="1000"/>
+                <a:spcPts val="1100"/>
               </a:spcAft>
             </a:pPr>
             <a:r>
               <a:rPr sz="1600" b="1" i="0">
                 <a:solidFill>
-                  <a:srgbClr val="2E3A80"/>
-                </a:solidFill>
-                <a:latin typeface="Montserrat"/>
-              </a:rPr>
-              <a:t>•  </a:t>
+                  <a:srgbClr val="E8801A"/>
+                </a:solidFill>
+                <a:latin typeface="Montserrat"/>
+              </a:rPr>
+              <a:t>▸  </a:t>
             </a:r>
             <a:r>
               <a:rPr sz="1600" b="0" i="0">
@@ -12019,14 +13369,14 @@
                 </a:solidFill>
                 <a:latin typeface="Montserrat"/>
               </a:rPr>
-              <a:t>El popular es el más pequeño</a:t>
-            </a:r>
-          </a:p>
-        </p:txBody>
-      </p:sp>
-      <p:sp>
-        <p:nvSpPr>
-          <p:cNvPr id="8" name="imgph" descr="IMGQ:small camping gas stove with cartridge"/>
+              <a:t>A y B abiertos; C estanco</a:t>
+            </a:r>
+          </a:p>
+        </p:txBody>
+      </p:sp>
+      <p:sp>
+        <p:nvSpPr>
+          <p:cNvPr id="9" name="imgph" descr="IMGQ:modern sealed gas condensing boiler"/>
           <p:cNvSpPr/>
           <p:nvPr/>
         </p:nvSpPr>
@@ -12072,7 +13422,7 @@
       </p:sp>
       <p:sp>
         <p:nvSpPr>
-          <p:cNvPr id="9" name="TextBox 8"/>
+          <p:cNvPr id="10" name="TextBox 9"/>
           <p:cNvSpPr txBox="1"/>
           <p:nvPr/>
         </p:nvSpPr>
@@ -12112,7 +13462,7 @@
                 </a:solidFill>
                 <a:latin typeface="Montserrat"/>
               </a:rPr>
-              <a:t>small camping gas stove with cartridge</a:t>
+              <a:t>modern sealed gas condensing boiler</a:t>
             </a:r>
           </a:p>
         </p:txBody>
@@ -12209,7 +13559,7 @@
                 </a:solidFill>
                 <a:latin typeface="Montserrat"/>
               </a:rPr>
-              <a:t>009 / 019</a:t>
+              <a:t>009 / 020</a:t>
             </a:r>
           </a:p>
         </p:txBody>
@@ -12257,7 +13607,7 @@
         <p:spPr>
           <a:xfrm>
             <a:off x="822960" y="457200"/>
-            <a:ext cx="8229600" cy="365760"/>
+            <a:ext cx="10058400" cy="365760"/>
           </a:xfrm>
           <a:prstGeom prst="rect">
             <a:avLst/>
@@ -12271,13 +13621,13 @@
           <a:lstStyle/>
           <a:p>
             <a:r>
-              <a:rPr sz="1200" b="1" i="0">
-                <a:solidFill>
-                  <a:srgbClr val="64748B"/>
-                </a:solidFill>
-                <a:latin typeface="Montserrat"/>
-              </a:rPr>
-              <a:t>TÉRMINOS 3.14 A 3.16</a:t>
+              <a:rPr sz="1300" b="1" i="0">
+                <a:solidFill>
+                  <a:srgbClr val="E8801A"/>
+                </a:solidFill>
+                <a:latin typeface="Montserrat"/>
+              </a:rPr>
+              <a:t>TÉRMINOS 3.12 Y 3.13</a:t>
             </a:r>
           </a:p>
         </p:txBody>
@@ -12305,26 +13655,70 @@
           <a:lstStyle/>
           <a:p>
             <a:r>
-              <a:rPr sz="2700" b="1" i="0">
+              <a:rPr sz="2800" b="1" i="0">
                 <a:solidFill>
                   <a:srgbClr val="1E2761"/>
                 </a:solidFill>
                 <a:latin typeface="Montserrat"/>
               </a:rPr>
-              <a:t>Aparcamiento y garaje</a:t>
-            </a:r>
-          </a:p>
-        </p:txBody>
-      </p:sp>
-      <p:sp>
-        <p:nvSpPr>
-          <p:cNvPr id="7" name="TextBox 6"/>
+              <a:t>Aparato móvil y aparato popular</a:t>
+            </a:r>
+          </a:p>
+        </p:txBody>
+      </p:sp>
+      <p:sp>
+        <p:nvSpPr>
+          <p:cNvPr id="7" name="Rounded Rectangle 6"/>
+          <p:cNvSpPr/>
+          <p:nvPr/>
+        </p:nvSpPr>
+        <p:spPr>
+          <a:xfrm>
+            <a:off x="868680" y="1627632"/>
+            <a:ext cx="2011680" cy="73152"/>
+          </a:xfrm>
+          <a:prstGeom prst="roundRect">
+            <a:avLst/>
+          </a:prstGeom>
+          <a:solidFill>
+            <a:srgbClr val="E8801A"/>
+          </a:solidFill>
+          <a:ln>
+            <a:noFill/>
+          </a:ln>
+          <a:effectLst/>
+        </p:spPr>
+        <p:style>
+          <a:lnRef idx="1">
+            <a:schemeClr val="accent1"/>
+          </a:lnRef>
+          <a:fillRef idx="3">
+            <a:schemeClr val="accent1"/>
+          </a:fillRef>
+          <a:effectRef idx="2">
+            <a:schemeClr val="accent1"/>
+          </a:effectRef>
+          <a:fontRef idx="minor">
+            <a:schemeClr val="lt1"/>
+          </a:fontRef>
+        </p:style>
+        <p:txBody>
+          <a:bodyPr rtlCol="0" anchor="ctr"/>
+          <a:lstStyle/>
+          <a:p>
+            <a:pPr algn="ctr"/>
+          </a:p>
+        </p:txBody>
+      </p:sp>
+      <p:sp>
+        <p:nvSpPr>
+          <p:cNvPr id="8" name="TextBox 7"/>
           <p:cNvSpPr txBox="1"/>
           <p:nvPr/>
         </p:nvSpPr>
         <p:spPr>
           <a:xfrm>
-            <a:off x="822960" y="1920240"/>
+            <a:off x="822960" y="1965960"/>
             <a:ext cx="4983480" cy="4206240"/>
           </a:xfrm>
           <a:prstGeom prst="rect">
@@ -12340,17 +13734,17 @@
           <a:p>
             <a:pPr>
               <a:spcAft>
-                <a:spcPts val="1000"/>
+                <a:spcPts val="1100"/>
               </a:spcAft>
             </a:pPr>
             <a:r>
               <a:rPr sz="1600" b="1" i="0">
                 <a:solidFill>
-                  <a:srgbClr val="2E3A80"/>
-                </a:solidFill>
-                <a:latin typeface="Montserrat"/>
-              </a:rPr>
-              <a:t>•  </a:t>
+                  <a:srgbClr val="E8801A"/>
+                </a:solidFill>
+                <a:latin typeface="Montserrat"/>
+              </a:rPr>
+              <a:t>▸  </a:t>
             </a:r>
             <a:r>
               <a:rPr sz="1600" b="0" i="0">
@@ -12359,23 +13753,23 @@
                 </a:solidFill>
                 <a:latin typeface="Montserrat"/>
               </a:rPr>
-              <a:t>Aparcamiento: superficie &gt; 100 m²</a:t>
+              <a:t>Móvil: no está fijo, se puede desplazar</a:t>
             </a:r>
           </a:p>
           <a:p>
             <a:pPr>
               <a:spcAft>
-                <a:spcPts val="1000"/>
+                <a:spcPts val="1100"/>
               </a:spcAft>
             </a:pPr>
             <a:r>
               <a:rPr sz="1600" b="1" i="0">
                 <a:solidFill>
-                  <a:srgbClr val="2E3A80"/>
-                </a:solidFill>
-                <a:latin typeface="Montserrat"/>
-              </a:rPr>
-              <a:t>•  </a:t>
+                  <a:srgbClr val="E8801A"/>
+                </a:solidFill>
+                <a:latin typeface="Montserrat"/>
+              </a:rPr>
+              <a:t>▸  </a:t>
             </a:r>
             <a:r>
               <a:rPr sz="1600" b="0" i="0">
@@ -12384,23 +13778,23 @@
                 </a:solidFill>
                 <a:latin typeface="Montserrat"/>
               </a:rPr>
-              <a:t>Garaje: ≤ 100 m²</a:t>
+              <a:t>Nunca con tubería rígida</a:t>
             </a:r>
           </a:p>
           <a:p>
             <a:pPr>
               <a:spcAft>
-                <a:spcPts val="1000"/>
+                <a:spcPts val="1100"/>
               </a:spcAft>
             </a:pPr>
             <a:r>
               <a:rPr sz="1600" b="1" i="0">
                 <a:solidFill>
-                  <a:srgbClr val="2E3A80"/>
-                </a:solidFill>
-                <a:latin typeface="Montserrat"/>
-              </a:rPr>
-              <a:t>•  </a:t>
+                  <a:srgbClr val="E8801A"/>
+                </a:solidFill>
+                <a:latin typeface="Montserrat"/>
+              </a:rPr>
+              <a:t>▸  </a:t>
             </a:r>
             <a:r>
               <a:rPr sz="1600" b="0" i="0">
@@ -12409,23 +13803,23 @@
                 </a:solidFill>
                 <a:latin typeface="Montserrat"/>
               </a:rPr>
-              <a:t>Abierto: aberturas ≥ 1/20, ≤ 0,5 m al techo</a:t>
+              <a:t>Popular: solo envase ≤ 3 kg</a:t>
             </a:r>
           </a:p>
           <a:p>
             <a:pPr>
               <a:spcAft>
-                <a:spcPts val="1000"/>
+                <a:spcPts val="1100"/>
               </a:spcAft>
             </a:pPr>
             <a:r>
               <a:rPr sz="1600" b="1" i="0">
                 <a:solidFill>
-                  <a:srgbClr val="2E3A80"/>
-                </a:solidFill>
-                <a:latin typeface="Montserrat"/>
-              </a:rPr>
-              <a:t>•  </a:t>
+                  <a:srgbClr val="E8801A"/>
+                </a:solidFill>
+                <a:latin typeface="Montserrat"/>
+              </a:rPr>
+              <a:t>▸  </a:t>
             </a:r>
             <a:r>
               <a:rPr sz="1600" b="0" i="0">
@@ -12434,14 +13828,14 @@
                 </a:solidFill>
                 <a:latin typeface="Montserrat"/>
               </a:rPr>
-              <a:t>Cerrado: el que no cumple</a:t>
-            </a:r>
-          </a:p>
-        </p:txBody>
-      </p:sp>
-      <p:sp>
-        <p:nvSpPr>
-          <p:cNvPr id="8" name="imgph" descr="IMGQ:underground parking garage ventilation"/>
+              <a:t>El popular es el más pequeño</a:t>
+            </a:r>
+          </a:p>
+        </p:txBody>
+      </p:sp>
+      <p:sp>
+        <p:nvSpPr>
+          <p:cNvPr id="9" name="imgph" descr="IMGQ:small camping gas stove with cartridge"/>
           <p:cNvSpPr/>
           <p:nvPr/>
         </p:nvSpPr>
@@ -12487,7 +13881,7 @@
       </p:sp>
       <p:sp>
         <p:nvSpPr>
-          <p:cNvPr id="9" name="TextBox 8"/>
+          <p:cNvPr id="10" name="TextBox 9"/>
           <p:cNvSpPr txBox="1"/>
           <p:nvPr/>
         </p:nvSpPr>
@@ -12527,7 +13921,7 @@
                 </a:solidFill>
                 <a:latin typeface="Montserrat"/>
               </a:rPr>
-              <a:t>underground parking garage ventilation</a:t>
+              <a:t>small camping gas stove with cartridge</a:t>
             </a:r>
           </a:p>
         </p:txBody>

--- a/Curso Gas B/09 - UNE 60670 - Generalidades y terminologia/09 - UNE 60670 - Generalidades y terminologia - Vídeo 2.pptx
+++ b/Curso Gas B/09 - UNE 60670 - Generalidades y terminologia/09 - UNE 60670 - Generalidades y terminologia - Vídeo 2.pptx
@@ -25,6 +25,12 @@
     <p:sldId id="273" r:id="rId25"/>
     <p:sldId id="274" r:id="rId26"/>
     <p:sldId id="275" r:id="rId27"/>
+    <p:sldId id="276" r:id="rId28"/>
+    <p:sldId id="277" r:id="rId29"/>
+    <p:sldId id="278" r:id="rId30"/>
+    <p:sldId id="279" r:id="rId31"/>
+    <p:sldId id="280" r:id="rId32"/>
+    <p:sldId id="281" r:id="rId33"/>
   </p:sldIdLst>
   <p:sldSz cx="12191695" cy="6858000" type="screen4x3"/>
   <p:notesSz cx="6858000" cy="9144000"/>
@@ -596,12 +602,12 @@
           <a:lstStyle/>
           <a:p>
             <a:r>
-              <a:t>N1: Aparcamiento y garaje, ¿no son lo mismo?</a:t>
-            </a:r>
-          </a:p>
-          <a:p>
-            <a:r>
-              <a:t>N2: Para la norma no, y el número que los separa es cien metros cuadrados. Si la superficie construida supera los cien metros cuadrados, es aparcamiento; si es igual o menor, es garaje, que veremos en el vídeo tres. Y dentro del aparcamiento hay dos clases. Abierto: sus fachadas tienen tanta abertura permanente al exterior que ventilan solas; en concreto, un área abierta de al menos un veinteavo de la superficie, con al menos un cuarentavo repartido de forma uniforme entre las paredes opuestas, y el borde superior de las aberturas a no más de medio metro del techo. Cerrado: el que no cumple eso. Por qué importa: cuanta más ventilación natural, menos riesgo de acumular gas; de ahí que la norma sea tan exigente con las aberturas.</a:t>
+              <a:t>N1: ¿Por qué la A?</a:t>
+            </a:r>
+          </a:p>
+          <a:p>
+            <a:r>
+              <a:t>N2: Porque el tipo C es estanco: su circuito de combustión no tiene ninguna comunicación con el aire del local. El tipo A coge aire del local y no evacúa fuera; el tipo B coge aire del local pero sí evacúa por conducto. Truco: el A no tira humos fuera, el B coge aire dentro y tira humos fuera, y el C ni entra ni sale del local.</a:t>
             </a:r>
           </a:p>
         </p:txBody>
@@ -671,12 +677,12 @@
           <a:lstStyle/>
           <a:p>
             <a:r>
-              <a:t>N1: Tanto armario y conducto, ¿cómo no me hago un lío?</a:t>
-            </a:r>
-          </a:p>
-          <a:p>
-            <a:r>
-              <a:t>N2: Los agrupamos por para qué sirven. El armario de contadores y regulación es un recinto ventilado, con puertas, que solo contiene contadores o reguladores, y en el que no pueden entrar personas; solo se abre para instalar o cambiar equipos. El armario-cocina es otra cosa: un recinto de cocción cuyo lado menor, con la puerta cerrada, es igual o menor de treinta centímetros; ese número, treinta centímetros, es el que lo define. Y los conductos: el conducto de tuberías es un canal, de obra o metálico, que puede alojar varias tuberías de gas; y el conducto técnico es ese hueco vertical junto a los rellanos que contiene, en cada planta, los contadores o reguladores que dan gas a las viviendas. Regla: el armario contiene equipos y no entra nadie; el conducto es un canal por donde pasan tuberías o donde se alojan los contadores planta a planta.</a:t>
+              <a:t>N1: ¿Aparato móvil es cualquier cosa que se pueda mover?</a:t>
+            </a:r>
+          </a:p>
+          <a:p>
+            <a:r>
+              <a:t>N2: Casi. Móvil es el que no está fijado al local ni a un mueble anclado a la estructura, y por tanto lo puedes mover para usarlo o recolocarlo, como una estufa de butano. Y hay una regla de seguridad que no falla: un aparato móvil no se puede conectar nunca con tubería rígida; siempre flexible, porque si va a moverse, un tubo rígido acabaría rompiendo por fatiga y tendrías fuga. El aparato popular es todavía más pequeño: solo se puede conectar a un envase de hasta tres kilos, como el infiernillo de camping. Piensa en el popular como un subconjunto de lo pequeño, y el número que lo marca son tres kilos.</a:t>
             </a:r>
           </a:p>
         </p:txBody>
@@ -746,12 +752,12 @@
           <a:lstStyle/>
           <a:p>
             <a:r>
-              <a:t>N1: ¿Qué diferencia hay entre chimenea y conducto de evacuación?</a:t>
-            </a:r>
-          </a:p>
-          <a:p>
-            <a:r>
-              <a:t>N2: La chimenea es la estructura, las paredes que encierran uno o varios conductos de humos. El conducto de evacuación es el tubo de dentro: un conducto continuo y estanco cuya misión es llevar los humos de los aparatos tipo B o tipo C hasta la chimenea o hasta el terminal de salida. Dos palabras clave ahí: continuo, sin cortes, y estanco, que no se escapen los humos por el camino, porque esos humos llevan monóxido. El collarín de evacuación es la boca del aparato tipo B por donde se enchufa a ese conducto. Y en los tipo C los conductos pueden ser concéntricos, un tubo dentro de otro, el de humos rodeado por el de aire; o independientes, dos tubos separados. Detalle de examen: esos conductos y el terminal forman parte del aparato, salvo que se diga lo contrario.</a:t>
+              <a:t>N1: Aparcamiento y garaje, ¿no son lo mismo?</a:t>
+            </a:r>
+          </a:p>
+          <a:p>
+            <a:r>
+              <a:t>N2: Para la norma no, y el número que los separa es cien metros cuadrados. Si la superficie construida supera los cien metros cuadrados, es aparcamiento; si es igual o menor, es garaje, que veremos en el vídeo tres. Y dentro del aparcamiento hay dos clases. Abierto: sus fachadas tienen tanta abertura permanente al exterior que ventilan solas; en concreto, un área abierta de al menos un veinteavo de la superficie, con al menos un cuarentavo repartido de forma uniforme entre las paredes opuestas, y el borde superior de las aberturas a no más de medio metro del techo. Cerrado: el que no cumple eso. Por qué importa: cuanta más ventilación natural, menos riesgo de acumular gas; de ahí que la norma sea tan exigente con las aberturas.</a:t>
             </a:r>
           </a:p>
         </p:txBody>
@@ -821,12 +827,12 @@
           <a:lstStyle/>
           <a:p>
             <a:r>
-              <a:t>N1: ¿Por qué hay dos condiciones distintas para medir el gas?</a:t>
-            </a:r>
-          </a:p>
-          <a:p>
-            <a:r>
-              <a:t>N2: Porque el gas cambia de volumen con la temperatura, así que para comparar hace falta una situación patrón, un punto de partida fijo. La norma define dos, y las dos comparten la misma presión, mil trece con veinticinco milibares, y el gas seco. La única diferencia es la temperatura. Condiciones de referencia: quince grados. Condiciones normales: cero grados. Truco para no fallar nunca: referencia, quince; normales, cero. De ahí salen las dos unidades de caudal que ves en las etiquetas, el metro cúbico estándar, medido a quince grados, y el metro cúbico normal, medido a cero grados. Cuando en obra veas metro cúbico ese o metro cúbico ene, ya sabes de dónde vienen.</a:t>
+              <a:t>N1: Un número que cae seguro: ¿dónde está la frontera entre aparcamiento y garaje?</a:t>
+            </a:r>
+          </a:p>
+          <a:p>
+            <a:r>
+              <a:t>N2: Pista: es una cifra redonda de metros cuadrados; piensa en la superficie construida.</a:t>
             </a:r>
           </a:p>
         </p:txBody>
@@ -896,12 +902,12 @@
           <a:lstStyle/>
           <a:p>
             <a:r>
-              <a:t>N1: Caudal, consumo, nominal, volumétrico, másico... ¿en qué se diferencian?</a:t>
-            </a:r>
-          </a:p>
-          <a:p>
-            <a:r>
-              <a:t>N2: Ordénalos por lo que miden. El caudal de diseño, qs, es el que usas para dimensionar la instalación, calculado a partir de lo que consumen todos los aparatos juntos; se da en metros cúbicos por hora. El consumo calorífico, Q, es la energía que gasta un aparato en un tiempo, y se expresa en kilovatios; el nominal, Qn, es ese valor pero el que declara el fabricante en la placa. Luego, según midas volumen o masa: el consumo volumétrico, qv, es el volumen de gas por hora, en metros cúbicos por hora; el másico, qm, es la masa por hora, en kilogramos por hora, típico del GLP. Regla rápida: Q va en kilovatios porque es energía; qv y qm van en volumen o en peso porque es cantidad de gas. Y qs es lo que sumas para elegir el diámetro de los tubos.</a:t>
+              <a:t>N1: ¿Por qué cien metros cuadrados?</a:t>
+            </a:r>
+          </a:p>
+          <a:p>
+            <a:r>
+              <a:t>N2: Porque si la superficie construida supera los cien metros cuadrados es aparcamiento, y si es igual o inferior es garaje. Es de los datos que más se preguntan. Truco: por encima de cien, aparcamiento; hasta cien, garaje.</a:t>
             </a:r>
           </a:p>
         </p:txBody>
@@ -971,12 +977,12 @@
           <a:lstStyle/>
           <a:p>
             <a:r>
-              <a:t>N1: ¿La conexión de aparato es solo el tubo final?</a:t>
-            </a:r>
-          </a:p>
-          <a:p>
-            <a:r>
-              <a:t>N2: Es el último tramo, sí. La conexión de aparato va desde la llave de conexión del aparato, excluida, hasta el propio aparato, también excluido; o sea, lo que hay entre la llave y el aparato, y puede ser flexible o rígida. En una bombona pequeña acoplada a un aparato móvil, esa conexión la forman el regulador de la bombona y el tubo flexible. El conjunto de regulación con o sin medida es otra cosa: es el regulador de presión más todo lo que lo acompaña, filtro, llaves de corte, tomas de presión, válvulas de seguridad, y si hay que contar el consumo, el contador. Cuando todo eso va metido en un armario, se llama armario de regulación. Idea clara: la conexión es el tramo final hasta el aparato; el conjunto de regulación es el equipo que ajusta la presión y, si toca, mide.</a:t>
+              <a:t>N1: Tanto armario y conducto, ¿cómo no me hago un lío?</a:t>
+            </a:r>
+          </a:p>
+          <a:p>
+            <a:r>
+              <a:t>N2: Los agrupamos por para qué sirven. El armario de contadores y regulación es un recinto ventilado, con puertas, que solo contiene contadores o reguladores, y en el que no pueden entrar personas; solo se abre para instalar o cambiar equipos. El armario-cocina es otra cosa: un recinto de cocción cuyo lado menor, con la puerta cerrada, es igual o menor de treinta centímetros; ese número, treinta centímetros, es el que lo define. Y los conductos: el conducto de tuberías es un canal, de obra o metálico, que puede alojar varias tuberías de gas; y el conducto técnico es ese hueco vertical junto a los rellanos que contiene, en cada planta, los contadores o reguladores que dan gas a las viviendas. Regla: el armario contiene equipos y no entra nadie; el conducto es un canal por donde pasan tuberías o donde se alojan los contadores planta a planta.</a:t>
             </a:r>
           </a:p>
         </p:txBody>
@@ -1046,12 +1052,12 @@
           <a:lstStyle/>
           <a:p>
             <a:r>
-              <a:t>N1: El cortatiro y esos dispositivos, ¿no son todos lo mismo?</a:t>
-            </a:r>
-          </a:p>
-          <a:p>
-            <a:r>
-              <a:t>N2: No, y conviene no mezclarlos. El cortatiro es esa abertura de los aparatos B de tiro natural que estabiliza el tiro y evita que un golpe de aire apague o descontrole la llama. A su alrededor aparecen dos dispositivos que suenan parecido pero hacen cosas opuestas. El dispositivo de control de la evacuación, típico de los aparatos que se llaman BBS, vigila: si los humos se desbordan por el cortatiro hacia el local, para el quemador. El dispositivo de ayuda a la evacuación es lo contrario de vigilar: es un ventilador que se coloca después del cortatiro y empuja los humos para que salgan. Regla: uno vigila y corta si hay peligro; el otro simplemente empuja los humos hacia fuera.</a:t>
+              <a:t>N1: ¿Qué diferencia hay entre chimenea y conducto de evacuación?</a:t>
+            </a:r>
+          </a:p>
+          <a:p>
+            <a:r>
+              <a:t>N2: La chimenea es la estructura, las paredes que encierran uno o varios conductos de humos. El conducto de evacuación es el tubo de dentro: un conducto continuo y estanco cuya misión es llevar los humos de los aparatos tipo B o tipo C hasta la chimenea o hasta el terminal de salida. Dos palabras clave ahí: continuo, sin cortes, y estanco, que no se escapen los humos por el camino, porque esos humos llevan monóxido. El collarín de evacuación es la boca del aparato tipo B por donde se enchufa a ese conducto. Y en los tipo C los conductos pueden ser concéntricos, un tubo dentro de otro, el de humos rodeado por el de aire; o independientes, dos tubos separados. Detalle de examen: esos conductos y el terminal forman parte del aparato, salvo que se diga lo contrario.</a:t>
             </a:r>
           </a:p>
         </p:txBody>
@@ -1121,12 +1127,12 @@
           <a:lstStyle/>
           <a:p>
             <a:r>
-              <a:t>N1: ¿Cómo funciona la seguridad cuando hay una fuga?</a:t>
-            </a:r>
-          </a:p>
-          <a:p>
-            <a:r>
-              <a:t>N2: Se encadenan tres cosas. Primero el detector de gas: un aparato que huele el gas en el aire y, al llegar a cierta concentración, avisa y puede ordenar un corte. Ese corte lo hace el corte automático de gas, y aquí va el concepto clave de toda la seguridad del gas: es normalmente cerrado. Quiere decir que, si se va la luz o falla algo, el sistema se queda en la posición segura, que es cerrado, cortando el gas. Y una vez que salta, solo se reabre a mano, con rearme manual, nunca solo; así nadie se lleva una sorpresa. Además, la norma clasifica los espacios: emplazamiento peligroso es donde puede haber una atmósfera de gas explosiva y hacen falta precauciones; no peligroso, donde no se espera. Y atmósfera explosiva es la mezcla de gas y aire en la que, si prende, la llama se propaga a toda la mezcla.</a:t>
+              <a:t>N1: ¿Por qué hay dos condiciones distintas para medir el gas?</a:t>
+            </a:r>
+          </a:p>
+          <a:p>
+            <a:r>
+              <a:t>N2: Porque el gas cambia de volumen con la temperatura, así que para comparar hace falta una situación patrón, un punto de partida fijo. La norma define dos, y las dos comparten la misma presión, mil trece con veinticinco milibares, y el gas seco. La única diferencia es la temperatura. Condiciones de referencia: quince grados. Condiciones normales: cero grados. Truco para no fallar nunca: referencia, quince; normales, cero. De ahí salen las dos unidades de caudal que ves en las etiquetas, el metro cúbico estándar, medido a quince grados, y el metro cúbico normal, medido a cero grados. Cuando en obra veas metro cúbico ese o metro cúbico ene, ya sabes de dónde vienen.</a:t>
             </a:r>
           </a:p>
         </p:txBody>
@@ -1196,12 +1202,12 @@
           <a:lstStyle/>
           <a:p>
             <a:r>
-              <a:t>N1: ¿Qué es eso del índice de Wobbe y por qué clasifica los gases?</a:t>
-            </a:r>
-          </a:p>
-          <a:p>
-            <a:r>
-              <a:t>N2: El índice de Wobbe es como la huella de identidad de un gas. Se calcula dividiendo el poder calorífico del gas por la raíz cuadrada de su densidad relativa, y sirve para saber si dos gases se comportan igual en un mismo quemador. Con él se ordenan las tres familias, y estos rangos caen en el examen. Primera familia, los gases manufacturados y el aire metanado o propanado: Wobbe superior entre veintidós con cuatro y veinticuatro con ocho. Segunda familia, el gas natural: entre treinta y nueve con uno y cincuenta y cuatro con siete. Tercera familia, el GLP, butano y propano: entre setenta y dos con nueve y ochenta y siete con tres, en megajulios por metro cúbico. Truco: cuanto más pesado y energético el gas, mayor Wobbe; el GLP arriba, los manufacturados abajo. Y para qué sirve en obra: cada aparato está tarado a una familia; meterle gas de otra familia da llama amarilla, hollín y monóxido.</a:t>
+              <a:t>N1: Caudal, consumo, nominal, volumétrico, másico... ¿en qué se diferencian?</a:t>
+            </a:r>
+          </a:p>
+          <a:p>
+            <a:r>
+              <a:t>N2: Ordénalos por lo que miden. El caudal de diseño, qs, es el que usas para dimensionar la instalación, calculado a partir de lo que consumen todos los aparatos juntos; se da en metros cúbicos por hora. El consumo calorífico, Q, es la energía que gasta un aparato en un tiempo, y se expresa en kilovatios; el nominal, Qn, es ese valor pero el que declara el fabricante en la placa. Luego, según midas volumen o masa: el consumo volumétrico, qv, es el volumen de gas por hora, en metros cúbicos por hora; el másico, qm, es la masa por hora, en kilogramos por hora, típico del GLP. Regla rápida: Q va en kilovatios porque es energía; qv y qm van en volumen o en peso porque es cantidad de gas. Y qs es lo que sumas para elegir el diámetro de los tubos.</a:t>
             </a:r>
           </a:p>
         </p:txBody>
@@ -1271,12 +1277,12 @@
           <a:lstStyle/>
           <a:p>
             <a:r>
-              <a:t>N1: ¿Dónde acaba la parte común y empieza la individual?</a:t>
-            </a:r>
-          </a:p>
-          <a:p>
-            <a:r>
-              <a:t>N2: Todo se decide en una cadena de llaves, y con la regla de oro incluida-excluida. La instalación común va desde la llave de edificio, excluida, hasta las llaves de usuario, incluidas. La instalación individual arranca en la llave de usuario, excluida, y termina en las llaves de conexión de los aparatos, incluidas. Fíjate: la llave de usuario es la frontera; cierra la común y abre la individual. Por encima de las dos, la instalación receptora es el conjunto entero: desde la llave de acometida, excluida, hasta las llaves de conexión de aparato, incluidas, quedando fuera la conexión del aparato y el aparato mismo. Regla de oro: lo que pone la comunidad o la compañía va excluido; lo que es tuyo va incluido. Y un término suelto: intemperie es, sencillamente, a cielo descubierto, sin techo ni reparo. Por qué importa esto: ese límite decide qué tramo sometes a estanquidad y quién responde, la comunidad o el usuario.</a:t>
+              <a:t>N1: ¿La conexión de aparato es solo el tubo final?</a:t>
+            </a:r>
+          </a:p>
+          <a:p>
+            <a:r>
+              <a:t>N2: Es el último tramo, sí. La conexión de aparato va desde la llave de conexión del aparato, excluida, hasta el propio aparato, también excluido; o sea, lo que hay entre la llave y el aparato, y puede ser flexible o rígida. En una bombona pequeña acoplada a un aparato móvil, esa conexión la forman el regulador de la bombona y el tubo flexible. El conjunto de regulación con o sin medida es otra cosa: es el regulador de presión más todo lo que lo acompaña, filtro, llaves de corte, tomas de presión, válvulas de seguridad, y si hay que contar el consumo, el contador. Cuando todo eso va metido en un armario, se llama armario de regulación. Idea clara: la conexión es el tramo final hasta el aparato; el conjunto de regulación es el equipo que ajusta la presión y, si toca, mide.</a:t>
             </a:r>
           </a:p>
         </p:txBody>
@@ -1421,6 +1427,456 @@
           <a:lstStyle/>
           <a:p>
             <a:r>
+              <a:t>N1: El cortatiro y esos dispositivos, ¿no son todos lo mismo?</a:t>
+            </a:r>
+          </a:p>
+          <a:p>
+            <a:r>
+              <a:t>N2: No, y conviene no mezclarlos. El cortatiro es esa abertura de los aparatos B de tiro natural que estabiliza el tiro y evita que un golpe de aire apague o descontrole la llama. A su alrededor aparecen dos dispositivos que suenan parecido pero hacen cosas opuestas. El dispositivo de control de la evacuación, típico de los aparatos que se llaman BBS, vigila: si los humos se desbordan por el cortatiro hacia el local, para el quemador. El dispositivo de ayuda a la evacuación es lo contrario de vigilar: es un ventilador que se coloca después del cortatiro y empuja los humos para que salgan. Regla: uno vigila y corta si hay peligro; el otro simplemente empuja los humos hacia fuera.</a:t>
+            </a:r>
+          </a:p>
+        </p:txBody>
+      </p:sp>
+      <p:sp>
+        <p:nvSpPr>
+          <p:cNvPr id="4" name="Slide Number Placeholder 3"/>
+          <p:cNvSpPr>
+            <a:spLocks noGrp="1"/>
+          </p:cNvSpPr>
+          <p:nvPr>
+            <p:ph type="sldNum" idx="5" sz="quarter"/>
+          </p:nvPr>
+        </p:nvSpPr>
+        <p:spPr/>
+      </p:sp>
+    </p:spTree>
+  </p:cSld>
+  <p:clrMapOvr>
+    <a:masterClrMapping/>
+  </p:clrMapOvr>
+</p:notes>
+</file>
+
+<file path=ppt/notesSlides/notesSlide21.xml><?xml version="1.0" encoding="utf-8"?>
+<p:notes xmlns:a="http://schemas.openxmlformats.org/drawingml/2006/main" xmlns:p="http://schemas.openxmlformats.org/presentationml/2006/main" xmlns:r="http://schemas.openxmlformats.org/officeDocument/2006/relationships">
+  <p:cSld>
+    <p:spTree>
+      <p:nvGrpSpPr>
+        <p:cNvPr id="1" name=""/>
+        <p:cNvGrpSpPr/>
+        <p:nvPr/>
+      </p:nvGrpSpPr>
+      <p:grpSpPr>
+        <a:xfrm>
+          <a:off x="0" y="0"/>
+          <a:ext cx="0" cy="0"/>
+          <a:chOff x="0" y="0"/>
+          <a:chExt cx="0" cy="0"/>
+        </a:xfrm>
+      </p:grpSpPr>
+      <p:sp>
+        <p:nvSpPr>
+          <p:cNvPr id="2" name="Slide Image Placeholder 1"/>
+          <p:cNvSpPr>
+            <a:spLocks noGrp="1"/>
+          </p:cNvSpPr>
+          <p:nvPr>
+            <p:ph type="sldImg" idx="2"/>
+          </p:nvPr>
+        </p:nvSpPr>
+        <p:spPr/>
+      </p:sp>
+      <p:sp>
+        <p:nvSpPr>
+          <p:cNvPr id="3" name="Notes Placeholder 2"/>
+          <p:cNvSpPr>
+            <a:spLocks noGrp="1"/>
+          </p:cNvSpPr>
+          <p:nvPr>
+            <p:ph type="body" idx="3" sz="quarter"/>
+          </p:nvPr>
+        </p:nvSpPr>
+        <p:spPr/>
+        <p:txBody>
+          <a:bodyPr/>
+          <a:lstStyle/>
+          <a:p>
+            <a:r>
+              <a:t>N1: ¿Cómo funciona la seguridad cuando hay una fuga?</a:t>
+            </a:r>
+          </a:p>
+          <a:p>
+            <a:r>
+              <a:t>N2: Se encadenan tres cosas. Primero el detector de gas: un aparato que huele el gas en el aire y, al llegar a cierta concentración, avisa y puede ordenar un corte. Ese corte lo hace el corte automático de gas, y aquí va el concepto clave de toda la seguridad del gas: es normalmente cerrado. Quiere decir que, si se va la luz o falla algo, el sistema se queda en la posición segura, que es cerrado, cortando el gas. Y una vez que salta, solo se reabre a mano, con rearme manual, nunca solo; así nadie se lleva una sorpresa. Además, la norma clasifica los espacios: emplazamiento peligroso es donde puede haber una atmósfera de gas explosiva y hacen falta precauciones; no peligroso, donde no se espera. Y atmósfera explosiva es la mezcla de gas y aire en la que, si prende, la llama se propaga a toda la mezcla.</a:t>
+            </a:r>
+          </a:p>
+        </p:txBody>
+      </p:sp>
+      <p:sp>
+        <p:nvSpPr>
+          <p:cNvPr id="4" name="Slide Number Placeholder 3"/>
+          <p:cNvSpPr>
+            <a:spLocks noGrp="1"/>
+          </p:cNvSpPr>
+          <p:nvPr>
+            <p:ph type="sldNum" idx="5" sz="quarter"/>
+          </p:nvPr>
+        </p:nvSpPr>
+        <p:spPr/>
+      </p:sp>
+    </p:spTree>
+  </p:cSld>
+  <p:clrMapOvr>
+    <a:masterClrMapping/>
+  </p:clrMapOvr>
+</p:notes>
+</file>
+
+<file path=ppt/notesSlides/notesSlide22.xml><?xml version="1.0" encoding="utf-8"?>
+<p:notes xmlns:a="http://schemas.openxmlformats.org/drawingml/2006/main" xmlns:p="http://schemas.openxmlformats.org/presentationml/2006/main" xmlns:r="http://schemas.openxmlformats.org/officeDocument/2006/relationships">
+  <p:cSld>
+    <p:spTree>
+      <p:nvGrpSpPr>
+        <p:cNvPr id="1" name=""/>
+        <p:cNvGrpSpPr/>
+        <p:nvPr/>
+      </p:nvGrpSpPr>
+      <p:grpSpPr>
+        <a:xfrm>
+          <a:off x="0" y="0"/>
+          <a:ext cx="0" cy="0"/>
+          <a:chOff x="0" y="0"/>
+          <a:chExt cx="0" cy="0"/>
+        </a:xfrm>
+      </p:grpSpPr>
+      <p:sp>
+        <p:nvSpPr>
+          <p:cNvPr id="2" name="Slide Image Placeholder 1"/>
+          <p:cNvSpPr>
+            <a:spLocks noGrp="1"/>
+          </p:cNvSpPr>
+          <p:nvPr>
+            <p:ph type="sldImg" idx="2"/>
+          </p:nvPr>
+        </p:nvSpPr>
+        <p:spPr/>
+      </p:sp>
+      <p:sp>
+        <p:nvSpPr>
+          <p:cNvPr id="3" name="Notes Placeholder 2"/>
+          <p:cNvSpPr>
+            <a:spLocks noGrp="1"/>
+          </p:cNvSpPr>
+          <p:nvPr>
+            <p:ph type="body" idx="3" sz="quarter"/>
+          </p:nvPr>
+        </p:nvSpPr>
+        <p:spPr/>
+        <p:txBody>
+          <a:bodyPr/>
+          <a:lstStyle/>
+          <a:p>
+            <a:r>
+              <a:t>N1: ¿Qué es eso del índice de Wobbe y por qué clasifica los gases?</a:t>
+            </a:r>
+          </a:p>
+          <a:p>
+            <a:r>
+              <a:t>N2: El índice de Wobbe es como la huella de identidad de un gas. Se calcula dividiendo el poder calorífico del gas por la raíz cuadrada de su densidad relativa, y sirve para saber si dos gases se comportan igual en un mismo quemador. Con él se ordenan las tres familias, y estos rangos caen en el examen. Primera familia, los gases manufacturados y el aire metanado o propanado: Wobbe superior entre veintidós con cuatro y veinticuatro con ocho. Segunda familia, el gas natural: entre treinta y nueve con uno y cincuenta y cuatro con siete. Tercera familia, el GLP, butano y propano: entre setenta y dos con nueve y ochenta y siete con tres, en megajulios por metro cúbico. Truco: cuanto más pesado y energético el gas, mayor Wobbe; el GLP arriba, los manufacturados abajo. Y para qué sirve en obra: cada aparato está tarado a una familia; meterle gas de otra familia da llama amarilla, hollín y monóxido.</a:t>
+            </a:r>
+          </a:p>
+        </p:txBody>
+      </p:sp>
+      <p:sp>
+        <p:nvSpPr>
+          <p:cNvPr id="4" name="Slide Number Placeholder 3"/>
+          <p:cNvSpPr>
+            <a:spLocks noGrp="1"/>
+          </p:cNvSpPr>
+          <p:nvPr>
+            <p:ph type="sldNum" idx="5" sz="quarter"/>
+          </p:nvPr>
+        </p:nvSpPr>
+        <p:spPr/>
+      </p:sp>
+    </p:spTree>
+  </p:cSld>
+  <p:clrMapOvr>
+    <a:masterClrMapping/>
+  </p:clrMapOvr>
+</p:notes>
+</file>
+
+<file path=ppt/notesSlides/notesSlide23.xml><?xml version="1.0" encoding="utf-8"?>
+<p:notes xmlns:a="http://schemas.openxmlformats.org/drawingml/2006/main" xmlns:p="http://schemas.openxmlformats.org/presentationml/2006/main" xmlns:r="http://schemas.openxmlformats.org/officeDocument/2006/relationships">
+  <p:cSld>
+    <p:spTree>
+      <p:nvGrpSpPr>
+        <p:cNvPr id="1" name=""/>
+        <p:cNvGrpSpPr/>
+        <p:nvPr/>
+      </p:nvGrpSpPr>
+      <p:grpSpPr>
+        <a:xfrm>
+          <a:off x="0" y="0"/>
+          <a:ext cx="0" cy="0"/>
+          <a:chOff x="0" y="0"/>
+          <a:chExt cx="0" cy="0"/>
+        </a:xfrm>
+      </p:grpSpPr>
+      <p:sp>
+        <p:nvSpPr>
+          <p:cNvPr id="2" name="Slide Image Placeholder 1"/>
+          <p:cNvSpPr>
+            <a:spLocks noGrp="1"/>
+          </p:cNvSpPr>
+          <p:nvPr>
+            <p:ph type="sldImg" idx="2"/>
+          </p:nvPr>
+        </p:nvSpPr>
+        <p:spPr/>
+      </p:sp>
+      <p:sp>
+        <p:nvSpPr>
+          <p:cNvPr id="3" name="Notes Placeholder 2"/>
+          <p:cNvSpPr>
+            <a:spLocks noGrp="1"/>
+          </p:cNvSpPr>
+          <p:nvPr>
+            <p:ph type="body" idx="3" sz="quarter"/>
+          </p:nvPr>
+        </p:nvSpPr>
+        <p:spPr/>
+        <p:txBody>
+          <a:bodyPr/>
+          <a:lstStyle/>
+          <a:p>
+            <a:r>
+              <a:t>N1: ¿Dónde acaba la parte común y empieza la individual?</a:t>
+            </a:r>
+          </a:p>
+          <a:p>
+            <a:r>
+              <a:t>N2: Todo se decide en una cadena de llaves, y con la regla de oro incluida-excluida. La instalación común va desde la llave de edificio, excluida, hasta las llaves de usuario, incluidas. La instalación individual arranca en la llave de usuario, excluida, y termina en las llaves de conexión de los aparatos, incluidas. Fíjate: la llave de usuario es la frontera; cierra la común y abre la individual. Por encima de las dos, la instalación receptora es el conjunto entero: desde la llave de acometida, excluida, hasta las llaves de conexión de aparato, incluidas, quedando fuera la conexión del aparato y el aparato mismo. Regla de oro: lo que pone la comunidad o la compañía va excluido; lo que es tuyo va incluido. Y un término suelto: intemperie es, sencillamente, a cielo descubierto, sin techo ni reparo. Por qué importa esto: ese límite decide qué tramo sometes a estanquidad y quién responde, la comunidad o el usuario.</a:t>
+            </a:r>
+          </a:p>
+        </p:txBody>
+      </p:sp>
+      <p:sp>
+        <p:nvSpPr>
+          <p:cNvPr id="4" name="Slide Number Placeholder 3"/>
+          <p:cNvSpPr>
+            <a:spLocks noGrp="1"/>
+          </p:cNvSpPr>
+          <p:nvPr>
+            <p:ph type="sldNum" idx="5" sz="quarter"/>
+          </p:nvPr>
+        </p:nvSpPr>
+        <p:spPr/>
+      </p:sp>
+    </p:spTree>
+  </p:cSld>
+  <p:clrMapOvr>
+    <a:masterClrMapping/>
+  </p:clrMapOvr>
+</p:notes>
+</file>
+
+<file path=ppt/notesSlides/notesSlide24.xml><?xml version="1.0" encoding="utf-8"?>
+<p:notes xmlns:a="http://schemas.openxmlformats.org/drawingml/2006/main" xmlns:p="http://schemas.openxmlformats.org/presentationml/2006/main" xmlns:r="http://schemas.openxmlformats.org/officeDocument/2006/relationships">
+  <p:cSld>
+    <p:spTree>
+      <p:nvGrpSpPr>
+        <p:cNvPr id="1" name=""/>
+        <p:cNvGrpSpPr/>
+        <p:nvPr/>
+      </p:nvGrpSpPr>
+      <p:grpSpPr>
+        <a:xfrm>
+          <a:off x="0" y="0"/>
+          <a:ext cx="0" cy="0"/>
+          <a:chOff x="0" y="0"/>
+          <a:chExt cx="0" cy="0"/>
+        </a:xfrm>
+      </p:grpSpPr>
+      <p:sp>
+        <p:nvSpPr>
+          <p:cNvPr id="2" name="Slide Image Placeholder 1"/>
+          <p:cNvSpPr>
+            <a:spLocks noGrp="1"/>
+          </p:cNvSpPr>
+          <p:nvPr>
+            <p:ph type="sldImg" idx="2"/>
+          </p:nvPr>
+        </p:nvSpPr>
+        <p:spPr/>
+      </p:sp>
+      <p:sp>
+        <p:nvSpPr>
+          <p:cNvPr id="3" name="Notes Placeholder 2"/>
+          <p:cNvSpPr>
+            <a:spLocks noGrp="1"/>
+          </p:cNvSpPr>
+          <p:nvPr>
+            <p:ph type="body" idx="3" sz="quarter"/>
+          </p:nvPr>
+        </p:nvSpPr>
+        <p:spPr/>
+        <p:txBody>
+          <a:bodyPr/>
+          <a:lstStyle/>
+          <a:p>
+            <a:r>
+              <a:t>N1: La joya del examen: ¿qué llave marca la frontera entre lo común y lo individual?</a:t>
+            </a:r>
+          </a:p>
+          <a:p>
+            <a:r>
+              <a:t>N2: Pista: es la que pertenece a la instalación común pero da inicio a tu instalación de vivienda.</a:t>
+            </a:r>
+          </a:p>
+        </p:txBody>
+      </p:sp>
+      <p:sp>
+        <p:nvSpPr>
+          <p:cNvPr id="4" name="Slide Number Placeholder 3"/>
+          <p:cNvSpPr>
+            <a:spLocks noGrp="1"/>
+          </p:cNvSpPr>
+          <p:nvPr>
+            <p:ph type="sldNum" idx="5" sz="quarter"/>
+          </p:nvPr>
+        </p:nvSpPr>
+        <p:spPr/>
+      </p:sp>
+    </p:spTree>
+  </p:cSld>
+  <p:clrMapOvr>
+    <a:masterClrMapping/>
+  </p:clrMapOvr>
+</p:notes>
+</file>
+
+<file path=ppt/notesSlides/notesSlide25.xml><?xml version="1.0" encoding="utf-8"?>
+<p:notes xmlns:a="http://schemas.openxmlformats.org/drawingml/2006/main" xmlns:p="http://schemas.openxmlformats.org/presentationml/2006/main" xmlns:r="http://schemas.openxmlformats.org/officeDocument/2006/relationships">
+  <p:cSld>
+    <p:spTree>
+      <p:nvGrpSpPr>
+        <p:cNvPr id="1" name=""/>
+        <p:cNvGrpSpPr/>
+        <p:nvPr/>
+      </p:nvGrpSpPr>
+      <p:grpSpPr>
+        <a:xfrm>
+          <a:off x="0" y="0"/>
+          <a:ext cx="0" cy="0"/>
+          <a:chOff x="0" y="0"/>
+          <a:chExt cx="0" cy="0"/>
+        </a:xfrm>
+      </p:grpSpPr>
+      <p:sp>
+        <p:nvSpPr>
+          <p:cNvPr id="2" name="Slide Image Placeholder 1"/>
+          <p:cNvSpPr>
+            <a:spLocks noGrp="1"/>
+          </p:cNvSpPr>
+          <p:nvPr>
+            <p:ph type="sldImg" idx="2"/>
+          </p:nvPr>
+        </p:nvSpPr>
+        <p:spPr/>
+      </p:sp>
+      <p:sp>
+        <p:nvSpPr>
+          <p:cNvPr id="3" name="Notes Placeholder 2"/>
+          <p:cNvSpPr>
+            <a:spLocks noGrp="1"/>
+          </p:cNvSpPr>
+          <p:nvPr>
+            <p:ph type="body" idx="3" sz="quarter"/>
+          </p:nvPr>
+        </p:nvSpPr>
+        <p:spPr/>
+        <p:txBody>
+          <a:bodyPr/>
+          <a:lstStyle/>
+          <a:p>
+            <a:r>
+              <a:t>N1: ¿Por qué la llave de usuario?</a:t>
+            </a:r>
+          </a:p>
+          <a:p>
+            <a:r>
+              <a:t>N2: Porque la instalación común llega hasta las llaves de usuario, incluidas, y la individual arranca justo en la llave de usuario, excluida. Es la frontera: cierra la común y abre la individual. La regla de oro: lo que pone la comunidad va excluido, y lo tuyo va incluido.</a:t>
+            </a:r>
+          </a:p>
+        </p:txBody>
+      </p:sp>
+      <p:sp>
+        <p:nvSpPr>
+          <p:cNvPr id="4" name="Slide Number Placeholder 3"/>
+          <p:cNvSpPr>
+            <a:spLocks noGrp="1"/>
+          </p:cNvSpPr>
+          <p:nvPr>
+            <p:ph type="sldNum" idx="5" sz="quarter"/>
+          </p:nvPr>
+        </p:nvSpPr>
+        <p:spPr/>
+      </p:sp>
+    </p:spTree>
+  </p:cSld>
+  <p:clrMapOvr>
+    <a:masterClrMapping/>
+  </p:clrMapOvr>
+</p:notes>
+</file>
+
+<file path=ppt/notesSlides/notesSlide26.xml><?xml version="1.0" encoding="utf-8"?>
+<p:notes xmlns:a="http://schemas.openxmlformats.org/drawingml/2006/main" xmlns:p="http://schemas.openxmlformats.org/presentationml/2006/main" xmlns:r="http://schemas.openxmlformats.org/officeDocument/2006/relationships">
+  <p:cSld>
+    <p:spTree>
+      <p:nvGrpSpPr>
+        <p:cNvPr id="1" name=""/>
+        <p:cNvGrpSpPr/>
+        <p:nvPr/>
+      </p:nvGrpSpPr>
+      <p:grpSpPr>
+        <a:xfrm>
+          <a:off x="0" y="0"/>
+          <a:ext cx="0" cy="0"/>
+          <a:chOff x="0" y="0"/>
+          <a:chExt cx="0" cy="0"/>
+        </a:xfrm>
+      </p:grpSpPr>
+      <p:sp>
+        <p:nvSpPr>
+          <p:cNvPr id="2" name="Slide Image Placeholder 1"/>
+          <p:cNvSpPr>
+            <a:spLocks noGrp="1"/>
+          </p:cNvSpPr>
+          <p:nvPr>
+            <p:ph type="sldImg" idx="2"/>
+          </p:nvPr>
+        </p:nvSpPr>
+        <p:spPr/>
+      </p:sp>
+      <p:sp>
+        <p:nvSpPr>
+          <p:cNvPr id="3" name="Notes Placeholder 2"/>
+          <p:cNvSpPr>
+            <a:spLocks noGrp="1"/>
+          </p:cNvSpPr>
+          <p:nvPr>
+            <p:ph type="body" idx="3" sz="quarter"/>
+          </p:nvPr>
+        </p:nvSpPr>
+        <p:spPr/>
+        <p:txBody>
+          <a:bodyPr/>
+          <a:lstStyle/>
+          <a:p>
+            <a:r>
               <a:t>N1: Ha sido mucho vocabulario. ¿Cómo lo ato todo?</a:t>
             </a:r>
           </a:p>
@@ -1947,12 +2403,12 @@
           <a:lstStyle/>
           <a:p>
             <a:r>
-              <a:t>N1: ¿Aparato móvil es cualquier cosa que se pueda mover?</a:t>
-            </a:r>
-          </a:p>
-          <a:p>
-            <a:r>
-              <a:t>N2: Casi. Móvil es el que no está fijado al local ni a un mueble anclado a la estructura, y por tanto lo puedes mover para usarlo o recolocarlo, como una estufa de butano. Y hay una regla de seguridad que no falla: un aparato móvil no se puede conectar nunca con tubería rígida; siempre flexible, porque si va a moverse, un tubo rígido acabaría rompiendo por fatiga y tendrías fuga. El aparato popular es todavía más pequeño: solo se puede conectar a un envase de hasta tres kilos, como el infiernillo de camping. Piensa en el popular como un subconjunto de lo pequeño, y el número que lo marca son tres kilos.</a:t>
+              <a:t>N1: El concepto estrella del tema: ¿qué distingue al tipo C?</a:t>
+            </a:r>
+          </a:p>
+          <a:p>
+            <a:r>
+              <a:t>N2: Pista: es la caldera moderna que ni respira el aire de la cocina ni suelta humos en ella.</a:t>
             </a:r>
           </a:p>
         </p:txBody>
@@ -5038,7 +5494,7 @@
       </p:sp>
       <p:sp>
         <p:nvSpPr>
-          <p:cNvPr id="4" name="Rounded Rectangle 3"/>
+          <p:cNvPr id="4" name="Rectangle 3"/>
           <p:cNvSpPr/>
           <p:nvPr/>
         </p:nvSpPr>
@@ -5047,7 +5503,7 @@
             <a:off x="868680" y="2057400"/>
             <a:ext cx="1463040" cy="82296"/>
           </a:xfrm>
-          <a:prstGeom prst="roundRect">
+          <a:prstGeom prst="rect">
             <a:avLst/>
           </a:prstGeom>
           <a:solidFill>
@@ -5164,6 +5620,18 @@
   <p:clrMapOvr>
     <a:masterClrMapping/>
   </p:clrMapOvr>
+  <mc:AlternateContent xmlns:mc="http://schemas.openxmlformats.org/markup-compatibility/2006">
+    <mc:Choice xmlns:p14="http://schemas.microsoft.com/office/powerpoint/2010/main" Requires="p14">
+      <p:transition spd="med" p14:dur="700">
+        <p14:cube dir="l"/>
+      </p:transition>
+    </mc:Choice>
+    <mc:Fallback>
+      <p:transition spd="med">
+        <p:push dir="l"/>
+      </p:transition>
+    </mc:Fallback>
+  </mc:AlternateContent>
 </p:sld>
 </file>
 
@@ -5251,7 +5719,7 @@
                 </a:solidFill>
                 <a:latin typeface="Montserrat"/>
               </a:rPr>
-              <a:t>010 / 020</a:t>
+              <a:t>010 / 026</a:t>
             </a:r>
           </a:p>
         </p:txBody>
@@ -5292,88 +5760,20 @@
       </p:sp>
       <p:sp>
         <p:nvSpPr>
-          <p:cNvPr id="5" name="TextBox 4"/>
-          <p:cNvSpPr txBox="1"/>
-          <p:nvPr/>
-        </p:nvSpPr>
-        <p:spPr>
-          <a:xfrm>
-            <a:off x="822960" y="457200"/>
-            <a:ext cx="10058400" cy="365760"/>
-          </a:xfrm>
-          <a:prstGeom prst="rect">
-            <a:avLst/>
-          </a:prstGeom>
-          <a:noFill/>
-        </p:spPr>
-        <p:txBody>
-          <a:bodyPr wrap="square">
-            <a:spAutoFit/>
-          </a:bodyPr>
-          <a:lstStyle/>
-          <a:p>
-            <a:r>
-              <a:rPr sz="1300" b="1" i="0">
-                <a:solidFill>
-                  <a:srgbClr val="E8801A"/>
-                </a:solidFill>
-                <a:latin typeface="Montserrat"/>
-              </a:rPr>
-              <a:t>TÉRMINOS 3.14 A 3.16</a:t>
-            </a:r>
-          </a:p>
-        </p:txBody>
-      </p:sp>
-      <p:sp>
-        <p:nvSpPr>
-          <p:cNvPr id="6" name="TextBox 5"/>
-          <p:cNvSpPr txBox="1"/>
-          <p:nvPr/>
-        </p:nvSpPr>
-        <p:spPr>
-          <a:xfrm>
-            <a:off x="822960" y="868680"/>
-            <a:ext cx="10515600" cy="914400"/>
-          </a:xfrm>
-          <a:prstGeom prst="rect">
-            <a:avLst/>
-          </a:prstGeom>
-          <a:noFill/>
-        </p:spPr>
-        <p:txBody>
-          <a:bodyPr wrap="square">
-            <a:spAutoFit/>
-          </a:bodyPr>
-          <a:lstStyle/>
-          <a:p>
-            <a:r>
-              <a:rPr sz="2800" b="1" i="0">
-                <a:solidFill>
-                  <a:srgbClr val="1E2761"/>
-                </a:solidFill>
-                <a:latin typeface="Montserrat"/>
-              </a:rPr>
-              <a:t>Aparcamiento y garaje</a:t>
-            </a:r>
-          </a:p>
-        </p:txBody>
-      </p:sp>
-      <p:sp>
-        <p:nvSpPr>
-          <p:cNvPr id="7" name="Rounded Rectangle 6"/>
+          <p:cNvPr id="5" name="Rectangle 4"/>
           <p:cNvSpPr/>
           <p:nvPr/>
         </p:nvSpPr>
         <p:spPr>
           <a:xfrm>
-            <a:off x="868680" y="1627632"/>
-            <a:ext cx="2011680" cy="73152"/>
-          </a:xfrm>
-          <a:prstGeom prst="roundRect">
+            <a:off x="0" y="0"/>
+            <a:ext cx="12191695" cy="1143000"/>
+          </a:xfrm>
+          <a:prstGeom prst="rect">
             <a:avLst/>
           </a:prstGeom>
           <a:solidFill>
-            <a:srgbClr val="E8801A"/>
+            <a:srgbClr val="1E8E4B"/>
           </a:solidFill>
           <a:ln>
             <a:noFill/>
@@ -5404,14 +5804,14 @@
       </p:sp>
       <p:sp>
         <p:nvSpPr>
-          <p:cNvPr id="8" name="TextBox 7"/>
+          <p:cNvPr id="6" name="TextBox 5"/>
           <p:cNvSpPr txBox="1"/>
           <p:nvPr/>
         </p:nvSpPr>
         <p:spPr>
           <a:xfrm>
-            <a:off x="822960" y="1965960"/>
-            <a:ext cx="4983480" cy="4206240"/>
+            <a:off x="822960" y="274320"/>
+            <a:ext cx="10515600" cy="640080"/>
           </a:xfrm>
           <a:prstGeom prst="rect">
             <a:avLst/>
@@ -5424,127 +5824,72 @@
           </a:bodyPr>
           <a:lstStyle/>
           <a:p>
-            <a:pPr>
-              <a:spcAft>
-                <a:spcPts val="1100"/>
-              </a:spcAft>
-            </a:pPr>
-            <a:r>
-              <a:rPr sz="1600" b="1" i="0">
-                <a:solidFill>
-                  <a:srgbClr val="E8801A"/>
-                </a:solidFill>
-                <a:latin typeface="Montserrat"/>
-              </a:rPr>
-              <a:t>▸  </a:t>
-            </a:r>
-            <a:r>
-              <a:rPr sz="1600" b="0" i="0">
-                <a:solidFill>
-                  <a:srgbClr val="1B2330"/>
-                </a:solidFill>
-                <a:latin typeface="Montserrat"/>
-              </a:rPr>
-              <a:t>Aparcamiento: superficie &gt; 100 m²</a:t>
-            </a:r>
-          </a:p>
-          <a:p>
-            <a:pPr>
-              <a:spcAft>
-                <a:spcPts val="1100"/>
-              </a:spcAft>
-            </a:pPr>
-            <a:r>
-              <a:rPr sz="1600" b="1" i="0">
-                <a:solidFill>
-                  <a:srgbClr val="E8801A"/>
-                </a:solidFill>
-                <a:latin typeface="Montserrat"/>
-              </a:rPr>
-              <a:t>▸  </a:t>
-            </a:r>
-            <a:r>
-              <a:rPr sz="1600" b="0" i="0">
-                <a:solidFill>
-                  <a:srgbClr val="1B2330"/>
-                </a:solidFill>
-                <a:latin typeface="Montserrat"/>
-              </a:rPr>
-              <a:t>Garaje: ≤ 100 m²</a:t>
-            </a:r>
-          </a:p>
-          <a:p>
-            <a:pPr>
-              <a:spcAft>
-                <a:spcPts val="1100"/>
-              </a:spcAft>
-            </a:pPr>
-            <a:r>
-              <a:rPr sz="1600" b="1" i="0">
-                <a:solidFill>
-                  <a:srgbClr val="E8801A"/>
-                </a:solidFill>
-                <a:latin typeface="Montserrat"/>
-              </a:rPr>
-              <a:t>▸  </a:t>
-            </a:r>
-            <a:r>
-              <a:rPr sz="1600" b="0" i="0">
-                <a:solidFill>
-                  <a:srgbClr val="1B2330"/>
-                </a:solidFill>
-                <a:latin typeface="Montserrat"/>
-              </a:rPr>
-              <a:t>Abierto: aberturas ≥ 1/20, ≤ 0,5 m al techo</a:t>
-            </a:r>
-          </a:p>
-          <a:p>
-            <a:pPr>
-              <a:spcAft>
-                <a:spcPts val="1100"/>
-              </a:spcAft>
-            </a:pPr>
-            <a:r>
-              <a:rPr sz="1600" b="1" i="0">
-                <a:solidFill>
-                  <a:srgbClr val="E8801A"/>
-                </a:solidFill>
-                <a:latin typeface="Montserrat"/>
-              </a:rPr>
-              <a:t>▸  </a:t>
-            </a:r>
-            <a:r>
-              <a:rPr sz="1600" b="0" i="0">
-                <a:solidFill>
-                  <a:srgbClr val="1B2330"/>
-                </a:solidFill>
-                <a:latin typeface="Montserrat"/>
-              </a:rPr>
-              <a:t>Cerrado: el que no cumple</a:t>
-            </a:r>
-          </a:p>
-        </p:txBody>
-      </p:sp>
-      <p:sp>
-        <p:nvSpPr>
-          <p:cNvPr id="9" name="imgph" descr="IMGQ:underground parking garage ventilation"/>
+            <a:r>
+              <a:rPr sz="2400" b="1" i="0">
+                <a:solidFill>
+                  <a:srgbClr val="FFFFFF"/>
+                </a:solidFill>
+                <a:latin typeface="Montserrat"/>
+              </a:rPr>
+              <a:t>✔  RESPUESTA:  A</a:t>
+            </a:r>
+          </a:p>
+        </p:txBody>
+      </p:sp>
+      <p:sp>
+        <p:nvSpPr>
+          <p:cNvPr id="7" name="TextBox 6"/>
+          <p:cNvSpPr txBox="1"/>
+          <p:nvPr/>
+        </p:nvSpPr>
+        <p:spPr>
+          <a:xfrm>
+            <a:off x="822960" y="1417320"/>
+            <a:ext cx="10515600" cy="914400"/>
+          </a:xfrm>
+          <a:prstGeom prst="rect">
+            <a:avLst/>
+          </a:prstGeom>
+          <a:noFill/>
+        </p:spPr>
+        <p:txBody>
+          <a:bodyPr wrap="square">
+            <a:spAutoFit/>
+          </a:bodyPr>
+          <a:lstStyle/>
+          <a:p>
+            <a:r>
+              <a:rPr sz="1800" b="1" i="0">
+                <a:solidFill>
+                  <a:srgbClr val="64748B"/>
+                </a:solidFill>
+                <a:latin typeface="Montserrat"/>
+              </a:rPr>
+              <a:t>¿Qué caracteriza a un aparato de gas de tipo C?</a:t>
+            </a:r>
+          </a:p>
+        </p:txBody>
+      </p:sp>
+      <p:sp>
+        <p:nvSpPr>
+          <p:cNvPr id="8" name="Rounded Rectangle 7"/>
           <p:cNvSpPr/>
           <p:nvPr/>
         </p:nvSpPr>
         <p:spPr>
           <a:xfrm>
-            <a:off x="5806440" y="1051560"/>
-            <a:ext cx="5298947" cy="4629150"/>
+            <a:off x="822960" y="2514600"/>
+            <a:ext cx="10515600" cy="914400"/>
           </a:xfrm>
           <a:prstGeom prst="roundRect">
             <a:avLst/>
           </a:prstGeom>
           <a:solidFill>
-            <a:srgbClr val="F3F6FB"/>
+            <a:srgbClr val="E9F6EE"/>
           </a:solidFill>
           <a:ln w="12700">
             <a:solidFill>
-              <a:srgbClr val="C7D2E6"/>
+              <a:srgbClr val="1E8E4B"/>
             </a:solidFill>
           </a:ln>
           <a:effectLst/>
@@ -5573,14 +5918,14 @@
       </p:sp>
       <p:sp>
         <p:nvSpPr>
-          <p:cNvPr id="10" name="TextBox 9"/>
+          <p:cNvPr id="9" name="TextBox 8"/>
           <p:cNvSpPr txBox="1"/>
           <p:nvPr/>
         </p:nvSpPr>
         <p:spPr>
           <a:xfrm>
-            <a:off x="6080760" y="2726055"/>
-            <a:ext cx="4750307" cy="1280160"/>
+            <a:off x="1097280" y="2697480"/>
+            <a:ext cx="10058400" cy="640080"/>
           </a:xfrm>
           <a:prstGeom prst="rect">
             <a:avLst/>
@@ -5593,27 +5938,66 @@
           </a:bodyPr>
           <a:lstStyle/>
           <a:p>
-            <a:pPr algn="ctr"/>
-            <a:r>
-              <a:rPr sz="1400" b="1" i="0">
-                <a:solidFill>
-                  <a:srgbClr val="64748B"/>
-                </a:solidFill>
-                <a:latin typeface="Montserrat"/>
-              </a:rPr>
-              <a:t>IMAGEN REALISTA</a:t>
-            </a:r>
-          </a:p>
-          <a:p>
-            <a:pPr algn="ctr"/>
-            <a:r>
-              <a:rPr sz="1100" b="0" i="1">
-                <a:solidFill>
-                  <a:srgbClr val="64748B"/>
-                </a:solidFill>
-                <a:latin typeface="Montserrat"/>
-              </a:rPr>
-              <a:t>underground parking garage ventilation</a:t>
+            <a:r>
+              <a:rPr sz="1800" b="1" i="0">
+                <a:solidFill>
+                  <a:srgbClr val="1E8E4B"/>
+                </a:solidFill>
+                <a:latin typeface="Montserrat"/>
+              </a:rPr>
+              <a:t>A.  </a:t>
+            </a:r>
+            <a:r>
+              <a:rPr sz="1800" b="1" i="0">
+                <a:solidFill>
+                  <a:srgbClr val="1E2761"/>
+                </a:solidFill>
+                <a:latin typeface="Montserrat"/>
+              </a:rPr>
+              <a:t>Es estanco: ni toma aire del local ni evacúa humos en él</a:t>
+            </a:r>
+          </a:p>
+        </p:txBody>
+      </p:sp>
+      <p:sp>
+        <p:nvSpPr>
+          <p:cNvPr id="10" name="TextBox 9"/>
+          <p:cNvSpPr txBox="1"/>
+          <p:nvPr/>
+        </p:nvSpPr>
+        <p:spPr>
+          <a:xfrm>
+            <a:off x="822960" y="3749039"/>
+            <a:ext cx="10515600" cy="2194560"/>
+          </a:xfrm>
+          <a:prstGeom prst="rect">
+            <a:avLst/>
+          </a:prstGeom>
+          <a:noFill/>
+        </p:spPr>
+        <p:txBody>
+          <a:bodyPr wrap="square">
+            <a:spAutoFit/>
+          </a:bodyPr>
+          <a:lstStyle/>
+          <a:p>
+            <a:r>
+              <a:rPr sz="1500" b="1" i="0">
+                <a:solidFill>
+                  <a:srgbClr val="E8801A"/>
+                </a:solidFill>
+                <a:latin typeface="Montserrat"/>
+              </a:rPr>
+              <a:t>Por qué:  </a:t>
+            </a:r>
+            <a:r>
+              <a:rPr sz="1500" b="0" i="0">
+                <a:solidFill>
+                  <a:srgbClr val="1B2330"/>
+                </a:solidFill>
+                <a:latin typeface="Montserrat"/>
+              </a:rPr>
+              <a:t>El tipo C es estanco: su circuito de combustión no tiene comunicación alguna con la atmósfera del local.</a:t>
             </a:r>
           </a:p>
         </p:txBody>
@@ -5623,6 +6007,18 @@
   <p:clrMapOvr>
     <a:masterClrMapping/>
   </p:clrMapOvr>
+  <mc:AlternateContent xmlns:mc="http://schemas.openxmlformats.org/markup-compatibility/2006">
+    <mc:Choice xmlns:p14="http://schemas.microsoft.com/office/powerpoint/2010/main" Requires="p14">
+      <p:transition spd="med" p14:dur="700">
+        <p14:cube dir="r"/>
+      </p:transition>
+    </mc:Choice>
+    <mc:Fallback>
+      <p:transition spd="med">
+        <p:push dir="r"/>
+      </p:transition>
+    </mc:Fallback>
+  </mc:AlternateContent>
 </p:sld>
 </file>
 
@@ -5710,7 +6106,7 @@
                 </a:solidFill>
                 <a:latin typeface="Montserrat"/>
               </a:rPr>
-              <a:t>011 / 020</a:t>
+              <a:t>011 / 026</a:t>
             </a:r>
           </a:p>
         </p:txBody>
@@ -5778,7 +6174,7 @@
                 </a:solidFill>
                 <a:latin typeface="Montserrat"/>
               </a:rPr>
-              <a:t>TÉRMINOS 3.17 A 3.29</a:t>
+              <a:t>TÉRMINOS 3.12 Y 3.13</a:t>
             </a:r>
           </a:p>
         </p:txBody>
@@ -5812,14 +6208,14 @@
                 </a:solidFill>
                 <a:latin typeface="Montserrat"/>
               </a:rPr>
-              <a:t>Armarios, recintos y conductos</a:t>
-            </a:r>
-          </a:p>
-        </p:txBody>
-      </p:sp>
-      <p:sp>
-        <p:nvSpPr>
-          <p:cNvPr id="7" name="Rounded Rectangle 6"/>
+              <a:t>Aparato móvil y aparato popular</a:t>
+            </a:r>
+          </a:p>
+        </p:txBody>
+      </p:sp>
+      <p:sp>
+        <p:nvSpPr>
+          <p:cNvPr id="7" name="Rectangle 6"/>
           <p:cNvSpPr/>
           <p:nvPr/>
         </p:nvSpPr>
@@ -5828,7 +6224,7 @@
             <a:off x="868680" y="1627632"/>
             <a:ext cx="2011680" cy="73152"/>
           </a:xfrm>
-          <a:prstGeom prst="roundRect">
+          <a:prstGeom prst="rect">
             <a:avLst/>
           </a:prstGeom>
           <a:solidFill>
@@ -5869,8 +6265,8 @@
         </p:nvSpPr>
         <p:spPr>
           <a:xfrm>
-            <a:off x="822960" y="1965960"/>
-            <a:ext cx="4983480" cy="4206240"/>
+            <a:off x="6355080" y="1965960"/>
+            <a:ext cx="5029200" cy="4206240"/>
           </a:xfrm>
           <a:prstGeom prst="rect">
             <a:avLst/>
@@ -5904,7 +6300,7 @@
                 </a:solidFill>
                 <a:latin typeface="Montserrat"/>
               </a:rPr>
-              <a:t>Armario de contadores: no entran personas</a:t>
+              <a:t>Móvil: no está fijo, se puede desplazar</a:t>
             </a:r>
           </a:p>
           <a:p>
@@ -5929,7 +6325,7 @@
                 </a:solidFill>
                 <a:latin typeface="Montserrat"/>
               </a:rPr>
-              <a:t>Armario-cocina: lado menor ≤ 30 cm</a:t>
+              <a:t>Nunca con tubería rígida</a:t>
             </a:r>
           </a:p>
           <a:p>
@@ -5954,7 +6350,7 @@
                 </a:solidFill>
                 <a:latin typeface="Montserrat"/>
               </a:rPr>
-              <a:t>Conducto de tuberías: varias tuberías</a:t>
+              <a:t>Popular: solo envase ≤ 3 kg</a:t>
             </a:r>
           </a:p>
           <a:p>
@@ -5979,21 +6375,21 @@
                 </a:solidFill>
                 <a:latin typeface="Montserrat"/>
               </a:rPr>
-              <a:t>Conducto técnico: contadores por planta</a:t>
-            </a:r>
-          </a:p>
-        </p:txBody>
-      </p:sp>
-      <p:sp>
-        <p:nvSpPr>
-          <p:cNvPr id="9" name="imgph" descr="IMGQ:row of gas meters in ventilated cabinet"/>
+              <a:t>El popular es el más pequeño</a:t>
+            </a:r>
+          </a:p>
+        </p:txBody>
+      </p:sp>
+      <p:sp>
+        <p:nvSpPr>
+          <p:cNvPr id="9" name="imgph" descr="IMGQ:small camping gas stove with cartridge"/>
           <p:cNvSpPr/>
           <p:nvPr/>
         </p:nvSpPr>
         <p:spPr>
           <a:xfrm>
-            <a:off x="5806440" y="1051560"/>
-            <a:ext cx="5298947" cy="4629150"/>
+            <a:off x="822960" y="1965960"/>
+            <a:ext cx="5303520" cy="4572000"/>
           </a:xfrm>
           <a:prstGeom prst="roundRect">
             <a:avLst/>
@@ -6038,8 +6434,8 @@
         </p:nvSpPr>
         <p:spPr>
           <a:xfrm>
-            <a:off x="6080760" y="2726055"/>
-            <a:ext cx="4750307" cy="1280160"/>
+            <a:off x="1097280" y="3611880"/>
+            <a:ext cx="4754880" cy="1280160"/>
           </a:xfrm>
           <a:prstGeom prst="rect">
             <a:avLst/>
@@ -6060,7 +6456,7 @@
                 </a:solidFill>
                 <a:latin typeface="Montserrat"/>
               </a:rPr>
-              <a:t>IMAGEN REALISTA</a:t>
+              <a:t>IMAGEN</a:t>
             </a:r>
           </a:p>
           <a:p>
@@ -6072,7 +6468,7 @@
                 </a:solidFill>
                 <a:latin typeface="Montserrat"/>
               </a:rPr>
-              <a:t>row of gas meters in ventilated cabinet</a:t>
+              <a:t>small camping gas stove with cartridge</a:t>
             </a:r>
           </a:p>
         </p:txBody>
@@ -6082,6 +6478,18 @@
   <p:clrMapOvr>
     <a:masterClrMapping/>
   </p:clrMapOvr>
+  <mc:AlternateContent xmlns:mc="http://schemas.openxmlformats.org/markup-compatibility/2006">
+    <mc:Choice xmlns:p14="http://schemas.microsoft.com/office/powerpoint/2010/main" Requires="p14">
+      <p:transition spd="med" p14:dur="700">
+        <p14:cube dir="l"/>
+      </p:transition>
+    </mc:Choice>
+    <mc:Fallback>
+      <p:transition spd="med">
+        <p:push dir="l"/>
+      </p:transition>
+    </mc:Fallback>
+  </mc:AlternateContent>
 </p:sld>
 </file>
 
@@ -6169,7 +6577,7 @@
                 </a:solidFill>
                 <a:latin typeface="Montserrat"/>
               </a:rPr>
-              <a:t>012 / 020</a:t>
+              <a:t>012 / 026</a:t>
             </a:r>
           </a:p>
         </p:txBody>
@@ -6237,7 +6645,7 @@
                 </a:solidFill>
                 <a:latin typeface="Montserrat"/>
               </a:rPr>
-              <a:t>TÉRMINOS 3.23 A 3.30</a:t>
+              <a:t>TÉRMINOS 3.14 A 3.16</a:t>
             </a:r>
           </a:p>
         </p:txBody>
@@ -6271,14 +6679,14 @@
                 </a:solidFill>
                 <a:latin typeface="Montserrat"/>
               </a:rPr>
-              <a:t>Chimenea, conductos y evacuación</a:t>
-            </a:r>
-          </a:p>
-        </p:txBody>
-      </p:sp>
-      <p:sp>
-        <p:nvSpPr>
-          <p:cNvPr id="7" name="Rounded Rectangle 6"/>
+              <a:t>Aparcamiento y garaje</a:t>
+            </a:r>
+          </a:p>
+        </p:txBody>
+      </p:sp>
+      <p:sp>
+        <p:nvSpPr>
+          <p:cNvPr id="7" name="Rectangle 6"/>
           <p:cNvSpPr/>
           <p:nvPr/>
         </p:nvSpPr>
@@ -6287,7 +6695,7 @@
             <a:off x="868680" y="1627632"/>
             <a:ext cx="2011680" cy="73152"/>
           </a:xfrm>
-          <a:prstGeom prst="roundRect">
+          <a:prstGeom prst="rect">
             <a:avLst/>
           </a:prstGeom>
           <a:solidFill>
@@ -6329,7 +6737,7 @@
         <p:spPr>
           <a:xfrm>
             <a:off x="822960" y="1965960"/>
-            <a:ext cx="4983480" cy="4206240"/>
+            <a:ext cx="5029200" cy="4206240"/>
           </a:xfrm>
           <a:prstGeom prst="rect">
             <a:avLst/>
@@ -6363,7 +6771,7 @@
                 </a:solidFill>
                 <a:latin typeface="Montserrat"/>
               </a:rPr>
-              <a:t>Conducto de evacuación: continuo y estanco</a:t>
+              <a:t>Aparcamiento: superficie &gt; 100 m²</a:t>
             </a:r>
           </a:p>
           <a:p>
@@ -6388,7 +6796,7 @@
                 </a:solidFill>
                 <a:latin typeface="Montserrat"/>
               </a:rPr>
-              <a:t>Para aparatos tipo B o C</a:t>
+              <a:t>Garaje: ≤ 100 m²</a:t>
             </a:r>
           </a:p>
           <a:p>
@@ -6413,7 +6821,7 @@
                 </a:solidFill>
                 <a:latin typeface="Montserrat"/>
               </a:rPr>
-              <a:t>Collarín: la boca del tipo B</a:t>
+              <a:t>Abierto: aberturas ≥ 1/20, ≤ 0,5 m al techo</a:t>
             </a:r>
           </a:p>
           <a:p>
@@ -6438,21 +6846,21 @@
                 </a:solidFill>
                 <a:latin typeface="Montserrat"/>
               </a:rPr>
-              <a:t>Concéntricos o independientes</a:t>
-            </a:r>
-          </a:p>
-        </p:txBody>
-      </p:sp>
-      <p:sp>
-        <p:nvSpPr>
-          <p:cNvPr id="9" name="imgph" descr="IMGQ:concentric flue pipe on gas boiler"/>
+              <a:t>Cerrado: el que no cumple</a:t>
+            </a:r>
+          </a:p>
+        </p:txBody>
+      </p:sp>
+      <p:sp>
+        <p:nvSpPr>
+          <p:cNvPr id="9" name="imgph" descr="IMGQ:underground parking garage ventilation"/>
           <p:cNvSpPr/>
           <p:nvPr/>
         </p:nvSpPr>
         <p:spPr>
           <a:xfrm>
-            <a:off x="5806440" y="1051560"/>
-            <a:ext cx="5298947" cy="4629150"/>
+            <a:off x="6080760" y="1965960"/>
+            <a:ext cx="5303520" cy="4572000"/>
           </a:xfrm>
           <a:prstGeom prst="roundRect">
             <a:avLst/>
@@ -6497,8 +6905,8 @@
         </p:nvSpPr>
         <p:spPr>
           <a:xfrm>
-            <a:off x="6080760" y="2726055"/>
-            <a:ext cx="4750307" cy="1280160"/>
+            <a:off x="6355080" y="3611880"/>
+            <a:ext cx="4754880" cy="1280160"/>
           </a:xfrm>
           <a:prstGeom prst="rect">
             <a:avLst/>
@@ -6519,7 +6927,7 @@
                 </a:solidFill>
                 <a:latin typeface="Montserrat"/>
               </a:rPr>
-              <a:t>IMAGEN REALISTA</a:t>
+              <a:t>IMAGEN</a:t>
             </a:r>
           </a:p>
           <a:p>
@@ -6531,7 +6939,7 @@
                 </a:solidFill>
                 <a:latin typeface="Montserrat"/>
               </a:rPr>
-              <a:t>concentric flue pipe on gas boiler</a:t>
+              <a:t>underground parking garage ventilation</a:t>
             </a:r>
           </a:p>
         </p:txBody>
@@ -6541,6 +6949,18 @@
   <p:clrMapOvr>
     <a:masterClrMapping/>
   </p:clrMapOvr>
+  <mc:AlternateContent xmlns:mc="http://schemas.openxmlformats.org/markup-compatibility/2006">
+    <mc:Choice xmlns:p14="http://schemas.microsoft.com/office/powerpoint/2010/main" Requires="p14">
+      <p:transition spd="med" p14:dur="700">
+        <p14:cube dir="r"/>
+      </p:transition>
+    </mc:Choice>
+    <mc:Fallback>
+      <p:transition spd="med">
+        <p:push dir="r"/>
+      </p:transition>
+    </mc:Fallback>
+  </mc:AlternateContent>
 </p:sld>
 </file>
 
@@ -6628,7 +7048,7 @@
                 </a:solidFill>
                 <a:latin typeface="Montserrat"/>
               </a:rPr>
-              <a:t>013 / 020</a:t>
+              <a:t>013 / 026</a:t>
             </a:r>
           </a:p>
         </p:txBody>
@@ -6669,84 +7089,16 @@
       </p:sp>
       <p:sp>
         <p:nvSpPr>
-          <p:cNvPr id="5" name="TextBox 4"/>
-          <p:cNvSpPr txBox="1"/>
-          <p:nvPr/>
-        </p:nvSpPr>
-        <p:spPr>
-          <a:xfrm>
-            <a:off x="822960" y="457200"/>
-            <a:ext cx="10058400" cy="365760"/>
-          </a:xfrm>
-          <a:prstGeom prst="rect">
-            <a:avLst/>
-          </a:prstGeom>
-          <a:noFill/>
-        </p:spPr>
-        <p:txBody>
-          <a:bodyPr wrap="square">
-            <a:spAutoFit/>
-          </a:bodyPr>
-          <a:lstStyle/>
-          <a:p>
-            <a:r>
-              <a:rPr sz="1300" b="1" i="0">
-                <a:solidFill>
-                  <a:srgbClr val="E8801A"/>
-                </a:solidFill>
-                <a:latin typeface="Montserrat"/>
-              </a:rPr>
-              <a:t>TÉRMINOS 3.25 Y 3.26</a:t>
-            </a:r>
-          </a:p>
-        </p:txBody>
-      </p:sp>
-      <p:sp>
-        <p:nvSpPr>
-          <p:cNvPr id="6" name="TextBox 5"/>
-          <p:cNvSpPr txBox="1"/>
-          <p:nvPr/>
-        </p:nvSpPr>
-        <p:spPr>
-          <a:xfrm>
-            <a:off x="822960" y="868680"/>
-            <a:ext cx="10515600" cy="914400"/>
-          </a:xfrm>
-          <a:prstGeom prst="rect">
-            <a:avLst/>
-          </a:prstGeom>
-          <a:noFill/>
-        </p:spPr>
-        <p:txBody>
-          <a:bodyPr wrap="square">
-            <a:spAutoFit/>
-          </a:bodyPr>
-          <a:lstStyle/>
-          <a:p>
-            <a:r>
-              <a:rPr sz="2800" b="1" i="0">
-                <a:solidFill>
-                  <a:srgbClr val="1E2761"/>
-                </a:solidFill>
-                <a:latin typeface="Montserrat"/>
-              </a:rPr>
-              <a:t>Referencia frente a normales</a:t>
-            </a:r>
-          </a:p>
-        </p:txBody>
-      </p:sp>
-      <p:sp>
-        <p:nvSpPr>
-          <p:cNvPr id="7" name="Rounded Rectangle 6"/>
+          <p:cNvPr id="5" name="Rectangle 4"/>
           <p:cNvSpPr/>
           <p:nvPr/>
         </p:nvSpPr>
         <p:spPr>
           <a:xfrm>
-            <a:off x="868680" y="1627632"/>
-            <a:ext cx="2011680" cy="73152"/>
-          </a:xfrm>
-          <a:prstGeom prst="roundRect">
+            <a:off x="0" y="0"/>
+            <a:ext cx="12191695" cy="1143000"/>
+          </a:xfrm>
+          <a:prstGeom prst="rect">
             <a:avLst/>
           </a:prstGeom>
           <a:solidFill>
@@ -6781,14 +7133,14 @@
       </p:sp>
       <p:sp>
         <p:nvSpPr>
-          <p:cNvPr id="8" name="TextBox 7"/>
+          <p:cNvPr id="6" name="TextBox 5"/>
           <p:cNvSpPr txBox="1"/>
           <p:nvPr/>
         </p:nvSpPr>
         <p:spPr>
           <a:xfrm>
-            <a:off x="822960" y="1965960"/>
-            <a:ext cx="4983480" cy="4206240"/>
+            <a:off x="822960" y="274320"/>
+            <a:ext cx="10515600" cy="640080"/>
           </a:xfrm>
           <a:prstGeom prst="rect">
             <a:avLst/>
@@ -6801,117 +7153,62 @@
           </a:bodyPr>
           <a:lstStyle/>
           <a:p>
-            <a:pPr>
-              <a:spcAft>
-                <a:spcPts val="1100"/>
-              </a:spcAft>
-            </a:pPr>
-            <a:r>
-              <a:rPr sz="1600" b="1" i="0">
-                <a:solidFill>
-                  <a:srgbClr val="E8801A"/>
-                </a:solidFill>
-                <a:latin typeface="Montserrat"/>
-              </a:rPr>
-              <a:t>▸  </a:t>
-            </a:r>
-            <a:r>
-              <a:rPr sz="1600" b="0" i="0">
-                <a:solidFill>
-                  <a:srgbClr val="1B2330"/>
-                </a:solidFill>
-                <a:latin typeface="Montserrat"/>
-              </a:rPr>
-              <a:t>Referencia: 15 °C</a:t>
-            </a:r>
-          </a:p>
-          <a:p>
-            <a:pPr>
-              <a:spcAft>
-                <a:spcPts val="1100"/>
-              </a:spcAft>
-            </a:pPr>
-            <a:r>
-              <a:rPr sz="1600" b="1" i="0">
-                <a:solidFill>
-                  <a:srgbClr val="E8801A"/>
-                </a:solidFill>
-                <a:latin typeface="Montserrat"/>
-              </a:rPr>
-              <a:t>▸  </a:t>
-            </a:r>
-            <a:r>
-              <a:rPr sz="1600" b="0" i="0">
-                <a:solidFill>
-                  <a:srgbClr val="1B2330"/>
-                </a:solidFill>
-                <a:latin typeface="Montserrat"/>
-              </a:rPr>
-              <a:t>Normales: 0 °C</a:t>
-            </a:r>
-          </a:p>
-          <a:p>
-            <a:pPr>
-              <a:spcAft>
-                <a:spcPts val="1100"/>
-              </a:spcAft>
-            </a:pPr>
-            <a:r>
-              <a:rPr sz="1600" b="1" i="0">
-                <a:solidFill>
-                  <a:srgbClr val="E8801A"/>
-                </a:solidFill>
-                <a:latin typeface="Montserrat"/>
-              </a:rPr>
-              <a:t>▸  </a:t>
-            </a:r>
-            <a:r>
-              <a:rPr sz="1600" b="0" i="0">
-                <a:solidFill>
-                  <a:srgbClr val="1B2330"/>
-                </a:solidFill>
-                <a:latin typeface="Montserrat"/>
-              </a:rPr>
-              <a:t>Las dos a 1 013,25 mbar</a:t>
-            </a:r>
-          </a:p>
-          <a:p>
-            <a:pPr>
-              <a:spcAft>
-                <a:spcPts val="1100"/>
-              </a:spcAft>
-            </a:pPr>
-            <a:r>
-              <a:rPr sz="1600" b="1" i="0">
-                <a:solidFill>
-                  <a:srgbClr val="E8801A"/>
-                </a:solidFill>
-                <a:latin typeface="Montserrat"/>
-              </a:rPr>
-              <a:t>▸  </a:t>
-            </a:r>
-            <a:r>
-              <a:rPr sz="1600" b="0" i="0">
-                <a:solidFill>
-                  <a:srgbClr val="1B2330"/>
-                </a:solidFill>
-                <a:latin typeface="Montserrat"/>
-              </a:rPr>
-              <a:t>Referencia quince, normales cero</a:t>
-            </a:r>
-          </a:p>
-        </p:txBody>
-      </p:sp>
-      <p:sp>
-        <p:nvSpPr>
-          <p:cNvPr id="9" name="imgph" descr="IMGQ:gas pressure gauge and thermometer"/>
+            <a:r>
+              <a:rPr sz="2400" b="1" i="0">
+                <a:solidFill>
+                  <a:srgbClr val="FFFFFF"/>
+                </a:solidFill>
+                <a:latin typeface="Montserrat"/>
+              </a:rPr>
+              <a:t>⚡  PREGUNTA RÁPIDA</a:t>
+            </a:r>
+          </a:p>
+        </p:txBody>
+      </p:sp>
+      <p:sp>
+        <p:nvSpPr>
+          <p:cNvPr id="7" name="TextBox 6"/>
+          <p:cNvSpPr txBox="1"/>
+          <p:nvPr/>
+        </p:nvSpPr>
+        <p:spPr>
+          <a:xfrm>
+            <a:off x="822960" y="1508760"/>
+            <a:ext cx="10515600" cy="1371600"/>
+          </a:xfrm>
+          <a:prstGeom prst="rect">
+            <a:avLst/>
+          </a:prstGeom>
+          <a:noFill/>
+        </p:spPr>
+        <p:txBody>
+          <a:bodyPr wrap="square">
+            <a:spAutoFit/>
+          </a:bodyPr>
+          <a:lstStyle/>
+          <a:p>
+            <a:r>
+              <a:rPr sz="2400" b="1" i="0">
+                <a:solidFill>
+                  <a:srgbClr val="1E2761"/>
+                </a:solidFill>
+                <a:latin typeface="Montserrat"/>
+              </a:rPr>
+              <a:t>¿Qué superficie construida separa un aparcamiento de un garaje?</a:t>
+            </a:r>
+          </a:p>
+        </p:txBody>
+      </p:sp>
+      <p:sp>
+        <p:nvSpPr>
+          <p:cNvPr id="8" name="Rounded Rectangle 7"/>
           <p:cNvSpPr/>
           <p:nvPr/>
         </p:nvSpPr>
         <p:spPr>
           <a:xfrm>
-            <a:off x="5806440" y="1051560"/>
-            <a:ext cx="5298947" cy="4629150"/>
+            <a:off x="822960" y="3291840"/>
+            <a:ext cx="4983480" cy="1143000"/>
           </a:xfrm>
           <a:prstGeom prst="roundRect">
             <a:avLst/>
@@ -6950,14 +7247,58 @@
       </p:sp>
       <p:sp>
         <p:nvSpPr>
+          <p:cNvPr id="9" name="Rectangle 8"/>
+          <p:cNvSpPr/>
+          <p:nvPr/>
+        </p:nvSpPr>
+        <p:spPr>
+          <a:xfrm>
+            <a:off x="822960" y="3291840"/>
+            <a:ext cx="640080" cy="1143000"/>
+          </a:xfrm>
+          <a:prstGeom prst="rect">
+            <a:avLst/>
+          </a:prstGeom>
+          <a:solidFill>
+            <a:srgbClr val="1E2761"/>
+          </a:solidFill>
+          <a:ln>
+            <a:noFill/>
+          </a:ln>
+          <a:effectLst/>
+        </p:spPr>
+        <p:style>
+          <a:lnRef idx="1">
+            <a:schemeClr val="accent1"/>
+          </a:lnRef>
+          <a:fillRef idx="3">
+            <a:schemeClr val="accent1"/>
+          </a:fillRef>
+          <a:effectRef idx="2">
+            <a:schemeClr val="accent1"/>
+          </a:effectRef>
+          <a:fontRef idx="minor">
+            <a:schemeClr val="lt1"/>
+          </a:fontRef>
+        </p:style>
+        <p:txBody>
+          <a:bodyPr rtlCol="0" anchor="ctr"/>
+          <a:lstStyle/>
+          <a:p>
+            <a:pPr algn="ctr"/>
+          </a:p>
+        </p:txBody>
+      </p:sp>
+      <p:sp>
+        <p:nvSpPr>
           <p:cNvPr id="10" name="TextBox 9"/>
           <p:cNvSpPr txBox="1"/>
           <p:nvPr/>
         </p:nvSpPr>
         <p:spPr>
           <a:xfrm>
-            <a:off x="6080760" y="2726055"/>
-            <a:ext cx="4750307" cy="1280160"/>
+            <a:off x="822960" y="3611880"/>
+            <a:ext cx="640080" cy="548640"/>
           </a:xfrm>
           <a:prstGeom prst="rect">
             <a:avLst/>
@@ -6972,25 +7313,524 @@
           <a:p>
             <a:pPr algn="ctr"/>
             <a:r>
-              <a:rPr sz="1400" b="1" i="0">
-                <a:solidFill>
-                  <a:srgbClr val="64748B"/>
-                </a:solidFill>
-                <a:latin typeface="Montserrat"/>
-              </a:rPr>
-              <a:t>IMAGEN REALISTA</a:t>
-            </a:r>
-          </a:p>
+              <a:rPr sz="2200" b="1" i="0">
+                <a:solidFill>
+                  <a:srgbClr val="FFFFFF"/>
+                </a:solidFill>
+                <a:latin typeface="Montserrat"/>
+              </a:rPr>
+              <a:t>A</a:t>
+            </a:r>
+          </a:p>
+        </p:txBody>
+      </p:sp>
+      <p:sp>
+        <p:nvSpPr>
+          <p:cNvPr id="11" name="TextBox 10"/>
+          <p:cNvSpPr txBox="1"/>
+          <p:nvPr/>
+        </p:nvSpPr>
+        <p:spPr>
+          <a:xfrm>
+            <a:off x="1600200" y="3474720"/>
+            <a:ext cx="4114800" cy="868680"/>
+          </a:xfrm>
+          <a:prstGeom prst="rect">
+            <a:avLst/>
+          </a:prstGeom>
+          <a:noFill/>
+        </p:spPr>
+        <p:txBody>
+          <a:bodyPr wrap="square">
+            <a:spAutoFit/>
+          </a:bodyPr>
+          <a:lstStyle/>
+          <a:p>
+            <a:r>
+              <a:rPr sz="1400" b="0" i="0">
+                <a:solidFill>
+                  <a:srgbClr val="1B2330"/>
+                </a:solidFill>
+                <a:latin typeface="Montserrat"/>
+              </a:rPr>
+              <a:t>50 m²</a:t>
+            </a:r>
+          </a:p>
+        </p:txBody>
+      </p:sp>
+      <p:sp>
+        <p:nvSpPr>
+          <p:cNvPr id="12" name="Rounded Rectangle 11"/>
+          <p:cNvSpPr/>
+          <p:nvPr/>
+        </p:nvSpPr>
+        <p:spPr>
+          <a:xfrm>
+            <a:off x="6355080" y="3291840"/>
+            <a:ext cx="4983480" cy="1143000"/>
+          </a:xfrm>
+          <a:prstGeom prst="roundRect">
+            <a:avLst/>
+          </a:prstGeom>
+          <a:solidFill>
+            <a:srgbClr val="F3F6FB"/>
+          </a:solidFill>
+          <a:ln w="12700">
+            <a:solidFill>
+              <a:srgbClr val="C7D2E6"/>
+            </a:solidFill>
+          </a:ln>
+          <a:effectLst/>
+        </p:spPr>
+        <p:style>
+          <a:lnRef idx="1">
+            <a:schemeClr val="accent1"/>
+          </a:lnRef>
+          <a:fillRef idx="3">
+            <a:schemeClr val="accent1"/>
+          </a:fillRef>
+          <a:effectRef idx="2">
+            <a:schemeClr val="accent1"/>
+          </a:effectRef>
+          <a:fontRef idx="minor">
+            <a:schemeClr val="lt1"/>
+          </a:fontRef>
+        </p:style>
+        <p:txBody>
+          <a:bodyPr rtlCol="0" anchor="ctr"/>
+          <a:lstStyle/>
           <a:p>
             <a:pPr algn="ctr"/>
-            <a:r>
-              <a:rPr sz="1100" b="0" i="1">
-                <a:solidFill>
-                  <a:srgbClr val="64748B"/>
-                </a:solidFill>
-                <a:latin typeface="Montserrat"/>
-              </a:rPr>
-              <a:t>gas pressure gauge and thermometer</a:t>
+          </a:p>
+        </p:txBody>
+      </p:sp>
+      <p:sp>
+        <p:nvSpPr>
+          <p:cNvPr id="13" name="Rectangle 12"/>
+          <p:cNvSpPr/>
+          <p:nvPr/>
+        </p:nvSpPr>
+        <p:spPr>
+          <a:xfrm>
+            <a:off x="6355080" y="3291840"/>
+            <a:ext cx="640080" cy="1143000"/>
+          </a:xfrm>
+          <a:prstGeom prst="rect">
+            <a:avLst/>
+          </a:prstGeom>
+          <a:solidFill>
+            <a:srgbClr val="1E2761"/>
+          </a:solidFill>
+          <a:ln>
+            <a:noFill/>
+          </a:ln>
+          <a:effectLst/>
+        </p:spPr>
+        <p:style>
+          <a:lnRef idx="1">
+            <a:schemeClr val="accent1"/>
+          </a:lnRef>
+          <a:fillRef idx="3">
+            <a:schemeClr val="accent1"/>
+          </a:fillRef>
+          <a:effectRef idx="2">
+            <a:schemeClr val="accent1"/>
+          </a:effectRef>
+          <a:fontRef idx="minor">
+            <a:schemeClr val="lt1"/>
+          </a:fontRef>
+        </p:style>
+        <p:txBody>
+          <a:bodyPr rtlCol="0" anchor="ctr"/>
+          <a:lstStyle/>
+          <a:p>
+            <a:pPr algn="ctr"/>
+          </a:p>
+        </p:txBody>
+      </p:sp>
+      <p:sp>
+        <p:nvSpPr>
+          <p:cNvPr id="14" name="TextBox 13"/>
+          <p:cNvSpPr txBox="1"/>
+          <p:nvPr/>
+        </p:nvSpPr>
+        <p:spPr>
+          <a:xfrm>
+            <a:off x="6355080" y="3611880"/>
+            <a:ext cx="640080" cy="548640"/>
+          </a:xfrm>
+          <a:prstGeom prst="rect">
+            <a:avLst/>
+          </a:prstGeom>
+          <a:noFill/>
+        </p:spPr>
+        <p:txBody>
+          <a:bodyPr wrap="square">
+            <a:spAutoFit/>
+          </a:bodyPr>
+          <a:lstStyle/>
+          <a:p>
+            <a:pPr algn="ctr"/>
+            <a:r>
+              <a:rPr sz="2200" b="1" i="0">
+                <a:solidFill>
+                  <a:srgbClr val="FFFFFF"/>
+                </a:solidFill>
+                <a:latin typeface="Montserrat"/>
+              </a:rPr>
+              <a:t>B</a:t>
+            </a:r>
+          </a:p>
+        </p:txBody>
+      </p:sp>
+      <p:sp>
+        <p:nvSpPr>
+          <p:cNvPr id="15" name="TextBox 14"/>
+          <p:cNvSpPr txBox="1"/>
+          <p:nvPr/>
+        </p:nvSpPr>
+        <p:spPr>
+          <a:xfrm>
+            <a:off x="7132320" y="3474720"/>
+            <a:ext cx="4114800" cy="868680"/>
+          </a:xfrm>
+          <a:prstGeom prst="rect">
+            <a:avLst/>
+          </a:prstGeom>
+          <a:noFill/>
+        </p:spPr>
+        <p:txBody>
+          <a:bodyPr wrap="square">
+            <a:spAutoFit/>
+          </a:bodyPr>
+          <a:lstStyle/>
+          <a:p>
+            <a:r>
+              <a:rPr sz="1400" b="0" i="0">
+                <a:solidFill>
+                  <a:srgbClr val="1B2330"/>
+                </a:solidFill>
+                <a:latin typeface="Montserrat"/>
+              </a:rPr>
+              <a:t>75 m²</a:t>
+            </a:r>
+          </a:p>
+        </p:txBody>
+      </p:sp>
+      <p:sp>
+        <p:nvSpPr>
+          <p:cNvPr id="16" name="Rounded Rectangle 15"/>
+          <p:cNvSpPr/>
+          <p:nvPr/>
+        </p:nvSpPr>
+        <p:spPr>
+          <a:xfrm>
+            <a:off x="822960" y="4617720"/>
+            <a:ext cx="4983480" cy="1143000"/>
+          </a:xfrm>
+          <a:prstGeom prst="roundRect">
+            <a:avLst/>
+          </a:prstGeom>
+          <a:solidFill>
+            <a:srgbClr val="F3F6FB"/>
+          </a:solidFill>
+          <a:ln w="12700">
+            <a:solidFill>
+              <a:srgbClr val="C7D2E6"/>
+            </a:solidFill>
+          </a:ln>
+          <a:effectLst/>
+        </p:spPr>
+        <p:style>
+          <a:lnRef idx="1">
+            <a:schemeClr val="accent1"/>
+          </a:lnRef>
+          <a:fillRef idx="3">
+            <a:schemeClr val="accent1"/>
+          </a:fillRef>
+          <a:effectRef idx="2">
+            <a:schemeClr val="accent1"/>
+          </a:effectRef>
+          <a:fontRef idx="minor">
+            <a:schemeClr val="lt1"/>
+          </a:fontRef>
+        </p:style>
+        <p:txBody>
+          <a:bodyPr rtlCol="0" anchor="ctr"/>
+          <a:lstStyle/>
+          <a:p>
+            <a:pPr algn="ctr"/>
+          </a:p>
+        </p:txBody>
+      </p:sp>
+      <p:sp>
+        <p:nvSpPr>
+          <p:cNvPr id="17" name="Rectangle 16"/>
+          <p:cNvSpPr/>
+          <p:nvPr/>
+        </p:nvSpPr>
+        <p:spPr>
+          <a:xfrm>
+            <a:off x="822960" y="4617720"/>
+            <a:ext cx="640080" cy="1143000"/>
+          </a:xfrm>
+          <a:prstGeom prst="rect">
+            <a:avLst/>
+          </a:prstGeom>
+          <a:solidFill>
+            <a:srgbClr val="1E2761"/>
+          </a:solidFill>
+          <a:ln>
+            <a:noFill/>
+          </a:ln>
+          <a:effectLst/>
+        </p:spPr>
+        <p:style>
+          <a:lnRef idx="1">
+            <a:schemeClr val="accent1"/>
+          </a:lnRef>
+          <a:fillRef idx="3">
+            <a:schemeClr val="accent1"/>
+          </a:fillRef>
+          <a:effectRef idx="2">
+            <a:schemeClr val="accent1"/>
+          </a:effectRef>
+          <a:fontRef idx="minor">
+            <a:schemeClr val="lt1"/>
+          </a:fontRef>
+        </p:style>
+        <p:txBody>
+          <a:bodyPr rtlCol="0" anchor="ctr"/>
+          <a:lstStyle/>
+          <a:p>
+            <a:pPr algn="ctr"/>
+          </a:p>
+        </p:txBody>
+      </p:sp>
+      <p:sp>
+        <p:nvSpPr>
+          <p:cNvPr id="18" name="TextBox 17"/>
+          <p:cNvSpPr txBox="1"/>
+          <p:nvPr/>
+        </p:nvSpPr>
+        <p:spPr>
+          <a:xfrm>
+            <a:off x="822960" y="4937760"/>
+            <a:ext cx="640080" cy="548640"/>
+          </a:xfrm>
+          <a:prstGeom prst="rect">
+            <a:avLst/>
+          </a:prstGeom>
+          <a:noFill/>
+        </p:spPr>
+        <p:txBody>
+          <a:bodyPr wrap="square">
+            <a:spAutoFit/>
+          </a:bodyPr>
+          <a:lstStyle/>
+          <a:p>
+            <a:pPr algn="ctr"/>
+            <a:r>
+              <a:rPr sz="2200" b="1" i="0">
+                <a:solidFill>
+                  <a:srgbClr val="FFFFFF"/>
+                </a:solidFill>
+                <a:latin typeface="Montserrat"/>
+              </a:rPr>
+              <a:t>C</a:t>
+            </a:r>
+          </a:p>
+        </p:txBody>
+      </p:sp>
+      <p:sp>
+        <p:nvSpPr>
+          <p:cNvPr id="19" name="TextBox 18"/>
+          <p:cNvSpPr txBox="1"/>
+          <p:nvPr/>
+        </p:nvSpPr>
+        <p:spPr>
+          <a:xfrm>
+            <a:off x="1600200" y="4800600"/>
+            <a:ext cx="4114800" cy="868680"/>
+          </a:xfrm>
+          <a:prstGeom prst="rect">
+            <a:avLst/>
+          </a:prstGeom>
+          <a:noFill/>
+        </p:spPr>
+        <p:txBody>
+          <a:bodyPr wrap="square">
+            <a:spAutoFit/>
+          </a:bodyPr>
+          <a:lstStyle/>
+          <a:p>
+            <a:r>
+              <a:rPr sz="1400" b="0" i="0">
+                <a:solidFill>
+                  <a:srgbClr val="1B2330"/>
+                </a:solidFill>
+                <a:latin typeface="Montserrat"/>
+              </a:rPr>
+              <a:t>100 m²</a:t>
+            </a:r>
+          </a:p>
+        </p:txBody>
+      </p:sp>
+      <p:sp>
+        <p:nvSpPr>
+          <p:cNvPr id="20" name="Rounded Rectangle 19"/>
+          <p:cNvSpPr/>
+          <p:nvPr/>
+        </p:nvSpPr>
+        <p:spPr>
+          <a:xfrm>
+            <a:off x="6355080" y="4617720"/>
+            <a:ext cx="4983480" cy="1143000"/>
+          </a:xfrm>
+          <a:prstGeom prst="roundRect">
+            <a:avLst/>
+          </a:prstGeom>
+          <a:solidFill>
+            <a:srgbClr val="F3F6FB"/>
+          </a:solidFill>
+          <a:ln w="12700">
+            <a:solidFill>
+              <a:srgbClr val="C7D2E6"/>
+            </a:solidFill>
+          </a:ln>
+          <a:effectLst/>
+        </p:spPr>
+        <p:style>
+          <a:lnRef idx="1">
+            <a:schemeClr val="accent1"/>
+          </a:lnRef>
+          <a:fillRef idx="3">
+            <a:schemeClr val="accent1"/>
+          </a:fillRef>
+          <a:effectRef idx="2">
+            <a:schemeClr val="accent1"/>
+          </a:effectRef>
+          <a:fontRef idx="minor">
+            <a:schemeClr val="lt1"/>
+          </a:fontRef>
+        </p:style>
+        <p:txBody>
+          <a:bodyPr rtlCol="0" anchor="ctr"/>
+          <a:lstStyle/>
+          <a:p>
+            <a:pPr algn="ctr"/>
+          </a:p>
+        </p:txBody>
+      </p:sp>
+      <p:sp>
+        <p:nvSpPr>
+          <p:cNvPr id="21" name="Rectangle 20"/>
+          <p:cNvSpPr/>
+          <p:nvPr/>
+        </p:nvSpPr>
+        <p:spPr>
+          <a:xfrm>
+            <a:off x="6355080" y="4617720"/>
+            <a:ext cx="640080" cy="1143000"/>
+          </a:xfrm>
+          <a:prstGeom prst="rect">
+            <a:avLst/>
+          </a:prstGeom>
+          <a:solidFill>
+            <a:srgbClr val="1E2761"/>
+          </a:solidFill>
+          <a:ln>
+            <a:noFill/>
+          </a:ln>
+          <a:effectLst/>
+        </p:spPr>
+        <p:style>
+          <a:lnRef idx="1">
+            <a:schemeClr val="accent1"/>
+          </a:lnRef>
+          <a:fillRef idx="3">
+            <a:schemeClr val="accent1"/>
+          </a:fillRef>
+          <a:effectRef idx="2">
+            <a:schemeClr val="accent1"/>
+          </a:effectRef>
+          <a:fontRef idx="minor">
+            <a:schemeClr val="lt1"/>
+          </a:fontRef>
+        </p:style>
+        <p:txBody>
+          <a:bodyPr rtlCol="0" anchor="ctr"/>
+          <a:lstStyle/>
+          <a:p>
+            <a:pPr algn="ctr"/>
+          </a:p>
+        </p:txBody>
+      </p:sp>
+      <p:sp>
+        <p:nvSpPr>
+          <p:cNvPr id="22" name="TextBox 21"/>
+          <p:cNvSpPr txBox="1"/>
+          <p:nvPr/>
+        </p:nvSpPr>
+        <p:spPr>
+          <a:xfrm>
+            <a:off x="6355080" y="4937760"/>
+            <a:ext cx="640080" cy="548640"/>
+          </a:xfrm>
+          <a:prstGeom prst="rect">
+            <a:avLst/>
+          </a:prstGeom>
+          <a:noFill/>
+        </p:spPr>
+        <p:txBody>
+          <a:bodyPr wrap="square">
+            <a:spAutoFit/>
+          </a:bodyPr>
+          <a:lstStyle/>
+          <a:p>
+            <a:pPr algn="ctr"/>
+            <a:r>
+              <a:rPr sz="2200" b="1" i="0">
+                <a:solidFill>
+                  <a:srgbClr val="FFFFFF"/>
+                </a:solidFill>
+                <a:latin typeface="Montserrat"/>
+              </a:rPr>
+              <a:t>D</a:t>
+            </a:r>
+          </a:p>
+        </p:txBody>
+      </p:sp>
+      <p:sp>
+        <p:nvSpPr>
+          <p:cNvPr id="23" name="TextBox 22"/>
+          <p:cNvSpPr txBox="1"/>
+          <p:nvPr/>
+        </p:nvSpPr>
+        <p:spPr>
+          <a:xfrm>
+            <a:off x="7132320" y="4800600"/>
+            <a:ext cx="4114800" cy="868680"/>
+          </a:xfrm>
+          <a:prstGeom prst="rect">
+            <a:avLst/>
+          </a:prstGeom>
+          <a:noFill/>
+        </p:spPr>
+        <p:txBody>
+          <a:bodyPr wrap="square">
+            <a:spAutoFit/>
+          </a:bodyPr>
+          <a:lstStyle/>
+          <a:p>
+            <a:r>
+              <a:rPr sz="1400" b="0" i="0">
+                <a:solidFill>
+                  <a:srgbClr val="1B2330"/>
+                </a:solidFill>
+                <a:latin typeface="Montserrat"/>
+              </a:rPr>
+              <a:t>150 m²</a:t>
             </a:r>
           </a:p>
         </p:txBody>
@@ -7000,6 +7840,18 @@
   <p:clrMapOvr>
     <a:masterClrMapping/>
   </p:clrMapOvr>
+  <mc:AlternateContent xmlns:mc="http://schemas.openxmlformats.org/markup-compatibility/2006">
+    <mc:Choice xmlns:p14="http://schemas.microsoft.com/office/powerpoint/2010/main" Requires="p14">
+      <p:transition spd="med" p14:dur="700">
+        <p14:cube dir="l"/>
+      </p:transition>
+    </mc:Choice>
+    <mc:Fallback>
+      <p:transition spd="med">
+        <p:push dir="l"/>
+      </p:transition>
+    </mc:Fallback>
+  </mc:AlternateContent>
 </p:sld>
 </file>
 
@@ -7087,7 +7939,7 @@
                 </a:solidFill>
                 <a:latin typeface="Montserrat"/>
               </a:rPr>
-              <a:t>014 / 020</a:t>
+              <a:t>014 / 026</a:t>
             </a:r>
           </a:p>
         </p:txBody>
@@ -7128,88 +7980,20 @@
       </p:sp>
       <p:sp>
         <p:nvSpPr>
-          <p:cNvPr id="5" name="TextBox 4"/>
-          <p:cNvSpPr txBox="1"/>
-          <p:nvPr/>
-        </p:nvSpPr>
-        <p:spPr>
-          <a:xfrm>
-            <a:off x="822960" y="457200"/>
-            <a:ext cx="10058400" cy="365760"/>
-          </a:xfrm>
-          <a:prstGeom prst="rect">
-            <a:avLst/>
-          </a:prstGeom>
-          <a:noFill/>
-        </p:spPr>
-        <p:txBody>
-          <a:bodyPr wrap="square">
-            <a:spAutoFit/>
-          </a:bodyPr>
-          <a:lstStyle/>
-          <a:p>
-            <a:r>
-              <a:rPr sz="1300" b="1" i="0">
-                <a:solidFill>
-                  <a:srgbClr val="E8801A"/>
-                </a:solidFill>
-                <a:latin typeface="Montserrat"/>
-              </a:rPr>
-              <a:t>TÉRMINOS 3.22 A 3.36</a:t>
-            </a:r>
-          </a:p>
-        </p:txBody>
-      </p:sp>
-      <p:sp>
-        <p:nvSpPr>
-          <p:cNvPr id="6" name="TextBox 5"/>
-          <p:cNvSpPr txBox="1"/>
-          <p:nvPr/>
-        </p:nvSpPr>
-        <p:spPr>
-          <a:xfrm>
-            <a:off x="822960" y="868680"/>
-            <a:ext cx="10515600" cy="914400"/>
-          </a:xfrm>
-          <a:prstGeom prst="rect">
-            <a:avLst/>
-          </a:prstGeom>
-          <a:noFill/>
-        </p:spPr>
-        <p:txBody>
-          <a:bodyPr wrap="square">
-            <a:spAutoFit/>
-          </a:bodyPr>
-          <a:lstStyle/>
-          <a:p>
-            <a:r>
-              <a:rPr sz="2800" b="1" i="0">
-                <a:solidFill>
-                  <a:srgbClr val="1E2761"/>
-                </a:solidFill>
-                <a:latin typeface="Montserrat"/>
-              </a:rPr>
-              <a:t>Caudal de diseño y consumos</a:t>
-            </a:r>
-          </a:p>
-        </p:txBody>
-      </p:sp>
-      <p:sp>
-        <p:nvSpPr>
-          <p:cNvPr id="7" name="Rounded Rectangle 6"/>
+          <p:cNvPr id="5" name="Rectangle 4"/>
           <p:cNvSpPr/>
           <p:nvPr/>
         </p:nvSpPr>
         <p:spPr>
           <a:xfrm>
-            <a:off x="868680" y="1627632"/>
-            <a:ext cx="2011680" cy="73152"/>
-          </a:xfrm>
-          <a:prstGeom prst="roundRect">
+            <a:off x="0" y="0"/>
+            <a:ext cx="12191695" cy="1143000"/>
+          </a:xfrm>
+          <a:prstGeom prst="rect">
             <a:avLst/>
           </a:prstGeom>
           <a:solidFill>
-            <a:srgbClr val="E8801A"/>
+            <a:srgbClr val="1E8E4B"/>
           </a:solidFill>
           <a:ln>
             <a:noFill/>
@@ -7240,14 +8024,14 @@
       </p:sp>
       <p:sp>
         <p:nvSpPr>
-          <p:cNvPr id="8" name="TextBox 7"/>
+          <p:cNvPr id="6" name="TextBox 5"/>
           <p:cNvSpPr txBox="1"/>
           <p:nvPr/>
         </p:nvSpPr>
         <p:spPr>
           <a:xfrm>
-            <a:off x="822960" y="1965960"/>
-            <a:ext cx="4983480" cy="4206240"/>
+            <a:off x="822960" y="274320"/>
+            <a:ext cx="10515600" cy="640080"/>
           </a:xfrm>
           <a:prstGeom prst="rect">
             <a:avLst/>
@@ -7260,127 +8044,72 @@
           </a:bodyPr>
           <a:lstStyle/>
           <a:p>
-            <a:pPr>
-              <a:spcAft>
-                <a:spcPts val="1100"/>
-              </a:spcAft>
-            </a:pPr>
-            <a:r>
-              <a:rPr sz="1600" b="1" i="0">
-                <a:solidFill>
-                  <a:srgbClr val="E8801A"/>
-                </a:solidFill>
-                <a:latin typeface="Montserrat"/>
-              </a:rPr>
-              <a:t>▸  </a:t>
-            </a:r>
-            <a:r>
-              <a:rPr sz="1600" b="0" i="0">
-                <a:solidFill>
-                  <a:srgbClr val="1B2330"/>
-                </a:solidFill>
-                <a:latin typeface="Montserrat"/>
-              </a:rPr>
-              <a:t>Caudal de diseño qs: para dimensionar</a:t>
-            </a:r>
-          </a:p>
-          <a:p>
-            <a:pPr>
-              <a:spcAft>
-                <a:spcPts val="1100"/>
-              </a:spcAft>
-            </a:pPr>
-            <a:r>
-              <a:rPr sz="1600" b="1" i="0">
-                <a:solidFill>
-                  <a:srgbClr val="E8801A"/>
-                </a:solidFill>
-                <a:latin typeface="Montserrat"/>
-              </a:rPr>
-              <a:t>▸  </a:t>
-            </a:r>
-            <a:r>
-              <a:rPr sz="1600" b="0" i="0">
-                <a:solidFill>
-                  <a:srgbClr val="1B2330"/>
-                </a:solidFill>
-                <a:latin typeface="Montserrat"/>
-              </a:rPr>
-              <a:t>Consumo calorífico Q: en kW</a:t>
-            </a:r>
-          </a:p>
-          <a:p>
-            <a:pPr>
-              <a:spcAft>
-                <a:spcPts val="1100"/>
-              </a:spcAft>
-            </a:pPr>
-            <a:r>
-              <a:rPr sz="1600" b="1" i="0">
-                <a:solidFill>
-                  <a:srgbClr val="E8801A"/>
-                </a:solidFill>
-                <a:latin typeface="Montserrat"/>
-              </a:rPr>
-              <a:t>▸  </a:t>
-            </a:r>
-            <a:r>
-              <a:rPr sz="1600" b="0" i="0">
-                <a:solidFill>
-                  <a:srgbClr val="1B2330"/>
-                </a:solidFill>
-                <a:latin typeface="Montserrat"/>
-              </a:rPr>
-              <a:t>Nominal Qn: lo da el fabricante</a:t>
-            </a:r>
-          </a:p>
-          <a:p>
-            <a:pPr>
-              <a:spcAft>
-                <a:spcPts val="1100"/>
-              </a:spcAft>
-            </a:pPr>
-            <a:r>
-              <a:rPr sz="1600" b="1" i="0">
-                <a:solidFill>
-                  <a:srgbClr val="E8801A"/>
-                </a:solidFill>
-                <a:latin typeface="Montserrat"/>
-              </a:rPr>
-              <a:t>▸  </a:t>
-            </a:r>
-            <a:r>
-              <a:rPr sz="1600" b="0" i="0">
-                <a:solidFill>
-                  <a:srgbClr val="1B2330"/>
-                </a:solidFill>
-                <a:latin typeface="Montserrat"/>
-              </a:rPr>
-              <a:t>Volumétrico qv y másico qm</a:t>
-            </a:r>
-          </a:p>
-        </p:txBody>
-      </p:sp>
-      <p:sp>
-        <p:nvSpPr>
-          <p:cNvPr id="9" name="imgph" descr="IMGQ:gas appliance rating plate with kW value"/>
+            <a:r>
+              <a:rPr sz="2400" b="1" i="0">
+                <a:solidFill>
+                  <a:srgbClr val="FFFFFF"/>
+                </a:solidFill>
+                <a:latin typeface="Montserrat"/>
+              </a:rPr>
+              <a:t>✔  RESPUESTA:  C</a:t>
+            </a:r>
+          </a:p>
+        </p:txBody>
+      </p:sp>
+      <p:sp>
+        <p:nvSpPr>
+          <p:cNvPr id="7" name="TextBox 6"/>
+          <p:cNvSpPr txBox="1"/>
+          <p:nvPr/>
+        </p:nvSpPr>
+        <p:spPr>
+          <a:xfrm>
+            <a:off x="822960" y="1417320"/>
+            <a:ext cx="10515600" cy="914400"/>
+          </a:xfrm>
+          <a:prstGeom prst="rect">
+            <a:avLst/>
+          </a:prstGeom>
+          <a:noFill/>
+        </p:spPr>
+        <p:txBody>
+          <a:bodyPr wrap="square">
+            <a:spAutoFit/>
+          </a:bodyPr>
+          <a:lstStyle/>
+          <a:p>
+            <a:r>
+              <a:rPr sz="1800" b="1" i="0">
+                <a:solidFill>
+                  <a:srgbClr val="64748B"/>
+                </a:solidFill>
+                <a:latin typeface="Montserrat"/>
+              </a:rPr>
+              <a:t>¿Qué superficie construida separa un aparcamiento de un garaje?</a:t>
+            </a:r>
+          </a:p>
+        </p:txBody>
+      </p:sp>
+      <p:sp>
+        <p:nvSpPr>
+          <p:cNvPr id="8" name="Rounded Rectangle 7"/>
           <p:cNvSpPr/>
           <p:nvPr/>
         </p:nvSpPr>
         <p:spPr>
           <a:xfrm>
-            <a:off x="5806440" y="1051560"/>
-            <a:ext cx="5298947" cy="4629150"/>
+            <a:off x="822960" y="2514600"/>
+            <a:ext cx="10515600" cy="914400"/>
           </a:xfrm>
           <a:prstGeom prst="roundRect">
             <a:avLst/>
           </a:prstGeom>
           <a:solidFill>
-            <a:srgbClr val="F3F6FB"/>
+            <a:srgbClr val="E9F6EE"/>
           </a:solidFill>
           <a:ln w="12700">
             <a:solidFill>
-              <a:srgbClr val="C7D2E6"/>
+              <a:srgbClr val="1E8E4B"/>
             </a:solidFill>
           </a:ln>
           <a:effectLst/>
@@ -7409,14 +8138,14 @@
       </p:sp>
       <p:sp>
         <p:nvSpPr>
-          <p:cNvPr id="10" name="TextBox 9"/>
+          <p:cNvPr id="9" name="TextBox 8"/>
           <p:cNvSpPr txBox="1"/>
           <p:nvPr/>
         </p:nvSpPr>
         <p:spPr>
           <a:xfrm>
-            <a:off x="6080760" y="2726055"/>
-            <a:ext cx="4750307" cy="1280160"/>
+            <a:off x="1097280" y="2697480"/>
+            <a:ext cx="10058400" cy="640080"/>
           </a:xfrm>
           <a:prstGeom prst="rect">
             <a:avLst/>
@@ -7429,27 +8158,66 @@
           </a:bodyPr>
           <a:lstStyle/>
           <a:p>
-            <a:pPr algn="ctr"/>
-            <a:r>
-              <a:rPr sz="1400" b="1" i="0">
-                <a:solidFill>
-                  <a:srgbClr val="64748B"/>
-                </a:solidFill>
-                <a:latin typeface="Montserrat"/>
-              </a:rPr>
-              <a:t>IMAGEN REALISTA</a:t>
-            </a:r>
-          </a:p>
-          <a:p>
-            <a:pPr algn="ctr"/>
-            <a:r>
-              <a:rPr sz="1100" b="0" i="1">
-                <a:solidFill>
-                  <a:srgbClr val="64748B"/>
-                </a:solidFill>
-                <a:latin typeface="Montserrat"/>
-              </a:rPr>
-              <a:t>gas appliance rating plate with kW value</a:t>
+            <a:r>
+              <a:rPr sz="1800" b="1" i="0">
+                <a:solidFill>
+                  <a:srgbClr val="1E8E4B"/>
+                </a:solidFill>
+                <a:latin typeface="Montserrat"/>
+              </a:rPr>
+              <a:t>C.  </a:t>
+            </a:r>
+            <a:r>
+              <a:rPr sz="1800" b="1" i="0">
+                <a:solidFill>
+                  <a:srgbClr val="1E2761"/>
+                </a:solidFill>
+                <a:latin typeface="Montserrat"/>
+              </a:rPr>
+              <a:t>100 m²</a:t>
+            </a:r>
+          </a:p>
+        </p:txBody>
+      </p:sp>
+      <p:sp>
+        <p:nvSpPr>
+          <p:cNvPr id="10" name="TextBox 9"/>
+          <p:cNvSpPr txBox="1"/>
+          <p:nvPr/>
+        </p:nvSpPr>
+        <p:spPr>
+          <a:xfrm>
+            <a:off x="822960" y="3749039"/>
+            <a:ext cx="10515600" cy="2194560"/>
+          </a:xfrm>
+          <a:prstGeom prst="rect">
+            <a:avLst/>
+          </a:prstGeom>
+          <a:noFill/>
+        </p:spPr>
+        <p:txBody>
+          <a:bodyPr wrap="square">
+            <a:spAutoFit/>
+          </a:bodyPr>
+          <a:lstStyle/>
+          <a:p>
+            <a:r>
+              <a:rPr sz="1500" b="1" i="0">
+                <a:solidFill>
+                  <a:srgbClr val="E8801A"/>
+                </a:solidFill>
+                <a:latin typeface="Montserrat"/>
+              </a:rPr>
+              <a:t>Por qué:  </a:t>
+            </a:r>
+            <a:r>
+              <a:rPr sz="1500" b="0" i="0">
+                <a:solidFill>
+                  <a:srgbClr val="1B2330"/>
+                </a:solidFill>
+                <a:latin typeface="Montserrat"/>
+              </a:rPr>
+              <a:t>Por encima de 100 m² es aparcamiento; si es igual o inferior a 100 m², es garaje.</a:t>
             </a:r>
           </a:p>
         </p:txBody>
@@ -7459,6 +8227,18 @@
   <p:clrMapOvr>
     <a:masterClrMapping/>
   </p:clrMapOvr>
+  <mc:AlternateContent xmlns:mc="http://schemas.openxmlformats.org/markup-compatibility/2006">
+    <mc:Choice xmlns:p14="http://schemas.microsoft.com/office/powerpoint/2010/main" Requires="p14">
+      <p:transition spd="med" p14:dur="700">
+        <p14:cube dir="r"/>
+      </p:transition>
+    </mc:Choice>
+    <mc:Fallback>
+      <p:transition spd="med">
+        <p:push dir="r"/>
+      </p:transition>
+    </mc:Fallback>
+  </mc:AlternateContent>
 </p:sld>
 </file>
 
@@ -7546,7 +8326,7 @@
                 </a:solidFill>
                 <a:latin typeface="Montserrat"/>
               </a:rPr>
-              <a:t>015 / 020</a:t>
+              <a:t>015 / 026</a:t>
             </a:r>
           </a:p>
         </p:txBody>
@@ -7614,7 +8394,7 @@
                 </a:solidFill>
                 <a:latin typeface="Montserrat"/>
               </a:rPr>
-              <a:t>TÉRMINOS 3.31 Y 3.32</a:t>
+              <a:t>TÉRMINOS 3.17 A 3.29</a:t>
             </a:r>
           </a:p>
         </p:txBody>
@@ -7648,14 +8428,14 @@
                 </a:solidFill>
                 <a:latin typeface="Montserrat"/>
               </a:rPr>
-              <a:t>Conexión de aparato y regulación</a:t>
-            </a:r>
-          </a:p>
-        </p:txBody>
-      </p:sp>
-      <p:sp>
-        <p:nvSpPr>
-          <p:cNvPr id="7" name="Rounded Rectangle 6"/>
+              <a:t>Armarios, recintos y conductos</a:t>
+            </a:r>
+          </a:p>
+        </p:txBody>
+      </p:sp>
+      <p:sp>
+        <p:nvSpPr>
+          <p:cNvPr id="7" name="Rectangle 6"/>
           <p:cNvSpPr/>
           <p:nvPr/>
         </p:nvSpPr>
@@ -7664,7 +8444,7 @@
             <a:off x="868680" y="1627632"/>
             <a:ext cx="2011680" cy="73152"/>
           </a:xfrm>
-          <a:prstGeom prst="roundRect">
+          <a:prstGeom prst="rect">
             <a:avLst/>
           </a:prstGeom>
           <a:solidFill>
@@ -7705,8 +8485,8 @@
         </p:nvSpPr>
         <p:spPr>
           <a:xfrm>
-            <a:off x="822960" y="1965960"/>
-            <a:ext cx="4983480" cy="4206240"/>
+            <a:off x="6355080" y="1965960"/>
+            <a:ext cx="5029200" cy="4206240"/>
           </a:xfrm>
           <a:prstGeom prst="rect">
             <a:avLst/>
@@ -7740,7 +8520,7 @@
                 </a:solidFill>
                 <a:latin typeface="Montserrat"/>
               </a:rPr>
-              <a:t>Conexión: de la llave del aparato al aparato</a:t>
+              <a:t>Armario de contadores: no entran personas</a:t>
             </a:r>
           </a:p>
           <a:p>
@@ -7765,7 +8545,7 @@
                 </a:solidFill>
                 <a:latin typeface="Montserrat"/>
               </a:rPr>
-              <a:t>Puede ser flexible o rígida</a:t>
+              <a:t>Armario-cocina: lado menor ≤ 30 cm</a:t>
             </a:r>
           </a:p>
           <a:p>
@@ -7790,7 +8570,7 @@
                 </a:solidFill>
                 <a:latin typeface="Montserrat"/>
               </a:rPr>
-              <a:t>Conjunto de regulación: regulador y accesorios</a:t>
+              <a:t>Conducto de tuberías: varias tuberías</a:t>
             </a:r>
           </a:p>
           <a:p>
@@ -7815,21 +8595,21 @@
                 </a:solidFill>
                 <a:latin typeface="Montserrat"/>
               </a:rPr>
-              <a:t>En armario: armario de regulación</a:t>
-            </a:r>
-          </a:p>
-        </p:txBody>
-      </p:sp>
-      <p:sp>
-        <p:nvSpPr>
-          <p:cNvPr id="9" name="imgph" descr="IMGQ:gas regulator with filter and valves"/>
+              <a:t>Conducto técnico: contadores por planta</a:t>
+            </a:r>
+          </a:p>
+        </p:txBody>
+      </p:sp>
+      <p:sp>
+        <p:nvSpPr>
+          <p:cNvPr id="9" name="imgph" descr="IMGQ:row of gas meters in ventilated cabinet"/>
           <p:cNvSpPr/>
           <p:nvPr/>
         </p:nvSpPr>
         <p:spPr>
           <a:xfrm>
-            <a:off x="5806440" y="1051560"/>
-            <a:ext cx="5298947" cy="4629150"/>
+            <a:off x="822960" y="1965960"/>
+            <a:ext cx="5303520" cy="4572000"/>
           </a:xfrm>
           <a:prstGeom prst="roundRect">
             <a:avLst/>
@@ -7874,8 +8654,8 @@
         </p:nvSpPr>
         <p:spPr>
           <a:xfrm>
-            <a:off x="6080760" y="2726055"/>
-            <a:ext cx="4750307" cy="1280160"/>
+            <a:off x="1097280" y="3611880"/>
+            <a:ext cx="4754880" cy="1280160"/>
           </a:xfrm>
           <a:prstGeom prst="rect">
             <a:avLst/>
@@ -7896,7 +8676,7 @@
                 </a:solidFill>
                 <a:latin typeface="Montserrat"/>
               </a:rPr>
-              <a:t>IMAGEN REALISTA</a:t>
+              <a:t>IMAGEN</a:t>
             </a:r>
           </a:p>
           <a:p>
@@ -7908,7 +8688,7 @@
                 </a:solidFill>
                 <a:latin typeface="Montserrat"/>
               </a:rPr>
-              <a:t>gas regulator with filter and valves</a:t>
+              <a:t>row of gas meters in ventilated cabinet</a:t>
             </a:r>
           </a:p>
         </p:txBody>
@@ -7918,6 +8698,18 @@
   <p:clrMapOvr>
     <a:masterClrMapping/>
   </p:clrMapOvr>
+  <mc:AlternateContent xmlns:mc="http://schemas.openxmlformats.org/markup-compatibility/2006">
+    <mc:Choice xmlns:p14="http://schemas.microsoft.com/office/powerpoint/2010/main" Requires="p14">
+      <p:transition spd="med" p14:dur="700">
+        <p14:cube dir="l"/>
+      </p:transition>
+    </mc:Choice>
+    <mc:Fallback>
+      <p:transition spd="med">
+        <p:push dir="l"/>
+      </p:transition>
+    </mc:Fallback>
+  </mc:AlternateContent>
 </p:sld>
 </file>
 
@@ -8005,7 +8797,7 @@
                 </a:solidFill>
                 <a:latin typeface="Montserrat"/>
               </a:rPr>
-              <a:t>016 / 020</a:t>
+              <a:t>016 / 026</a:t>
             </a:r>
           </a:p>
         </p:txBody>
@@ -8073,7 +8865,7 @@
                 </a:solidFill>
                 <a:latin typeface="Montserrat"/>
               </a:rPr>
-              <a:t>TÉRMINOS 3.37 A 3.44</a:t>
+              <a:t>TÉRMINOS 3.23 A 3.30</a:t>
             </a:r>
           </a:p>
         </p:txBody>
@@ -8107,14 +8899,14 @@
                 </a:solidFill>
                 <a:latin typeface="Montserrat"/>
               </a:rPr>
-              <a:t>Cortatiro y evacuación asistida</a:t>
-            </a:r>
-          </a:p>
-        </p:txBody>
-      </p:sp>
-      <p:sp>
-        <p:nvSpPr>
-          <p:cNvPr id="7" name="Rounded Rectangle 6"/>
+              <a:t>Chimenea, conductos y evacuación</a:t>
+            </a:r>
+          </a:p>
+        </p:txBody>
+      </p:sp>
+      <p:sp>
+        <p:nvSpPr>
+          <p:cNvPr id="7" name="Rectangle 6"/>
           <p:cNvSpPr/>
           <p:nvPr/>
         </p:nvSpPr>
@@ -8123,7 +8915,7 @@
             <a:off x="868680" y="1627632"/>
             <a:ext cx="2011680" cy="73152"/>
           </a:xfrm>
-          <a:prstGeom prst="roundRect">
+          <a:prstGeom prst="rect">
             <a:avLst/>
           </a:prstGeom>
           <a:solidFill>
@@ -8165,7 +8957,7 @@
         <p:spPr>
           <a:xfrm>
             <a:off x="822960" y="1965960"/>
-            <a:ext cx="4983480" cy="4206240"/>
+            <a:ext cx="5029200" cy="4206240"/>
           </a:xfrm>
           <a:prstGeom prst="rect">
             <a:avLst/>
@@ -8199,7 +8991,7 @@
                 </a:solidFill>
                 <a:latin typeface="Montserrat"/>
               </a:rPr>
-              <a:t>Cortatiro: estabiliza el tiro (tipo B)</a:t>
+              <a:t>Conducto de evacuación: continuo y estanco</a:t>
             </a:r>
           </a:p>
           <a:p>
@@ -8224,7 +9016,7 @@
                 </a:solidFill>
                 <a:latin typeface="Montserrat"/>
               </a:rPr>
-              <a:t>Control de evacuación: para si hay revoco</a:t>
+              <a:t>Para aparatos tipo B o C</a:t>
             </a:r>
           </a:p>
           <a:p>
@@ -8249,7 +9041,7 @@
                 </a:solidFill>
                 <a:latin typeface="Montserrat"/>
               </a:rPr>
-              <a:t>Ayuda a la evacuación: ventilador que empuja</a:t>
+              <a:t>Collarín: la boca del tipo B</a:t>
             </a:r>
           </a:p>
           <a:p>
@@ -8274,21 +9066,21 @@
                 </a:solidFill>
                 <a:latin typeface="Montserrat"/>
               </a:rPr>
-              <a:t>Uno vigila y corta; otro empuja</a:t>
-            </a:r>
-          </a:p>
-        </p:txBody>
-      </p:sp>
-      <p:sp>
-        <p:nvSpPr>
-          <p:cNvPr id="9" name="imgph" descr="IMGQ:draught diverter on gas water heater"/>
+              <a:t>Concéntricos o independientes</a:t>
+            </a:r>
+          </a:p>
+        </p:txBody>
+      </p:sp>
+      <p:sp>
+        <p:nvSpPr>
+          <p:cNvPr id="9" name="imgph" descr="IMGQ:concentric flue pipe on gas boiler"/>
           <p:cNvSpPr/>
           <p:nvPr/>
         </p:nvSpPr>
         <p:spPr>
           <a:xfrm>
-            <a:off x="5806440" y="1051560"/>
-            <a:ext cx="5298947" cy="4629150"/>
+            <a:off x="6080760" y="1965960"/>
+            <a:ext cx="5303520" cy="4572000"/>
           </a:xfrm>
           <a:prstGeom prst="roundRect">
             <a:avLst/>
@@ -8333,8 +9125,8 @@
         </p:nvSpPr>
         <p:spPr>
           <a:xfrm>
-            <a:off x="6080760" y="2726055"/>
-            <a:ext cx="4750307" cy="1280160"/>
+            <a:off x="6355080" y="3611880"/>
+            <a:ext cx="4754880" cy="1280160"/>
           </a:xfrm>
           <a:prstGeom prst="rect">
             <a:avLst/>
@@ -8355,7 +9147,7 @@
                 </a:solidFill>
                 <a:latin typeface="Montserrat"/>
               </a:rPr>
-              <a:t>IMAGEN REALISTA</a:t>
+              <a:t>IMAGEN</a:t>
             </a:r>
           </a:p>
           <a:p>
@@ -8367,7 +9159,7 @@
                 </a:solidFill>
                 <a:latin typeface="Montserrat"/>
               </a:rPr>
-              <a:t>draught diverter on gas water heater</a:t>
+              <a:t>concentric flue pipe on gas boiler</a:t>
             </a:r>
           </a:p>
         </p:txBody>
@@ -8377,6 +9169,18 @@
   <p:clrMapOvr>
     <a:masterClrMapping/>
   </p:clrMapOvr>
+  <mc:AlternateContent xmlns:mc="http://schemas.openxmlformats.org/markup-compatibility/2006">
+    <mc:Choice xmlns:p14="http://schemas.microsoft.com/office/powerpoint/2010/main" Requires="p14">
+      <p:transition spd="med" p14:dur="700">
+        <p14:cube dir="r"/>
+      </p:transition>
+    </mc:Choice>
+    <mc:Fallback>
+      <p:transition spd="med">
+        <p:push dir="r"/>
+      </p:transition>
+    </mc:Fallback>
+  </mc:AlternateContent>
 </p:sld>
 </file>
 
@@ -8464,7 +9268,7 @@
                 </a:solidFill>
                 <a:latin typeface="Montserrat"/>
               </a:rPr>
-              <a:t>017 / 020</a:t>
+              <a:t>017 / 026</a:t>
             </a:r>
           </a:p>
         </p:txBody>
@@ -8532,7 +9336,7 @@
                 </a:solidFill>
                 <a:latin typeface="Montserrat"/>
               </a:rPr>
-              <a:t>TÉRMINOS 3.38 A 3.47</a:t>
+              <a:t>TÉRMINOS 3.25 Y 3.26</a:t>
             </a:r>
           </a:p>
         </p:txBody>
@@ -8566,14 +9370,14 @@
                 </a:solidFill>
                 <a:latin typeface="Montserrat"/>
               </a:rPr>
-              <a:t>Detectores y corte de gas</a:t>
-            </a:r>
-          </a:p>
-        </p:txBody>
-      </p:sp>
-      <p:sp>
-        <p:nvSpPr>
-          <p:cNvPr id="7" name="Rounded Rectangle 6"/>
+              <a:t>Referencia frente a normales</a:t>
+            </a:r>
+          </a:p>
+        </p:txBody>
+      </p:sp>
+      <p:sp>
+        <p:nvSpPr>
+          <p:cNvPr id="7" name="Rectangle 6"/>
           <p:cNvSpPr/>
           <p:nvPr/>
         </p:nvSpPr>
@@ -8582,7 +9386,7 @@
             <a:off x="868680" y="1627632"/>
             <a:ext cx="2011680" cy="73152"/>
           </a:xfrm>
-          <a:prstGeom prst="roundRect">
+          <a:prstGeom prst="rect">
             <a:avLst/>
           </a:prstGeom>
           <a:solidFill>
@@ -8623,8 +9427,8 @@
         </p:nvSpPr>
         <p:spPr>
           <a:xfrm>
-            <a:off x="822960" y="1965960"/>
-            <a:ext cx="4983480" cy="4206240"/>
+            <a:off x="6355080" y="1965960"/>
+            <a:ext cx="5029200" cy="4206240"/>
           </a:xfrm>
           <a:prstGeom prst="rect">
             <a:avLst/>
@@ -8658,7 +9462,7 @@
                 </a:solidFill>
                 <a:latin typeface="Montserrat"/>
               </a:rPr>
-              <a:t>Detector de gas: avisa por concentración</a:t>
+              <a:t>Referencia: 15 °C</a:t>
             </a:r>
           </a:p>
           <a:p>
@@ -8683,7 +9487,7 @@
                 </a:solidFill>
                 <a:latin typeface="Montserrat"/>
               </a:rPr>
-              <a:t>Corte automático: normalmente cerrado</a:t>
+              <a:t>Normales: 0 °C</a:t>
             </a:r>
           </a:p>
           <a:p>
@@ -8708,7 +9512,7 @@
                 </a:solidFill>
                 <a:latin typeface="Montserrat"/>
               </a:rPr>
-              <a:t>Rearme siempre manual</a:t>
+              <a:t>Las dos a 1 013,25 mbar</a:t>
             </a:r>
           </a:p>
           <a:p>
@@ -8733,21 +9537,21 @@
                 </a:solidFill>
                 <a:latin typeface="Montserrat"/>
               </a:rPr>
-              <a:t>Emplazamiento peligroso: puede haber explosivo</a:t>
-            </a:r>
-          </a:p>
-        </p:txBody>
-      </p:sp>
-      <p:sp>
-        <p:nvSpPr>
-          <p:cNvPr id="9" name="imgph" descr="IMGQ:gas leak detector mounted on wall"/>
+              <a:t>Referencia quince, normales cero</a:t>
+            </a:r>
+          </a:p>
+        </p:txBody>
+      </p:sp>
+      <p:sp>
+        <p:nvSpPr>
+          <p:cNvPr id="9" name="imgph" descr="IMGQ:gas pressure gauge and thermometer"/>
           <p:cNvSpPr/>
           <p:nvPr/>
         </p:nvSpPr>
         <p:spPr>
           <a:xfrm>
-            <a:off x="5806440" y="1051560"/>
-            <a:ext cx="5298947" cy="4629150"/>
+            <a:off x="822960" y="1965960"/>
+            <a:ext cx="5303520" cy="4572000"/>
           </a:xfrm>
           <a:prstGeom prst="roundRect">
             <a:avLst/>
@@ -8792,8 +9596,8 @@
         </p:nvSpPr>
         <p:spPr>
           <a:xfrm>
-            <a:off x="6080760" y="2726055"/>
-            <a:ext cx="4750307" cy="1280160"/>
+            <a:off x="1097280" y="3611880"/>
+            <a:ext cx="4754880" cy="1280160"/>
           </a:xfrm>
           <a:prstGeom prst="rect">
             <a:avLst/>
@@ -8814,7 +9618,7 @@
                 </a:solidFill>
                 <a:latin typeface="Montserrat"/>
               </a:rPr>
-              <a:t>IMAGEN REALISTA</a:t>
+              <a:t>IMAGEN</a:t>
             </a:r>
           </a:p>
           <a:p>
@@ -8826,7 +9630,7 @@
                 </a:solidFill>
                 <a:latin typeface="Montserrat"/>
               </a:rPr>
-              <a:t>gas leak detector mounted on wall</a:t>
+              <a:t>gas pressure gauge and thermometer</a:t>
             </a:r>
           </a:p>
         </p:txBody>
@@ -8836,6 +9640,18 @@
   <p:clrMapOvr>
     <a:masterClrMapping/>
   </p:clrMapOvr>
+  <mc:AlternateContent xmlns:mc="http://schemas.openxmlformats.org/markup-compatibility/2006">
+    <mc:Choice xmlns:p14="http://schemas.microsoft.com/office/powerpoint/2010/main" Requires="p14">
+      <p:transition spd="med" p14:dur="700">
+        <p14:cube dir="l"/>
+      </p:transition>
+    </mc:Choice>
+    <mc:Fallback>
+      <p:transition spd="med">
+        <p:push dir="l"/>
+      </p:transition>
+    </mc:Fallback>
+  </mc:AlternateContent>
 </p:sld>
 </file>
 
@@ -8923,7 +9739,7 @@
                 </a:solidFill>
                 <a:latin typeface="Montserrat"/>
               </a:rPr>
-              <a:t>018 / 020</a:t>
+              <a:t>018 / 026</a:t>
             </a:r>
           </a:p>
         </p:txBody>
@@ -8991,7 +9807,7 @@
                 </a:solidFill>
                 <a:latin typeface="Montserrat"/>
               </a:rPr>
-              <a:t>TÉRMINOS 3.52 A 3.55</a:t>
+              <a:t>TÉRMINOS 3.22 A 3.36</a:t>
             </a:r>
           </a:p>
         </p:txBody>
@@ -9025,14 +9841,14 @@
                 </a:solidFill>
                 <a:latin typeface="Montserrat"/>
               </a:rPr>
-              <a:t>Las tres familias de gas</a:t>
-            </a:r>
-          </a:p>
-        </p:txBody>
-      </p:sp>
-      <p:sp>
-        <p:nvSpPr>
-          <p:cNvPr id="7" name="Rounded Rectangle 6"/>
+              <a:t>Caudal de diseño y consumos</a:t>
+            </a:r>
+          </a:p>
+        </p:txBody>
+      </p:sp>
+      <p:sp>
+        <p:nvSpPr>
+          <p:cNvPr id="7" name="Rectangle 6"/>
           <p:cNvSpPr/>
           <p:nvPr/>
         </p:nvSpPr>
@@ -9041,7 +9857,7 @@
             <a:off x="868680" y="1627632"/>
             <a:ext cx="2011680" cy="73152"/>
           </a:xfrm>
-          <a:prstGeom prst="roundRect">
+          <a:prstGeom prst="rect">
             <a:avLst/>
           </a:prstGeom>
           <a:solidFill>
@@ -9083,7 +9899,7 @@
         <p:spPr>
           <a:xfrm>
             <a:off x="822960" y="1965960"/>
-            <a:ext cx="4983480" cy="4206240"/>
+            <a:ext cx="5029200" cy="4206240"/>
           </a:xfrm>
           <a:prstGeom prst="rect">
             <a:avLst/>
@@ -9117,7 +9933,7 @@
                 </a:solidFill>
                 <a:latin typeface="Montserrat"/>
               </a:rPr>
-              <a:t>Wobbe: poder calorífico ÷ √densidad</a:t>
+              <a:t>Caudal de diseño qs: para dimensionar</a:t>
             </a:r>
           </a:p>
           <a:p>
@@ -9142,7 +9958,7 @@
                 </a:solidFill>
                 <a:latin typeface="Montserrat"/>
               </a:rPr>
-              <a:t>1ª familia: Ws 22,4 a 24,8</a:t>
+              <a:t>Consumo calorífico Q: en kW</a:t>
             </a:r>
           </a:p>
           <a:p>
@@ -9167,7 +9983,7 @@
                 </a:solidFill>
                 <a:latin typeface="Montserrat"/>
               </a:rPr>
-              <a:t>2ª familia (gas natural): 39,1 a 54,7</a:t>
+              <a:t>Nominal Qn: lo da el fabricante</a:t>
             </a:r>
           </a:p>
           <a:p>
@@ -9192,21 +10008,21 @@
                 </a:solidFill>
                 <a:latin typeface="Montserrat"/>
               </a:rPr>
-              <a:t>3ª familia (GLP): 72,9 a 87,3</a:t>
-            </a:r>
-          </a:p>
-        </p:txBody>
-      </p:sp>
-      <p:sp>
-        <p:nvSpPr>
-          <p:cNvPr id="9" name="imgph" descr="IMGQ:blue and orange gas burner flame comparison"/>
+              <a:t>Volumétrico qv y másico qm</a:t>
+            </a:r>
+          </a:p>
+        </p:txBody>
+      </p:sp>
+      <p:sp>
+        <p:nvSpPr>
+          <p:cNvPr id="9" name="imgph" descr="IMGQ:gas appliance rating plate with kW value"/>
           <p:cNvSpPr/>
           <p:nvPr/>
         </p:nvSpPr>
         <p:spPr>
           <a:xfrm>
-            <a:off x="5806440" y="1051560"/>
-            <a:ext cx="5298947" cy="4629150"/>
+            <a:off x="6080760" y="1965960"/>
+            <a:ext cx="5303520" cy="4572000"/>
           </a:xfrm>
           <a:prstGeom prst="roundRect">
             <a:avLst/>
@@ -9251,8 +10067,8 @@
         </p:nvSpPr>
         <p:spPr>
           <a:xfrm>
-            <a:off x="6080760" y="2726055"/>
-            <a:ext cx="4750307" cy="1280160"/>
+            <a:off x="6355080" y="3611880"/>
+            <a:ext cx="4754880" cy="1280160"/>
           </a:xfrm>
           <a:prstGeom prst="rect">
             <a:avLst/>
@@ -9273,7 +10089,7 @@
                 </a:solidFill>
                 <a:latin typeface="Montserrat"/>
               </a:rPr>
-              <a:t>IMAGEN REALISTA</a:t>
+              <a:t>IMAGEN</a:t>
             </a:r>
           </a:p>
           <a:p>
@@ -9285,7 +10101,7 @@
                 </a:solidFill>
                 <a:latin typeface="Montserrat"/>
               </a:rPr>
-              <a:t>blue and orange gas burner flame comparison</a:t>
+              <a:t>gas appliance rating plate with kW value</a:t>
             </a:r>
           </a:p>
         </p:txBody>
@@ -9295,6 +10111,18 @@
   <p:clrMapOvr>
     <a:masterClrMapping/>
   </p:clrMapOvr>
+  <mc:AlternateContent xmlns:mc="http://schemas.openxmlformats.org/markup-compatibility/2006">
+    <mc:Choice xmlns:p14="http://schemas.microsoft.com/office/powerpoint/2010/main" Requires="p14">
+      <p:transition spd="med" p14:dur="700">
+        <p14:cube dir="r"/>
+      </p:transition>
+    </mc:Choice>
+    <mc:Fallback>
+      <p:transition spd="med">
+        <p:push dir="r"/>
+      </p:transition>
+    </mc:Fallback>
+  </mc:AlternateContent>
 </p:sld>
 </file>
 
@@ -9382,7 +10210,7 @@
                 </a:solidFill>
                 <a:latin typeface="Montserrat"/>
               </a:rPr>
-              <a:t>019 / 020</a:t>
+              <a:t>019 / 026</a:t>
             </a:r>
           </a:p>
         </p:txBody>
@@ -9450,7 +10278,7 @@
                 </a:solidFill>
                 <a:latin typeface="Montserrat"/>
               </a:rPr>
-              <a:t>TÉRMINOS 3.56 A 3.60</a:t>
+              <a:t>TÉRMINOS 3.31 Y 3.32</a:t>
             </a:r>
           </a:p>
         </p:txBody>
@@ -9484,14 +10312,14 @@
                 </a:solidFill>
                 <a:latin typeface="Montserrat"/>
               </a:rPr>
-              <a:t>Común, individual y receptora</a:t>
-            </a:r>
-          </a:p>
-        </p:txBody>
-      </p:sp>
-      <p:sp>
-        <p:nvSpPr>
-          <p:cNvPr id="7" name="Rounded Rectangle 6"/>
+              <a:t>Conexión de aparato y regulación</a:t>
+            </a:r>
+          </a:p>
+        </p:txBody>
+      </p:sp>
+      <p:sp>
+        <p:nvSpPr>
+          <p:cNvPr id="7" name="Rectangle 6"/>
           <p:cNvSpPr/>
           <p:nvPr/>
         </p:nvSpPr>
@@ -9500,7 +10328,7 @@
             <a:off x="868680" y="1627632"/>
             <a:ext cx="2011680" cy="73152"/>
           </a:xfrm>
-          <a:prstGeom prst="roundRect">
+          <a:prstGeom prst="rect">
             <a:avLst/>
           </a:prstGeom>
           <a:solidFill>
@@ -9541,8 +10369,8 @@
         </p:nvSpPr>
         <p:spPr>
           <a:xfrm>
-            <a:off x="822960" y="1965960"/>
-            <a:ext cx="4983480" cy="4206240"/>
+            <a:off x="6355080" y="1965960"/>
+            <a:ext cx="5029200" cy="4206240"/>
           </a:xfrm>
           <a:prstGeom prst="rect">
             <a:avLst/>
@@ -9576,7 +10404,7 @@
                 </a:solidFill>
                 <a:latin typeface="Montserrat"/>
               </a:rPr>
-              <a:t>Común: de la llave de edificio a las de usuario</a:t>
+              <a:t>Conexión: de la llave del aparato al aparato</a:t>
             </a:r>
           </a:p>
           <a:p>
@@ -9601,7 +10429,7 @@
                 </a:solidFill>
                 <a:latin typeface="Montserrat"/>
               </a:rPr>
-              <a:t>Individual: de la llave de usuario al aparato</a:t>
+              <a:t>Puede ser flexible o rígida</a:t>
             </a:r>
           </a:p>
           <a:p>
@@ -9626,7 +10454,7 @@
                 </a:solidFill>
                 <a:latin typeface="Montserrat"/>
               </a:rPr>
-              <a:t>Receptora: de la acometida al aparato</a:t>
+              <a:t>Conjunto de regulación: regulador y accesorios</a:t>
             </a:r>
           </a:p>
           <a:p>
@@ -9651,21 +10479,21 @@
                 </a:solidFill>
                 <a:latin typeface="Montserrat"/>
               </a:rPr>
-              <a:t>Intemperie: a cielo descubierto</a:t>
-            </a:r>
-          </a:p>
-        </p:txBody>
-      </p:sp>
-      <p:sp>
-        <p:nvSpPr>
-          <p:cNvPr id="9" name="imgph" descr="IMGQ:gas riser pipe in apartment stairwell"/>
+              <a:t>En armario: armario de regulación</a:t>
+            </a:r>
+          </a:p>
+        </p:txBody>
+      </p:sp>
+      <p:sp>
+        <p:nvSpPr>
+          <p:cNvPr id="9" name="imgph" descr="IMGQ:gas regulator with filter and valves"/>
           <p:cNvSpPr/>
           <p:nvPr/>
         </p:nvSpPr>
         <p:spPr>
           <a:xfrm>
-            <a:off x="5806440" y="1051560"/>
-            <a:ext cx="5298947" cy="4629150"/>
+            <a:off x="822960" y="1965960"/>
+            <a:ext cx="5303520" cy="4572000"/>
           </a:xfrm>
           <a:prstGeom prst="roundRect">
             <a:avLst/>
@@ -9710,8 +10538,8 @@
         </p:nvSpPr>
         <p:spPr>
           <a:xfrm>
-            <a:off x="6080760" y="2726055"/>
-            <a:ext cx="4750307" cy="1280160"/>
+            <a:off x="1097280" y="3611880"/>
+            <a:ext cx="4754880" cy="1280160"/>
           </a:xfrm>
           <a:prstGeom prst="rect">
             <a:avLst/>
@@ -9732,7 +10560,7 @@
                 </a:solidFill>
                 <a:latin typeface="Montserrat"/>
               </a:rPr>
-              <a:t>IMAGEN REALISTA</a:t>
+              <a:t>IMAGEN</a:t>
             </a:r>
           </a:p>
           <a:p>
@@ -9744,7 +10572,7 @@
                 </a:solidFill>
                 <a:latin typeface="Montserrat"/>
               </a:rPr>
-              <a:t>gas riser pipe in apartment stairwell</a:t>
+              <a:t>gas regulator with filter and valves</a:t>
             </a:r>
           </a:p>
         </p:txBody>
@@ -9754,6 +10582,18 @@
   <p:clrMapOvr>
     <a:masterClrMapping/>
   </p:clrMapOvr>
+  <mc:AlternateContent xmlns:mc="http://schemas.openxmlformats.org/markup-compatibility/2006">
+    <mc:Choice xmlns:p14="http://schemas.microsoft.com/office/powerpoint/2010/main" Requires="p14">
+      <p:transition spd="med" p14:dur="700">
+        <p14:cube dir="l"/>
+      </p:transition>
+    </mc:Choice>
+    <mc:Fallback>
+      <p:transition spd="med">
+        <p:push dir="l"/>
+      </p:transition>
+    </mc:Fallback>
+  </mc:AlternateContent>
 </p:sld>
 </file>
 
@@ -9841,7 +10681,7 @@
                 </a:solidFill>
                 <a:latin typeface="Montserrat"/>
               </a:rPr>
-              <a:t>002 / 020</a:t>
+              <a:t>002 / 026</a:t>
             </a:r>
           </a:p>
         </p:txBody>
@@ -9916,7 +10756,7 @@
       </p:sp>
       <p:sp>
         <p:nvSpPr>
-          <p:cNvPr id="6" name="Rounded Rectangle 5"/>
+          <p:cNvPr id="6" name="Rectangle 5"/>
           <p:cNvSpPr/>
           <p:nvPr/>
         </p:nvSpPr>
@@ -9925,7 +10765,7 @@
             <a:off x="868680" y="1234440"/>
             <a:ext cx="1463040" cy="73152"/>
           </a:xfrm>
-          <a:prstGeom prst="roundRect">
+          <a:prstGeom prst="rect">
             <a:avLst/>
           </a:prstGeom>
           <a:solidFill>
@@ -10006,14 +10846,58 @@
       </p:sp>
       <p:sp>
         <p:nvSpPr>
-          <p:cNvPr id="8" name="TextBox 7"/>
+          <p:cNvPr id="8" name="Rectangle 7"/>
+          <p:cNvSpPr/>
+          <p:nvPr/>
+        </p:nvSpPr>
+        <p:spPr>
+          <a:xfrm>
+            <a:off x="822960" y="2011680"/>
+            <a:ext cx="3017520" cy="128016"/>
+          </a:xfrm>
+          <a:prstGeom prst="rect">
+            <a:avLst/>
+          </a:prstGeom>
+          <a:solidFill>
+            <a:srgbClr val="E8801A"/>
+          </a:solidFill>
+          <a:ln>
+            <a:noFill/>
+          </a:ln>
+          <a:effectLst/>
+        </p:spPr>
+        <p:style>
+          <a:lnRef idx="1">
+            <a:schemeClr val="accent1"/>
+          </a:lnRef>
+          <a:fillRef idx="3">
+            <a:schemeClr val="accent1"/>
+          </a:fillRef>
+          <a:effectRef idx="2">
+            <a:schemeClr val="accent1"/>
+          </a:effectRef>
+          <a:fontRef idx="minor">
+            <a:schemeClr val="lt1"/>
+          </a:fontRef>
+        </p:style>
+        <p:txBody>
+          <a:bodyPr rtlCol="0" anchor="ctr"/>
+          <a:lstStyle/>
+          <a:p>
+            <a:pPr algn="ctr"/>
+          </a:p>
+        </p:txBody>
+      </p:sp>
+      <p:sp>
+        <p:nvSpPr>
+          <p:cNvPr id="9" name="TextBox 8"/>
           <p:cNvSpPr txBox="1"/>
           <p:nvPr/>
         </p:nvSpPr>
         <p:spPr>
           <a:xfrm>
-            <a:off x="822960" y="2331720"/>
-            <a:ext cx="3017520" cy="1463040"/>
+            <a:off x="822960" y="2377440"/>
+            <a:ext cx="3017520" cy="1371600"/>
           </a:xfrm>
           <a:prstGeom prst="rect">
             <a:avLst/>
@@ -10028,7 +10912,7 @@
           <a:p>
             <a:pPr algn="ctr"/>
             <a:r>
-              <a:rPr sz="6000" b="1" i="0">
+              <a:rPr sz="5800" b="1" i="0">
                 <a:solidFill>
                   <a:srgbClr val="1E2761"/>
                 </a:solidFill>
@@ -10041,13 +10925,13 @@
       </p:sp>
       <p:sp>
         <p:nvSpPr>
-          <p:cNvPr id="9" name="TextBox 8"/>
+          <p:cNvPr id="10" name="TextBox 9"/>
           <p:cNvSpPr txBox="1"/>
           <p:nvPr/>
         </p:nvSpPr>
         <p:spPr>
           <a:xfrm>
-            <a:off x="1051560" y="3611880"/>
+            <a:off x="1051560" y="3657600"/>
             <a:ext cx="2560320" cy="1005840"/>
           </a:xfrm>
           <a:prstGeom prst="rect">
@@ -10076,7 +10960,7 @@
       </p:sp>
       <p:sp>
         <p:nvSpPr>
-          <p:cNvPr id="10" name="Rounded Rectangle 9"/>
+          <p:cNvPr id="11" name="Rounded Rectangle 10"/>
           <p:cNvSpPr/>
           <p:nvPr/>
         </p:nvSpPr>
@@ -10122,14 +11006,58 @@
       </p:sp>
       <p:sp>
         <p:nvSpPr>
-          <p:cNvPr id="11" name="TextBox 10"/>
+          <p:cNvPr id="12" name="Rectangle 11"/>
+          <p:cNvSpPr/>
+          <p:nvPr/>
+        </p:nvSpPr>
+        <p:spPr>
+          <a:xfrm>
+            <a:off x="4617720" y="2011680"/>
+            <a:ext cx="3017520" cy="128016"/>
+          </a:xfrm>
+          <a:prstGeom prst="rect">
+            <a:avLst/>
+          </a:prstGeom>
+          <a:solidFill>
+            <a:srgbClr val="E8801A"/>
+          </a:solidFill>
+          <a:ln>
+            <a:noFill/>
+          </a:ln>
+          <a:effectLst/>
+        </p:spPr>
+        <p:style>
+          <a:lnRef idx="1">
+            <a:schemeClr val="accent1"/>
+          </a:lnRef>
+          <a:fillRef idx="3">
+            <a:schemeClr val="accent1"/>
+          </a:fillRef>
+          <a:effectRef idx="2">
+            <a:schemeClr val="accent1"/>
+          </a:effectRef>
+          <a:fontRef idx="minor">
+            <a:schemeClr val="lt1"/>
+          </a:fontRef>
+        </p:style>
+        <p:txBody>
+          <a:bodyPr rtlCol="0" anchor="ctr"/>
+          <a:lstStyle/>
+          <a:p>
+            <a:pPr algn="ctr"/>
+          </a:p>
+        </p:txBody>
+      </p:sp>
+      <p:sp>
+        <p:nvSpPr>
+          <p:cNvPr id="13" name="TextBox 12"/>
           <p:cNvSpPr txBox="1"/>
           <p:nvPr/>
         </p:nvSpPr>
         <p:spPr>
           <a:xfrm>
-            <a:off x="4617720" y="2331720"/>
-            <a:ext cx="3017520" cy="1463040"/>
+            <a:off x="4617720" y="2377440"/>
+            <a:ext cx="3017520" cy="1371600"/>
           </a:xfrm>
           <a:prstGeom prst="rect">
             <a:avLst/>
@@ -10144,7 +11072,7 @@
           <a:p>
             <a:pPr algn="ctr"/>
             <a:r>
-              <a:rPr sz="6000" b="1" i="0">
+              <a:rPr sz="5800" b="1" i="0">
                 <a:solidFill>
                   <a:srgbClr val="1E2761"/>
                 </a:solidFill>
@@ -10157,13 +11085,13 @@
       </p:sp>
       <p:sp>
         <p:nvSpPr>
-          <p:cNvPr id="12" name="TextBox 11"/>
+          <p:cNvPr id="14" name="TextBox 13"/>
           <p:cNvSpPr txBox="1"/>
           <p:nvPr/>
         </p:nvSpPr>
         <p:spPr>
           <a:xfrm>
-            <a:off x="4846320" y="3611880"/>
+            <a:off x="4846320" y="3657600"/>
             <a:ext cx="2560320" cy="1005840"/>
           </a:xfrm>
           <a:prstGeom prst="rect">
@@ -10192,7 +11120,7 @@
       </p:sp>
       <p:sp>
         <p:nvSpPr>
-          <p:cNvPr id="13" name="Rounded Rectangle 12"/>
+          <p:cNvPr id="15" name="Rounded Rectangle 14"/>
           <p:cNvSpPr/>
           <p:nvPr/>
         </p:nvSpPr>
@@ -10238,14 +11166,58 @@
       </p:sp>
       <p:sp>
         <p:nvSpPr>
-          <p:cNvPr id="14" name="TextBox 13"/>
+          <p:cNvPr id="16" name="Rectangle 15"/>
+          <p:cNvSpPr/>
+          <p:nvPr/>
+        </p:nvSpPr>
+        <p:spPr>
+          <a:xfrm>
+            <a:off x="8412480" y="2011680"/>
+            <a:ext cx="3017520" cy="128016"/>
+          </a:xfrm>
+          <a:prstGeom prst="rect">
+            <a:avLst/>
+          </a:prstGeom>
+          <a:solidFill>
+            <a:srgbClr val="E8801A"/>
+          </a:solidFill>
+          <a:ln>
+            <a:noFill/>
+          </a:ln>
+          <a:effectLst/>
+        </p:spPr>
+        <p:style>
+          <a:lnRef idx="1">
+            <a:schemeClr val="accent1"/>
+          </a:lnRef>
+          <a:fillRef idx="3">
+            <a:schemeClr val="accent1"/>
+          </a:fillRef>
+          <a:effectRef idx="2">
+            <a:schemeClr val="accent1"/>
+          </a:effectRef>
+          <a:fontRef idx="minor">
+            <a:schemeClr val="lt1"/>
+          </a:fontRef>
+        </p:style>
+        <p:txBody>
+          <a:bodyPr rtlCol="0" anchor="ctr"/>
+          <a:lstStyle/>
+          <a:p>
+            <a:pPr algn="ctr"/>
+          </a:p>
+        </p:txBody>
+      </p:sp>
+      <p:sp>
+        <p:nvSpPr>
+          <p:cNvPr id="17" name="TextBox 16"/>
           <p:cNvSpPr txBox="1"/>
           <p:nvPr/>
         </p:nvSpPr>
         <p:spPr>
           <a:xfrm>
-            <a:off x="8412480" y="2331720"/>
-            <a:ext cx="3017520" cy="1463040"/>
+            <a:off x="8412480" y="2377440"/>
+            <a:ext cx="3017520" cy="1371600"/>
           </a:xfrm>
           <a:prstGeom prst="rect">
             <a:avLst/>
@@ -10260,7 +11232,7 @@
           <a:p>
             <a:pPr algn="ctr"/>
             <a:r>
-              <a:rPr sz="6000" b="1" i="0">
+              <a:rPr sz="5800" b="1" i="0">
                 <a:solidFill>
                   <a:srgbClr val="1E2761"/>
                 </a:solidFill>
@@ -10273,13 +11245,13 @@
       </p:sp>
       <p:sp>
         <p:nvSpPr>
-          <p:cNvPr id="15" name="TextBox 14"/>
+          <p:cNvPr id="18" name="TextBox 17"/>
           <p:cNvSpPr txBox="1"/>
           <p:nvPr/>
         </p:nvSpPr>
         <p:spPr>
           <a:xfrm>
-            <a:off x="8641080" y="3611880"/>
+            <a:off x="8641080" y="3657600"/>
             <a:ext cx="2560320" cy="1005840"/>
           </a:xfrm>
           <a:prstGeom prst="rect">
@@ -10311,6 +11283,18 @@
   <p:clrMapOvr>
     <a:masterClrMapping/>
   </p:clrMapOvr>
+  <mc:AlternateContent xmlns:mc="http://schemas.openxmlformats.org/markup-compatibility/2006">
+    <mc:Choice xmlns:p14="http://schemas.microsoft.com/office/powerpoint/2010/main" Requires="p14">
+      <p:transition spd="med" p14:dur="700">
+        <p14:cube dir="r"/>
+      </p:transition>
+    </mc:Choice>
+    <mc:Fallback>
+      <p:transition spd="med">
+        <p:push dir="r"/>
+      </p:transition>
+    </mc:Fallback>
+  </mc:AlternateContent>
 </p:sld>
 </file>
 
@@ -10339,7 +11323,7 @@
             <a:avLst/>
           </a:prstGeom>
           <a:solidFill>
-            <a:srgbClr val="1E2761"/>
+            <a:srgbClr val="FFFFFF"/>
           </a:solidFill>
           <a:ln>
             <a:noFill/>
@@ -10376,8 +11360,8 @@
         </p:nvSpPr>
         <p:spPr>
           <a:xfrm>
-            <a:off x="822960" y="640080"/>
-            <a:ext cx="10515600" cy="457200"/>
+            <a:off x="10607040" y="320040"/>
+            <a:ext cx="1371600" cy="365760"/>
           </a:xfrm>
           <a:prstGeom prst="rect">
             <a:avLst/>
@@ -10390,30 +11374,133 @@
           </a:bodyPr>
           <a:lstStyle/>
           <a:p>
-            <a:r>
-              <a:rPr sz="1400" b="1" i="0">
-                <a:solidFill>
-                  <a:srgbClr val="F4A24C"/>
-                </a:solidFill>
-                <a:latin typeface="Montserrat"/>
-              </a:rPr>
-              <a:t>LO QUE YA DOMINAS</a:t>
-            </a:r>
-          </a:p>
-        </p:txBody>
-      </p:sp>
-      <p:sp>
-        <p:nvSpPr>
-          <p:cNvPr id="4" name="Rounded Rectangle 3"/>
+            <a:pPr algn="r"/>
+            <a:r>
+              <a:rPr sz="1000" b="1" i="0">
+                <a:solidFill>
+                  <a:srgbClr val="64748B"/>
+                </a:solidFill>
+                <a:latin typeface="Montserrat"/>
+              </a:rPr>
+              <a:t>020 / 026</a:t>
+            </a:r>
+          </a:p>
+        </p:txBody>
+      </p:sp>
+      <p:sp>
+        <p:nvSpPr>
+          <p:cNvPr id="4" name="TextBox 3"/>
+          <p:cNvSpPr txBox="1"/>
+          <p:nvPr/>
+        </p:nvSpPr>
+        <p:spPr>
+          <a:xfrm>
+            <a:off x="457200" y="6419088"/>
+            <a:ext cx="8229600" cy="365760"/>
+          </a:xfrm>
+          <a:prstGeom prst="rect">
+            <a:avLst/>
+          </a:prstGeom>
+          <a:noFill/>
+        </p:spPr>
+        <p:txBody>
+          <a:bodyPr wrap="square">
+            <a:spAutoFit/>
+          </a:bodyPr>
+          <a:lstStyle/>
+          <a:p>
+            <a:r>
+              <a:rPr sz="900" b="0" i="0">
+                <a:solidFill>
+                  <a:srgbClr val="64748B"/>
+                </a:solidFill>
+                <a:latin typeface="Montserrat"/>
+              </a:rPr>
+              <a:t>Curso Gas B · Tema 09 · UNE 60670-1 y -2</a:t>
+            </a:r>
+          </a:p>
+        </p:txBody>
+      </p:sp>
+      <p:sp>
+        <p:nvSpPr>
+          <p:cNvPr id="5" name="TextBox 4"/>
+          <p:cNvSpPr txBox="1"/>
+          <p:nvPr/>
+        </p:nvSpPr>
+        <p:spPr>
+          <a:xfrm>
+            <a:off x="822960" y="457200"/>
+            <a:ext cx="10058400" cy="365760"/>
+          </a:xfrm>
+          <a:prstGeom prst="rect">
+            <a:avLst/>
+          </a:prstGeom>
+          <a:noFill/>
+        </p:spPr>
+        <p:txBody>
+          <a:bodyPr wrap="square">
+            <a:spAutoFit/>
+          </a:bodyPr>
+          <a:lstStyle/>
+          <a:p>
+            <a:r>
+              <a:rPr sz="1300" b="1" i="0">
+                <a:solidFill>
+                  <a:srgbClr val="E8801A"/>
+                </a:solidFill>
+                <a:latin typeface="Montserrat"/>
+              </a:rPr>
+              <a:t>TÉRMINOS 3.37 A 3.44</a:t>
+            </a:r>
+          </a:p>
+        </p:txBody>
+      </p:sp>
+      <p:sp>
+        <p:nvSpPr>
+          <p:cNvPr id="6" name="TextBox 5"/>
+          <p:cNvSpPr txBox="1"/>
+          <p:nvPr/>
+        </p:nvSpPr>
+        <p:spPr>
+          <a:xfrm>
+            <a:off x="822960" y="868680"/>
+            <a:ext cx="10515600" cy="914400"/>
+          </a:xfrm>
+          <a:prstGeom prst="rect">
+            <a:avLst/>
+          </a:prstGeom>
+          <a:noFill/>
+        </p:spPr>
+        <p:txBody>
+          <a:bodyPr wrap="square">
+            <a:spAutoFit/>
+          </a:bodyPr>
+          <a:lstStyle/>
+          <a:p>
+            <a:r>
+              <a:rPr sz="2800" b="1" i="0">
+                <a:solidFill>
+                  <a:srgbClr val="1E2761"/>
+                </a:solidFill>
+                <a:latin typeface="Montserrat"/>
+              </a:rPr>
+              <a:t>Cortatiro y evacuación asistida</a:t>
+            </a:r>
+          </a:p>
+        </p:txBody>
+      </p:sp>
+      <p:sp>
+        <p:nvSpPr>
+          <p:cNvPr id="7" name="Rectangle 6"/>
           <p:cNvSpPr/>
           <p:nvPr/>
         </p:nvSpPr>
         <p:spPr>
           <a:xfrm>
-            <a:off x="868680" y="1051560"/>
-            <a:ext cx="1463040" cy="82296"/>
-          </a:xfrm>
-          <a:prstGeom prst="roundRect">
+            <a:off x="868680" y="1627632"/>
+            <a:ext cx="2011680" cy="73152"/>
+          </a:xfrm>
+          <a:prstGeom prst="rect">
             <a:avLst/>
           </a:prstGeom>
           <a:solidFill>
@@ -10448,14 +11535,14 @@
       </p:sp>
       <p:sp>
         <p:nvSpPr>
-          <p:cNvPr id="5" name="TextBox 4"/>
+          <p:cNvPr id="8" name="TextBox 7"/>
           <p:cNvSpPr txBox="1"/>
           <p:nvPr/>
         </p:nvSpPr>
         <p:spPr>
           <a:xfrm>
-            <a:off x="822960" y="1234440"/>
-            <a:ext cx="10515600" cy="1097280"/>
+            <a:off x="822960" y="1965960"/>
+            <a:ext cx="5029200" cy="4206240"/>
           </a:xfrm>
           <a:prstGeom prst="rect">
             <a:avLst/>
@@ -10468,28 +11555,163 @@
           </a:bodyPr>
           <a:lstStyle/>
           <a:p>
-            <a:r>
-              <a:rPr sz="3400" b="1" i="0">
-                <a:solidFill>
-                  <a:srgbClr val="FFFFFF"/>
-                </a:solidFill>
-                <a:latin typeface="Montserrat"/>
-              </a:rPr>
-              <a:t>Ya hablas el idioma de la norma</a:t>
-            </a:r>
-          </a:p>
-        </p:txBody>
-      </p:sp>
-      <p:sp>
-        <p:nvSpPr>
-          <p:cNvPr id="6" name="TextBox 5"/>
+            <a:pPr>
+              <a:spcAft>
+                <a:spcPts val="1100"/>
+              </a:spcAft>
+            </a:pPr>
+            <a:r>
+              <a:rPr sz="1600" b="1" i="0">
+                <a:solidFill>
+                  <a:srgbClr val="E8801A"/>
+                </a:solidFill>
+                <a:latin typeface="Montserrat"/>
+              </a:rPr>
+              <a:t>▸  </a:t>
+            </a:r>
+            <a:r>
+              <a:rPr sz="1600" b="0" i="0">
+                <a:solidFill>
+                  <a:srgbClr val="1B2330"/>
+                </a:solidFill>
+                <a:latin typeface="Montserrat"/>
+              </a:rPr>
+              <a:t>Cortatiro: estabiliza el tiro (tipo B)</a:t>
+            </a:r>
+          </a:p>
+          <a:p>
+            <a:pPr>
+              <a:spcAft>
+                <a:spcPts val="1100"/>
+              </a:spcAft>
+            </a:pPr>
+            <a:r>
+              <a:rPr sz="1600" b="1" i="0">
+                <a:solidFill>
+                  <a:srgbClr val="E8801A"/>
+                </a:solidFill>
+                <a:latin typeface="Montserrat"/>
+              </a:rPr>
+              <a:t>▸  </a:t>
+            </a:r>
+            <a:r>
+              <a:rPr sz="1600" b="0" i="0">
+                <a:solidFill>
+                  <a:srgbClr val="1B2330"/>
+                </a:solidFill>
+                <a:latin typeface="Montserrat"/>
+              </a:rPr>
+              <a:t>Control de evacuación: para si hay revoco</a:t>
+            </a:r>
+          </a:p>
+          <a:p>
+            <a:pPr>
+              <a:spcAft>
+                <a:spcPts val="1100"/>
+              </a:spcAft>
+            </a:pPr>
+            <a:r>
+              <a:rPr sz="1600" b="1" i="0">
+                <a:solidFill>
+                  <a:srgbClr val="E8801A"/>
+                </a:solidFill>
+                <a:latin typeface="Montserrat"/>
+              </a:rPr>
+              <a:t>▸  </a:t>
+            </a:r>
+            <a:r>
+              <a:rPr sz="1600" b="0" i="0">
+                <a:solidFill>
+                  <a:srgbClr val="1B2330"/>
+                </a:solidFill>
+                <a:latin typeface="Montserrat"/>
+              </a:rPr>
+              <a:t>Ayuda a la evacuación: ventilador que empuja</a:t>
+            </a:r>
+          </a:p>
+          <a:p>
+            <a:pPr>
+              <a:spcAft>
+                <a:spcPts val="1100"/>
+              </a:spcAft>
+            </a:pPr>
+            <a:r>
+              <a:rPr sz="1600" b="1" i="0">
+                <a:solidFill>
+                  <a:srgbClr val="E8801A"/>
+                </a:solidFill>
+                <a:latin typeface="Montserrat"/>
+              </a:rPr>
+              <a:t>▸  </a:t>
+            </a:r>
+            <a:r>
+              <a:rPr sz="1600" b="0" i="0">
+                <a:solidFill>
+                  <a:srgbClr val="1B2330"/>
+                </a:solidFill>
+                <a:latin typeface="Montserrat"/>
+              </a:rPr>
+              <a:t>Uno vigila y corta; otro empuja</a:t>
+            </a:r>
+          </a:p>
+        </p:txBody>
+      </p:sp>
+      <p:sp>
+        <p:nvSpPr>
+          <p:cNvPr id="9" name="imgph" descr="IMGQ:draught diverter on gas water heater"/>
+          <p:cNvSpPr/>
+          <p:nvPr/>
+        </p:nvSpPr>
+        <p:spPr>
+          <a:xfrm>
+            <a:off x="6080760" y="1965960"/>
+            <a:ext cx="5303520" cy="4572000"/>
+          </a:xfrm>
+          <a:prstGeom prst="roundRect">
+            <a:avLst/>
+          </a:prstGeom>
+          <a:solidFill>
+            <a:srgbClr val="F3F6FB"/>
+          </a:solidFill>
+          <a:ln w="12700">
+            <a:solidFill>
+              <a:srgbClr val="C7D2E6"/>
+            </a:solidFill>
+          </a:ln>
+          <a:effectLst/>
+        </p:spPr>
+        <p:style>
+          <a:lnRef idx="1">
+            <a:schemeClr val="accent1"/>
+          </a:lnRef>
+          <a:fillRef idx="3">
+            <a:schemeClr val="accent1"/>
+          </a:fillRef>
+          <a:effectRef idx="2">
+            <a:schemeClr val="accent1"/>
+          </a:effectRef>
+          <a:fontRef idx="minor">
+            <a:schemeClr val="lt1"/>
+          </a:fontRef>
+        </p:style>
+        <p:txBody>
+          <a:bodyPr rtlCol="0" anchor="ctr"/>
+          <a:lstStyle/>
+          <a:p>
+            <a:pPr algn="ctr"/>
+          </a:p>
+        </p:txBody>
+      </p:sp>
+      <p:sp>
+        <p:nvSpPr>
+          <p:cNvPr id="10" name="TextBox 9"/>
           <p:cNvSpPr txBox="1"/>
           <p:nvPr/>
         </p:nvSpPr>
         <p:spPr>
           <a:xfrm>
-            <a:off x="822960" y="2606040"/>
-            <a:ext cx="10515600" cy="2743200"/>
+            <a:off x="6355080" y="3611880"/>
+            <a:ext cx="4754880" cy="1280160"/>
           </a:xfrm>
           <a:prstGeom prst="rect">
             <a:avLst/>
@@ -10502,119 +11724,254 @@
           </a:bodyPr>
           <a:lstStyle/>
           <a:p>
-            <a:pPr>
-              <a:spcAft>
-                <a:spcPts val="1200"/>
-              </a:spcAft>
-            </a:pPr>
-            <a:r>
-              <a:rPr sz="2000" b="1" i="0">
-                <a:solidFill>
-                  <a:srgbClr val="F4A24C"/>
-                </a:solidFill>
-                <a:latin typeface="Montserrat"/>
-              </a:rPr>
-              <a:t>✓  </a:t>
-            </a:r>
-            <a:r>
-              <a:rPr sz="1900" b="0" i="0">
-                <a:solidFill>
-                  <a:srgbClr val="FFFFFF"/>
-                </a:solidFill>
-                <a:latin typeface="Montserrat"/>
-              </a:rPr>
-              <a:t>Tipos A, B y C: ventilación y CO</a:t>
-            </a:r>
-          </a:p>
-          <a:p>
-            <a:pPr>
-              <a:spcAft>
-                <a:spcPts val="1200"/>
-              </a:spcAft>
-            </a:pPr>
-            <a:r>
-              <a:rPr sz="2000" b="1" i="0">
-                <a:solidFill>
-                  <a:srgbClr val="F4A24C"/>
-                </a:solidFill>
-                <a:latin typeface="Montserrat"/>
-              </a:rPr>
-              <a:t>✓  </a:t>
-            </a:r>
-            <a:r>
-              <a:rPr sz="1900" b="0" i="0">
-                <a:solidFill>
-                  <a:srgbClr val="FFFFFF"/>
-                </a:solidFill>
-                <a:latin typeface="Montserrat"/>
-              </a:rPr>
-              <a:t>Accesibilidad 1, 2 y 3 para el mantenimiento</a:t>
-            </a:r>
-          </a:p>
-          <a:p>
-            <a:pPr>
-              <a:spcAft>
-                <a:spcPts val="1200"/>
-              </a:spcAft>
-            </a:pPr>
-            <a:r>
-              <a:rPr sz="2000" b="1" i="0">
-                <a:solidFill>
-                  <a:srgbClr val="F4A24C"/>
-                </a:solidFill>
-                <a:latin typeface="Montserrat"/>
-              </a:rPr>
-              <a:t>✓  </a:t>
-            </a:r>
-            <a:r>
-              <a:rPr sz="1900" b="0" i="0">
-                <a:solidFill>
-                  <a:srgbClr val="FFFFFF"/>
-                </a:solidFill>
-                <a:latin typeface="Montserrat"/>
-              </a:rPr>
-              <a:t>Familias de gas por índice de Wobbe</a:t>
-            </a:r>
-          </a:p>
-          <a:p>
-            <a:pPr>
-              <a:spcAft>
-                <a:spcPts val="1200"/>
-              </a:spcAft>
-            </a:pPr>
-            <a:r>
-              <a:rPr sz="2000" b="1" i="0">
-                <a:solidFill>
-                  <a:srgbClr val="F4A24C"/>
-                </a:solidFill>
-                <a:latin typeface="Montserrat"/>
-              </a:rPr>
-              <a:t>✓  </a:t>
-            </a:r>
-            <a:r>
-              <a:rPr sz="1900" b="0" i="0">
-                <a:solidFill>
-                  <a:srgbClr val="FFFFFF"/>
-                </a:solidFill>
-                <a:latin typeface="Montserrat"/>
-              </a:rPr>
-              <a:t>Límites excluida/incluida: qué firmas y quién responde</a:t>
-            </a:r>
-          </a:p>
-        </p:txBody>
-      </p:sp>
-      <p:sp>
-        <p:nvSpPr>
-          <p:cNvPr id="7" name="Rounded Rectangle 6"/>
+            <a:pPr algn="ctr"/>
+            <a:r>
+              <a:rPr sz="1400" b="1" i="0">
+                <a:solidFill>
+                  <a:srgbClr val="64748B"/>
+                </a:solidFill>
+                <a:latin typeface="Montserrat"/>
+              </a:rPr>
+              <a:t>IMAGEN</a:t>
+            </a:r>
+          </a:p>
+          <a:p>
+            <a:pPr algn="ctr"/>
+            <a:r>
+              <a:rPr sz="1100" b="0" i="1">
+                <a:solidFill>
+                  <a:srgbClr val="64748B"/>
+                </a:solidFill>
+                <a:latin typeface="Montserrat"/>
+              </a:rPr>
+              <a:t>draught diverter on gas water heater</a:t>
+            </a:r>
+          </a:p>
+        </p:txBody>
+      </p:sp>
+    </p:spTree>
+  </p:cSld>
+  <p:clrMapOvr>
+    <a:masterClrMapping/>
+  </p:clrMapOvr>
+  <mc:AlternateContent xmlns:mc="http://schemas.openxmlformats.org/markup-compatibility/2006">
+    <mc:Choice xmlns:p14="http://schemas.microsoft.com/office/powerpoint/2010/main" Requires="p14">
+      <p:transition spd="med" p14:dur="700">
+        <p14:cube dir="r"/>
+      </p:transition>
+    </mc:Choice>
+    <mc:Fallback>
+      <p:transition spd="med">
+        <p:push dir="r"/>
+      </p:transition>
+    </mc:Fallback>
+  </mc:AlternateContent>
+</p:sld>
+</file>
+
+<file path=ppt/slides/slide21.xml><?xml version="1.0" encoding="utf-8"?>
+<p:sld xmlns:a="http://schemas.openxmlformats.org/drawingml/2006/main" xmlns:p="http://schemas.openxmlformats.org/presentationml/2006/main" xmlns:r="http://schemas.openxmlformats.org/officeDocument/2006/relationships">
+  <p:cSld>
+    <p:spTree>
+      <p:nvGrpSpPr>
+        <p:cNvPr id="1" name=""/>
+        <p:cNvGrpSpPr/>
+        <p:nvPr/>
+      </p:nvGrpSpPr>
+      <p:grpSpPr/>
+      <p:sp>
+        <p:nvSpPr>
+          <p:cNvPr id="2" name="Rectangle 1"/>
           <p:cNvSpPr/>
           <p:nvPr/>
         </p:nvSpPr>
         <p:spPr>
           <a:xfrm>
-            <a:off x="822960" y="5532120"/>
-            <a:ext cx="10515600" cy="822960"/>
-          </a:xfrm>
-          <a:prstGeom prst="roundRect">
+            <a:off x="0" y="0"/>
+            <a:ext cx="12191695" cy="6858000"/>
+          </a:xfrm>
+          <a:prstGeom prst="rect">
+            <a:avLst/>
+          </a:prstGeom>
+          <a:solidFill>
+            <a:srgbClr val="FFFFFF"/>
+          </a:solidFill>
+          <a:ln>
+            <a:noFill/>
+          </a:ln>
+          <a:effectLst/>
+        </p:spPr>
+        <p:style>
+          <a:lnRef idx="1">
+            <a:schemeClr val="accent1"/>
+          </a:lnRef>
+          <a:fillRef idx="3">
+            <a:schemeClr val="accent1"/>
+          </a:fillRef>
+          <a:effectRef idx="2">
+            <a:schemeClr val="accent1"/>
+          </a:effectRef>
+          <a:fontRef idx="minor">
+            <a:schemeClr val="lt1"/>
+          </a:fontRef>
+        </p:style>
+        <p:txBody>
+          <a:bodyPr rtlCol="0" anchor="ctr"/>
+          <a:lstStyle/>
+          <a:p>
+            <a:pPr algn="ctr"/>
+          </a:p>
+        </p:txBody>
+      </p:sp>
+      <p:sp>
+        <p:nvSpPr>
+          <p:cNvPr id="3" name="TextBox 2"/>
+          <p:cNvSpPr txBox="1"/>
+          <p:nvPr/>
+        </p:nvSpPr>
+        <p:spPr>
+          <a:xfrm>
+            <a:off x="10607040" y="320040"/>
+            <a:ext cx="1371600" cy="365760"/>
+          </a:xfrm>
+          <a:prstGeom prst="rect">
+            <a:avLst/>
+          </a:prstGeom>
+          <a:noFill/>
+        </p:spPr>
+        <p:txBody>
+          <a:bodyPr wrap="square">
+            <a:spAutoFit/>
+          </a:bodyPr>
+          <a:lstStyle/>
+          <a:p>
+            <a:pPr algn="r"/>
+            <a:r>
+              <a:rPr sz="1000" b="1" i="0">
+                <a:solidFill>
+                  <a:srgbClr val="64748B"/>
+                </a:solidFill>
+                <a:latin typeface="Montserrat"/>
+              </a:rPr>
+              <a:t>021 / 026</a:t>
+            </a:r>
+          </a:p>
+        </p:txBody>
+      </p:sp>
+      <p:sp>
+        <p:nvSpPr>
+          <p:cNvPr id="4" name="TextBox 3"/>
+          <p:cNvSpPr txBox="1"/>
+          <p:nvPr/>
+        </p:nvSpPr>
+        <p:spPr>
+          <a:xfrm>
+            <a:off x="457200" y="6419088"/>
+            <a:ext cx="8229600" cy="365760"/>
+          </a:xfrm>
+          <a:prstGeom prst="rect">
+            <a:avLst/>
+          </a:prstGeom>
+          <a:noFill/>
+        </p:spPr>
+        <p:txBody>
+          <a:bodyPr wrap="square">
+            <a:spAutoFit/>
+          </a:bodyPr>
+          <a:lstStyle/>
+          <a:p>
+            <a:r>
+              <a:rPr sz="900" b="0" i="0">
+                <a:solidFill>
+                  <a:srgbClr val="64748B"/>
+                </a:solidFill>
+                <a:latin typeface="Montserrat"/>
+              </a:rPr>
+              <a:t>Curso Gas B · Tema 09 · UNE 60670-1 y -2</a:t>
+            </a:r>
+          </a:p>
+        </p:txBody>
+      </p:sp>
+      <p:sp>
+        <p:nvSpPr>
+          <p:cNvPr id="5" name="TextBox 4"/>
+          <p:cNvSpPr txBox="1"/>
+          <p:nvPr/>
+        </p:nvSpPr>
+        <p:spPr>
+          <a:xfrm>
+            <a:off x="822960" y="457200"/>
+            <a:ext cx="10058400" cy="365760"/>
+          </a:xfrm>
+          <a:prstGeom prst="rect">
+            <a:avLst/>
+          </a:prstGeom>
+          <a:noFill/>
+        </p:spPr>
+        <p:txBody>
+          <a:bodyPr wrap="square">
+            <a:spAutoFit/>
+          </a:bodyPr>
+          <a:lstStyle/>
+          <a:p>
+            <a:r>
+              <a:rPr sz="1300" b="1" i="0">
+                <a:solidFill>
+                  <a:srgbClr val="E8801A"/>
+                </a:solidFill>
+                <a:latin typeface="Montserrat"/>
+              </a:rPr>
+              <a:t>TÉRMINOS 3.38 A 3.47</a:t>
+            </a:r>
+          </a:p>
+        </p:txBody>
+      </p:sp>
+      <p:sp>
+        <p:nvSpPr>
+          <p:cNvPr id="6" name="TextBox 5"/>
+          <p:cNvSpPr txBox="1"/>
+          <p:nvPr/>
+        </p:nvSpPr>
+        <p:spPr>
+          <a:xfrm>
+            <a:off x="822960" y="868680"/>
+            <a:ext cx="10515600" cy="914400"/>
+          </a:xfrm>
+          <a:prstGeom prst="rect">
+            <a:avLst/>
+          </a:prstGeom>
+          <a:noFill/>
+        </p:spPr>
+        <p:txBody>
+          <a:bodyPr wrap="square">
+            <a:spAutoFit/>
+          </a:bodyPr>
+          <a:lstStyle/>
+          <a:p>
+            <a:r>
+              <a:rPr sz="2800" b="1" i="0">
+                <a:solidFill>
+                  <a:srgbClr val="1E2761"/>
+                </a:solidFill>
+                <a:latin typeface="Montserrat"/>
+              </a:rPr>
+              <a:t>Detectores y corte de gas</a:t>
+            </a:r>
+          </a:p>
+        </p:txBody>
+      </p:sp>
+      <p:sp>
+        <p:nvSpPr>
+          <p:cNvPr id="7" name="Rectangle 6"/>
+          <p:cNvSpPr/>
+          <p:nvPr/>
+        </p:nvSpPr>
+        <p:spPr>
+          <a:xfrm>
+            <a:off x="868680" y="1627632"/>
+            <a:ext cx="2011680" cy="73152"/>
+          </a:xfrm>
+          <a:prstGeom prst="rect">
             <a:avLst/>
           </a:prstGeom>
           <a:solidFill>
@@ -10655,8 +12012,8 @@
         </p:nvSpPr>
         <p:spPr>
           <a:xfrm>
-            <a:off x="1051560" y="5623560"/>
-            <a:ext cx="10058400" cy="640080"/>
+            <a:off x="6355080" y="1965960"/>
+            <a:ext cx="5029200" cy="4206240"/>
           </a:xfrm>
           <a:prstGeom prst="rect">
             <a:avLst/>
@@ -10669,14 +12026,196 @@
           </a:bodyPr>
           <a:lstStyle/>
           <a:p>
-            <a:r>
-              <a:rPr sz="1500" b="1" i="1">
-                <a:solidFill>
-                  <a:srgbClr val="1E2761"/>
-                </a:solidFill>
-                <a:latin typeface="Montserrat"/>
-              </a:rPr>
-              <a:t>Media exposición del examen, cazada. Nos queda la mitad más técnica.</a:t>
+            <a:pPr>
+              <a:spcAft>
+                <a:spcPts val="1100"/>
+              </a:spcAft>
+            </a:pPr>
+            <a:r>
+              <a:rPr sz="1600" b="1" i="0">
+                <a:solidFill>
+                  <a:srgbClr val="E8801A"/>
+                </a:solidFill>
+                <a:latin typeface="Montserrat"/>
+              </a:rPr>
+              <a:t>▸  </a:t>
+            </a:r>
+            <a:r>
+              <a:rPr sz="1600" b="0" i="0">
+                <a:solidFill>
+                  <a:srgbClr val="1B2330"/>
+                </a:solidFill>
+                <a:latin typeface="Montserrat"/>
+              </a:rPr>
+              <a:t>Detector de gas: avisa por concentración</a:t>
+            </a:r>
+          </a:p>
+          <a:p>
+            <a:pPr>
+              <a:spcAft>
+                <a:spcPts val="1100"/>
+              </a:spcAft>
+            </a:pPr>
+            <a:r>
+              <a:rPr sz="1600" b="1" i="0">
+                <a:solidFill>
+                  <a:srgbClr val="E8801A"/>
+                </a:solidFill>
+                <a:latin typeface="Montserrat"/>
+              </a:rPr>
+              <a:t>▸  </a:t>
+            </a:r>
+            <a:r>
+              <a:rPr sz="1600" b="0" i="0">
+                <a:solidFill>
+                  <a:srgbClr val="1B2330"/>
+                </a:solidFill>
+                <a:latin typeface="Montserrat"/>
+              </a:rPr>
+              <a:t>Corte automático: normalmente cerrado</a:t>
+            </a:r>
+          </a:p>
+          <a:p>
+            <a:pPr>
+              <a:spcAft>
+                <a:spcPts val="1100"/>
+              </a:spcAft>
+            </a:pPr>
+            <a:r>
+              <a:rPr sz="1600" b="1" i="0">
+                <a:solidFill>
+                  <a:srgbClr val="E8801A"/>
+                </a:solidFill>
+                <a:latin typeface="Montserrat"/>
+              </a:rPr>
+              <a:t>▸  </a:t>
+            </a:r>
+            <a:r>
+              <a:rPr sz="1600" b="0" i="0">
+                <a:solidFill>
+                  <a:srgbClr val="1B2330"/>
+                </a:solidFill>
+                <a:latin typeface="Montserrat"/>
+              </a:rPr>
+              <a:t>Rearme siempre manual</a:t>
+            </a:r>
+          </a:p>
+          <a:p>
+            <a:pPr>
+              <a:spcAft>
+                <a:spcPts val="1100"/>
+              </a:spcAft>
+            </a:pPr>
+            <a:r>
+              <a:rPr sz="1600" b="1" i="0">
+                <a:solidFill>
+                  <a:srgbClr val="E8801A"/>
+                </a:solidFill>
+                <a:latin typeface="Montserrat"/>
+              </a:rPr>
+              <a:t>▸  </a:t>
+            </a:r>
+            <a:r>
+              <a:rPr sz="1600" b="0" i="0">
+                <a:solidFill>
+                  <a:srgbClr val="1B2330"/>
+                </a:solidFill>
+                <a:latin typeface="Montserrat"/>
+              </a:rPr>
+              <a:t>Emplazamiento peligroso: puede haber explosivo</a:t>
+            </a:r>
+          </a:p>
+        </p:txBody>
+      </p:sp>
+      <p:sp>
+        <p:nvSpPr>
+          <p:cNvPr id="9" name="imgph" descr="IMGQ:gas leak detector mounted on wall"/>
+          <p:cNvSpPr/>
+          <p:nvPr/>
+        </p:nvSpPr>
+        <p:spPr>
+          <a:xfrm>
+            <a:off x="822960" y="1965960"/>
+            <a:ext cx="5303520" cy="4572000"/>
+          </a:xfrm>
+          <a:prstGeom prst="roundRect">
+            <a:avLst/>
+          </a:prstGeom>
+          <a:solidFill>
+            <a:srgbClr val="F3F6FB"/>
+          </a:solidFill>
+          <a:ln w="12700">
+            <a:solidFill>
+              <a:srgbClr val="C7D2E6"/>
+            </a:solidFill>
+          </a:ln>
+          <a:effectLst/>
+        </p:spPr>
+        <p:style>
+          <a:lnRef idx="1">
+            <a:schemeClr val="accent1"/>
+          </a:lnRef>
+          <a:fillRef idx="3">
+            <a:schemeClr val="accent1"/>
+          </a:fillRef>
+          <a:effectRef idx="2">
+            <a:schemeClr val="accent1"/>
+          </a:effectRef>
+          <a:fontRef idx="minor">
+            <a:schemeClr val="lt1"/>
+          </a:fontRef>
+        </p:style>
+        <p:txBody>
+          <a:bodyPr rtlCol="0" anchor="ctr"/>
+          <a:lstStyle/>
+          <a:p>
+            <a:pPr algn="ctr"/>
+          </a:p>
+        </p:txBody>
+      </p:sp>
+      <p:sp>
+        <p:nvSpPr>
+          <p:cNvPr id="10" name="TextBox 9"/>
+          <p:cNvSpPr txBox="1"/>
+          <p:nvPr/>
+        </p:nvSpPr>
+        <p:spPr>
+          <a:xfrm>
+            <a:off x="1097280" y="3611880"/>
+            <a:ext cx="4754880" cy="1280160"/>
+          </a:xfrm>
+          <a:prstGeom prst="rect">
+            <a:avLst/>
+          </a:prstGeom>
+          <a:noFill/>
+        </p:spPr>
+        <p:txBody>
+          <a:bodyPr wrap="square">
+            <a:spAutoFit/>
+          </a:bodyPr>
+          <a:lstStyle/>
+          <a:p>
+            <a:pPr algn="ctr"/>
+            <a:r>
+              <a:rPr sz="1400" b="1" i="0">
+                <a:solidFill>
+                  <a:srgbClr val="64748B"/>
+                </a:solidFill>
+                <a:latin typeface="Montserrat"/>
+              </a:rPr>
+              <a:t>IMAGEN</a:t>
+            </a:r>
+          </a:p>
+          <a:p>
+            <a:pPr algn="ctr"/>
+            <a:r>
+              <a:rPr sz="1100" b="0" i="1">
+                <a:solidFill>
+                  <a:srgbClr val="64748B"/>
+                </a:solidFill>
+                <a:latin typeface="Montserrat"/>
+              </a:rPr>
+              <a:t>gas leak detector mounted on wall</a:t>
             </a:r>
           </a:p>
         </p:txBody>
@@ -10686,6 +12225,2625 @@
   <p:clrMapOvr>
     <a:masterClrMapping/>
   </p:clrMapOvr>
+  <mc:AlternateContent xmlns:mc="http://schemas.openxmlformats.org/markup-compatibility/2006">
+    <mc:Choice xmlns:p14="http://schemas.microsoft.com/office/powerpoint/2010/main" Requires="p14">
+      <p:transition spd="med" p14:dur="700">
+        <p14:cube dir="l"/>
+      </p:transition>
+    </mc:Choice>
+    <mc:Fallback>
+      <p:transition spd="med">
+        <p:push dir="l"/>
+      </p:transition>
+    </mc:Fallback>
+  </mc:AlternateContent>
+</p:sld>
+</file>
+
+<file path=ppt/slides/slide22.xml><?xml version="1.0" encoding="utf-8"?>
+<p:sld xmlns:a="http://schemas.openxmlformats.org/drawingml/2006/main" xmlns:p="http://schemas.openxmlformats.org/presentationml/2006/main" xmlns:r="http://schemas.openxmlformats.org/officeDocument/2006/relationships">
+  <p:cSld>
+    <p:spTree>
+      <p:nvGrpSpPr>
+        <p:cNvPr id="1" name=""/>
+        <p:cNvGrpSpPr/>
+        <p:nvPr/>
+      </p:nvGrpSpPr>
+      <p:grpSpPr/>
+      <p:sp>
+        <p:nvSpPr>
+          <p:cNvPr id="2" name="Rectangle 1"/>
+          <p:cNvSpPr/>
+          <p:nvPr/>
+        </p:nvSpPr>
+        <p:spPr>
+          <a:xfrm>
+            <a:off x="0" y="0"/>
+            <a:ext cx="12191695" cy="6858000"/>
+          </a:xfrm>
+          <a:prstGeom prst="rect">
+            <a:avLst/>
+          </a:prstGeom>
+          <a:solidFill>
+            <a:srgbClr val="FFFFFF"/>
+          </a:solidFill>
+          <a:ln>
+            <a:noFill/>
+          </a:ln>
+          <a:effectLst/>
+        </p:spPr>
+        <p:style>
+          <a:lnRef idx="1">
+            <a:schemeClr val="accent1"/>
+          </a:lnRef>
+          <a:fillRef idx="3">
+            <a:schemeClr val="accent1"/>
+          </a:fillRef>
+          <a:effectRef idx="2">
+            <a:schemeClr val="accent1"/>
+          </a:effectRef>
+          <a:fontRef idx="minor">
+            <a:schemeClr val="lt1"/>
+          </a:fontRef>
+        </p:style>
+        <p:txBody>
+          <a:bodyPr rtlCol="0" anchor="ctr"/>
+          <a:lstStyle/>
+          <a:p>
+            <a:pPr algn="ctr"/>
+          </a:p>
+        </p:txBody>
+      </p:sp>
+      <p:sp>
+        <p:nvSpPr>
+          <p:cNvPr id="3" name="TextBox 2"/>
+          <p:cNvSpPr txBox="1"/>
+          <p:nvPr/>
+        </p:nvSpPr>
+        <p:spPr>
+          <a:xfrm>
+            <a:off x="10607040" y="320040"/>
+            <a:ext cx="1371600" cy="365760"/>
+          </a:xfrm>
+          <a:prstGeom prst="rect">
+            <a:avLst/>
+          </a:prstGeom>
+          <a:noFill/>
+        </p:spPr>
+        <p:txBody>
+          <a:bodyPr wrap="square">
+            <a:spAutoFit/>
+          </a:bodyPr>
+          <a:lstStyle/>
+          <a:p>
+            <a:pPr algn="r"/>
+            <a:r>
+              <a:rPr sz="1000" b="1" i="0">
+                <a:solidFill>
+                  <a:srgbClr val="64748B"/>
+                </a:solidFill>
+                <a:latin typeface="Montserrat"/>
+              </a:rPr>
+              <a:t>022 / 026</a:t>
+            </a:r>
+          </a:p>
+        </p:txBody>
+      </p:sp>
+      <p:sp>
+        <p:nvSpPr>
+          <p:cNvPr id="4" name="TextBox 3"/>
+          <p:cNvSpPr txBox="1"/>
+          <p:nvPr/>
+        </p:nvSpPr>
+        <p:spPr>
+          <a:xfrm>
+            <a:off x="457200" y="6419088"/>
+            <a:ext cx="8229600" cy="365760"/>
+          </a:xfrm>
+          <a:prstGeom prst="rect">
+            <a:avLst/>
+          </a:prstGeom>
+          <a:noFill/>
+        </p:spPr>
+        <p:txBody>
+          <a:bodyPr wrap="square">
+            <a:spAutoFit/>
+          </a:bodyPr>
+          <a:lstStyle/>
+          <a:p>
+            <a:r>
+              <a:rPr sz="900" b="0" i="0">
+                <a:solidFill>
+                  <a:srgbClr val="64748B"/>
+                </a:solidFill>
+                <a:latin typeface="Montserrat"/>
+              </a:rPr>
+              <a:t>Curso Gas B · Tema 09 · UNE 60670-1 y -2</a:t>
+            </a:r>
+          </a:p>
+        </p:txBody>
+      </p:sp>
+      <p:sp>
+        <p:nvSpPr>
+          <p:cNvPr id="5" name="TextBox 4"/>
+          <p:cNvSpPr txBox="1"/>
+          <p:nvPr/>
+        </p:nvSpPr>
+        <p:spPr>
+          <a:xfrm>
+            <a:off x="822960" y="457200"/>
+            <a:ext cx="10058400" cy="365760"/>
+          </a:xfrm>
+          <a:prstGeom prst="rect">
+            <a:avLst/>
+          </a:prstGeom>
+          <a:noFill/>
+        </p:spPr>
+        <p:txBody>
+          <a:bodyPr wrap="square">
+            <a:spAutoFit/>
+          </a:bodyPr>
+          <a:lstStyle/>
+          <a:p>
+            <a:r>
+              <a:rPr sz="1300" b="1" i="0">
+                <a:solidFill>
+                  <a:srgbClr val="E8801A"/>
+                </a:solidFill>
+                <a:latin typeface="Montserrat"/>
+              </a:rPr>
+              <a:t>TÉRMINOS 3.52 A 3.55</a:t>
+            </a:r>
+          </a:p>
+        </p:txBody>
+      </p:sp>
+      <p:sp>
+        <p:nvSpPr>
+          <p:cNvPr id="6" name="TextBox 5"/>
+          <p:cNvSpPr txBox="1"/>
+          <p:nvPr/>
+        </p:nvSpPr>
+        <p:spPr>
+          <a:xfrm>
+            <a:off x="822960" y="868680"/>
+            <a:ext cx="10515600" cy="914400"/>
+          </a:xfrm>
+          <a:prstGeom prst="rect">
+            <a:avLst/>
+          </a:prstGeom>
+          <a:noFill/>
+        </p:spPr>
+        <p:txBody>
+          <a:bodyPr wrap="square">
+            <a:spAutoFit/>
+          </a:bodyPr>
+          <a:lstStyle/>
+          <a:p>
+            <a:r>
+              <a:rPr sz="2800" b="1" i="0">
+                <a:solidFill>
+                  <a:srgbClr val="1E2761"/>
+                </a:solidFill>
+                <a:latin typeface="Montserrat"/>
+              </a:rPr>
+              <a:t>Las tres familias de gas</a:t>
+            </a:r>
+          </a:p>
+        </p:txBody>
+      </p:sp>
+      <p:sp>
+        <p:nvSpPr>
+          <p:cNvPr id="7" name="Rectangle 6"/>
+          <p:cNvSpPr/>
+          <p:nvPr/>
+        </p:nvSpPr>
+        <p:spPr>
+          <a:xfrm>
+            <a:off x="868680" y="1627632"/>
+            <a:ext cx="2011680" cy="73152"/>
+          </a:xfrm>
+          <a:prstGeom prst="rect">
+            <a:avLst/>
+          </a:prstGeom>
+          <a:solidFill>
+            <a:srgbClr val="E8801A"/>
+          </a:solidFill>
+          <a:ln>
+            <a:noFill/>
+          </a:ln>
+          <a:effectLst/>
+        </p:spPr>
+        <p:style>
+          <a:lnRef idx="1">
+            <a:schemeClr val="accent1"/>
+          </a:lnRef>
+          <a:fillRef idx="3">
+            <a:schemeClr val="accent1"/>
+          </a:fillRef>
+          <a:effectRef idx="2">
+            <a:schemeClr val="accent1"/>
+          </a:effectRef>
+          <a:fontRef idx="minor">
+            <a:schemeClr val="lt1"/>
+          </a:fontRef>
+        </p:style>
+        <p:txBody>
+          <a:bodyPr rtlCol="0" anchor="ctr"/>
+          <a:lstStyle/>
+          <a:p>
+            <a:pPr algn="ctr"/>
+          </a:p>
+        </p:txBody>
+      </p:sp>
+      <p:sp>
+        <p:nvSpPr>
+          <p:cNvPr id="8" name="TextBox 7"/>
+          <p:cNvSpPr txBox="1"/>
+          <p:nvPr/>
+        </p:nvSpPr>
+        <p:spPr>
+          <a:xfrm>
+            <a:off x="822960" y="1965960"/>
+            <a:ext cx="5029200" cy="4206240"/>
+          </a:xfrm>
+          <a:prstGeom prst="rect">
+            <a:avLst/>
+          </a:prstGeom>
+          <a:noFill/>
+        </p:spPr>
+        <p:txBody>
+          <a:bodyPr wrap="square">
+            <a:spAutoFit/>
+          </a:bodyPr>
+          <a:lstStyle/>
+          <a:p>
+            <a:pPr>
+              <a:spcAft>
+                <a:spcPts val="1100"/>
+              </a:spcAft>
+            </a:pPr>
+            <a:r>
+              <a:rPr sz="1600" b="1" i="0">
+                <a:solidFill>
+                  <a:srgbClr val="E8801A"/>
+                </a:solidFill>
+                <a:latin typeface="Montserrat"/>
+              </a:rPr>
+              <a:t>▸  </a:t>
+            </a:r>
+            <a:r>
+              <a:rPr sz="1600" b="0" i="0">
+                <a:solidFill>
+                  <a:srgbClr val="1B2330"/>
+                </a:solidFill>
+                <a:latin typeface="Montserrat"/>
+              </a:rPr>
+              <a:t>Wobbe: poder calorífico ÷ √densidad</a:t>
+            </a:r>
+          </a:p>
+          <a:p>
+            <a:pPr>
+              <a:spcAft>
+                <a:spcPts val="1100"/>
+              </a:spcAft>
+            </a:pPr>
+            <a:r>
+              <a:rPr sz="1600" b="1" i="0">
+                <a:solidFill>
+                  <a:srgbClr val="E8801A"/>
+                </a:solidFill>
+                <a:latin typeface="Montserrat"/>
+              </a:rPr>
+              <a:t>▸  </a:t>
+            </a:r>
+            <a:r>
+              <a:rPr sz="1600" b="0" i="0">
+                <a:solidFill>
+                  <a:srgbClr val="1B2330"/>
+                </a:solidFill>
+                <a:latin typeface="Montserrat"/>
+              </a:rPr>
+              <a:t>1ª familia: Ws 22,4 a 24,8</a:t>
+            </a:r>
+          </a:p>
+          <a:p>
+            <a:pPr>
+              <a:spcAft>
+                <a:spcPts val="1100"/>
+              </a:spcAft>
+            </a:pPr>
+            <a:r>
+              <a:rPr sz="1600" b="1" i="0">
+                <a:solidFill>
+                  <a:srgbClr val="E8801A"/>
+                </a:solidFill>
+                <a:latin typeface="Montserrat"/>
+              </a:rPr>
+              <a:t>▸  </a:t>
+            </a:r>
+            <a:r>
+              <a:rPr sz="1600" b="0" i="0">
+                <a:solidFill>
+                  <a:srgbClr val="1B2330"/>
+                </a:solidFill>
+                <a:latin typeface="Montserrat"/>
+              </a:rPr>
+              <a:t>2ª familia (gas natural): 39,1 a 54,7</a:t>
+            </a:r>
+          </a:p>
+          <a:p>
+            <a:pPr>
+              <a:spcAft>
+                <a:spcPts val="1100"/>
+              </a:spcAft>
+            </a:pPr>
+            <a:r>
+              <a:rPr sz="1600" b="1" i="0">
+                <a:solidFill>
+                  <a:srgbClr val="E8801A"/>
+                </a:solidFill>
+                <a:latin typeface="Montserrat"/>
+              </a:rPr>
+              <a:t>▸  </a:t>
+            </a:r>
+            <a:r>
+              <a:rPr sz="1600" b="0" i="0">
+                <a:solidFill>
+                  <a:srgbClr val="1B2330"/>
+                </a:solidFill>
+                <a:latin typeface="Montserrat"/>
+              </a:rPr>
+              <a:t>3ª familia (GLP): 72,9 a 87,3</a:t>
+            </a:r>
+          </a:p>
+        </p:txBody>
+      </p:sp>
+      <p:sp>
+        <p:nvSpPr>
+          <p:cNvPr id="9" name="imgph" descr="IMGQ:blue and orange gas burner flame comparison"/>
+          <p:cNvSpPr/>
+          <p:nvPr/>
+        </p:nvSpPr>
+        <p:spPr>
+          <a:xfrm>
+            <a:off x="6080760" y="1965960"/>
+            <a:ext cx="5303520" cy="4572000"/>
+          </a:xfrm>
+          <a:prstGeom prst="roundRect">
+            <a:avLst/>
+          </a:prstGeom>
+          <a:solidFill>
+            <a:srgbClr val="F3F6FB"/>
+          </a:solidFill>
+          <a:ln w="12700">
+            <a:solidFill>
+              <a:srgbClr val="C7D2E6"/>
+            </a:solidFill>
+          </a:ln>
+          <a:effectLst/>
+        </p:spPr>
+        <p:style>
+          <a:lnRef idx="1">
+            <a:schemeClr val="accent1"/>
+          </a:lnRef>
+          <a:fillRef idx="3">
+            <a:schemeClr val="accent1"/>
+          </a:fillRef>
+          <a:effectRef idx="2">
+            <a:schemeClr val="accent1"/>
+          </a:effectRef>
+          <a:fontRef idx="minor">
+            <a:schemeClr val="lt1"/>
+          </a:fontRef>
+        </p:style>
+        <p:txBody>
+          <a:bodyPr rtlCol="0" anchor="ctr"/>
+          <a:lstStyle/>
+          <a:p>
+            <a:pPr algn="ctr"/>
+          </a:p>
+        </p:txBody>
+      </p:sp>
+      <p:sp>
+        <p:nvSpPr>
+          <p:cNvPr id="10" name="TextBox 9"/>
+          <p:cNvSpPr txBox="1"/>
+          <p:nvPr/>
+        </p:nvSpPr>
+        <p:spPr>
+          <a:xfrm>
+            <a:off x="6355080" y="3611880"/>
+            <a:ext cx="4754880" cy="1280160"/>
+          </a:xfrm>
+          <a:prstGeom prst="rect">
+            <a:avLst/>
+          </a:prstGeom>
+          <a:noFill/>
+        </p:spPr>
+        <p:txBody>
+          <a:bodyPr wrap="square">
+            <a:spAutoFit/>
+          </a:bodyPr>
+          <a:lstStyle/>
+          <a:p>
+            <a:pPr algn="ctr"/>
+            <a:r>
+              <a:rPr sz="1400" b="1" i="0">
+                <a:solidFill>
+                  <a:srgbClr val="64748B"/>
+                </a:solidFill>
+                <a:latin typeface="Montserrat"/>
+              </a:rPr>
+              <a:t>IMAGEN</a:t>
+            </a:r>
+          </a:p>
+          <a:p>
+            <a:pPr algn="ctr"/>
+            <a:r>
+              <a:rPr sz="1100" b="0" i="1">
+                <a:solidFill>
+                  <a:srgbClr val="64748B"/>
+                </a:solidFill>
+                <a:latin typeface="Montserrat"/>
+              </a:rPr>
+              <a:t>blue and orange gas burner flame comparison</a:t>
+            </a:r>
+          </a:p>
+        </p:txBody>
+      </p:sp>
+    </p:spTree>
+  </p:cSld>
+  <p:clrMapOvr>
+    <a:masterClrMapping/>
+  </p:clrMapOvr>
+  <mc:AlternateContent xmlns:mc="http://schemas.openxmlformats.org/markup-compatibility/2006">
+    <mc:Choice xmlns:p14="http://schemas.microsoft.com/office/powerpoint/2010/main" Requires="p14">
+      <p:transition spd="med" p14:dur="700">
+        <p14:cube dir="r"/>
+      </p:transition>
+    </mc:Choice>
+    <mc:Fallback>
+      <p:transition spd="med">
+        <p:push dir="r"/>
+      </p:transition>
+    </mc:Fallback>
+  </mc:AlternateContent>
+</p:sld>
+</file>
+
+<file path=ppt/slides/slide23.xml><?xml version="1.0" encoding="utf-8"?>
+<p:sld xmlns:a="http://schemas.openxmlformats.org/drawingml/2006/main" xmlns:p="http://schemas.openxmlformats.org/presentationml/2006/main" xmlns:r="http://schemas.openxmlformats.org/officeDocument/2006/relationships">
+  <p:cSld>
+    <p:spTree>
+      <p:nvGrpSpPr>
+        <p:cNvPr id="1" name=""/>
+        <p:cNvGrpSpPr/>
+        <p:nvPr/>
+      </p:nvGrpSpPr>
+      <p:grpSpPr/>
+      <p:sp>
+        <p:nvSpPr>
+          <p:cNvPr id="2" name="Rectangle 1"/>
+          <p:cNvSpPr/>
+          <p:nvPr/>
+        </p:nvSpPr>
+        <p:spPr>
+          <a:xfrm>
+            <a:off x="0" y="0"/>
+            <a:ext cx="12191695" cy="6858000"/>
+          </a:xfrm>
+          <a:prstGeom prst="rect">
+            <a:avLst/>
+          </a:prstGeom>
+          <a:solidFill>
+            <a:srgbClr val="FFFFFF"/>
+          </a:solidFill>
+          <a:ln>
+            <a:noFill/>
+          </a:ln>
+          <a:effectLst/>
+        </p:spPr>
+        <p:style>
+          <a:lnRef idx="1">
+            <a:schemeClr val="accent1"/>
+          </a:lnRef>
+          <a:fillRef idx="3">
+            <a:schemeClr val="accent1"/>
+          </a:fillRef>
+          <a:effectRef idx="2">
+            <a:schemeClr val="accent1"/>
+          </a:effectRef>
+          <a:fontRef idx="minor">
+            <a:schemeClr val="lt1"/>
+          </a:fontRef>
+        </p:style>
+        <p:txBody>
+          <a:bodyPr rtlCol="0" anchor="ctr"/>
+          <a:lstStyle/>
+          <a:p>
+            <a:pPr algn="ctr"/>
+          </a:p>
+        </p:txBody>
+      </p:sp>
+      <p:sp>
+        <p:nvSpPr>
+          <p:cNvPr id="3" name="TextBox 2"/>
+          <p:cNvSpPr txBox="1"/>
+          <p:nvPr/>
+        </p:nvSpPr>
+        <p:spPr>
+          <a:xfrm>
+            <a:off x="10607040" y="320040"/>
+            <a:ext cx="1371600" cy="365760"/>
+          </a:xfrm>
+          <a:prstGeom prst="rect">
+            <a:avLst/>
+          </a:prstGeom>
+          <a:noFill/>
+        </p:spPr>
+        <p:txBody>
+          <a:bodyPr wrap="square">
+            <a:spAutoFit/>
+          </a:bodyPr>
+          <a:lstStyle/>
+          <a:p>
+            <a:pPr algn="r"/>
+            <a:r>
+              <a:rPr sz="1000" b="1" i="0">
+                <a:solidFill>
+                  <a:srgbClr val="64748B"/>
+                </a:solidFill>
+                <a:latin typeface="Montserrat"/>
+              </a:rPr>
+              <a:t>023 / 026</a:t>
+            </a:r>
+          </a:p>
+        </p:txBody>
+      </p:sp>
+      <p:sp>
+        <p:nvSpPr>
+          <p:cNvPr id="4" name="TextBox 3"/>
+          <p:cNvSpPr txBox="1"/>
+          <p:nvPr/>
+        </p:nvSpPr>
+        <p:spPr>
+          <a:xfrm>
+            <a:off x="457200" y="6419088"/>
+            <a:ext cx="8229600" cy="365760"/>
+          </a:xfrm>
+          <a:prstGeom prst="rect">
+            <a:avLst/>
+          </a:prstGeom>
+          <a:noFill/>
+        </p:spPr>
+        <p:txBody>
+          <a:bodyPr wrap="square">
+            <a:spAutoFit/>
+          </a:bodyPr>
+          <a:lstStyle/>
+          <a:p>
+            <a:r>
+              <a:rPr sz="900" b="0" i="0">
+                <a:solidFill>
+                  <a:srgbClr val="64748B"/>
+                </a:solidFill>
+                <a:latin typeface="Montserrat"/>
+              </a:rPr>
+              <a:t>Curso Gas B · Tema 09 · UNE 60670-1 y -2</a:t>
+            </a:r>
+          </a:p>
+        </p:txBody>
+      </p:sp>
+      <p:sp>
+        <p:nvSpPr>
+          <p:cNvPr id="5" name="TextBox 4"/>
+          <p:cNvSpPr txBox="1"/>
+          <p:nvPr/>
+        </p:nvSpPr>
+        <p:spPr>
+          <a:xfrm>
+            <a:off x="822960" y="457200"/>
+            <a:ext cx="10058400" cy="365760"/>
+          </a:xfrm>
+          <a:prstGeom prst="rect">
+            <a:avLst/>
+          </a:prstGeom>
+          <a:noFill/>
+        </p:spPr>
+        <p:txBody>
+          <a:bodyPr wrap="square">
+            <a:spAutoFit/>
+          </a:bodyPr>
+          <a:lstStyle/>
+          <a:p>
+            <a:r>
+              <a:rPr sz="1300" b="1" i="0">
+                <a:solidFill>
+                  <a:srgbClr val="E8801A"/>
+                </a:solidFill>
+                <a:latin typeface="Montserrat"/>
+              </a:rPr>
+              <a:t>TÉRMINOS 3.56 A 3.60</a:t>
+            </a:r>
+          </a:p>
+        </p:txBody>
+      </p:sp>
+      <p:sp>
+        <p:nvSpPr>
+          <p:cNvPr id="6" name="TextBox 5"/>
+          <p:cNvSpPr txBox="1"/>
+          <p:nvPr/>
+        </p:nvSpPr>
+        <p:spPr>
+          <a:xfrm>
+            <a:off x="822960" y="868680"/>
+            <a:ext cx="10515600" cy="914400"/>
+          </a:xfrm>
+          <a:prstGeom prst="rect">
+            <a:avLst/>
+          </a:prstGeom>
+          <a:noFill/>
+        </p:spPr>
+        <p:txBody>
+          <a:bodyPr wrap="square">
+            <a:spAutoFit/>
+          </a:bodyPr>
+          <a:lstStyle/>
+          <a:p>
+            <a:r>
+              <a:rPr sz="2800" b="1" i="0">
+                <a:solidFill>
+                  <a:srgbClr val="1E2761"/>
+                </a:solidFill>
+                <a:latin typeface="Montserrat"/>
+              </a:rPr>
+              <a:t>Común, individual y receptora</a:t>
+            </a:r>
+          </a:p>
+        </p:txBody>
+      </p:sp>
+      <p:sp>
+        <p:nvSpPr>
+          <p:cNvPr id="7" name="Rectangle 6"/>
+          <p:cNvSpPr/>
+          <p:nvPr/>
+        </p:nvSpPr>
+        <p:spPr>
+          <a:xfrm>
+            <a:off x="868680" y="1627632"/>
+            <a:ext cx="2011680" cy="73152"/>
+          </a:xfrm>
+          <a:prstGeom prst="rect">
+            <a:avLst/>
+          </a:prstGeom>
+          <a:solidFill>
+            <a:srgbClr val="E8801A"/>
+          </a:solidFill>
+          <a:ln>
+            <a:noFill/>
+          </a:ln>
+          <a:effectLst/>
+        </p:spPr>
+        <p:style>
+          <a:lnRef idx="1">
+            <a:schemeClr val="accent1"/>
+          </a:lnRef>
+          <a:fillRef idx="3">
+            <a:schemeClr val="accent1"/>
+          </a:fillRef>
+          <a:effectRef idx="2">
+            <a:schemeClr val="accent1"/>
+          </a:effectRef>
+          <a:fontRef idx="minor">
+            <a:schemeClr val="lt1"/>
+          </a:fontRef>
+        </p:style>
+        <p:txBody>
+          <a:bodyPr rtlCol="0" anchor="ctr"/>
+          <a:lstStyle/>
+          <a:p>
+            <a:pPr algn="ctr"/>
+          </a:p>
+        </p:txBody>
+      </p:sp>
+      <p:sp>
+        <p:nvSpPr>
+          <p:cNvPr id="8" name="TextBox 7"/>
+          <p:cNvSpPr txBox="1"/>
+          <p:nvPr/>
+        </p:nvSpPr>
+        <p:spPr>
+          <a:xfrm>
+            <a:off x="6355080" y="1965960"/>
+            <a:ext cx="5029200" cy="4206240"/>
+          </a:xfrm>
+          <a:prstGeom prst="rect">
+            <a:avLst/>
+          </a:prstGeom>
+          <a:noFill/>
+        </p:spPr>
+        <p:txBody>
+          <a:bodyPr wrap="square">
+            <a:spAutoFit/>
+          </a:bodyPr>
+          <a:lstStyle/>
+          <a:p>
+            <a:pPr>
+              <a:spcAft>
+                <a:spcPts val="1100"/>
+              </a:spcAft>
+            </a:pPr>
+            <a:r>
+              <a:rPr sz="1600" b="1" i="0">
+                <a:solidFill>
+                  <a:srgbClr val="E8801A"/>
+                </a:solidFill>
+                <a:latin typeface="Montserrat"/>
+              </a:rPr>
+              <a:t>▸  </a:t>
+            </a:r>
+            <a:r>
+              <a:rPr sz="1600" b="0" i="0">
+                <a:solidFill>
+                  <a:srgbClr val="1B2330"/>
+                </a:solidFill>
+                <a:latin typeface="Montserrat"/>
+              </a:rPr>
+              <a:t>Común: de la llave de edificio a las de usuario</a:t>
+            </a:r>
+          </a:p>
+          <a:p>
+            <a:pPr>
+              <a:spcAft>
+                <a:spcPts val="1100"/>
+              </a:spcAft>
+            </a:pPr>
+            <a:r>
+              <a:rPr sz="1600" b="1" i="0">
+                <a:solidFill>
+                  <a:srgbClr val="E8801A"/>
+                </a:solidFill>
+                <a:latin typeface="Montserrat"/>
+              </a:rPr>
+              <a:t>▸  </a:t>
+            </a:r>
+            <a:r>
+              <a:rPr sz="1600" b="0" i="0">
+                <a:solidFill>
+                  <a:srgbClr val="1B2330"/>
+                </a:solidFill>
+                <a:latin typeface="Montserrat"/>
+              </a:rPr>
+              <a:t>Individual: de la llave de usuario al aparato</a:t>
+            </a:r>
+          </a:p>
+          <a:p>
+            <a:pPr>
+              <a:spcAft>
+                <a:spcPts val="1100"/>
+              </a:spcAft>
+            </a:pPr>
+            <a:r>
+              <a:rPr sz="1600" b="1" i="0">
+                <a:solidFill>
+                  <a:srgbClr val="E8801A"/>
+                </a:solidFill>
+                <a:latin typeface="Montserrat"/>
+              </a:rPr>
+              <a:t>▸  </a:t>
+            </a:r>
+            <a:r>
+              <a:rPr sz="1600" b="0" i="0">
+                <a:solidFill>
+                  <a:srgbClr val="1B2330"/>
+                </a:solidFill>
+                <a:latin typeface="Montserrat"/>
+              </a:rPr>
+              <a:t>Receptora: de la acometida al aparato</a:t>
+            </a:r>
+          </a:p>
+          <a:p>
+            <a:pPr>
+              <a:spcAft>
+                <a:spcPts val="1100"/>
+              </a:spcAft>
+            </a:pPr>
+            <a:r>
+              <a:rPr sz="1600" b="1" i="0">
+                <a:solidFill>
+                  <a:srgbClr val="E8801A"/>
+                </a:solidFill>
+                <a:latin typeface="Montserrat"/>
+              </a:rPr>
+              <a:t>▸  </a:t>
+            </a:r>
+            <a:r>
+              <a:rPr sz="1600" b="0" i="0">
+                <a:solidFill>
+                  <a:srgbClr val="1B2330"/>
+                </a:solidFill>
+                <a:latin typeface="Montserrat"/>
+              </a:rPr>
+              <a:t>Intemperie: a cielo descubierto</a:t>
+            </a:r>
+          </a:p>
+        </p:txBody>
+      </p:sp>
+      <p:sp>
+        <p:nvSpPr>
+          <p:cNvPr id="9" name="imgph" descr="IMGQ:gas riser pipe in apartment stairwell"/>
+          <p:cNvSpPr/>
+          <p:nvPr/>
+        </p:nvSpPr>
+        <p:spPr>
+          <a:xfrm>
+            <a:off x="822960" y="1965960"/>
+            <a:ext cx="5303520" cy="4572000"/>
+          </a:xfrm>
+          <a:prstGeom prst="roundRect">
+            <a:avLst/>
+          </a:prstGeom>
+          <a:solidFill>
+            <a:srgbClr val="F3F6FB"/>
+          </a:solidFill>
+          <a:ln w="12700">
+            <a:solidFill>
+              <a:srgbClr val="C7D2E6"/>
+            </a:solidFill>
+          </a:ln>
+          <a:effectLst/>
+        </p:spPr>
+        <p:style>
+          <a:lnRef idx="1">
+            <a:schemeClr val="accent1"/>
+          </a:lnRef>
+          <a:fillRef idx="3">
+            <a:schemeClr val="accent1"/>
+          </a:fillRef>
+          <a:effectRef idx="2">
+            <a:schemeClr val="accent1"/>
+          </a:effectRef>
+          <a:fontRef idx="minor">
+            <a:schemeClr val="lt1"/>
+          </a:fontRef>
+        </p:style>
+        <p:txBody>
+          <a:bodyPr rtlCol="0" anchor="ctr"/>
+          <a:lstStyle/>
+          <a:p>
+            <a:pPr algn="ctr"/>
+          </a:p>
+        </p:txBody>
+      </p:sp>
+      <p:sp>
+        <p:nvSpPr>
+          <p:cNvPr id="10" name="TextBox 9"/>
+          <p:cNvSpPr txBox="1"/>
+          <p:nvPr/>
+        </p:nvSpPr>
+        <p:spPr>
+          <a:xfrm>
+            <a:off x="1097280" y="3611880"/>
+            <a:ext cx="4754880" cy="1280160"/>
+          </a:xfrm>
+          <a:prstGeom prst="rect">
+            <a:avLst/>
+          </a:prstGeom>
+          <a:noFill/>
+        </p:spPr>
+        <p:txBody>
+          <a:bodyPr wrap="square">
+            <a:spAutoFit/>
+          </a:bodyPr>
+          <a:lstStyle/>
+          <a:p>
+            <a:pPr algn="ctr"/>
+            <a:r>
+              <a:rPr sz="1400" b="1" i="0">
+                <a:solidFill>
+                  <a:srgbClr val="64748B"/>
+                </a:solidFill>
+                <a:latin typeface="Montserrat"/>
+              </a:rPr>
+              <a:t>IMAGEN</a:t>
+            </a:r>
+          </a:p>
+          <a:p>
+            <a:pPr algn="ctr"/>
+            <a:r>
+              <a:rPr sz="1100" b="0" i="1">
+                <a:solidFill>
+                  <a:srgbClr val="64748B"/>
+                </a:solidFill>
+                <a:latin typeface="Montserrat"/>
+              </a:rPr>
+              <a:t>gas riser pipe in apartment stairwell</a:t>
+            </a:r>
+          </a:p>
+        </p:txBody>
+      </p:sp>
+    </p:spTree>
+  </p:cSld>
+  <p:clrMapOvr>
+    <a:masterClrMapping/>
+  </p:clrMapOvr>
+  <mc:AlternateContent xmlns:mc="http://schemas.openxmlformats.org/markup-compatibility/2006">
+    <mc:Choice xmlns:p14="http://schemas.microsoft.com/office/powerpoint/2010/main" Requires="p14">
+      <p:transition spd="med" p14:dur="700">
+        <p14:cube dir="l"/>
+      </p:transition>
+    </mc:Choice>
+    <mc:Fallback>
+      <p:transition spd="med">
+        <p:push dir="l"/>
+      </p:transition>
+    </mc:Fallback>
+  </mc:AlternateContent>
+</p:sld>
+</file>
+
+<file path=ppt/slides/slide24.xml><?xml version="1.0" encoding="utf-8"?>
+<p:sld xmlns:a="http://schemas.openxmlformats.org/drawingml/2006/main" xmlns:p="http://schemas.openxmlformats.org/presentationml/2006/main" xmlns:r="http://schemas.openxmlformats.org/officeDocument/2006/relationships">
+  <p:cSld>
+    <p:spTree>
+      <p:nvGrpSpPr>
+        <p:cNvPr id="1" name=""/>
+        <p:cNvGrpSpPr/>
+        <p:nvPr/>
+      </p:nvGrpSpPr>
+      <p:grpSpPr/>
+      <p:sp>
+        <p:nvSpPr>
+          <p:cNvPr id="2" name="Rectangle 1"/>
+          <p:cNvSpPr/>
+          <p:nvPr/>
+        </p:nvSpPr>
+        <p:spPr>
+          <a:xfrm>
+            <a:off x="0" y="0"/>
+            <a:ext cx="12191695" cy="6858000"/>
+          </a:xfrm>
+          <a:prstGeom prst="rect">
+            <a:avLst/>
+          </a:prstGeom>
+          <a:solidFill>
+            <a:srgbClr val="FFFFFF"/>
+          </a:solidFill>
+          <a:ln>
+            <a:noFill/>
+          </a:ln>
+          <a:effectLst/>
+        </p:spPr>
+        <p:style>
+          <a:lnRef idx="1">
+            <a:schemeClr val="accent1"/>
+          </a:lnRef>
+          <a:fillRef idx="3">
+            <a:schemeClr val="accent1"/>
+          </a:fillRef>
+          <a:effectRef idx="2">
+            <a:schemeClr val="accent1"/>
+          </a:effectRef>
+          <a:fontRef idx="minor">
+            <a:schemeClr val="lt1"/>
+          </a:fontRef>
+        </p:style>
+        <p:txBody>
+          <a:bodyPr rtlCol="0" anchor="ctr"/>
+          <a:lstStyle/>
+          <a:p>
+            <a:pPr algn="ctr"/>
+          </a:p>
+        </p:txBody>
+      </p:sp>
+      <p:sp>
+        <p:nvSpPr>
+          <p:cNvPr id="3" name="TextBox 2"/>
+          <p:cNvSpPr txBox="1"/>
+          <p:nvPr/>
+        </p:nvSpPr>
+        <p:spPr>
+          <a:xfrm>
+            <a:off x="10607040" y="320040"/>
+            <a:ext cx="1371600" cy="365760"/>
+          </a:xfrm>
+          <a:prstGeom prst="rect">
+            <a:avLst/>
+          </a:prstGeom>
+          <a:noFill/>
+        </p:spPr>
+        <p:txBody>
+          <a:bodyPr wrap="square">
+            <a:spAutoFit/>
+          </a:bodyPr>
+          <a:lstStyle/>
+          <a:p>
+            <a:pPr algn="r"/>
+            <a:r>
+              <a:rPr sz="1000" b="1" i="0">
+                <a:solidFill>
+                  <a:srgbClr val="64748B"/>
+                </a:solidFill>
+                <a:latin typeface="Montserrat"/>
+              </a:rPr>
+              <a:t>024 / 026</a:t>
+            </a:r>
+          </a:p>
+        </p:txBody>
+      </p:sp>
+      <p:sp>
+        <p:nvSpPr>
+          <p:cNvPr id="4" name="TextBox 3"/>
+          <p:cNvSpPr txBox="1"/>
+          <p:nvPr/>
+        </p:nvSpPr>
+        <p:spPr>
+          <a:xfrm>
+            <a:off x="457200" y="6419088"/>
+            <a:ext cx="8229600" cy="365760"/>
+          </a:xfrm>
+          <a:prstGeom prst="rect">
+            <a:avLst/>
+          </a:prstGeom>
+          <a:noFill/>
+        </p:spPr>
+        <p:txBody>
+          <a:bodyPr wrap="square">
+            <a:spAutoFit/>
+          </a:bodyPr>
+          <a:lstStyle/>
+          <a:p>
+            <a:r>
+              <a:rPr sz="900" b="0" i="0">
+                <a:solidFill>
+                  <a:srgbClr val="64748B"/>
+                </a:solidFill>
+                <a:latin typeface="Montserrat"/>
+              </a:rPr>
+              <a:t>Curso Gas B · Tema 09 · UNE 60670-1 y -2</a:t>
+            </a:r>
+          </a:p>
+        </p:txBody>
+      </p:sp>
+      <p:sp>
+        <p:nvSpPr>
+          <p:cNvPr id="5" name="Rectangle 4"/>
+          <p:cNvSpPr/>
+          <p:nvPr/>
+        </p:nvSpPr>
+        <p:spPr>
+          <a:xfrm>
+            <a:off x="0" y="0"/>
+            <a:ext cx="12191695" cy="1143000"/>
+          </a:xfrm>
+          <a:prstGeom prst="rect">
+            <a:avLst/>
+          </a:prstGeom>
+          <a:solidFill>
+            <a:srgbClr val="E8801A"/>
+          </a:solidFill>
+          <a:ln>
+            <a:noFill/>
+          </a:ln>
+          <a:effectLst/>
+        </p:spPr>
+        <p:style>
+          <a:lnRef idx="1">
+            <a:schemeClr val="accent1"/>
+          </a:lnRef>
+          <a:fillRef idx="3">
+            <a:schemeClr val="accent1"/>
+          </a:fillRef>
+          <a:effectRef idx="2">
+            <a:schemeClr val="accent1"/>
+          </a:effectRef>
+          <a:fontRef idx="minor">
+            <a:schemeClr val="lt1"/>
+          </a:fontRef>
+        </p:style>
+        <p:txBody>
+          <a:bodyPr rtlCol="0" anchor="ctr"/>
+          <a:lstStyle/>
+          <a:p>
+            <a:pPr algn="ctr"/>
+          </a:p>
+        </p:txBody>
+      </p:sp>
+      <p:sp>
+        <p:nvSpPr>
+          <p:cNvPr id="6" name="TextBox 5"/>
+          <p:cNvSpPr txBox="1"/>
+          <p:nvPr/>
+        </p:nvSpPr>
+        <p:spPr>
+          <a:xfrm>
+            <a:off x="822960" y="274320"/>
+            <a:ext cx="10515600" cy="640080"/>
+          </a:xfrm>
+          <a:prstGeom prst="rect">
+            <a:avLst/>
+          </a:prstGeom>
+          <a:noFill/>
+        </p:spPr>
+        <p:txBody>
+          <a:bodyPr wrap="square">
+            <a:spAutoFit/>
+          </a:bodyPr>
+          <a:lstStyle/>
+          <a:p>
+            <a:r>
+              <a:rPr sz="2400" b="1" i="0">
+                <a:solidFill>
+                  <a:srgbClr val="FFFFFF"/>
+                </a:solidFill>
+                <a:latin typeface="Montserrat"/>
+              </a:rPr>
+              <a:t>⚡  PREGUNTA RÁPIDA</a:t>
+            </a:r>
+          </a:p>
+        </p:txBody>
+      </p:sp>
+      <p:sp>
+        <p:nvSpPr>
+          <p:cNvPr id="7" name="TextBox 6"/>
+          <p:cNvSpPr txBox="1"/>
+          <p:nvPr/>
+        </p:nvSpPr>
+        <p:spPr>
+          <a:xfrm>
+            <a:off x="822960" y="1508760"/>
+            <a:ext cx="10515600" cy="1371600"/>
+          </a:xfrm>
+          <a:prstGeom prst="rect">
+            <a:avLst/>
+          </a:prstGeom>
+          <a:noFill/>
+        </p:spPr>
+        <p:txBody>
+          <a:bodyPr wrap="square">
+            <a:spAutoFit/>
+          </a:bodyPr>
+          <a:lstStyle/>
+          <a:p>
+            <a:r>
+              <a:rPr sz="2400" b="1" i="0">
+                <a:solidFill>
+                  <a:srgbClr val="1E2761"/>
+                </a:solidFill>
+                <a:latin typeface="Montserrat"/>
+              </a:rPr>
+              <a:t>¿Qué llave marca el límite entre la instalación común y la individual?</a:t>
+            </a:r>
+          </a:p>
+        </p:txBody>
+      </p:sp>
+      <p:sp>
+        <p:nvSpPr>
+          <p:cNvPr id="8" name="Rounded Rectangle 7"/>
+          <p:cNvSpPr/>
+          <p:nvPr/>
+        </p:nvSpPr>
+        <p:spPr>
+          <a:xfrm>
+            <a:off x="822960" y="3291840"/>
+            <a:ext cx="4983480" cy="1143000"/>
+          </a:xfrm>
+          <a:prstGeom prst="roundRect">
+            <a:avLst/>
+          </a:prstGeom>
+          <a:solidFill>
+            <a:srgbClr val="F3F6FB"/>
+          </a:solidFill>
+          <a:ln w="12700">
+            <a:solidFill>
+              <a:srgbClr val="C7D2E6"/>
+            </a:solidFill>
+          </a:ln>
+          <a:effectLst/>
+        </p:spPr>
+        <p:style>
+          <a:lnRef idx="1">
+            <a:schemeClr val="accent1"/>
+          </a:lnRef>
+          <a:fillRef idx="3">
+            <a:schemeClr val="accent1"/>
+          </a:fillRef>
+          <a:effectRef idx="2">
+            <a:schemeClr val="accent1"/>
+          </a:effectRef>
+          <a:fontRef idx="minor">
+            <a:schemeClr val="lt1"/>
+          </a:fontRef>
+        </p:style>
+        <p:txBody>
+          <a:bodyPr rtlCol="0" anchor="ctr"/>
+          <a:lstStyle/>
+          <a:p>
+            <a:pPr algn="ctr"/>
+          </a:p>
+        </p:txBody>
+      </p:sp>
+      <p:sp>
+        <p:nvSpPr>
+          <p:cNvPr id="9" name="Rectangle 8"/>
+          <p:cNvSpPr/>
+          <p:nvPr/>
+        </p:nvSpPr>
+        <p:spPr>
+          <a:xfrm>
+            <a:off x="822960" y="3291840"/>
+            <a:ext cx="640080" cy="1143000"/>
+          </a:xfrm>
+          <a:prstGeom prst="rect">
+            <a:avLst/>
+          </a:prstGeom>
+          <a:solidFill>
+            <a:srgbClr val="1E2761"/>
+          </a:solidFill>
+          <a:ln>
+            <a:noFill/>
+          </a:ln>
+          <a:effectLst/>
+        </p:spPr>
+        <p:style>
+          <a:lnRef idx="1">
+            <a:schemeClr val="accent1"/>
+          </a:lnRef>
+          <a:fillRef idx="3">
+            <a:schemeClr val="accent1"/>
+          </a:fillRef>
+          <a:effectRef idx="2">
+            <a:schemeClr val="accent1"/>
+          </a:effectRef>
+          <a:fontRef idx="minor">
+            <a:schemeClr val="lt1"/>
+          </a:fontRef>
+        </p:style>
+        <p:txBody>
+          <a:bodyPr rtlCol="0" anchor="ctr"/>
+          <a:lstStyle/>
+          <a:p>
+            <a:pPr algn="ctr"/>
+          </a:p>
+        </p:txBody>
+      </p:sp>
+      <p:sp>
+        <p:nvSpPr>
+          <p:cNvPr id="10" name="TextBox 9"/>
+          <p:cNvSpPr txBox="1"/>
+          <p:nvPr/>
+        </p:nvSpPr>
+        <p:spPr>
+          <a:xfrm>
+            <a:off x="822960" y="3611880"/>
+            <a:ext cx="640080" cy="548640"/>
+          </a:xfrm>
+          <a:prstGeom prst="rect">
+            <a:avLst/>
+          </a:prstGeom>
+          <a:noFill/>
+        </p:spPr>
+        <p:txBody>
+          <a:bodyPr wrap="square">
+            <a:spAutoFit/>
+          </a:bodyPr>
+          <a:lstStyle/>
+          <a:p>
+            <a:pPr algn="ctr"/>
+            <a:r>
+              <a:rPr sz="2200" b="1" i="0">
+                <a:solidFill>
+                  <a:srgbClr val="FFFFFF"/>
+                </a:solidFill>
+                <a:latin typeface="Montserrat"/>
+              </a:rPr>
+              <a:t>A</a:t>
+            </a:r>
+          </a:p>
+        </p:txBody>
+      </p:sp>
+      <p:sp>
+        <p:nvSpPr>
+          <p:cNvPr id="11" name="TextBox 10"/>
+          <p:cNvSpPr txBox="1"/>
+          <p:nvPr/>
+        </p:nvSpPr>
+        <p:spPr>
+          <a:xfrm>
+            <a:off x="1600200" y="3474720"/>
+            <a:ext cx="4114800" cy="868680"/>
+          </a:xfrm>
+          <a:prstGeom prst="rect">
+            <a:avLst/>
+          </a:prstGeom>
+          <a:noFill/>
+        </p:spPr>
+        <p:txBody>
+          <a:bodyPr wrap="square">
+            <a:spAutoFit/>
+          </a:bodyPr>
+          <a:lstStyle/>
+          <a:p>
+            <a:r>
+              <a:rPr sz="1400" b="0" i="0">
+                <a:solidFill>
+                  <a:srgbClr val="1B2330"/>
+                </a:solidFill>
+                <a:latin typeface="Montserrat"/>
+              </a:rPr>
+              <a:t>La llave de acometida</a:t>
+            </a:r>
+          </a:p>
+        </p:txBody>
+      </p:sp>
+      <p:sp>
+        <p:nvSpPr>
+          <p:cNvPr id="12" name="Rounded Rectangle 11"/>
+          <p:cNvSpPr/>
+          <p:nvPr/>
+        </p:nvSpPr>
+        <p:spPr>
+          <a:xfrm>
+            <a:off x="6355080" y="3291840"/>
+            <a:ext cx="4983480" cy="1143000"/>
+          </a:xfrm>
+          <a:prstGeom prst="roundRect">
+            <a:avLst/>
+          </a:prstGeom>
+          <a:solidFill>
+            <a:srgbClr val="F3F6FB"/>
+          </a:solidFill>
+          <a:ln w="12700">
+            <a:solidFill>
+              <a:srgbClr val="C7D2E6"/>
+            </a:solidFill>
+          </a:ln>
+          <a:effectLst/>
+        </p:spPr>
+        <p:style>
+          <a:lnRef idx="1">
+            <a:schemeClr val="accent1"/>
+          </a:lnRef>
+          <a:fillRef idx="3">
+            <a:schemeClr val="accent1"/>
+          </a:fillRef>
+          <a:effectRef idx="2">
+            <a:schemeClr val="accent1"/>
+          </a:effectRef>
+          <a:fontRef idx="minor">
+            <a:schemeClr val="lt1"/>
+          </a:fontRef>
+        </p:style>
+        <p:txBody>
+          <a:bodyPr rtlCol="0" anchor="ctr"/>
+          <a:lstStyle/>
+          <a:p>
+            <a:pPr algn="ctr"/>
+          </a:p>
+        </p:txBody>
+      </p:sp>
+      <p:sp>
+        <p:nvSpPr>
+          <p:cNvPr id="13" name="Rectangle 12"/>
+          <p:cNvSpPr/>
+          <p:nvPr/>
+        </p:nvSpPr>
+        <p:spPr>
+          <a:xfrm>
+            <a:off x="6355080" y="3291840"/>
+            <a:ext cx="640080" cy="1143000"/>
+          </a:xfrm>
+          <a:prstGeom prst="rect">
+            <a:avLst/>
+          </a:prstGeom>
+          <a:solidFill>
+            <a:srgbClr val="1E2761"/>
+          </a:solidFill>
+          <a:ln>
+            <a:noFill/>
+          </a:ln>
+          <a:effectLst/>
+        </p:spPr>
+        <p:style>
+          <a:lnRef idx="1">
+            <a:schemeClr val="accent1"/>
+          </a:lnRef>
+          <a:fillRef idx="3">
+            <a:schemeClr val="accent1"/>
+          </a:fillRef>
+          <a:effectRef idx="2">
+            <a:schemeClr val="accent1"/>
+          </a:effectRef>
+          <a:fontRef idx="minor">
+            <a:schemeClr val="lt1"/>
+          </a:fontRef>
+        </p:style>
+        <p:txBody>
+          <a:bodyPr rtlCol="0" anchor="ctr"/>
+          <a:lstStyle/>
+          <a:p>
+            <a:pPr algn="ctr"/>
+          </a:p>
+        </p:txBody>
+      </p:sp>
+      <p:sp>
+        <p:nvSpPr>
+          <p:cNvPr id="14" name="TextBox 13"/>
+          <p:cNvSpPr txBox="1"/>
+          <p:nvPr/>
+        </p:nvSpPr>
+        <p:spPr>
+          <a:xfrm>
+            <a:off x="6355080" y="3611880"/>
+            <a:ext cx="640080" cy="548640"/>
+          </a:xfrm>
+          <a:prstGeom prst="rect">
+            <a:avLst/>
+          </a:prstGeom>
+          <a:noFill/>
+        </p:spPr>
+        <p:txBody>
+          <a:bodyPr wrap="square">
+            <a:spAutoFit/>
+          </a:bodyPr>
+          <a:lstStyle/>
+          <a:p>
+            <a:pPr algn="ctr"/>
+            <a:r>
+              <a:rPr sz="2200" b="1" i="0">
+                <a:solidFill>
+                  <a:srgbClr val="FFFFFF"/>
+                </a:solidFill>
+                <a:latin typeface="Montserrat"/>
+              </a:rPr>
+              <a:t>B</a:t>
+            </a:r>
+          </a:p>
+        </p:txBody>
+      </p:sp>
+      <p:sp>
+        <p:nvSpPr>
+          <p:cNvPr id="15" name="TextBox 14"/>
+          <p:cNvSpPr txBox="1"/>
+          <p:nvPr/>
+        </p:nvSpPr>
+        <p:spPr>
+          <a:xfrm>
+            <a:off x="7132320" y="3474720"/>
+            <a:ext cx="4114800" cy="868680"/>
+          </a:xfrm>
+          <a:prstGeom prst="rect">
+            <a:avLst/>
+          </a:prstGeom>
+          <a:noFill/>
+        </p:spPr>
+        <p:txBody>
+          <a:bodyPr wrap="square">
+            <a:spAutoFit/>
+          </a:bodyPr>
+          <a:lstStyle/>
+          <a:p>
+            <a:r>
+              <a:rPr sz="1400" b="0" i="0">
+                <a:solidFill>
+                  <a:srgbClr val="1B2330"/>
+                </a:solidFill>
+                <a:latin typeface="Montserrat"/>
+              </a:rPr>
+              <a:t>La llave de usuario</a:t>
+            </a:r>
+          </a:p>
+        </p:txBody>
+      </p:sp>
+      <p:sp>
+        <p:nvSpPr>
+          <p:cNvPr id="16" name="Rounded Rectangle 15"/>
+          <p:cNvSpPr/>
+          <p:nvPr/>
+        </p:nvSpPr>
+        <p:spPr>
+          <a:xfrm>
+            <a:off x="822960" y="4617720"/>
+            <a:ext cx="4983480" cy="1143000"/>
+          </a:xfrm>
+          <a:prstGeom prst="roundRect">
+            <a:avLst/>
+          </a:prstGeom>
+          <a:solidFill>
+            <a:srgbClr val="F3F6FB"/>
+          </a:solidFill>
+          <a:ln w="12700">
+            <a:solidFill>
+              <a:srgbClr val="C7D2E6"/>
+            </a:solidFill>
+          </a:ln>
+          <a:effectLst/>
+        </p:spPr>
+        <p:style>
+          <a:lnRef idx="1">
+            <a:schemeClr val="accent1"/>
+          </a:lnRef>
+          <a:fillRef idx="3">
+            <a:schemeClr val="accent1"/>
+          </a:fillRef>
+          <a:effectRef idx="2">
+            <a:schemeClr val="accent1"/>
+          </a:effectRef>
+          <a:fontRef idx="minor">
+            <a:schemeClr val="lt1"/>
+          </a:fontRef>
+        </p:style>
+        <p:txBody>
+          <a:bodyPr rtlCol="0" anchor="ctr"/>
+          <a:lstStyle/>
+          <a:p>
+            <a:pPr algn="ctr"/>
+          </a:p>
+        </p:txBody>
+      </p:sp>
+      <p:sp>
+        <p:nvSpPr>
+          <p:cNvPr id="17" name="Rectangle 16"/>
+          <p:cNvSpPr/>
+          <p:nvPr/>
+        </p:nvSpPr>
+        <p:spPr>
+          <a:xfrm>
+            <a:off x="822960" y="4617720"/>
+            <a:ext cx="640080" cy="1143000"/>
+          </a:xfrm>
+          <a:prstGeom prst="rect">
+            <a:avLst/>
+          </a:prstGeom>
+          <a:solidFill>
+            <a:srgbClr val="1E2761"/>
+          </a:solidFill>
+          <a:ln>
+            <a:noFill/>
+          </a:ln>
+          <a:effectLst/>
+        </p:spPr>
+        <p:style>
+          <a:lnRef idx="1">
+            <a:schemeClr val="accent1"/>
+          </a:lnRef>
+          <a:fillRef idx="3">
+            <a:schemeClr val="accent1"/>
+          </a:fillRef>
+          <a:effectRef idx="2">
+            <a:schemeClr val="accent1"/>
+          </a:effectRef>
+          <a:fontRef idx="minor">
+            <a:schemeClr val="lt1"/>
+          </a:fontRef>
+        </p:style>
+        <p:txBody>
+          <a:bodyPr rtlCol="0" anchor="ctr"/>
+          <a:lstStyle/>
+          <a:p>
+            <a:pPr algn="ctr"/>
+          </a:p>
+        </p:txBody>
+      </p:sp>
+      <p:sp>
+        <p:nvSpPr>
+          <p:cNvPr id="18" name="TextBox 17"/>
+          <p:cNvSpPr txBox="1"/>
+          <p:nvPr/>
+        </p:nvSpPr>
+        <p:spPr>
+          <a:xfrm>
+            <a:off x="822960" y="4937760"/>
+            <a:ext cx="640080" cy="548640"/>
+          </a:xfrm>
+          <a:prstGeom prst="rect">
+            <a:avLst/>
+          </a:prstGeom>
+          <a:noFill/>
+        </p:spPr>
+        <p:txBody>
+          <a:bodyPr wrap="square">
+            <a:spAutoFit/>
+          </a:bodyPr>
+          <a:lstStyle/>
+          <a:p>
+            <a:pPr algn="ctr"/>
+            <a:r>
+              <a:rPr sz="2200" b="1" i="0">
+                <a:solidFill>
+                  <a:srgbClr val="FFFFFF"/>
+                </a:solidFill>
+                <a:latin typeface="Montserrat"/>
+              </a:rPr>
+              <a:t>C</a:t>
+            </a:r>
+          </a:p>
+        </p:txBody>
+      </p:sp>
+      <p:sp>
+        <p:nvSpPr>
+          <p:cNvPr id="19" name="TextBox 18"/>
+          <p:cNvSpPr txBox="1"/>
+          <p:nvPr/>
+        </p:nvSpPr>
+        <p:spPr>
+          <a:xfrm>
+            <a:off x="1600200" y="4800600"/>
+            <a:ext cx="4114800" cy="868680"/>
+          </a:xfrm>
+          <a:prstGeom prst="rect">
+            <a:avLst/>
+          </a:prstGeom>
+          <a:noFill/>
+        </p:spPr>
+        <p:txBody>
+          <a:bodyPr wrap="square">
+            <a:spAutoFit/>
+          </a:bodyPr>
+          <a:lstStyle/>
+          <a:p>
+            <a:r>
+              <a:rPr sz="1400" b="0" i="0">
+                <a:solidFill>
+                  <a:srgbClr val="1B2330"/>
+                </a:solidFill>
+                <a:latin typeface="Montserrat"/>
+              </a:rPr>
+              <a:t>La llave de edificio</a:t>
+            </a:r>
+          </a:p>
+        </p:txBody>
+      </p:sp>
+      <p:sp>
+        <p:nvSpPr>
+          <p:cNvPr id="20" name="Rounded Rectangle 19"/>
+          <p:cNvSpPr/>
+          <p:nvPr/>
+        </p:nvSpPr>
+        <p:spPr>
+          <a:xfrm>
+            <a:off x="6355080" y="4617720"/>
+            <a:ext cx="4983480" cy="1143000"/>
+          </a:xfrm>
+          <a:prstGeom prst="roundRect">
+            <a:avLst/>
+          </a:prstGeom>
+          <a:solidFill>
+            <a:srgbClr val="F3F6FB"/>
+          </a:solidFill>
+          <a:ln w="12700">
+            <a:solidFill>
+              <a:srgbClr val="C7D2E6"/>
+            </a:solidFill>
+          </a:ln>
+          <a:effectLst/>
+        </p:spPr>
+        <p:style>
+          <a:lnRef idx="1">
+            <a:schemeClr val="accent1"/>
+          </a:lnRef>
+          <a:fillRef idx="3">
+            <a:schemeClr val="accent1"/>
+          </a:fillRef>
+          <a:effectRef idx="2">
+            <a:schemeClr val="accent1"/>
+          </a:effectRef>
+          <a:fontRef idx="minor">
+            <a:schemeClr val="lt1"/>
+          </a:fontRef>
+        </p:style>
+        <p:txBody>
+          <a:bodyPr rtlCol="0" anchor="ctr"/>
+          <a:lstStyle/>
+          <a:p>
+            <a:pPr algn="ctr"/>
+          </a:p>
+        </p:txBody>
+      </p:sp>
+      <p:sp>
+        <p:nvSpPr>
+          <p:cNvPr id="21" name="Rectangle 20"/>
+          <p:cNvSpPr/>
+          <p:nvPr/>
+        </p:nvSpPr>
+        <p:spPr>
+          <a:xfrm>
+            <a:off x="6355080" y="4617720"/>
+            <a:ext cx="640080" cy="1143000"/>
+          </a:xfrm>
+          <a:prstGeom prst="rect">
+            <a:avLst/>
+          </a:prstGeom>
+          <a:solidFill>
+            <a:srgbClr val="1E2761"/>
+          </a:solidFill>
+          <a:ln>
+            <a:noFill/>
+          </a:ln>
+          <a:effectLst/>
+        </p:spPr>
+        <p:style>
+          <a:lnRef idx="1">
+            <a:schemeClr val="accent1"/>
+          </a:lnRef>
+          <a:fillRef idx="3">
+            <a:schemeClr val="accent1"/>
+          </a:fillRef>
+          <a:effectRef idx="2">
+            <a:schemeClr val="accent1"/>
+          </a:effectRef>
+          <a:fontRef idx="minor">
+            <a:schemeClr val="lt1"/>
+          </a:fontRef>
+        </p:style>
+        <p:txBody>
+          <a:bodyPr rtlCol="0" anchor="ctr"/>
+          <a:lstStyle/>
+          <a:p>
+            <a:pPr algn="ctr"/>
+          </a:p>
+        </p:txBody>
+      </p:sp>
+      <p:sp>
+        <p:nvSpPr>
+          <p:cNvPr id="22" name="TextBox 21"/>
+          <p:cNvSpPr txBox="1"/>
+          <p:nvPr/>
+        </p:nvSpPr>
+        <p:spPr>
+          <a:xfrm>
+            <a:off x="6355080" y="4937760"/>
+            <a:ext cx="640080" cy="548640"/>
+          </a:xfrm>
+          <a:prstGeom prst="rect">
+            <a:avLst/>
+          </a:prstGeom>
+          <a:noFill/>
+        </p:spPr>
+        <p:txBody>
+          <a:bodyPr wrap="square">
+            <a:spAutoFit/>
+          </a:bodyPr>
+          <a:lstStyle/>
+          <a:p>
+            <a:pPr algn="ctr"/>
+            <a:r>
+              <a:rPr sz="2200" b="1" i="0">
+                <a:solidFill>
+                  <a:srgbClr val="FFFFFF"/>
+                </a:solidFill>
+                <a:latin typeface="Montserrat"/>
+              </a:rPr>
+              <a:t>D</a:t>
+            </a:r>
+          </a:p>
+        </p:txBody>
+      </p:sp>
+      <p:sp>
+        <p:nvSpPr>
+          <p:cNvPr id="23" name="TextBox 22"/>
+          <p:cNvSpPr txBox="1"/>
+          <p:nvPr/>
+        </p:nvSpPr>
+        <p:spPr>
+          <a:xfrm>
+            <a:off x="7132320" y="4800600"/>
+            <a:ext cx="4114800" cy="868680"/>
+          </a:xfrm>
+          <a:prstGeom prst="rect">
+            <a:avLst/>
+          </a:prstGeom>
+          <a:noFill/>
+        </p:spPr>
+        <p:txBody>
+          <a:bodyPr wrap="square">
+            <a:spAutoFit/>
+          </a:bodyPr>
+          <a:lstStyle/>
+          <a:p>
+            <a:r>
+              <a:rPr sz="1400" b="0" i="0">
+                <a:solidFill>
+                  <a:srgbClr val="1B2330"/>
+                </a:solidFill>
+                <a:latin typeface="Montserrat"/>
+              </a:rPr>
+              <a:t>La llave de conexión de aparato</a:t>
+            </a:r>
+          </a:p>
+        </p:txBody>
+      </p:sp>
+    </p:spTree>
+  </p:cSld>
+  <p:clrMapOvr>
+    <a:masterClrMapping/>
+  </p:clrMapOvr>
+  <mc:AlternateContent xmlns:mc="http://schemas.openxmlformats.org/markup-compatibility/2006">
+    <mc:Choice xmlns:p14="http://schemas.microsoft.com/office/powerpoint/2010/main" Requires="p14">
+      <p:transition spd="med" p14:dur="700">
+        <p14:cube dir="r"/>
+      </p:transition>
+    </mc:Choice>
+    <mc:Fallback>
+      <p:transition spd="med">
+        <p:push dir="r"/>
+      </p:transition>
+    </mc:Fallback>
+  </mc:AlternateContent>
+</p:sld>
+</file>
+
+<file path=ppt/slides/slide25.xml><?xml version="1.0" encoding="utf-8"?>
+<p:sld xmlns:a="http://schemas.openxmlformats.org/drawingml/2006/main" xmlns:p="http://schemas.openxmlformats.org/presentationml/2006/main" xmlns:r="http://schemas.openxmlformats.org/officeDocument/2006/relationships">
+  <p:cSld>
+    <p:spTree>
+      <p:nvGrpSpPr>
+        <p:cNvPr id="1" name=""/>
+        <p:cNvGrpSpPr/>
+        <p:nvPr/>
+      </p:nvGrpSpPr>
+      <p:grpSpPr/>
+      <p:sp>
+        <p:nvSpPr>
+          <p:cNvPr id="2" name="Rectangle 1"/>
+          <p:cNvSpPr/>
+          <p:nvPr/>
+        </p:nvSpPr>
+        <p:spPr>
+          <a:xfrm>
+            <a:off x="0" y="0"/>
+            <a:ext cx="12191695" cy="6858000"/>
+          </a:xfrm>
+          <a:prstGeom prst="rect">
+            <a:avLst/>
+          </a:prstGeom>
+          <a:solidFill>
+            <a:srgbClr val="FFFFFF"/>
+          </a:solidFill>
+          <a:ln>
+            <a:noFill/>
+          </a:ln>
+          <a:effectLst/>
+        </p:spPr>
+        <p:style>
+          <a:lnRef idx="1">
+            <a:schemeClr val="accent1"/>
+          </a:lnRef>
+          <a:fillRef idx="3">
+            <a:schemeClr val="accent1"/>
+          </a:fillRef>
+          <a:effectRef idx="2">
+            <a:schemeClr val="accent1"/>
+          </a:effectRef>
+          <a:fontRef idx="minor">
+            <a:schemeClr val="lt1"/>
+          </a:fontRef>
+        </p:style>
+        <p:txBody>
+          <a:bodyPr rtlCol="0" anchor="ctr"/>
+          <a:lstStyle/>
+          <a:p>
+            <a:pPr algn="ctr"/>
+          </a:p>
+        </p:txBody>
+      </p:sp>
+      <p:sp>
+        <p:nvSpPr>
+          <p:cNvPr id="3" name="TextBox 2"/>
+          <p:cNvSpPr txBox="1"/>
+          <p:nvPr/>
+        </p:nvSpPr>
+        <p:spPr>
+          <a:xfrm>
+            <a:off x="10607040" y="320040"/>
+            <a:ext cx="1371600" cy="365760"/>
+          </a:xfrm>
+          <a:prstGeom prst="rect">
+            <a:avLst/>
+          </a:prstGeom>
+          <a:noFill/>
+        </p:spPr>
+        <p:txBody>
+          <a:bodyPr wrap="square">
+            <a:spAutoFit/>
+          </a:bodyPr>
+          <a:lstStyle/>
+          <a:p>
+            <a:pPr algn="r"/>
+            <a:r>
+              <a:rPr sz="1000" b="1" i="0">
+                <a:solidFill>
+                  <a:srgbClr val="64748B"/>
+                </a:solidFill>
+                <a:latin typeface="Montserrat"/>
+              </a:rPr>
+              <a:t>025 / 026</a:t>
+            </a:r>
+          </a:p>
+        </p:txBody>
+      </p:sp>
+      <p:sp>
+        <p:nvSpPr>
+          <p:cNvPr id="4" name="TextBox 3"/>
+          <p:cNvSpPr txBox="1"/>
+          <p:nvPr/>
+        </p:nvSpPr>
+        <p:spPr>
+          <a:xfrm>
+            <a:off x="457200" y="6419088"/>
+            <a:ext cx="8229600" cy="365760"/>
+          </a:xfrm>
+          <a:prstGeom prst="rect">
+            <a:avLst/>
+          </a:prstGeom>
+          <a:noFill/>
+        </p:spPr>
+        <p:txBody>
+          <a:bodyPr wrap="square">
+            <a:spAutoFit/>
+          </a:bodyPr>
+          <a:lstStyle/>
+          <a:p>
+            <a:r>
+              <a:rPr sz="900" b="0" i="0">
+                <a:solidFill>
+                  <a:srgbClr val="64748B"/>
+                </a:solidFill>
+                <a:latin typeface="Montserrat"/>
+              </a:rPr>
+              <a:t>Curso Gas B · Tema 09 · UNE 60670-1 y -2</a:t>
+            </a:r>
+          </a:p>
+        </p:txBody>
+      </p:sp>
+      <p:sp>
+        <p:nvSpPr>
+          <p:cNvPr id="5" name="Rectangle 4"/>
+          <p:cNvSpPr/>
+          <p:nvPr/>
+        </p:nvSpPr>
+        <p:spPr>
+          <a:xfrm>
+            <a:off x="0" y="0"/>
+            <a:ext cx="12191695" cy="1143000"/>
+          </a:xfrm>
+          <a:prstGeom prst="rect">
+            <a:avLst/>
+          </a:prstGeom>
+          <a:solidFill>
+            <a:srgbClr val="1E8E4B"/>
+          </a:solidFill>
+          <a:ln>
+            <a:noFill/>
+          </a:ln>
+          <a:effectLst/>
+        </p:spPr>
+        <p:style>
+          <a:lnRef idx="1">
+            <a:schemeClr val="accent1"/>
+          </a:lnRef>
+          <a:fillRef idx="3">
+            <a:schemeClr val="accent1"/>
+          </a:fillRef>
+          <a:effectRef idx="2">
+            <a:schemeClr val="accent1"/>
+          </a:effectRef>
+          <a:fontRef idx="minor">
+            <a:schemeClr val="lt1"/>
+          </a:fontRef>
+        </p:style>
+        <p:txBody>
+          <a:bodyPr rtlCol="0" anchor="ctr"/>
+          <a:lstStyle/>
+          <a:p>
+            <a:pPr algn="ctr"/>
+          </a:p>
+        </p:txBody>
+      </p:sp>
+      <p:sp>
+        <p:nvSpPr>
+          <p:cNvPr id="6" name="TextBox 5"/>
+          <p:cNvSpPr txBox="1"/>
+          <p:nvPr/>
+        </p:nvSpPr>
+        <p:spPr>
+          <a:xfrm>
+            <a:off x="822960" y="274320"/>
+            <a:ext cx="10515600" cy="640080"/>
+          </a:xfrm>
+          <a:prstGeom prst="rect">
+            <a:avLst/>
+          </a:prstGeom>
+          <a:noFill/>
+        </p:spPr>
+        <p:txBody>
+          <a:bodyPr wrap="square">
+            <a:spAutoFit/>
+          </a:bodyPr>
+          <a:lstStyle/>
+          <a:p>
+            <a:r>
+              <a:rPr sz="2400" b="1" i="0">
+                <a:solidFill>
+                  <a:srgbClr val="FFFFFF"/>
+                </a:solidFill>
+                <a:latin typeface="Montserrat"/>
+              </a:rPr>
+              <a:t>✔  RESPUESTA:  B</a:t>
+            </a:r>
+          </a:p>
+        </p:txBody>
+      </p:sp>
+      <p:sp>
+        <p:nvSpPr>
+          <p:cNvPr id="7" name="TextBox 6"/>
+          <p:cNvSpPr txBox="1"/>
+          <p:nvPr/>
+        </p:nvSpPr>
+        <p:spPr>
+          <a:xfrm>
+            <a:off x="822960" y="1417320"/>
+            <a:ext cx="10515600" cy="914400"/>
+          </a:xfrm>
+          <a:prstGeom prst="rect">
+            <a:avLst/>
+          </a:prstGeom>
+          <a:noFill/>
+        </p:spPr>
+        <p:txBody>
+          <a:bodyPr wrap="square">
+            <a:spAutoFit/>
+          </a:bodyPr>
+          <a:lstStyle/>
+          <a:p>
+            <a:r>
+              <a:rPr sz="1800" b="1" i="0">
+                <a:solidFill>
+                  <a:srgbClr val="64748B"/>
+                </a:solidFill>
+                <a:latin typeface="Montserrat"/>
+              </a:rPr>
+              <a:t>¿Qué llave marca el límite entre la instalación común y la individual?</a:t>
+            </a:r>
+          </a:p>
+        </p:txBody>
+      </p:sp>
+      <p:sp>
+        <p:nvSpPr>
+          <p:cNvPr id="8" name="Rounded Rectangle 7"/>
+          <p:cNvSpPr/>
+          <p:nvPr/>
+        </p:nvSpPr>
+        <p:spPr>
+          <a:xfrm>
+            <a:off x="822960" y="2514600"/>
+            <a:ext cx="10515600" cy="914400"/>
+          </a:xfrm>
+          <a:prstGeom prst="roundRect">
+            <a:avLst/>
+          </a:prstGeom>
+          <a:solidFill>
+            <a:srgbClr val="E9F6EE"/>
+          </a:solidFill>
+          <a:ln w="12700">
+            <a:solidFill>
+              <a:srgbClr val="1E8E4B"/>
+            </a:solidFill>
+          </a:ln>
+          <a:effectLst/>
+        </p:spPr>
+        <p:style>
+          <a:lnRef idx="1">
+            <a:schemeClr val="accent1"/>
+          </a:lnRef>
+          <a:fillRef idx="3">
+            <a:schemeClr val="accent1"/>
+          </a:fillRef>
+          <a:effectRef idx="2">
+            <a:schemeClr val="accent1"/>
+          </a:effectRef>
+          <a:fontRef idx="minor">
+            <a:schemeClr val="lt1"/>
+          </a:fontRef>
+        </p:style>
+        <p:txBody>
+          <a:bodyPr rtlCol="0" anchor="ctr"/>
+          <a:lstStyle/>
+          <a:p>
+            <a:pPr algn="ctr"/>
+          </a:p>
+        </p:txBody>
+      </p:sp>
+      <p:sp>
+        <p:nvSpPr>
+          <p:cNvPr id="9" name="TextBox 8"/>
+          <p:cNvSpPr txBox="1"/>
+          <p:nvPr/>
+        </p:nvSpPr>
+        <p:spPr>
+          <a:xfrm>
+            <a:off x="1097280" y="2697480"/>
+            <a:ext cx="10058400" cy="640080"/>
+          </a:xfrm>
+          <a:prstGeom prst="rect">
+            <a:avLst/>
+          </a:prstGeom>
+          <a:noFill/>
+        </p:spPr>
+        <p:txBody>
+          <a:bodyPr wrap="square">
+            <a:spAutoFit/>
+          </a:bodyPr>
+          <a:lstStyle/>
+          <a:p>
+            <a:r>
+              <a:rPr sz="1800" b="1" i="0">
+                <a:solidFill>
+                  <a:srgbClr val="1E8E4B"/>
+                </a:solidFill>
+                <a:latin typeface="Montserrat"/>
+              </a:rPr>
+              <a:t>B.  </a:t>
+            </a:r>
+            <a:r>
+              <a:rPr sz="1800" b="1" i="0">
+                <a:solidFill>
+                  <a:srgbClr val="1E2761"/>
+                </a:solidFill>
+                <a:latin typeface="Montserrat"/>
+              </a:rPr>
+              <a:t>La llave de usuario</a:t>
+            </a:r>
+          </a:p>
+        </p:txBody>
+      </p:sp>
+      <p:sp>
+        <p:nvSpPr>
+          <p:cNvPr id="10" name="TextBox 9"/>
+          <p:cNvSpPr txBox="1"/>
+          <p:nvPr/>
+        </p:nvSpPr>
+        <p:spPr>
+          <a:xfrm>
+            <a:off x="822960" y="3749039"/>
+            <a:ext cx="10515600" cy="2194560"/>
+          </a:xfrm>
+          <a:prstGeom prst="rect">
+            <a:avLst/>
+          </a:prstGeom>
+          <a:noFill/>
+        </p:spPr>
+        <p:txBody>
+          <a:bodyPr wrap="square">
+            <a:spAutoFit/>
+          </a:bodyPr>
+          <a:lstStyle/>
+          <a:p>
+            <a:r>
+              <a:rPr sz="1500" b="1" i="0">
+                <a:solidFill>
+                  <a:srgbClr val="E8801A"/>
+                </a:solidFill>
+                <a:latin typeface="Montserrat"/>
+              </a:rPr>
+              <a:t>Por qué:  </a:t>
+            </a:r>
+            <a:r>
+              <a:rPr sz="1500" b="0" i="0">
+                <a:solidFill>
+                  <a:srgbClr val="1B2330"/>
+                </a:solidFill>
+                <a:latin typeface="Montserrat"/>
+              </a:rPr>
+              <a:t>La llave de usuario pertenece a la común y establece el límite con la individual: cierra una y da inicio a la otra.</a:t>
+            </a:r>
+          </a:p>
+        </p:txBody>
+      </p:sp>
+    </p:spTree>
+  </p:cSld>
+  <p:clrMapOvr>
+    <a:masterClrMapping/>
+  </p:clrMapOvr>
+  <mc:AlternateContent xmlns:mc="http://schemas.openxmlformats.org/markup-compatibility/2006">
+    <mc:Choice xmlns:p14="http://schemas.microsoft.com/office/powerpoint/2010/main" Requires="p14">
+      <p:transition spd="med" p14:dur="700">
+        <p14:cube dir="l"/>
+      </p:transition>
+    </mc:Choice>
+    <mc:Fallback>
+      <p:transition spd="med">
+        <p:push dir="l"/>
+      </p:transition>
+    </mc:Fallback>
+  </mc:AlternateContent>
+</p:sld>
+</file>
+
+<file path=ppt/slides/slide26.xml><?xml version="1.0" encoding="utf-8"?>
+<p:sld xmlns:a="http://schemas.openxmlformats.org/drawingml/2006/main" xmlns:p="http://schemas.openxmlformats.org/presentationml/2006/main" xmlns:r="http://schemas.openxmlformats.org/officeDocument/2006/relationships">
+  <p:cSld>
+    <p:spTree>
+      <p:nvGrpSpPr>
+        <p:cNvPr id="1" name=""/>
+        <p:cNvGrpSpPr/>
+        <p:nvPr/>
+      </p:nvGrpSpPr>
+      <p:grpSpPr/>
+      <p:sp>
+        <p:nvSpPr>
+          <p:cNvPr id="2" name="Rectangle 1"/>
+          <p:cNvSpPr/>
+          <p:nvPr/>
+        </p:nvSpPr>
+        <p:spPr>
+          <a:xfrm>
+            <a:off x="0" y="0"/>
+            <a:ext cx="12191695" cy="6858000"/>
+          </a:xfrm>
+          <a:prstGeom prst="rect">
+            <a:avLst/>
+          </a:prstGeom>
+          <a:solidFill>
+            <a:srgbClr val="1E2761"/>
+          </a:solidFill>
+          <a:ln>
+            <a:noFill/>
+          </a:ln>
+          <a:effectLst/>
+        </p:spPr>
+        <p:style>
+          <a:lnRef idx="1">
+            <a:schemeClr val="accent1"/>
+          </a:lnRef>
+          <a:fillRef idx="3">
+            <a:schemeClr val="accent1"/>
+          </a:fillRef>
+          <a:effectRef idx="2">
+            <a:schemeClr val="accent1"/>
+          </a:effectRef>
+          <a:fontRef idx="minor">
+            <a:schemeClr val="lt1"/>
+          </a:fontRef>
+        </p:style>
+        <p:txBody>
+          <a:bodyPr rtlCol="0" anchor="ctr"/>
+          <a:lstStyle/>
+          <a:p>
+            <a:pPr algn="ctr"/>
+          </a:p>
+        </p:txBody>
+      </p:sp>
+      <p:sp>
+        <p:nvSpPr>
+          <p:cNvPr id="3" name="TextBox 2"/>
+          <p:cNvSpPr txBox="1"/>
+          <p:nvPr/>
+        </p:nvSpPr>
+        <p:spPr>
+          <a:xfrm>
+            <a:off x="822960" y="640080"/>
+            <a:ext cx="10515600" cy="457200"/>
+          </a:xfrm>
+          <a:prstGeom prst="rect">
+            <a:avLst/>
+          </a:prstGeom>
+          <a:noFill/>
+        </p:spPr>
+        <p:txBody>
+          <a:bodyPr wrap="square">
+            <a:spAutoFit/>
+          </a:bodyPr>
+          <a:lstStyle/>
+          <a:p>
+            <a:r>
+              <a:rPr sz="1400" b="1" i="0">
+                <a:solidFill>
+                  <a:srgbClr val="F4A24C"/>
+                </a:solidFill>
+                <a:latin typeface="Montserrat"/>
+              </a:rPr>
+              <a:t>LO QUE YA DOMINAS</a:t>
+            </a:r>
+          </a:p>
+        </p:txBody>
+      </p:sp>
+      <p:sp>
+        <p:nvSpPr>
+          <p:cNvPr id="4" name="Rectangle 3"/>
+          <p:cNvSpPr/>
+          <p:nvPr/>
+        </p:nvSpPr>
+        <p:spPr>
+          <a:xfrm>
+            <a:off x="868680" y="1051560"/>
+            <a:ext cx="1463040" cy="82296"/>
+          </a:xfrm>
+          <a:prstGeom prst="rect">
+            <a:avLst/>
+          </a:prstGeom>
+          <a:solidFill>
+            <a:srgbClr val="E8801A"/>
+          </a:solidFill>
+          <a:ln>
+            <a:noFill/>
+          </a:ln>
+          <a:effectLst/>
+        </p:spPr>
+        <p:style>
+          <a:lnRef idx="1">
+            <a:schemeClr val="accent1"/>
+          </a:lnRef>
+          <a:fillRef idx="3">
+            <a:schemeClr val="accent1"/>
+          </a:fillRef>
+          <a:effectRef idx="2">
+            <a:schemeClr val="accent1"/>
+          </a:effectRef>
+          <a:fontRef idx="minor">
+            <a:schemeClr val="lt1"/>
+          </a:fontRef>
+        </p:style>
+        <p:txBody>
+          <a:bodyPr rtlCol="0" anchor="ctr"/>
+          <a:lstStyle/>
+          <a:p>
+            <a:pPr algn="ctr"/>
+          </a:p>
+        </p:txBody>
+      </p:sp>
+      <p:sp>
+        <p:nvSpPr>
+          <p:cNvPr id="5" name="TextBox 4"/>
+          <p:cNvSpPr txBox="1"/>
+          <p:nvPr/>
+        </p:nvSpPr>
+        <p:spPr>
+          <a:xfrm>
+            <a:off x="822960" y="1234440"/>
+            <a:ext cx="10515600" cy="1097280"/>
+          </a:xfrm>
+          <a:prstGeom prst="rect">
+            <a:avLst/>
+          </a:prstGeom>
+          <a:noFill/>
+        </p:spPr>
+        <p:txBody>
+          <a:bodyPr wrap="square">
+            <a:spAutoFit/>
+          </a:bodyPr>
+          <a:lstStyle/>
+          <a:p>
+            <a:r>
+              <a:rPr sz="3400" b="1" i="0">
+                <a:solidFill>
+                  <a:srgbClr val="FFFFFF"/>
+                </a:solidFill>
+                <a:latin typeface="Montserrat"/>
+              </a:rPr>
+              <a:t>Ya hablas el idioma de la norma</a:t>
+            </a:r>
+          </a:p>
+        </p:txBody>
+      </p:sp>
+      <p:sp>
+        <p:nvSpPr>
+          <p:cNvPr id="6" name="TextBox 5"/>
+          <p:cNvSpPr txBox="1"/>
+          <p:nvPr/>
+        </p:nvSpPr>
+        <p:spPr>
+          <a:xfrm>
+            <a:off x="822960" y="2606040"/>
+            <a:ext cx="10515600" cy="2743200"/>
+          </a:xfrm>
+          <a:prstGeom prst="rect">
+            <a:avLst/>
+          </a:prstGeom>
+          <a:noFill/>
+        </p:spPr>
+        <p:txBody>
+          <a:bodyPr wrap="square">
+            <a:spAutoFit/>
+          </a:bodyPr>
+          <a:lstStyle/>
+          <a:p>
+            <a:pPr>
+              <a:spcAft>
+                <a:spcPts val="1200"/>
+              </a:spcAft>
+            </a:pPr>
+            <a:r>
+              <a:rPr sz="2000" b="1" i="0">
+                <a:solidFill>
+                  <a:srgbClr val="F4A24C"/>
+                </a:solidFill>
+                <a:latin typeface="Montserrat"/>
+              </a:rPr>
+              <a:t>✓  </a:t>
+            </a:r>
+            <a:r>
+              <a:rPr sz="1900" b="0" i="0">
+                <a:solidFill>
+                  <a:srgbClr val="FFFFFF"/>
+                </a:solidFill>
+                <a:latin typeface="Montserrat"/>
+              </a:rPr>
+              <a:t>Tipos A, B y C: ventilación y CO</a:t>
+            </a:r>
+          </a:p>
+          <a:p>
+            <a:pPr>
+              <a:spcAft>
+                <a:spcPts val="1200"/>
+              </a:spcAft>
+            </a:pPr>
+            <a:r>
+              <a:rPr sz="2000" b="1" i="0">
+                <a:solidFill>
+                  <a:srgbClr val="F4A24C"/>
+                </a:solidFill>
+                <a:latin typeface="Montserrat"/>
+              </a:rPr>
+              <a:t>✓  </a:t>
+            </a:r>
+            <a:r>
+              <a:rPr sz="1900" b="0" i="0">
+                <a:solidFill>
+                  <a:srgbClr val="FFFFFF"/>
+                </a:solidFill>
+                <a:latin typeface="Montserrat"/>
+              </a:rPr>
+              <a:t>Accesibilidad 1, 2 y 3 para el mantenimiento</a:t>
+            </a:r>
+          </a:p>
+          <a:p>
+            <a:pPr>
+              <a:spcAft>
+                <a:spcPts val="1200"/>
+              </a:spcAft>
+            </a:pPr>
+            <a:r>
+              <a:rPr sz="2000" b="1" i="0">
+                <a:solidFill>
+                  <a:srgbClr val="F4A24C"/>
+                </a:solidFill>
+                <a:latin typeface="Montserrat"/>
+              </a:rPr>
+              <a:t>✓  </a:t>
+            </a:r>
+            <a:r>
+              <a:rPr sz="1900" b="0" i="0">
+                <a:solidFill>
+                  <a:srgbClr val="FFFFFF"/>
+                </a:solidFill>
+                <a:latin typeface="Montserrat"/>
+              </a:rPr>
+              <a:t>Familias de gas por índice de Wobbe</a:t>
+            </a:r>
+          </a:p>
+          <a:p>
+            <a:pPr>
+              <a:spcAft>
+                <a:spcPts val="1200"/>
+              </a:spcAft>
+            </a:pPr>
+            <a:r>
+              <a:rPr sz="2000" b="1" i="0">
+                <a:solidFill>
+                  <a:srgbClr val="F4A24C"/>
+                </a:solidFill>
+                <a:latin typeface="Montserrat"/>
+              </a:rPr>
+              <a:t>✓  </a:t>
+            </a:r>
+            <a:r>
+              <a:rPr sz="1900" b="0" i="0">
+                <a:solidFill>
+                  <a:srgbClr val="FFFFFF"/>
+                </a:solidFill>
+                <a:latin typeface="Montserrat"/>
+              </a:rPr>
+              <a:t>Límites excluida/incluida: qué firmas y quién responde</a:t>
+            </a:r>
+          </a:p>
+        </p:txBody>
+      </p:sp>
+      <p:sp>
+        <p:nvSpPr>
+          <p:cNvPr id="7" name="Rounded Rectangle 6"/>
+          <p:cNvSpPr/>
+          <p:nvPr/>
+        </p:nvSpPr>
+        <p:spPr>
+          <a:xfrm>
+            <a:off x="822960" y="5532120"/>
+            <a:ext cx="10515600" cy="822960"/>
+          </a:xfrm>
+          <a:prstGeom prst="roundRect">
+            <a:avLst/>
+          </a:prstGeom>
+          <a:solidFill>
+            <a:srgbClr val="E8801A"/>
+          </a:solidFill>
+          <a:ln>
+            <a:noFill/>
+          </a:ln>
+          <a:effectLst/>
+        </p:spPr>
+        <p:style>
+          <a:lnRef idx="1">
+            <a:schemeClr val="accent1"/>
+          </a:lnRef>
+          <a:fillRef idx="3">
+            <a:schemeClr val="accent1"/>
+          </a:fillRef>
+          <a:effectRef idx="2">
+            <a:schemeClr val="accent1"/>
+          </a:effectRef>
+          <a:fontRef idx="minor">
+            <a:schemeClr val="lt1"/>
+          </a:fontRef>
+        </p:style>
+        <p:txBody>
+          <a:bodyPr rtlCol="0" anchor="ctr"/>
+          <a:lstStyle/>
+          <a:p>
+            <a:pPr algn="ctr"/>
+          </a:p>
+        </p:txBody>
+      </p:sp>
+      <p:sp>
+        <p:nvSpPr>
+          <p:cNvPr id="8" name="TextBox 7"/>
+          <p:cNvSpPr txBox="1"/>
+          <p:nvPr/>
+        </p:nvSpPr>
+        <p:spPr>
+          <a:xfrm>
+            <a:off x="1051560" y="5623560"/>
+            <a:ext cx="10058400" cy="640080"/>
+          </a:xfrm>
+          <a:prstGeom prst="rect">
+            <a:avLst/>
+          </a:prstGeom>
+          <a:noFill/>
+        </p:spPr>
+        <p:txBody>
+          <a:bodyPr wrap="square">
+            <a:spAutoFit/>
+          </a:bodyPr>
+          <a:lstStyle/>
+          <a:p>
+            <a:r>
+              <a:rPr sz="1500" b="1" i="1">
+                <a:solidFill>
+                  <a:srgbClr val="1E2761"/>
+                </a:solidFill>
+                <a:latin typeface="Montserrat"/>
+              </a:rPr>
+              <a:t>Media exposición del examen, cazada. Nos queda la mitad más técnica.</a:t>
+            </a:r>
+          </a:p>
+        </p:txBody>
+      </p:sp>
+    </p:spTree>
+  </p:cSld>
+  <p:clrMapOvr>
+    <a:masterClrMapping/>
+  </p:clrMapOvr>
+  <mc:AlternateContent xmlns:mc="http://schemas.openxmlformats.org/markup-compatibility/2006">
+    <mc:Choice xmlns:p14="http://schemas.microsoft.com/office/powerpoint/2010/main" Requires="p14">
+      <p:transition spd="med" p14:dur="700">
+        <p14:cube dir="r"/>
+      </p:transition>
+    </mc:Choice>
+    <mc:Fallback>
+      <p:transition spd="med">
+        <p:push dir="r"/>
+      </p:transition>
+    </mc:Fallback>
+  </mc:AlternateContent>
 </p:sld>
 </file>
 
@@ -10773,7 +14931,7 @@
                 </a:solidFill>
                 <a:latin typeface="Montserrat"/>
               </a:rPr>
-              <a:t>003 / 020</a:t>
+              <a:t>003 / 026</a:t>
             </a:r>
           </a:p>
         </p:txBody>
@@ -10882,7 +15040,7 @@
       </p:sp>
       <p:sp>
         <p:nvSpPr>
-          <p:cNvPr id="7" name="Rounded Rectangle 6"/>
+          <p:cNvPr id="7" name="Rectangle 6"/>
           <p:cNvSpPr/>
           <p:nvPr/>
         </p:nvSpPr>
@@ -10891,7 +15049,7 @@
             <a:off x="868680" y="1673352"/>
             <a:ext cx="2011680" cy="73152"/>
           </a:xfrm>
-          <a:prstGeom prst="roundRect">
+          <a:prstGeom prst="rect">
             <a:avLst/>
           </a:prstGeom>
           <a:solidFill>
@@ -11177,6 +15335,18 @@
   <p:clrMapOvr>
     <a:masterClrMapping/>
   </p:clrMapOvr>
+  <mc:AlternateContent xmlns:mc="http://schemas.openxmlformats.org/markup-compatibility/2006">
+    <mc:Choice xmlns:p14="http://schemas.microsoft.com/office/powerpoint/2010/main" Requires="p14">
+      <p:transition spd="med" p14:dur="700">
+        <p14:cube dir="l"/>
+      </p:transition>
+    </mc:Choice>
+    <mc:Fallback>
+      <p:transition spd="med">
+        <p:push dir="l"/>
+      </p:transition>
+    </mc:Fallback>
+  </mc:AlternateContent>
 </p:sld>
 </file>
 
@@ -11264,7 +15434,7 @@
                 </a:solidFill>
                 <a:latin typeface="Montserrat"/>
               </a:rPr>
-              <a:t>004 / 020</a:t>
+              <a:t>004 / 026</a:t>
             </a:r>
           </a:p>
         </p:txBody>
@@ -11373,7 +15543,7 @@
       </p:sp>
       <p:sp>
         <p:nvSpPr>
-          <p:cNvPr id="7" name="Rounded Rectangle 6"/>
+          <p:cNvPr id="7" name="Rectangle 6"/>
           <p:cNvSpPr/>
           <p:nvPr/>
         </p:nvSpPr>
@@ -11382,7 +15552,7 @@
             <a:off x="868680" y="1627632"/>
             <a:ext cx="2011680" cy="73152"/>
           </a:xfrm>
-          <a:prstGeom prst="roundRect">
+          <a:prstGeom prst="rect">
             <a:avLst/>
           </a:prstGeom>
           <a:solidFill>
@@ -11424,7 +15594,7 @@
         <p:spPr>
           <a:xfrm>
             <a:off x="822960" y="1965960"/>
-            <a:ext cx="4983480" cy="4206240"/>
+            <a:ext cx="5029200" cy="4206240"/>
           </a:xfrm>
           <a:prstGeom prst="rect">
             <a:avLst/>
@@ -11546,8 +15716,8 @@
         </p:nvSpPr>
         <p:spPr>
           <a:xfrm>
-            <a:off x="5806440" y="1051560"/>
-            <a:ext cx="5298947" cy="4629150"/>
+            <a:off x="6080760" y="1965960"/>
+            <a:ext cx="5303520" cy="4572000"/>
           </a:xfrm>
           <a:prstGeom prst="roundRect">
             <a:avLst/>
@@ -11592,8 +15762,8 @@
         </p:nvSpPr>
         <p:spPr>
           <a:xfrm>
-            <a:off x="6080760" y="2726055"/>
-            <a:ext cx="4750307" cy="1280160"/>
+            <a:off x="6355080" y="3611880"/>
+            <a:ext cx="4754880" cy="1280160"/>
           </a:xfrm>
           <a:prstGeom prst="rect">
             <a:avLst/>
@@ -11614,7 +15784,7 @@
                 </a:solidFill>
                 <a:latin typeface="Montserrat"/>
               </a:rPr>
-              <a:t>IMAGEN REALISTA</a:t>
+              <a:t>IMAGEN</a:t>
             </a:r>
           </a:p>
           <a:p>
@@ -11636,6 +15806,18 @@
   <p:clrMapOvr>
     <a:masterClrMapping/>
   </p:clrMapOvr>
+  <mc:AlternateContent xmlns:mc="http://schemas.openxmlformats.org/markup-compatibility/2006">
+    <mc:Choice xmlns:p14="http://schemas.microsoft.com/office/powerpoint/2010/main" Requires="p14">
+      <p:transition spd="med" p14:dur="700">
+        <p14:cube dir="r"/>
+      </p:transition>
+    </mc:Choice>
+    <mc:Fallback>
+      <p:transition spd="med">
+        <p:push dir="r"/>
+      </p:transition>
+    </mc:Fallback>
+  </mc:AlternateContent>
 </p:sld>
 </file>
 
@@ -11723,7 +15905,7 @@
                 </a:solidFill>
                 <a:latin typeface="Montserrat"/>
               </a:rPr>
-              <a:t>005 / 020</a:t>
+              <a:t>005 / 026</a:t>
             </a:r>
           </a:p>
         </p:txBody>
@@ -11832,7 +16014,7 @@
       </p:sp>
       <p:sp>
         <p:nvSpPr>
-          <p:cNvPr id="7" name="Rounded Rectangle 6"/>
+          <p:cNvPr id="7" name="Rectangle 6"/>
           <p:cNvSpPr/>
           <p:nvPr/>
         </p:nvSpPr>
@@ -11841,7 +16023,7 @@
             <a:off x="868680" y="1627632"/>
             <a:ext cx="2011680" cy="73152"/>
           </a:xfrm>
-          <a:prstGeom prst="roundRect">
+          <a:prstGeom prst="rect">
             <a:avLst/>
           </a:prstGeom>
           <a:solidFill>
@@ -11882,8 +16064,8 @@
         </p:nvSpPr>
         <p:spPr>
           <a:xfrm>
-            <a:off x="822960" y="1965960"/>
-            <a:ext cx="4983480" cy="4206240"/>
+            <a:off x="6355080" y="1965960"/>
+            <a:ext cx="5029200" cy="4206240"/>
           </a:xfrm>
           <a:prstGeom prst="rect">
             <a:avLst/>
@@ -12005,8 +16187,8 @@
         </p:nvSpPr>
         <p:spPr>
           <a:xfrm>
-            <a:off x="5806440" y="1051560"/>
-            <a:ext cx="5298947" cy="4629150"/>
+            <a:off x="822960" y="1965960"/>
+            <a:ext cx="5303520" cy="4572000"/>
           </a:xfrm>
           <a:prstGeom prst="roundRect">
             <a:avLst/>
@@ -12051,8 +16233,8 @@
         </p:nvSpPr>
         <p:spPr>
           <a:xfrm>
-            <a:off x="6080760" y="2726055"/>
-            <a:ext cx="4750307" cy="1280160"/>
+            <a:off x="1097280" y="3611880"/>
+            <a:ext cx="4754880" cy="1280160"/>
           </a:xfrm>
           <a:prstGeom prst="rect">
             <a:avLst/>
@@ -12073,7 +16255,7 @@
                 </a:solidFill>
                 <a:latin typeface="Montserrat"/>
               </a:rPr>
-              <a:t>IMAGEN REALISTA</a:t>
+              <a:t>IMAGEN</a:t>
             </a:r>
           </a:p>
           <a:p>
@@ -12095,6 +16277,18 @@
   <p:clrMapOvr>
     <a:masterClrMapping/>
   </p:clrMapOvr>
+  <mc:AlternateContent xmlns:mc="http://schemas.openxmlformats.org/markup-compatibility/2006">
+    <mc:Choice xmlns:p14="http://schemas.microsoft.com/office/powerpoint/2010/main" Requires="p14">
+      <p:transition spd="med" p14:dur="700">
+        <p14:cube dir="l"/>
+      </p:transition>
+    </mc:Choice>
+    <mc:Fallback>
+      <p:transition spd="med">
+        <p:push dir="l"/>
+      </p:transition>
+    </mc:Fallback>
+  </mc:AlternateContent>
 </p:sld>
 </file>
 
@@ -12182,7 +16376,7 @@
                 </a:solidFill>
                 <a:latin typeface="Montserrat"/>
               </a:rPr>
-              <a:t>006 / 020</a:t>
+              <a:t>006 / 026</a:t>
             </a:r>
           </a:p>
         </p:txBody>
@@ -12291,7 +16485,7 @@
       </p:sp>
       <p:sp>
         <p:nvSpPr>
-          <p:cNvPr id="7" name="Rounded Rectangle 6"/>
+          <p:cNvPr id="7" name="Rectangle 6"/>
           <p:cNvSpPr/>
           <p:nvPr/>
         </p:nvSpPr>
@@ -12300,7 +16494,7 @@
             <a:off x="868680" y="1627632"/>
             <a:ext cx="2011680" cy="73152"/>
           </a:xfrm>
-          <a:prstGeom prst="roundRect">
+          <a:prstGeom prst="rect">
             <a:avLst/>
           </a:prstGeom>
           <a:solidFill>
@@ -12342,7 +16536,7 @@
         <p:spPr>
           <a:xfrm>
             <a:off x="822960" y="1965960"/>
-            <a:ext cx="4983480" cy="4206240"/>
+            <a:ext cx="5029200" cy="4206240"/>
           </a:xfrm>
           <a:prstGeom prst="rect">
             <a:avLst/>
@@ -12464,8 +16658,8 @@
         </p:nvSpPr>
         <p:spPr>
           <a:xfrm>
-            <a:off x="5806440" y="1051560"/>
-            <a:ext cx="5298947" cy="4629150"/>
+            <a:off x="6080760" y="1965960"/>
+            <a:ext cx="5303520" cy="4572000"/>
           </a:xfrm>
           <a:prstGeom prst="roundRect">
             <a:avLst/>
@@ -12510,8 +16704,8 @@
         </p:nvSpPr>
         <p:spPr>
           <a:xfrm>
-            <a:off x="6080760" y="2726055"/>
-            <a:ext cx="4750307" cy="1280160"/>
+            <a:off x="6355080" y="3611880"/>
+            <a:ext cx="4754880" cy="1280160"/>
           </a:xfrm>
           <a:prstGeom prst="rect">
             <a:avLst/>
@@ -12532,7 +16726,7 @@
                 </a:solidFill>
                 <a:latin typeface="Montserrat"/>
               </a:rPr>
-              <a:t>IMAGEN REALISTA</a:t>
+              <a:t>IMAGEN</a:t>
             </a:r>
           </a:p>
           <a:p>
@@ -12554,6 +16748,18 @@
   <p:clrMapOvr>
     <a:masterClrMapping/>
   </p:clrMapOvr>
+  <mc:AlternateContent xmlns:mc="http://schemas.openxmlformats.org/markup-compatibility/2006">
+    <mc:Choice xmlns:p14="http://schemas.microsoft.com/office/powerpoint/2010/main" Requires="p14">
+      <p:transition spd="med" p14:dur="700">
+        <p14:cube dir="r"/>
+      </p:transition>
+    </mc:Choice>
+    <mc:Fallback>
+      <p:transition spd="med">
+        <p:push dir="r"/>
+      </p:transition>
+    </mc:Fallback>
+  </mc:AlternateContent>
 </p:sld>
 </file>
 
@@ -12641,7 +16847,7 @@
                 </a:solidFill>
                 <a:latin typeface="Montserrat"/>
               </a:rPr>
-              <a:t>007 / 020</a:t>
+              <a:t>007 / 026</a:t>
             </a:r>
           </a:p>
         </p:txBody>
@@ -12750,7 +16956,7 @@
       </p:sp>
       <p:sp>
         <p:nvSpPr>
-          <p:cNvPr id="7" name="Rounded Rectangle 6"/>
+          <p:cNvPr id="7" name="Rectangle 6"/>
           <p:cNvSpPr/>
           <p:nvPr/>
         </p:nvSpPr>
@@ -12759,7 +16965,7 @@
             <a:off x="868680" y="1627632"/>
             <a:ext cx="2011680" cy="73152"/>
           </a:xfrm>
-          <a:prstGeom prst="roundRect">
+          <a:prstGeom prst="rect">
             <a:avLst/>
           </a:prstGeom>
           <a:solidFill>
@@ -12800,8 +17006,8 @@
         </p:nvSpPr>
         <p:spPr>
           <a:xfrm>
-            <a:off x="822960" y="1965960"/>
-            <a:ext cx="4983480" cy="4206240"/>
+            <a:off x="6355080" y="1965960"/>
+            <a:ext cx="5029200" cy="4206240"/>
           </a:xfrm>
           <a:prstGeom prst="rect">
             <a:avLst/>
@@ -12923,8 +17129,8 @@
         </p:nvSpPr>
         <p:spPr>
           <a:xfrm>
-            <a:off x="5806440" y="1051560"/>
-            <a:ext cx="5298947" cy="4629150"/>
+            <a:off x="822960" y="1965960"/>
+            <a:ext cx="5303520" cy="4572000"/>
           </a:xfrm>
           <a:prstGeom prst="roundRect">
             <a:avLst/>
@@ -12969,8 +17175,8 @@
         </p:nvSpPr>
         <p:spPr>
           <a:xfrm>
-            <a:off x="6080760" y="2726055"/>
-            <a:ext cx="4750307" cy="1280160"/>
+            <a:off x="1097280" y="3611880"/>
+            <a:ext cx="4754880" cy="1280160"/>
           </a:xfrm>
           <a:prstGeom prst="rect">
             <a:avLst/>
@@ -12991,7 +17197,7 @@
                 </a:solidFill>
                 <a:latin typeface="Montserrat"/>
               </a:rPr>
-              <a:t>IMAGEN REALISTA</a:t>
+              <a:t>IMAGEN</a:t>
             </a:r>
           </a:p>
           <a:p>
@@ -13013,6 +17219,18 @@
   <p:clrMapOvr>
     <a:masterClrMapping/>
   </p:clrMapOvr>
+  <mc:AlternateContent xmlns:mc="http://schemas.openxmlformats.org/markup-compatibility/2006">
+    <mc:Choice xmlns:p14="http://schemas.microsoft.com/office/powerpoint/2010/main" Requires="p14">
+      <p:transition spd="med" p14:dur="700">
+        <p14:cube dir="l"/>
+      </p:transition>
+    </mc:Choice>
+    <mc:Fallback>
+      <p:transition spd="med">
+        <p:push dir="l"/>
+      </p:transition>
+    </mc:Fallback>
+  </mc:AlternateContent>
 </p:sld>
 </file>
 
@@ -13100,7 +17318,7 @@
                 </a:solidFill>
                 <a:latin typeface="Montserrat"/>
               </a:rPr>
-              <a:t>008 / 020</a:t>
+              <a:t>008 / 026</a:t>
             </a:r>
           </a:p>
         </p:txBody>
@@ -13209,7 +17427,7 @@
       </p:sp>
       <p:sp>
         <p:nvSpPr>
-          <p:cNvPr id="7" name="Rounded Rectangle 6"/>
+          <p:cNvPr id="7" name="Rectangle 6"/>
           <p:cNvSpPr/>
           <p:nvPr/>
         </p:nvSpPr>
@@ -13218,7 +17436,7 @@
             <a:off x="868680" y="1627632"/>
             <a:ext cx="2011680" cy="73152"/>
           </a:xfrm>
-          <a:prstGeom prst="roundRect">
+          <a:prstGeom prst="rect">
             <a:avLst/>
           </a:prstGeom>
           <a:solidFill>
@@ -13260,7 +17478,7 @@
         <p:spPr>
           <a:xfrm>
             <a:off x="822960" y="1965960"/>
-            <a:ext cx="4983480" cy="4206240"/>
+            <a:ext cx="5029200" cy="4206240"/>
           </a:xfrm>
           <a:prstGeom prst="rect">
             <a:avLst/>
@@ -13382,8 +17600,8 @@
         </p:nvSpPr>
         <p:spPr>
           <a:xfrm>
-            <a:off x="5806440" y="1051560"/>
-            <a:ext cx="5298947" cy="4629150"/>
+            <a:off x="6080760" y="1965960"/>
+            <a:ext cx="5303520" cy="4572000"/>
           </a:xfrm>
           <a:prstGeom prst="roundRect">
             <a:avLst/>
@@ -13428,8 +17646,8 @@
         </p:nvSpPr>
         <p:spPr>
           <a:xfrm>
-            <a:off x="6080760" y="2726055"/>
-            <a:ext cx="4750307" cy="1280160"/>
+            <a:off x="6355080" y="3611880"/>
+            <a:ext cx="4754880" cy="1280160"/>
           </a:xfrm>
           <a:prstGeom prst="rect">
             <a:avLst/>
@@ -13450,7 +17668,7 @@
                 </a:solidFill>
                 <a:latin typeface="Montserrat"/>
               </a:rPr>
-              <a:t>IMAGEN REALISTA</a:t>
+              <a:t>IMAGEN</a:t>
             </a:r>
           </a:p>
           <a:p>
@@ -13472,6 +17690,18 @@
   <p:clrMapOvr>
     <a:masterClrMapping/>
   </p:clrMapOvr>
+  <mc:AlternateContent xmlns:mc="http://schemas.openxmlformats.org/markup-compatibility/2006">
+    <mc:Choice xmlns:p14="http://schemas.microsoft.com/office/powerpoint/2010/main" Requires="p14">
+      <p:transition spd="med" p14:dur="700">
+        <p14:cube dir="r"/>
+      </p:transition>
+    </mc:Choice>
+    <mc:Fallback>
+      <p:transition spd="med">
+        <p:push dir="r"/>
+      </p:transition>
+    </mc:Fallback>
+  </mc:AlternateContent>
 </p:sld>
 </file>
 
@@ -13559,7 +17789,7 @@
                 </a:solidFill>
                 <a:latin typeface="Montserrat"/>
               </a:rPr>
-              <a:t>009 / 020</a:t>
+              <a:t>009 / 026</a:t>
             </a:r>
           </a:p>
         </p:txBody>
@@ -13600,84 +17830,16 @@
       </p:sp>
       <p:sp>
         <p:nvSpPr>
-          <p:cNvPr id="5" name="TextBox 4"/>
-          <p:cNvSpPr txBox="1"/>
-          <p:nvPr/>
-        </p:nvSpPr>
-        <p:spPr>
-          <a:xfrm>
-            <a:off x="822960" y="457200"/>
-            <a:ext cx="10058400" cy="365760"/>
-          </a:xfrm>
-          <a:prstGeom prst="rect">
-            <a:avLst/>
-          </a:prstGeom>
-          <a:noFill/>
-        </p:spPr>
-        <p:txBody>
-          <a:bodyPr wrap="square">
-            <a:spAutoFit/>
-          </a:bodyPr>
-          <a:lstStyle/>
-          <a:p>
-            <a:r>
-              <a:rPr sz="1300" b="1" i="0">
-                <a:solidFill>
-                  <a:srgbClr val="E8801A"/>
-                </a:solidFill>
-                <a:latin typeface="Montserrat"/>
-              </a:rPr>
-              <a:t>TÉRMINOS 3.12 Y 3.13</a:t>
-            </a:r>
-          </a:p>
-        </p:txBody>
-      </p:sp>
-      <p:sp>
-        <p:nvSpPr>
-          <p:cNvPr id="6" name="TextBox 5"/>
-          <p:cNvSpPr txBox="1"/>
-          <p:nvPr/>
-        </p:nvSpPr>
-        <p:spPr>
-          <a:xfrm>
-            <a:off x="822960" y="868680"/>
-            <a:ext cx="10515600" cy="914400"/>
-          </a:xfrm>
-          <a:prstGeom prst="rect">
-            <a:avLst/>
-          </a:prstGeom>
-          <a:noFill/>
-        </p:spPr>
-        <p:txBody>
-          <a:bodyPr wrap="square">
-            <a:spAutoFit/>
-          </a:bodyPr>
-          <a:lstStyle/>
-          <a:p>
-            <a:r>
-              <a:rPr sz="2800" b="1" i="0">
-                <a:solidFill>
-                  <a:srgbClr val="1E2761"/>
-                </a:solidFill>
-                <a:latin typeface="Montserrat"/>
-              </a:rPr>
-              <a:t>Aparato móvil y aparato popular</a:t>
-            </a:r>
-          </a:p>
-        </p:txBody>
-      </p:sp>
-      <p:sp>
-        <p:nvSpPr>
-          <p:cNvPr id="7" name="Rounded Rectangle 6"/>
+          <p:cNvPr id="5" name="Rectangle 4"/>
           <p:cNvSpPr/>
           <p:nvPr/>
         </p:nvSpPr>
         <p:spPr>
           <a:xfrm>
-            <a:off x="868680" y="1627632"/>
-            <a:ext cx="2011680" cy="73152"/>
-          </a:xfrm>
-          <a:prstGeom prst="roundRect">
+            <a:off x="0" y="0"/>
+            <a:ext cx="12191695" cy="1143000"/>
+          </a:xfrm>
+          <a:prstGeom prst="rect">
             <a:avLst/>
           </a:prstGeom>
           <a:solidFill>
@@ -13712,14 +17874,14 @@
       </p:sp>
       <p:sp>
         <p:nvSpPr>
-          <p:cNvPr id="8" name="TextBox 7"/>
+          <p:cNvPr id="6" name="TextBox 5"/>
           <p:cNvSpPr txBox="1"/>
           <p:nvPr/>
         </p:nvSpPr>
         <p:spPr>
           <a:xfrm>
-            <a:off x="822960" y="1965960"/>
-            <a:ext cx="4983480" cy="4206240"/>
+            <a:off x="822960" y="274320"/>
+            <a:ext cx="10515600" cy="640080"/>
           </a:xfrm>
           <a:prstGeom prst="rect">
             <a:avLst/>
@@ -13732,117 +17894,62 @@
           </a:bodyPr>
           <a:lstStyle/>
           <a:p>
-            <a:pPr>
-              <a:spcAft>
-                <a:spcPts val="1100"/>
-              </a:spcAft>
-            </a:pPr>
-            <a:r>
-              <a:rPr sz="1600" b="1" i="0">
-                <a:solidFill>
-                  <a:srgbClr val="E8801A"/>
-                </a:solidFill>
-                <a:latin typeface="Montserrat"/>
-              </a:rPr>
-              <a:t>▸  </a:t>
-            </a:r>
-            <a:r>
-              <a:rPr sz="1600" b="0" i="0">
-                <a:solidFill>
-                  <a:srgbClr val="1B2330"/>
-                </a:solidFill>
-                <a:latin typeface="Montserrat"/>
-              </a:rPr>
-              <a:t>Móvil: no está fijo, se puede desplazar</a:t>
-            </a:r>
-          </a:p>
-          <a:p>
-            <a:pPr>
-              <a:spcAft>
-                <a:spcPts val="1100"/>
-              </a:spcAft>
-            </a:pPr>
-            <a:r>
-              <a:rPr sz="1600" b="1" i="0">
-                <a:solidFill>
-                  <a:srgbClr val="E8801A"/>
-                </a:solidFill>
-                <a:latin typeface="Montserrat"/>
-              </a:rPr>
-              <a:t>▸  </a:t>
-            </a:r>
-            <a:r>
-              <a:rPr sz="1600" b="0" i="0">
-                <a:solidFill>
-                  <a:srgbClr val="1B2330"/>
-                </a:solidFill>
-                <a:latin typeface="Montserrat"/>
-              </a:rPr>
-              <a:t>Nunca con tubería rígida</a:t>
-            </a:r>
-          </a:p>
-          <a:p>
-            <a:pPr>
-              <a:spcAft>
-                <a:spcPts val="1100"/>
-              </a:spcAft>
-            </a:pPr>
-            <a:r>
-              <a:rPr sz="1600" b="1" i="0">
-                <a:solidFill>
-                  <a:srgbClr val="E8801A"/>
-                </a:solidFill>
-                <a:latin typeface="Montserrat"/>
-              </a:rPr>
-              <a:t>▸  </a:t>
-            </a:r>
-            <a:r>
-              <a:rPr sz="1600" b="0" i="0">
-                <a:solidFill>
-                  <a:srgbClr val="1B2330"/>
-                </a:solidFill>
-                <a:latin typeface="Montserrat"/>
-              </a:rPr>
-              <a:t>Popular: solo envase ≤ 3 kg</a:t>
-            </a:r>
-          </a:p>
-          <a:p>
-            <a:pPr>
-              <a:spcAft>
-                <a:spcPts val="1100"/>
-              </a:spcAft>
-            </a:pPr>
-            <a:r>
-              <a:rPr sz="1600" b="1" i="0">
-                <a:solidFill>
-                  <a:srgbClr val="E8801A"/>
-                </a:solidFill>
-                <a:latin typeface="Montserrat"/>
-              </a:rPr>
-              <a:t>▸  </a:t>
-            </a:r>
-            <a:r>
-              <a:rPr sz="1600" b="0" i="0">
-                <a:solidFill>
-                  <a:srgbClr val="1B2330"/>
-                </a:solidFill>
-                <a:latin typeface="Montserrat"/>
-              </a:rPr>
-              <a:t>El popular es el más pequeño</a:t>
-            </a:r>
-          </a:p>
-        </p:txBody>
-      </p:sp>
-      <p:sp>
-        <p:nvSpPr>
-          <p:cNvPr id="9" name="imgph" descr="IMGQ:small camping gas stove with cartridge"/>
+            <a:r>
+              <a:rPr sz="2400" b="1" i="0">
+                <a:solidFill>
+                  <a:srgbClr val="FFFFFF"/>
+                </a:solidFill>
+                <a:latin typeface="Montserrat"/>
+              </a:rPr>
+              <a:t>⚡  PREGUNTA RÁPIDA</a:t>
+            </a:r>
+          </a:p>
+        </p:txBody>
+      </p:sp>
+      <p:sp>
+        <p:nvSpPr>
+          <p:cNvPr id="7" name="TextBox 6"/>
+          <p:cNvSpPr txBox="1"/>
+          <p:nvPr/>
+        </p:nvSpPr>
+        <p:spPr>
+          <a:xfrm>
+            <a:off x="822960" y="1508760"/>
+            <a:ext cx="10515600" cy="1371600"/>
+          </a:xfrm>
+          <a:prstGeom prst="rect">
+            <a:avLst/>
+          </a:prstGeom>
+          <a:noFill/>
+        </p:spPr>
+        <p:txBody>
+          <a:bodyPr wrap="square">
+            <a:spAutoFit/>
+          </a:bodyPr>
+          <a:lstStyle/>
+          <a:p>
+            <a:r>
+              <a:rPr sz="2400" b="1" i="0">
+                <a:solidFill>
+                  <a:srgbClr val="1E2761"/>
+                </a:solidFill>
+                <a:latin typeface="Montserrat"/>
+              </a:rPr>
+              <a:t>¿Qué caracteriza a un aparato de gas de tipo C?</a:t>
+            </a:r>
+          </a:p>
+        </p:txBody>
+      </p:sp>
+      <p:sp>
+        <p:nvSpPr>
+          <p:cNvPr id="8" name="Rounded Rectangle 7"/>
           <p:cNvSpPr/>
           <p:nvPr/>
         </p:nvSpPr>
         <p:spPr>
           <a:xfrm>
-            <a:off x="5806440" y="1051560"/>
-            <a:ext cx="5298947" cy="4629150"/>
+            <a:off x="822960" y="3291840"/>
+            <a:ext cx="4983480" cy="1143000"/>
           </a:xfrm>
           <a:prstGeom prst="roundRect">
             <a:avLst/>
@@ -13881,14 +17988,58 @@
       </p:sp>
       <p:sp>
         <p:nvSpPr>
+          <p:cNvPr id="9" name="Rectangle 8"/>
+          <p:cNvSpPr/>
+          <p:nvPr/>
+        </p:nvSpPr>
+        <p:spPr>
+          <a:xfrm>
+            <a:off x="822960" y="3291840"/>
+            <a:ext cx="640080" cy="1143000"/>
+          </a:xfrm>
+          <a:prstGeom prst="rect">
+            <a:avLst/>
+          </a:prstGeom>
+          <a:solidFill>
+            <a:srgbClr val="1E2761"/>
+          </a:solidFill>
+          <a:ln>
+            <a:noFill/>
+          </a:ln>
+          <a:effectLst/>
+        </p:spPr>
+        <p:style>
+          <a:lnRef idx="1">
+            <a:schemeClr val="accent1"/>
+          </a:lnRef>
+          <a:fillRef idx="3">
+            <a:schemeClr val="accent1"/>
+          </a:fillRef>
+          <a:effectRef idx="2">
+            <a:schemeClr val="accent1"/>
+          </a:effectRef>
+          <a:fontRef idx="minor">
+            <a:schemeClr val="lt1"/>
+          </a:fontRef>
+        </p:style>
+        <p:txBody>
+          <a:bodyPr rtlCol="0" anchor="ctr"/>
+          <a:lstStyle/>
+          <a:p>
+            <a:pPr algn="ctr"/>
+          </a:p>
+        </p:txBody>
+      </p:sp>
+      <p:sp>
+        <p:nvSpPr>
           <p:cNvPr id="10" name="TextBox 9"/>
           <p:cNvSpPr txBox="1"/>
           <p:nvPr/>
         </p:nvSpPr>
         <p:spPr>
           <a:xfrm>
-            <a:off x="6080760" y="2726055"/>
-            <a:ext cx="4750307" cy="1280160"/>
+            <a:off x="822960" y="3611880"/>
+            <a:ext cx="640080" cy="548640"/>
           </a:xfrm>
           <a:prstGeom prst="rect">
             <a:avLst/>
@@ -13903,25 +18054,524 @@
           <a:p>
             <a:pPr algn="ctr"/>
             <a:r>
-              <a:rPr sz="1400" b="1" i="0">
-                <a:solidFill>
-                  <a:srgbClr val="64748B"/>
-                </a:solidFill>
-                <a:latin typeface="Montserrat"/>
-              </a:rPr>
-              <a:t>IMAGEN REALISTA</a:t>
-            </a:r>
-          </a:p>
+              <a:rPr sz="2200" b="1" i="0">
+                <a:solidFill>
+                  <a:srgbClr val="FFFFFF"/>
+                </a:solidFill>
+                <a:latin typeface="Montserrat"/>
+              </a:rPr>
+              <a:t>A</a:t>
+            </a:r>
+          </a:p>
+        </p:txBody>
+      </p:sp>
+      <p:sp>
+        <p:nvSpPr>
+          <p:cNvPr id="11" name="TextBox 10"/>
+          <p:cNvSpPr txBox="1"/>
+          <p:nvPr/>
+        </p:nvSpPr>
+        <p:spPr>
+          <a:xfrm>
+            <a:off x="1600200" y="3474720"/>
+            <a:ext cx="4114800" cy="868680"/>
+          </a:xfrm>
+          <a:prstGeom prst="rect">
+            <a:avLst/>
+          </a:prstGeom>
+          <a:noFill/>
+        </p:spPr>
+        <p:txBody>
+          <a:bodyPr wrap="square">
+            <a:spAutoFit/>
+          </a:bodyPr>
+          <a:lstStyle/>
+          <a:p>
+            <a:r>
+              <a:rPr sz="1400" b="0" i="0">
+                <a:solidFill>
+                  <a:srgbClr val="1B2330"/>
+                </a:solidFill>
+                <a:latin typeface="Montserrat"/>
+              </a:rPr>
+              <a:t>Es estanco: ni toma aire del local ni evacúa humos en él</a:t>
+            </a:r>
+          </a:p>
+        </p:txBody>
+      </p:sp>
+      <p:sp>
+        <p:nvSpPr>
+          <p:cNvPr id="12" name="Rounded Rectangle 11"/>
+          <p:cNvSpPr/>
+          <p:nvPr/>
+        </p:nvSpPr>
+        <p:spPr>
+          <a:xfrm>
+            <a:off x="6355080" y="3291840"/>
+            <a:ext cx="4983480" cy="1143000"/>
+          </a:xfrm>
+          <a:prstGeom prst="roundRect">
+            <a:avLst/>
+          </a:prstGeom>
+          <a:solidFill>
+            <a:srgbClr val="F3F6FB"/>
+          </a:solidFill>
+          <a:ln w="12700">
+            <a:solidFill>
+              <a:srgbClr val="C7D2E6"/>
+            </a:solidFill>
+          </a:ln>
+          <a:effectLst/>
+        </p:spPr>
+        <p:style>
+          <a:lnRef idx="1">
+            <a:schemeClr val="accent1"/>
+          </a:lnRef>
+          <a:fillRef idx="3">
+            <a:schemeClr val="accent1"/>
+          </a:fillRef>
+          <a:effectRef idx="2">
+            <a:schemeClr val="accent1"/>
+          </a:effectRef>
+          <a:fontRef idx="minor">
+            <a:schemeClr val="lt1"/>
+          </a:fontRef>
+        </p:style>
+        <p:txBody>
+          <a:bodyPr rtlCol="0" anchor="ctr"/>
+          <a:lstStyle/>
           <a:p>
             <a:pPr algn="ctr"/>
-            <a:r>
-              <a:rPr sz="1100" b="0" i="1">
-                <a:solidFill>
-                  <a:srgbClr val="64748B"/>
-                </a:solidFill>
-                <a:latin typeface="Montserrat"/>
-              </a:rPr>
-              <a:t>small camping gas stove with cartridge</a:t>
+          </a:p>
+        </p:txBody>
+      </p:sp>
+      <p:sp>
+        <p:nvSpPr>
+          <p:cNvPr id="13" name="Rectangle 12"/>
+          <p:cNvSpPr/>
+          <p:nvPr/>
+        </p:nvSpPr>
+        <p:spPr>
+          <a:xfrm>
+            <a:off x="6355080" y="3291840"/>
+            <a:ext cx="640080" cy="1143000"/>
+          </a:xfrm>
+          <a:prstGeom prst="rect">
+            <a:avLst/>
+          </a:prstGeom>
+          <a:solidFill>
+            <a:srgbClr val="1E2761"/>
+          </a:solidFill>
+          <a:ln>
+            <a:noFill/>
+          </a:ln>
+          <a:effectLst/>
+        </p:spPr>
+        <p:style>
+          <a:lnRef idx="1">
+            <a:schemeClr val="accent1"/>
+          </a:lnRef>
+          <a:fillRef idx="3">
+            <a:schemeClr val="accent1"/>
+          </a:fillRef>
+          <a:effectRef idx="2">
+            <a:schemeClr val="accent1"/>
+          </a:effectRef>
+          <a:fontRef idx="minor">
+            <a:schemeClr val="lt1"/>
+          </a:fontRef>
+        </p:style>
+        <p:txBody>
+          <a:bodyPr rtlCol="0" anchor="ctr"/>
+          <a:lstStyle/>
+          <a:p>
+            <a:pPr algn="ctr"/>
+          </a:p>
+        </p:txBody>
+      </p:sp>
+      <p:sp>
+        <p:nvSpPr>
+          <p:cNvPr id="14" name="TextBox 13"/>
+          <p:cNvSpPr txBox="1"/>
+          <p:nvPr/>
+        </p:nvSpPr>
+        <p:spPr>
+          <a:xfrm>
+            <a:off x="6355080" y="3611880"/>
+            <a:ext cx="640080" cy="548640"/>
+          </a:xfrm>
+          <a:prstGeom prst="rect">
+            <a:avLst/>
+          </a:prstGeom>
+          <a:noFill/>
+        </p:spPr>
+        <p:txBody>
+          <a:bodyPr wrap="square">
+            <a:spAutoFit/>
+          </a:bodyPr>
+          <a:lstStyle/>
+          <a:p>
+            <a:pPr algn="ctr"/>
+            <a:r>
+              <a:rPr sz="2200" b="1" i="0">
+                <a:solidFill>
+                  <a:srgbClr val="FFFFFF"/>
+                </a:solidFill>
+                <a:latin typeface="Montserrat"/>
+              </a:rPr>
+              <a:t>B</a:t>
+            </a:r>
+          </a:p>
+        </p:txBody>
+      </p:sp>
+      <p:sp>
+        <p:nvSpPr>
+          <p:cNvPr id="15" name="TextBox 14"/>
+          <p:cNvSpPr txBox="1"/>
+          <p:nvPr/>
+        </p:nvSpPr>
+        <p:spPr>
+          <a:xfrm>
+            <a:off x="7132320" y="3474720"/>
+            <a:ext cx="4114800" cy="868680"/>
+          </a:xfrm>
+          <a:prstGeom prst="rect">
+            <a:avLst/>
+          </a:prstGeom>
+          <a:noFill/>
+        </p:spPr>
+        <p:txBody>
+          <a:bodyPr wrap="square">
+            <a:spAutoFit/>
+          </a:bodyPr>
+          <a:lstStyle/>
+          <a:p>
+            <a:r>
+              <a:rPr sz="1400" b="0" i="0">
+                <a:solidFill>
+                  <a:srgbClr val="1B2330"/>
+                </a:solidFill>
+                <a:latin typeface="Montserrat"/>
+              </a:rPr>
+              <a:t>Toma aire del local y no evacúa los humos al exterior</a:t>
+            </a:r>
+          </a:p>
+        </p:txBody>
+      </p:sp>
+      <p:sp>
+        <p:nvSpPr>
+          <p:cNvPr id="16" name="Rounded Rectangle 15"/>
+          <p:cNvSpPr/>
+          <p:nvPr/>
+        </p:nvSpPr>
+        <p:spPr>
+          <a:xfrm>
+            <a:off x="822960" y="4617720"/>
+            <a:ext cx="4983480" cy="1143000"/>
+          </a:xfrm>
+          <a:prstGeom prst="roundRect">
+            <a:avLst/>
+          </a:prstGeom>
+          <a:solidFill>
+            <a:srgbClr val="F3F6FB"/>
+          </a:solidFill>
+          <a:ln w="12700">
+            <a:solidFill>
+              <a:srgbClr val="C7D2E6"/>
+            </a:solidFill>
+          </a:ln>
+          <a:effectLst/>
+        </p:spPr>
+        <p:style>
+          <a:lnRef idx="1">
+            <a:schemeClr val="accent1"/>
+          </a:lnRef>
+          <a:fillRef idx="3">
+            <a:schemeClr val="accent1"/>
+          </a:fillRef>
+          <a:effectRef idx="2">
+            <a:schemeClr val="accent1"/>
+          </a:effectRef>
+          <a:fontRef idx="minor">
+            <a:schemeClr val="lt1"/>
+          </a:fontRef>
+        </p:style>
+        <p:txBody>
+          <a:bodyPr rtlCol="0" anchor="ctr"/>
+          <a:lstStyle/>
+          <a:p>
+            <a:pPr algn="ctr"/>
+          </a:p>
+        </p:txBody>
+      </p:sp>
+      <p:sp>
+        <p:nvSpPr>
+          <p:cNvPr id="17" name="Rectangle 16"/>
+          <p:cNvSpPr/>
+          <p:nvPr/>
+        </p:nvSpPr>
+        <p:spPr>
+          <a:xfrm>
+            <a:off x="822960" y="4617720"/>
+            <a:ext cx="640080" cy="1143000"/>
+          </a:xfrm>
+          <a:prstGeom prst="rect">
+            <a:avLst/>
+          </a:prstGeom>
+          <a:solidFill>
+            <a:srgbClr val="1E2761"/>
+          </a:solidFill>
+          <a:ln>
+            <a:noFill/>
+          </a:ln>
+          <a:effectLst/>
+        </p:spPr>
+        <p:style>
+          <a:lnRef idx="1">
+            <a:schemeClr val="accent1"/>
+          </a:lnRef>
+          <a:fillRef idx="3">
+            <a:schemeClr val="accent1"/>
+          </a:fillRef>
+          <a:effectRef idx="2">
+            <a:schemeClr val="accent1"/>
+          </a:effectRef>
+          <a:fontRef idx="minor">
+            <a:schemeClr val="lt1"/>
+          </a:fontRef>
+        </p:style>
+        <p:txBody>
+          <a:bodyPr rtlCol="0" anchor="ctr"/>
+          <a:lstStyle/>
+          <a:p>
+            <a:pPr algn="ctr"/>
+          </a:p>
+        </p:txBody>
+      </p:sp>
+      <p:sp>
+        <p:nvSpPr>
+          <p:cNvPr id="18" name="TextBox 17"/>
+          <p:cNvSpPr txBox="1"/>
+          <p:nvPr/>
+        </p:nvSpPr>
+        <p:spPr>
+          <a:xfrm>
+            <a:off x="822960" y="4937760"/>
+            <a:ext cx="640080" cy="548640"/>
+          </a:xfrm>
+          <a:prstGeom prst="rect">
+            <a:avLst/>
+          </a:prstGeom>
+          <a:noFill/>
+        </p:spPr>
+        <p:txBody>
+          <a:bodyPr wrap="square">
+            <a:spAutoFit/>
+          </a:bodyPr>
+          <a:lstStyle/>
+          <a:p>
+            <a:pPr algn="ctr"/>
+            <a:r>
+              <a:rPr sz="2200" b="1" i="0">
+                <a:solidFill>
+                  <a:srgbClr val="FFFFFF"/>
+                </a:solidFill>
+                <a:latin typeface="Montserrat"/>
+              </a:rPr>
+              <a:t>C</a:t>
+            </a:r>
+          </a:p>
+        </p:txBody>
+      </p:sp>
+      <p:sp>
+        <p:nvSpPr>
+          <p:cNvPr id="19" name="TextBox 18"/>
+          <p:cNvSpPr txBox="1"/>
+          <p:nvPr/>
+        </p:nvSpPr>
+        <p:spPr>
+          <a:xfrm>
+            <a:off x="1600200" y="4800600"/>
+            <a:ext cx="4114800" cy="868680"/>
+          </a:xfrm>
+          <a:prstGeom prst="rect">
+            <a:avLst/>
+          </a:prstGeom>
+          <a:noFill/>
+        </p:spPr>
+        <p:txBody>
+          <a:bodyPr wrap="square">
+            <a:spAutoFit/>
+          </a:bodyPr>
+          <a:lstStyle/>
+          <a:p>
+            <a:r>
+              <a:rPr sz="1400" b="0" i="0">
+                <a:solidFill>
+                  <a:srgbClr val="1B2330"/>
+                </a:solidFill>
+                <a:latin typeface="Montserrat"/>
+              </a:rPr>
+              <a:t>Toma aire del local y evacúa los humos por un conducto</a:t>
+            </a:r>
+          </a:p>
+        </p:txBody>
+      </p:sp>
+      <p:sp>
+        <p:nvSpPr>
+          <p:cNvPr id="20" name="Rounded Rectangle 19"/>
+          <p:cNvSpPr/>
+          <p:nvPr/>
+        </p:nvSpPr>
+        <p:spPr>
+          <a:xfrm>
+            <a:off x="6355080" y="4617720"/>
+            <a:ext cx="4983480" cy="1143000"/>
+          </a:xfrm>
+          <a:prstGeom prst="roundRect">
+            <a:avLst/>
+          </a:prstGeom>
+          <a:solidFill>
+            <a:srgbClr val="F3F6FB"/>
+          </a:solidFill>
+          <a:ln w="12700">
+            <a:solidFill>
+              <a:srgbClr val="C7D2E6"/>
+            </a:solidFill>
+          </a:ln>
+          <a:effectLst/>
+        </p:spPr>
+        <p:style>
+          <a:lnRef idx="1">
+            <a:schemeClr val="accent1"/>
+          </a:lnRef>
+          <a:fillRef idx="3">
+            <a:schemeClr val="accent1"/>
+          </a:fillRef>
+          <a:effectRef idx="2">
+            <a:schemeClr val="accent1"/>
+          </a:effectRef>
+          <a:fontRef idx="minor">
+            <a:schemeClr val="lt1"/>
+          </a:fontRef>
+        </p:style>
+        <p:txBody>
+          <a:bodyPr rtlCol="0" anchor="ctr"/>
+          <a:lstStyle/>
+          <a:p>
+            <a:pPr algn="ctr"/>
+          </a:p>
+        </p:txBody>
+      </p:sp>
+      <p:sp>
+        <p:nvSpPr>
+          <p:cNvPr id="21" name="Rectangle 20"/>
+          <p:cNvSpPr/>
+          <p:nvPr/>
+        </p:nvSpPr>
+        <p:spPr>
+          <a:xfrm>
+            <a:off x="6355080" y="4617720"/>
+            <a:ext cx="640080" cy="1143000"/>
+          </a:xfrm>
+          <a:prstGeom prst="rect">
+            <a:avLst/>
+          </a:prstGeom>
+          <a:solidFill>
+            <a:srgbClr val="1E2761"/>
+          </a:solidFill>
+          <a:ln>
+            <a:noFill/>
+          </a:ln>
+          <a:effectLst/>
+        </p:spPr>
+        <p:style>
+          <a:lnRef idx="1">
+            <a:schemeClr val="accent1"/>
+          </a:lnRef>
+          <a:fillRef idx="3">
+            <a:schemeClr val="accent1"/>
+          </a:fillRef>
+          <a:effectRef idx="2">
+            <a:schemeClr val="accent1"/>
+          </a:effectRef>
+          <a:fontRef idx="minor">
+            <a:schemeClr val="lt1"/>
+          </a:fontRef>
+        </p:style>
+        <p:txBody>
+          <a:bodyPr rtlCol="0" anchor="ctr"/>
+          <a:lstStyle/>
+          <a:p>
+            <a:pPr algn="ctr"/>
+          </a:p>
+        </p:txBody>
+      </p:sp>
+      <p:sp>
+        <p:nvSpPr>
+          <p:cNvPr id="22" name="TextBox 21"/>
+          <p:cNvSpPr txBox="1"/>
+          <p:nvPr/>
+        </p:nvSpPr>
+        <p:spPr>
+          <a:xfrm>
+            <a:off x="6355080" y="4937760"/>
+            <a:ext cx="640080" cy="548640"/>
+          </a:xfrm>
+          <a:prstGeom prst="rect">
+            <a:avLst/>
+          </a:prstGeom>
+          <a:noFill/>
+        </p:spPr>
+        <p:txBody>
+          <a:bodyPr wrap="square">
+            <a:spAutoFit/>
+          </a:bodyPr>
+          <a:lstStyle/>
+          <a:p>
+            <a:pPr algn="ctr"/>
+            <a:r>
+              <a:rPr sz="2200" b="1" i="0">
+                <a:solidFill>
+                  <a:srgbClr val="FFFFFF"/>
+                </a:solidFill>
+                <a:latin typeface="Montserrat"/>
+              </a:rPr>
+              <a:t>D</a:t>
+            </a:r>
+          </a:p>
+        </p:txBody>
+      </p:sp>
+      <p:sp>
+        <p:nvSpPr>
+          <p:cNvPr id="23" name="TextBox 22"/>
+          <p:cNvSpPr txBox="1"/>
+          <p:nvPr/>
+        </p:nvSpPr>
+        <p:spPr>
+          <a:xfrm>
+            <a:off x="7132320" y="4800600"/>
+            <a:ext cx="4114800" cy="868680"/>
+          </a:xfrm>
+          <a:prstGeom prst="rect">
+            <a:avLst/>
+          </a:prstGeom>
+          <a:noFill/>
+        </p:spPr>
+        <p:txBody>
+          <a:bodyPr wrap="square">
+            <a:spAutoFit/>
+          </a:bodyPr>
+          <a:lstStyle/>
+          <a:p>
+            <a:r>
+              <a:rPr sz="1400" b="0" i="0">
+                <a:solidFill>
+                  <a:srgbClr val="1B2330"/>
+                </a:solidFill>
+                <a:latin typeface="Montserrat"/>
+              </a:rPr>
+              <a:t>Solo puede usarse con envases de menos de 3 kg</a:t>
             </a:r>
           </a:p>
         </p:txBody>
@@ -13931,6 +18581,18 @@
   <p:clrMapOvr>
     <a:masterClrMapping/>
   </p:clrMapOvr>
+  <mc:AlternateContent xmlns:mc="http://schemas.openxmlformats.org/markup-compatibility/2006">
+    <mc:Choice xmlns:p14="http://schemas.microsoft.com/office/powerpoint/2010/main" Requires="p14">
+      <p:transition spd="med" p14:dur="700">
+        <p14:cube dir="l"/>
+      </p:transition>
+    </mc:Choice>
+    <mc:Fallback>
+      <p:transition spd="med">
+        <p:push dir="l"/>
+      </p:transition>
+    </mc:Fallback>
+  </mc:AlternateContent>
 </p:sld>
 </file>
 

--- a/Curso Gas B/09 - UNE 60670 - Generalidades y terminologia/09 - UNE 60670 - Generalidades y terminologia - Vídeo 2.pptx
+++ b/Curso Gas B/09 - UNE 60670 - Generalidades y terminologia/09 - UNE 60670 - Generalidades y terminologia - Vídeo 2.pptx
@@ -602,12 +602,12 @@
           <a:lstStyle/>
           <a:p>
             <a:r>
-              <a:t>N1: ¿Por qué la A?</a:t>
-            </a:r>
-          </a:p>
-          <a:p>
-            <a:r>
-              <a:t>N2: Porque el tipo C es estanco: su circuito de combustión no tiene ninguna comunicación con el aire del local. El tipo A coge aire del local y no evacúa fuera; el tipo B coge aire del local pero sí evacúa por conducto. Truco: el A no tira humos fuera, el B coge aire dentro y tira humos fuera, y el C ni entra ni sale del local.</a:t>
+              <a:t>N2: La respuesta correcta es la opción A: es estanco, ni toma aire del local ni evacúa humos en él. ¿Por qué? Porque el tipo C es estanco, su circuito de combustión no tiene ninguna comunicación con el aire del local. La opción B describe en realidad el tipo A, que coge aire del local y no evacúa fuera; la opción C describe el tipo B, que coge aire del local pero sí evacúa por un conducto; y lo de los tres kilos no tiene nada que ver con el tipo. El truco: el A no tira humos fuera, el B coge aire dentro y tira humos fuera, y el C ni entra ni sale del local.</a:t>
+            </a:r>
+          </a:p>
+          <a:p>
+            <a:r>
+              <a:t>N1: A, B y C, cazados.</a:t>
             </a:r>
           </a:p>
         </p:txBody>
@@ -827,7 +827,7 @@
           <a:lstStyle/>
           <a:p>
             <a:r>
-              <a:t>N1: Un número que cae seguro: ¿dónde está la frontera entre aparcamiento y garaje?</a:t>
+              <a:t>N1: Segunda pregunta, un número que cae seguro. Te la leo. ¿Qué superficie construida separa un aparcamiento de un garaje? Escucha las cuatro opciones. Opción A: cincuenta metros cuadrados. Opción B: setenta y cinco metros cuadrados. Opción C: cien metros cuadrados. Opción D: ciento cincuenta metros cuadrados. Piénsalo un momento.</a:t>
             </a:r>
           </a:p>
           <a:p>
@@ -902,12 +902,12 @@
           <a:lstStyle/>
           <a:p>
             <a:r>
-              <a:t>N1: ¿Por qué cien metros cuadrados?</a:t>
-            </a:r>
-          </a:p>
-          <a:p>
-            <a:r>
-              <a:t>N2: Porque si la superficie construida supera los cien metros cuadrados es aparcamiento, y si es igual o inferior es garaje. Es de los datos que más se preguntan. Truco: por encima de cien, aparcamiento; hasta cien, garaje.</a:t>
+              <a:t>N2: La respuesta correcta es la opción C: cien metros cuadrados. ¿Por qué? Porque si la superficie construida supera los cien metros cuadrados es aparcamiento, y si es igual o inferior a cien metros cuadrados es garaje. Es de los datos que más se preguntan; las otras cifras, cincuenta, setenta y cinco o ciento cincuenta, son solo distractores. El truco: por encima de cien, aparcamiento; hasta cien, garaje.</a:t>
+            </a:r>
+          </a:p>
+          <a:p>
+            <a:r>
+              <a:t>N1: Cien metros cuadrados, la frontera.</a:t>
             </a:r>
           </a:p>
         </p:txBody>
@@ -1727,7 +1727,7 @@
           <a:lstStyle/>
           <a:p>
             <a:r>
-              <a:t>N1: La joya del examen: ¿qué llave marca la frontera entre lo común y lo individual?</a:t>
+              <a:t>N1: Tercera pregunta, la joya del examen. Te la leo entera. ¿Qué llave marca el límite entre la instalación común y la individual? Escucha las cuatro opciones. Opción A: la llave de acometida. Opción B: la llave de usuario. Opción C: la llave de edificio. Opción D: la llave de conexión de aparato. Tómate un segundo.</a:t>
             </a:r>
           </a:p>
           <a:p>
@@ -1802,12 +1802,12 @@
           <a:lstStyle/>
           <a:p>
             <a:r>
-              <a:t>N1: ¿Por qué la llave de usuario?</a:t>
-            </a:r>
-          </a:p>
-          <a:p>
-            <a:r>
-              <a:t>N2: Porque la instalación común llega hasta las llaves de usuario, incluidas, y la individual arranca justo en la llave de usuario, excluida. Es la frontera: cierra la común y abre la individual. La regla de oro: lo que pone la comunidad va excluido, y lo tuyo va incluido.</a:t>
+              <a:t>N2: La respuesta correcta es la opción B: la llave de usuario. ¿Por qué? Porque la instalación común llega hasta las llaves de usuario, incluidas, y la individual arranca justo en la llave de usuario, excluida; es la frontera, cierra la común y abre la individual. La llave de acometida separa lo de la compañía de lo tuyo, la de edificio corta todo el inmueble y la de conexión de aparato está pegada al aparato; ninguna de esas es la frontera. La regla de oro: lo que pone la comunidad va excluido, y lo tuyo va incluido.</a:t>
+            </a:r>
+          </a:p>
+          <a:p>
+            <a:r>
+              <a:t>N1: La llave de usuario, el mojón entre lo común y lo tuyo.</a:t>
             </a:r>
           </a:p>
         </p:txBody>
@@ -2403,7 +2403,7 @@
           <a:lstStyle/>
           <a:p>
             <a:r>
-              <a:t>N1: El concepto estrella del tema: ¿qué distingue al tipo C?</a:t>
+              <a:t>N1: Primera pregunta, y va del concepto estrella del tema. Te la leo entera para que la juegues solo con el oído. ¿Qué caracteriza a un aparato de gas de tipo C? Escucha las cuatro opciones. Opción A: es estanco, ni toma aire del local ni evacúa humos en él. Opción B: toma aire del local y no evacúa los humos al exterior. Opción C: toma aire del local y evacúa los humos por un conducto. Opción D: solo puede usarse con envases de menos de tres kilos. Tómate un segundo.</a:t>
             </a:r>
           </a:p>
           <a:p>
